--- a/05-Transaction-Management/Transaction_management.pptx
+++ b/05-Transaction-Management/Transaction_management.pptx
@@ -4,8 +4,14 @@
   <p:sldMasterIdLst>
     <p:sldMasterId id="2147483648" r:id="rId1"/>
   </p:sldMasterIdLst>
+  <p:notesMasterIdLst>
+    <p:notesMasterId r:id="rId6"/>
+  </p:notesMasterIdLst>
   <p:sldIdLst>
     <p:sldId id="256" r:id="rId2"/>
+    <p:sldId id="258" r:id="rId3"/>
+    <p:sldId id="259" r:id="rId4"/>
+    <p:sldId id="257" r:id="rId5"/>
   </p:sldIdLst>
   <p:sldSz cx="12192000" cy="6858000"/>
   <p:notesSz cx="6858000" cy="9144000"/>
@@ -160,6 +166,524 @@
 </pc:chgInfo>
 </file>
 
+<file path=ppt/notesMasters/notesMaster1.xml><?xml version="1.0" encoding="utf-8"?>
+<p:notesMaster xmlns:a="http://schemas.openxmlformats.org/drawingml/2006/main" xmlns:r="http://schemas.openxmlformats.org/officeDocument/2006/relationships" xmlns:p="http://schemas.openxmlformats.org/presentationml/2006/main">
+  <p:cSld>
+    <p:bg>
+      <p:bgRef idx="1001">
+        <a:schemeClr val="bg1"/>
+      </p:bgRef>
+    </p:bg>
+    <p:spTree>
+      <p:nvGrpSpPr>
+        <p:cNvPr id="1" name=""/>
+        <p:cNvGrpSpPr/>
+        <p:nvPr/>
+      </p:nvGrpSpPr>
+      <p:grpSpPr>
+        <a:xfrm>
+          <a:off x="0" y="0"/>
+          <a:ext cx="0" cy="0"/>
+          <a:chOff x="0" y="0"/>
+          <a:chExt cx="0" cy="0"/>
+        </a:xfrm>
+      </p:grpSpPr>
+      <p:sp>
+        <p:nvSpPr>
+          <p:cNvPr id="2" name="Header Placeholder 1"/>
+          <p:cNvSpPr>
+            <a:spLocks noGrp="1"/>
+          </p:cNvSpPr>
+          <p:nvPr>
+            <p:ph type="hdr" sz="quarter"/>
+          </p:nvPr>
+        </p:nvSpPr>
+        <p:spPr>
+          <a:xfrm>
+            <a:off x="0" y="0"/>
+            <a:ext cx="2971800" cy="458788"/>
+          </a:xfrm>
+          <a:prstGeom prst="rect">
+            <a:avLst/>
+          </a:prstGeom>
+        </p:spPr>
+        <p:txBody>
+          <a:bodyPr vert="horz" lIns="91440" tIns="45720" rIns="91440" bIns="45720" rtlCol="0"/>
+          <a:lstStyle>
+            <a:lvl1pPr algn="l">
+              <a:defRPr sz="1200"/>
+            </a:lvl1pPr>
+          </a:lstStyle>
+          <a:p>
+            <a:endParaRPr lang="en-US"/>
+          </a:p>
+        </p:txBody>
+      </p:sp>
+      <p:sp>
+        <p:nvSpPr>
+          <p:cNvPr id="3" name="Date Placeholder 2"/>
+          <p:cNvSpPr>
+            <a:spLocks noGrp="1"/>
+          </p:cNvSpPr>
+          <p:nvPr>
+            <p:ph type="dt" idx="1"/>
+          </p:nvPr>
+        </p:nvSpPr>
+        <p:spPr>
+          <a:xfrm>
+            <a:off x="3884613" y="0"/>
+            <a:ext cx="2971800" cy="458788"/>
+          </a:xfrm>
+          <a:prstGeom prst="rect">
+            <a:avLst/>
+          </a:prstGeom>
+        </p:spPr>
+        <p:txBody>
+          <a:bodyPr vert="horz" lIns="91440" tIns="45720" rIns="91440" bIns="45720" rtlCol="0"/>
+          <a:lstStyle>
+            <a:lvl1pPr algn="r">
+              <a:defRPr sz="1200"/>
+            </a:lvl1pPr>
+          </a:lstStyle>
+          <a:p>
+            <a:fld id="{D35A715A-4E3D-47D0-A386-7DBD8CC75CAA}" type="datetimeFigureOut">
+              <a:rPr lang="en-US" smtClean="0"/>
+              <a:t>12/20/2022</a:t>
+            </a:fld>
+            <a:endParaRPr lang="en-US"/>
+          </a:p>
+        </p:txBody>
+      </p:sp>
+      <p:sp>
+        <p:nvSpPr>
+          <p:cNvPr id="4" name="Slide Image Placeholder 3"/>
+          <p:cNvSpPr>
+            <a:spLocks noGrp="1" noRot="1" noChangeAspect="1"/>
+          </p:cNvSpPr>
+          <p:nvPr>
+            <p:ph type="sldImg" idx="2"/>
+          </p:nvPr>
+        </p:nvSpPr>
+        <p:spPr>
+          <a:xfrm>
+            <a:off x="685800" y="1143000"/>
+            <a:ext cx="5486400" cy="3086100"/>
+          </a:xfrm>
+          <a:prstGeom prst="rect">
+            <a:avLst/>
+          </a:prstGeom>
+          <a:noFill/>
+          <a:ln w="12700">
+            <a:solidFill>
+              <a:prstClr val="black"/>
+            </a:solidFill>
+          </a:ln>
+        </p:spPr>
+        <p:txBody>
+          <a:bodyPr vert="horz" lIns="91440" tIns="45720" rIns="91440" bIns="45720" rtlCol="0" anchor="ctr"/>
+          <a:lstStyle/>
+          <a:p>
+            <a:endParaRPr lang="en-US"/>
+          </a:p>
+        </p:txBody>
+      </p:sp>
+      <p:sp>
+        <p:nvSpPr>
+          <p:cNvPr id="5" name="Notes Placeholder 4"/>
+          <p:cNvSpPr>
+            <a:spLocks noGrp="1"/>
+          </p:cNvSpPr>
+          <p:nvPr>
+            <p:ph type="body" sz="quarter" idx="3"/>
+          </p:nvPr>
+        </p:nvSpPr>
+        <p:spPr>
+          <a:xfrm>
+            <a:off x="685800" y="4400550"/>
+            <a:ext cx="5486400" cy="3600450"/>
+          </a:xfrm>
+          <a:prstGeom prst="rect">
+            <a:avLst/>
+          </a:prstGeom>
+        </p:spPr>
+        <p:txBody>
+          <a:bodyPr vert="horz" lIns="91440" tIns="45720" rIns="91440" bIns="45720" rtlCol="0"/>
+          <a:lstStyle/>
+          <a:p>
+            <a:pPr lvl="0"/>
+            <a:r>
+              <a:rPr lang="en-US" smtClean="0"/>
+              <a:t>Click to edit Master text styles</a:t>
+            </a:r>
+          </a:p>
+          <a:p>
+            <a:pPr lvl="1"/>
+            <a:r>
+              <a:rPr lang="en-US" smtClean="0"/>
+              <a:t>Second level</a:t>
+            </a:r>
+          </a:p>
+          <a:p>
+            <a:pPr lvl="2"/>
+            <a:r>
+              <a:rPr lang="en-US" smtClean="0"/>
+              <a:t>Third level</a:t>
+            </a:r>
+          </a:p>
+          <a:p>
+            <a:pPr lvl="3"/>
+            <a:r>
+              <a:rPr lang="en-US" smtClean="0"/>
+              <a:t>Fourth level</a:t>
+            </a:r>
+          </a:p>
+          <a:p>
+            <a:pPr lvl="4"/>
+            <a:r>
+              <a:rPr lang="en-US" smtClean="0"/>
+              <a:t>Fifth level</a:t>
+            </a:r>
+            <a:endParaRPr lang="en-US"/>
+          </a:p>
+        </p:txBody>
+      </p:sp>
+      <p:sp>
+        <p:nvSpPr>
+          <p:cNvPr id="6" name="Footer Placeholder 5"/>
+          <p:cNvSpPr>
+            <a:spLocks noGrp="1"/>
+          </p:cNvSpPr>
+          <p:nvPr>
+            <p:ph type="ftr" sz="quarter" idx="4"/>
+          </p:nvPr>
+        </p:nvSpPr>
+        <p:spPr>
+          <a:xfrm>
+            <a:off x="0" y="8685213"/>
+            <a:ext cx="2971800" cy="458787"/>
+          </a:xfrm>
+          <a:prstGeom prst="rect">
+            <a:avLst/>
+          </a:prstGeom>
+        </p:spPr>
+        <p:txBody>
+          <a:bodyPr vert="horz" lIns="91440" tIns="45720" rIns="91440" bIns="45720" rtlCol="0" anchor="b"/>
+          <a:lstStyle>
+            <a:lvl1pPr algn="l">
+              <a:defRPr sz="1200"/>
+            </a:lvl1pPr>
+          </a:lstStyle>
+          <a:p>
+            <a:endParaRPr lang="en-US"/>
+          </a:p>
+        </p:txBody>
+      </p:sp>
+      <p:sp>
+        <p:nvSpPr>
+          <p:cNvPr id="7" name="Slide Number Placeholder 6"/>
+          <p:cNvSpPr>
+            <a:spLocks noGrp="1"/>
+          </p:cNvSpPr>
+          <p:nvPr>
+            <p:ph type="sldNum" sz="quarter" idx="5"/>
+          </p:nvPr>
+        </p:nvSpPr>
+        <p:spPr>
+          <a:xfrm>
+            <a:off x="3884613" y="8685213"/>
+            <a:ext cx="2971800" cy="458787"/>
+          </a:xfrm>
+          <a:prstGeom prst="rect">
+            <a:avLst/>
+          </a:prstGeom>
+        </p:spPr>
+        <p:txBody>
+          <a:bodyPr vert="horz" lIns="91440" tIns="45720" rIns="91440" bIns="45720" rtlCol="0" anchor="b"/>
+          <a:lstStyle>
+            <a:lvl1pPr algn="r">
+              <a:defRPr sz="1200"/>
+            </a:lvl1pPr>
+          </a:lstStyle>
+          <a:p>
+            <a:fld id="{7FBCA59B-B642-4ED7-B3DB-3E8740693BC1}" type="slidenum">
+              <a:rPr lang="en-US" smtClean="0"/>
+              <a:t>‹#›</a:t>
+            </a:fld>
+            <a:endParaRPr lang="en-US"/>
+          </a:p>
+        </p:txBody>
+      </p:sp>
+    </p:spTree>
+    <p:extLst>
+      <p:ext uri="{BB962C8B-B14F-4D97-AF65-F5344CB8AC3E}">
+        <p14:creationId xmlns:p14="http://schemas.microsoft.com/office/powerpoint/2010/main" val="2667028300"/>
+      </p:ext>
+    </p:extLst>
+  </p:cSld>
+  <p:clrMap bg1="lt1" tx1="dk1" bg2="lt2" tx2="dk2" accent1="accent1" accent2="accent2" accent3="accent3" accent4="accent4" accent5="accent5" accent6="accent6" hlink="hlink" folHlink="folHlink"/>
+  <p:notesStyle>
+    <a:lvl1pPr marL="0" algn="l" defTabSz="914400" rtl="0" eaLnBrk="1" latinLnBrk="0" hangingPunct="1">
+      <a:defRPr sz="1200" kern="1200">
+        <a:solidFill>
+          <a:schemeClr val="tx1"/>
+        </a:solidFill>
+        <a:latin typeface="+mn-lt"/>
+        <a:ea typeface="+mn-ea"/>
+        <a:cs typeface="+mn-cs"/>
+      </a:defRPr>
+    </a:lvl1pPr>
+    <a:lvl2pPr marL="457200" algn="l" defTabSz="914400" rtl="0" eaLnBrk="1" latinLnBrk="0" hangingPunct="1">
+      <a:defRPr sz="1200" kern="1200">
+        <a:solidFill>
+          <a:schemeClr val="tx1"/>
+        </a:solidFill>
+        <a:latin typeface="+mn-lt"/>
+        <a:ea typeface="+mn-ea"/>
+        <a:cs typeface="+mn-cs"/>
+      </a:defRPr>
+    </a:lvl2pPr>
+    <a:lvl3pPr marL="914400" algn="l" defTabSz="914400" rtl="0" eaLnBrk="1" latinLnBrk="0" hangingPunct="1">
+      <a:defRPr sz="1200" kern="1200">
+        <a:solidFill>
+          <a:schemeClr val="tx1"/>
+        </a:solidFill>
+        <a:latin typeface="+mn-lt"/>
+        <a:ea typeface="+mn-ea"/>
+        <a:cs typeface="+mn-cs"/>
+      </a:defRPr>
+    </a:lvl3pPr>
+    <a:lvl4pPr marL="1371600" algn="l" defTabSz="914400" rtl="0" eaLnBrk="1" latinLnBrk="0" hangingPunct="1">
+      <a:defRPr sz="1200" kern="1200">
+        <a:solidFill>
+          <a:schemeClr val="tx1"/>
+        </a:solidFill>
+        <a:latin typeface="+mn-lt"/>
+        <a:ea typeface="+mn-ea"/>
+        <a:cs typeface="+mn-cs"/>
+      </a:defRPr>
+    </a:lvl4pPr>
+    <a:lvl5pPr marL="1828800" algn="l" defTabSz="914400" rtl="0" eaLnBrk="1" latinLnBrk="0" hangingPunct="1">
+      <a:defRPr sz="1200" kern="1200">
+        <a:solidFill>
+          <a:schemeClr val="tx1"/>
+        </a:solidFill>
+        <a:latin typeface="+mn-lt"/>
+        <a:ea typeface="+mn-ea"/>
+        <a:cs typeface="+mn-cs"/>
+      </a:defRPr>
+    </a:lvl5pPr>
+    <a:lvl6pPr marL="2286000" algn="l" defTabSz="914400" rtl="0" eaLnBrk="1" latinLnBrk="0" hangingPunct="1">
+      <a:defRPr sz="1200" kern="1200">
+        <a:solidFill>
+          <a:schemeClr val="tx1"/>
+        </a:solidFill>
+        <a:latin typeface="+mn-lt"/>
+        <a:ea typeface="+mn-ea"/>
+        <a:cs typeface="+mn-cs"/>
+      </a:defRPr>
+    </a:lvl6pPr>
+    <a:lvl7pPr marL="2743200" algn="l" defTabSz="914400" rtl="0" eaLnBrk="1" latinLnBrk="0" hangingPunct="1">
+      <a:defRPr sz="1200" kern="1200">
+        <a:solidFill>
+          <a:schemeClr val="tx1"/>
+        </a:solidFill>
+        <a:latin typeface="+mn-lt"/>
+        <a:ea typeface="+mn-ea"/>
+        <a:cs typeface="+mn-cs"/>
+      </a:defRPr>
+    </a:lvl7pPr>
+    <a:lvl8pPr marL="3200400" algn="l" defTabSz="914400" rtl="0" eaLnBrk="1" latinLnBrk="0" hangingPunct="1">
+      <a:defRPr sz="1200" kern="1200">
+        <a:solidFill>
+          <a:schemeClr val="tx1"/>
+        </a:solidFill>
+        <a:latin typeface="+mn-lt"/>
+        <a:ea typeface="+mn-ea"/>
+        <a:cs typeface="+mn-cs"/>
+      </a:defRPr>
+    </a:lvl8pPr>
+    <a:lvl9pPr marL="3657600" algn="l" defTabSz="914400" rtl="0" eaLnBrk="1" latinLnBrk="0" hangingPunct="1">
+      <a:defRPr sz="1200" kern="1200">
+        <a:solidFill>
+          <a:schemeClr val="tx1"/>
+        </a:solidFill>
+        <a:latin typeface="+mn-lt"/>
+        <a:ea typeface="+mn-ea"/>
+        <a:cs typeface="+mn-cs"/>
+      </a:defRPr>
+    </a:lvl9pPr>
+  </p:notesStyle>
+</p:notesMaster>
+</file>
+
+<file path=ppt/notesSlides/notesSlide1.xml><?xml version="1.0" encoding="utf-8"?>
+<p:notes xmlns:a="http://schemas.openxmlformats.org/drawingml/2006/main" xmlns:r="http://schemas.openxmlformats.org/officeDocument/2006/relationships" xmlns:p="http://schemas.openxmlformats.org/presentationml/2006/main">
+  <p:cSld>
+    <p:spTree>
+      <p:nvGrpSpPr>
+        <p:cNvPr id="1" name=""/>
+        <p:cNvGrpSpPr/>
+        <p:nvPr/>
+      </p:nvGrpSpPr>
+      <p:grpSpPr>
+        <a:xfrm>
+          <a:off x="0" y="0"/>
+          <a:ext cx="0" cy="0"/>
+          <a:chOff x="0" y="0"/>
+          <a:chExt cx="0" cy="0"/>
+        </a:xfrm>
+      </p:grpSpPr>
+      <p:sp>
+        <p:nvSpPr>
+          <p:cNvPr id="2" name="Slide Image Placeholder 1"/>
+          <p:cNvSpPr>
+            <a:spLocks noGrp="1" noRot="1" noChangeAspect="1"/>
+          </p:cNvSpPr>
+          <p:nvPr>
+            <p:ph type="sldImg"/>
+          </p:nvPr>
+        </p:nvSpPr>
+        <p:spPr/>
+      </p:sp>
+      <p:sp>
+        <p:nvSpPr>
+          <p:cNvPr id="3" name="Notes Placeholder 2"/>
+          <p:cNvSpPr>
+            <a:spLocks noGrp="1"/>
+          </p:cNvSpPr>
+          <p:nvPr>
+            <p:ph type="body" idx="1"/>
+          </p:nvPr>
+        </p:nvSpPr>
+        <p:spPr/>
+        <p:txBody>
+          <a:bodyPr/>
+          <a:lstStyle/>
+          <a:p>
+            <a:endParaRPr lang="en-US"/>
+          </a:p>
+        </p:txBody>
+      </p:sp>
+      <p:sp>
+        <p:nvSpPr>
+          <p:cNvPr id="4" name="Slide Number Placeholder 3"/>
+          <p:cNvSpPr>
+            <a:spLocks noGrp="1"/>
+          </p:cNvSpPr>
+          <p:nvPr>
+            <p:ph type="sldNum" sz="quarter" idx="10"/>
+          </p:nvPr>
+        </p:nvSpPr>
+        <p:spPr/>
+        <p:txBody>
+          <a:bodyPr/>
+          <a:lstStyle/>
+          <a:p>
+            <a:fld id="{7FBCA59B-B642-4ED7-B3DB-3E8740693BC1}" type="slidenum">
+              <a:rPr lang="en-US" smtClean="0"/>
+              <a:t>2</a:t>
+            </a:fld>
+            <a:endParaRPr lang="en-US"/>
+          </a:p>
+        </p:txBody>
+      </p:sp>
+    </p:spTree>
+    <p:extLst>
+      <p:ext uri="{BB962C8B-B14F-4D97-AF65-F5344CB8AC3E}">
+        <p14:creationId xmlns:p14="http://schemas.microsoft.com/office/powerpoint/2010/main" val="2236422455"/>
+      </p:ext>
+    </p:extLst>
+  </p:cSld>
+  <p:clrMapOvr>
+    <a:masterClrMapping/>
+  </p:clrMapOvr>
+</p:notes>
+</file>
+
+<file path=ppt/notesSlides/notesSlide2.xml><?xml version="1.0" encoding="utf-8"?>
+<p:notes xmlns:a="http://schemas.openxmlformats.org/drawingml/2006/main" xmlns:r="http://schemas.openxmlformats.org/officeDocument/2006/relationships" xmlns:p="http://schemas.openxmlformats.org/presentationml/2006/main">
+  <p:cSld>
+    <p:spTree>
+      <p:nvGrpSpPr>
+        <p:cNvPr id="1" name=""/>
+        <p:cNvGrpSpPr/>
+        <p:nvPr/>
+      </p:nvGrpSpPr>
+      <p:grpSpPr>
+        <a:xfrm>
+          <a:off x="0" y="0"/>
+          <a:ext cx="0" cy="0"/>
+          <a:chOff x="0" y="0"/>
+          <a:chExt cx="0" cy="0"/>
+        </a:xfrm>
+      </p:grpSpPr>
+      <p:sp>
+        <p:nvSpPr>
+          <p:cNvPr id="2" name="Slide Image Placeholder 1"/>
+          <p:cNvSpPr>
+            <a:spLocks noGrp="1" noRot="1" noChangeAspect="1"/>
+          </p:cNvSpPr>
+          <p:nvPr>
+            <p:ph type="sldImg"/>
+          </p:nvPr>
+        </p:nvSpPr>
+        <p:spPr/>
+      </p:sp>
+      <p:sp>
+        <p:nvSpPr>
+          <p:cNvPr id="3" name="Notes Placeholder 2"/>
+          <p:cNvSpPr>
+            <a:spLocks noGrp="1"/>
+          </p:cNvSpPr>
+          <p:nvPr>
+            <p:ph type="body" idx="1"/>
+          </p:nvPr>
+        </p:nvSpPr>
+        <p:spPr/>
+        <p:txBody>
+          <a:bodyPr/>
+          <a:lstStyle/>
+          <a:p>
+            <a:endParaRPr lang="en-US"/>
+          </a:p>
+        </p:txBody>
+      </p:sp>
+      <p:sp>
+        <p:nvSpPr>
+          <p:cNvPr id="4" name="Slide Number Placeholder 3"/>
+          <p:cNvSpPr>
+            <a:spLocks noGrp="1"/>
+          </p:cNvSpPr>
+          <p:nvPr>
+            <p:ph type="sldNum" sz="quarter" idx="10"/>
+          </p:nvPr>
+        </p:nvSpPr>
+        <p:spPr/>
+        <p:txBody>
+          <a:bodyPr/>
+          <a:lstStyle/>
+          <a:p>
+            <a:fld id="{7FBCA59B-B642-4ED7-B3DB-3E8740693BC1}" type="slidenum">
+              <a:rPr lang="en-US" smtClean="0"/>
+              <a:t>3</a:t>
+            </a:fld>
+            <a:endParaRPr lang="en-US"/>
+          </a:p>
+        </p:txBody>
+      </p:sp>
+    </p:spTree>
+    <p:extLst>
+      <p:ext uri="{BB962C8B-B14F-4D97-AF65-F5344CB8AC3E}">
+        <p14:creationId xmlns:p14="http://schemas.microsoft.com/office/powerpoint/2010/main" val="3456782783"/>
+      </p:ext>
+    </p:extLst>
+  </p:cSld>
+  <p:clrMapOvr>
+    <a:masterClrMapping/>
+  </p:clrMapOvr>
+</p:notes>
+</file>
+
 <file path=ppt/slideLayouts/slideLayout1.xml><?xml version="1.0" encoding="utf-8"?>
 <p:sldLayout xmlns:a="http://schemas.openxmlformats.org/drawingml/2006/main" xmlns:r="http://schemas.openxmlformats.org/officeDocument/2006/relationships" xmlns:p="http://schemas.openxmlformats.org/presentationml/2006/main" type="title" preserve="1">
   <p:cSld name="Title Slide">
@@ -182,7 +706,7 @@
           <p:cNvPr id="2" name="Title 1">
             <a:extLst>
               <a:ext uri="{FF2B5EF4-FFF2-40B4-BE49-F238E27FC236}">
-                <a16:creationId xmlns:a16="http://schemas.microsoft.com/office/drawing/2014/main" id="{7F986473-48FF-48D2-BE87-8E6EF1DE5CB7}"/>
+                <a16:creationId xmlns:a16="http://schemas.microsoft.com/office/drawing/2014/main" xmlns="" id="{7F986473-48FF-48D2-BE87-8E6EF1DE5CB7}"/>
               </a:ext>
             </a:extLst>
           </p:cNvPr>
@@ -219,7 +743,7 @@
           <p:cNvPr id="3" name="Subtitle 2">
             <a:extLst>
               <a:ext uri="{FF2B5EF4-FFF2-40B4-BE49-F238E27FC236}">
-                <a16:creationId xmlns:a16="http://schemas.microsoft.com/office/drawing/2014/main" id="{34E5E0FE-6852-4CAB-B62E-982090E13B7E}"/>
+                <a16:creationId xmlns:a16="http://schemas.microsoft.com/office/drawing/2014/main" xmlns="" id="{34E5E0FE-6852-4CAB-B62E-982090E13B7E}"/>
               </a:ext>
             </a:extLst>
           </p:cNvPr>
@@ -289,7 +813,7 @@
           <p:cNvPr id="4" name="Date Placeholder 3">
             <a:extLst>
               <a:ext uri="{FF2B5EF4-FFF2-40B4-BE49-F238E27FC236}">
-                <a16:creationId xmlns:a16="http://schemas.microsoft.com/office/drawing/2014/main" id="{02AD77F6-FA2D-48AC-A2E1-97A3C253D053}"/>
+                <a16:creationId xmlns:a16="http://schemas.microsoft.com/office/drawing/2014/main" xmlns="" id="{02AD77F6-FA2D-48AC-A2E1-97A3C253D053}"/>
               </a:ext>
             </a:extLst>
           </p:cNvPr>
@@ -307,7 +831,7 @@
           <a:p>
             <a:fld id="{1DF0471C-15C6-430F-A1D2-F5E2439A92BD}" type="datetimeFigureOut">
               <a:rPr lang="en-US" smtClean="0"/>
-              <a:t>12/19/2022</a:t>
+              <a:t>12/20/2022</a:t>
             </a:fld>
             <a:endParaRPr lang="en-US"/>
           </a:p>
@@ -318,7 +842,7 @@
           <p:cNvPr id="5" name="Footer Placeholder 4">
             <a:extLst>
               <a:ext uri="{FF2B5EF4-FFF2-40B4-BE49-F238E27FC236}">
-                <a16:creationId xmlns:a16="http://schemas.microsoft.com/office/drawing/2014/main" id="{B06C71EF-5AB6-482F-82DD-661F92C0EB81}"/>
+                <a16:creationId xmlns:a16="http://schemas.microsoft.com/office/drawing/2014/main" xmlns="" id="{B06C71EF-5AB6-482F-82DD-661F92C0EB81}"/>
               </a:ext>
             </a:extLst>
           </p:cNvPr>
@@ -343,7 +867,7 @@
           <p:cNvPr id="6" name="Slide Number Placeholder 5">
             <a:extLst>
               <a:ext uri="{FF2B5EF4-FFF2-40B4-BE49-F238E27FC236}">
-                <a16:creationId xmlns:a16="http://schemas.microsoft.com/office/drawing/2014/main" id="{45B588E1-4B96-4D36-ABFE-54B521327534}"/>
+                <a16:creationId xmlns:a16="http://schemas.microsoft.com/office/drawing/2014/main" xmlns="" id="{45B588E1-4B96-4D36-ABFE-54B521327534}"/>
               </a:ext>
             </a:extLst>
           </p:cNvPr>
@@ -402,7 +926,7 @@
           <p:cNvPr id="2" name="Title 1">
             <a:extLst>
               <a:ext uri="{FF2B5EF4-FFF2-40B4-BE49-F238E27FC236}">
-                <a16:creationId xmlns:a16="http://schemas.microsoft.com/office/drawing/2014/main" id="{F8B4BF2C-5868-4FE8-A0A8-0C99FC85D853}"/>
+                <a16:creationId xmlns:a16="http://schemas.microsoft.com/office/drawing/2014/main" xmlns="" id="{F8B4BF2C-5868-4FE8-A0A8-0C99FC85D853}"/>
               </a:ext>
             </a:extLst>
           </p:cNvPr>
@@ -430,7 +954,7 @@
           <p:cNvPr id="3" name="Vertical Text Placeholder 2">
             <a:extLst>
               <a:ext uri="{FF2B5EF4-FFF2-40B4-BE49-F238E27FC236}">
-                <a16:creationId xmlns:a16="http://schemas.microsoft.com/office/drawing/2014/main" id="{608961FA-067D-4E13-AEE4-DEB564415E2A}"/>
+                <a16:creationId xmlns:a16="http://schemas.microsoft.com/office/drawing/2014/main" xmlns="" id="{608961FA-067D-4E13-AEE4-DEB564415E2A}"/>
               </a:ext>
             </a:extLst>
           </p:cNvPr>
@@ -487,7 +1011,7 @@
           <p:cNvPr id="4" name="Date Placeholder 3">
             <a:extLst>
               <a:ext uri="{FF2B5EF4-FFF2-40B4-BE49-F238E27FC236}">
-                <a16:creationId xmlns:a16="http://schemas.microsoft.com/office/drawing/2014/main" id="{F8A3B194-BC00-4F26-B44D-AE804D4EE358}"/>
+                <a16:creationId xmlns:a16="http://schemas.microsoft.com/office/drawing/2014/main" xmlns="" id="{F8A3B194-BC00-4F26-B44D-AE804D4EE358}"/>
               </a:ext>
             </a:extLst>
           </p:cNvPr>
@@ -505,7 +1029,7 @@
           <a:p>
             <a:fld id="{1DF0471C-15C6-430F-A1D2-F5E2439A92BD}" type="datetimeFigureOut">
               <a:rPr lang="en-US" smtClean="0"/>
-              <a:t>12/19/2022</a:t>
+              <a:t>12/20/2022</a:t>
             </a:fld>
             <a:endParaRPr lang="en-US"/>
           </a:p>
@@ -516,7 +1040,7 @@
           <p:cNvPr id="5" name="Footer Placeholder 4">
             <a:extLst>
               <a:ext uri="{FF2B5EF4-FFF2-40B4-BE49-F238E27FC236}">
-                <a16:creationId xmlns:a16="http://schemas.microsoft.com/office/drawing/2014/main" id="{36DF11C2-1180-4F31-81D4-FA146263DBB1}"/>
+                <a16:creationId xmlns:a16="http://schemas.microsoft.com/office/drawing/2014/main" xmlns="" id="{36DF11C2-1180-4F31-81D4-FA146263DBB1}"/>
               </a:ext>
             </a:extLst>
           </p:cNvPr>
@@ -541,7 +1065,7 @@
           <p:cNvPr id="6" name="Slide Number Placeholder 5">
             <a:extLst>
               <a:ext uri="{FF2B5EF4-FFF2-40B4-BE49-F238E27FC236}">
-                <a16:creationId xmlns:a16="http://schemas.microsoft.com/office/drawing/2014/main" id="{F8B629C9-776A-494E-89FD-1C76FE331BBB}"/>
+                <a16:creationId xmlns:a16="http://schemas.microsoft.com/office/drawing/2014/main" xmlns="" id="{F8B629C9-776A-494E-89FD-1C76FE331BBB}"/>
               </a:ext>
             </a:extLst>
           </p:cNvPr>
@@ -600,7 +1124,7 @@
           <p:cNvPr id="2" name="Vertical Title 1">
             <a:extLst>
               <a:ext uri="{FF2B5EF4-FFF2-40B4-BE49-F238E27FC236}">
-                <a16:creationId xmlns:a16="http://schemas.microsoft.com/office/drawing/2014/main" id="{70D0F334-FD00-46CD-A061-98BDFB571FD9}"/>
+                <a16:creationId xmlns:a16="http://schemas.microsoft.com/office/drawing/2014/main" xmlns="" id="{70D0F334-FD00-46CD-A061-98BDFB571FD9}"/>
               </a:ext>
             </a:extLst>
           </p:cNvPr>
@@ -633,7 +1157,7 @@
           <p:cNvPr id="3" name="Vertical Text Placeholder 2">
             <a:extLst>
               <a:ext uri="{FF2B5EF4-FFF2-40B4-BE49-F238E27FC236}">
-                <a16:creationId xmlns:a16="http://schemas.microsoft.com/office/drawing/2014/main" id="{FFEBB3B4-1969-4250-84C3-4B5990EF6885}"/>
+                <a16:creationId xmlns:a16="http://schemas.microsoft.com/office/drawing/2014/main" xmlns="" id="{FFEBB3B4-1969-4250-84C3-4B5990EF6885}"/>
               </a:ext>
             </a:extLst>
           </p:cNvPr>
@@ -695,7 +1219,7 @@
           <p:cNvPr id="4" name="Date Placeholder 3">
             <a:extLst>
               <a:ext uri="{FF2B5EF4-FFF2-40B4-BE49-F238E27FC236}">
-                <a16:creationId xmlns:a16="http://schemas.microsoft.com/office/drawing/2014/main" id="{DB3F33DF-0039-4597-9B92-BE74F88DB2F0}"/>
+                <a16:creationId xmlns:a16="http://schemas.microsoft.com/office/drawing/2014/main" xmlns="" id="{DB3F33DF-0039-4597-9B92-BE74F88DB2F0}"/>
               </a:ext>
             </a:extLst>
           </p:cNvPr>
@@ -713,7 +1237,7 @@
           <a:p>
             <a:fld id="{1DF0471C-15C6-430F-A1D2-F5E2439A92BD}" type="datetimeFigureOut">
               <a:rPr lang="en-US" smtClean="0"/>
-              <a:t>12/19/2022</a:t>
+              <a:t>12/20/2022</a:t>
             </a:fld>
             <a:endParaRPr lang="en-US"/>
           </a:p>
@@ -724,7 +1248,7 @@
           <p:cNvPr id="5" name="Footer Placeholder 4">
             <a:extLst>
               <a:ext uri="{FF2B5EF4-FFF2-40B4-BE49-F238E27FC236}">
-                <a16:creationId xmlns:a16="http://schemas.microsoft.com/office/drawing/2014/main" id="{509961BE-F2FE-448E-9C62-B734E083CBFA}"/>
+                <a16:creationId xmlns:a16="http://schemas.microsoft.com/office/drawing/2014/main" xmlns="" id="{509961BE-F2FE-448E-9C62-B734E083CBFA}"/>
               </a:ext>
             </a:extLst>
           </p:cNvPr>
@@ -749,7 +1273,7 @@
           <p:cNvPr id="6" name="Slide Number Placeholder 5">
             <a:extLst>
               <a:ext uri="{FF2B5EF4-FFF2-40B4-BE49-F238E27FC236}">
-                <a16:creationId xmlns:a16="http://schemas.microsoft.com/office/drawing/2014/main" id="{5E7319AA-624B-41FF-A3D7-333FA6DA8759}"/>
+                <a16:creationId xmlns:a16="http://schemas.microsoft.com/office/drawing/2014/main" xmlns="" id="{5E7319AA-624B-41FF-A3D7-333FA6DA8759}"/>
               </a:ext>
             </a:extLst>
           </p:cNvPr>
@@ -808,7 +1332,7 @@
           <p:cNvPr id="2" name="Title 1">
             <a:extLst>
               <a:ext uri="{FF2B5EF4-FFF2-40B4-BE49-F238E27FC236}">
-                <a16:creationId xmlns:a16="http://schemas.microsoft.com/office/drawing/2014/main" id="{CEF0529E-423B-4047-9641-A0394321EB46}"/>
+                <a16:creationId xmlns:a16="http://schemas.microsoft.com/office/drawing/2014/main" xmlns="" id="{CEF0529E-423B-4047-9641-A0394321EB46}"/>
               </a:ext>
             </a:extLst>
           </p:cNvPr>
@@ -836,7 +1360,7 @@
           <p:cNvPr id="3" name="Content Placeholder 2">
             <a:extLst>
               <a:ext uri="{FF2B5EF4-FFF2-40B4-BE49-F238E27FC236}">
-                <a16:creationId xmlns:a16="http://schemas.microsoft.com/office/drawing/2014/main" id="{175E3BE1-1952-422C-8C38-09A610ED5095}"/>
+                <a16:creationId xmlns:a16="http://schemas.microsoft.com/office/drawing/2014/main" xmlns="" id="{175E3BE1-1952-422C-8C38-09A610ED5095}"/>
               </a:ext>
             </a:extLst>
           </p:cNvPr>
@@ -893,7 +1417,7 @@
           <p:cNvPr id="4" name="Date Placeholder 3">
             <a:extLst>
               <a:ext uri="{FF2B5EF4-FFF2-40B4-BE49-F238E27FC236}">
-                <a16:creationId xmlns:a16="http://schemas.microsoft.com/office/drawing/2014/main" id="{594F9D89-0318-45AB-8EF4-E4DBA4A04380}"/>
+                <a16:creationId xmlns:a16="http://schemas.microsoft.com/office/drawing/2014/main" xmlns="" id="{594F9D89-0318-45AB-8EF4-E4DBA4A04380}"/>
               </a:ext>
             </a:extLst>
           </p:cNvPr>
@@ -911,7 +1435,7 @@
           <a:p>
             <a:fld id="{1DF0471C-15C6-430F-A1D2-F5E2439A92BD}" type="datetimeFigureOut">
               <a:rPr lang="en-US" smtClean="0"/>
-              <a:t>12/19/2022</a:t>
+              <a:t>12/20/2022</a:t>
             </a:fld>
             <a:endParaRPr lang="en-US"/>
           </a:p>
@@ -922,7 +1446,7 @@
           <p:cNvPr id="5" name="Footer Placeholder 4">
             <a:extLst>
               <a:ext uri="{FF2B5EF4-FFF2-40B4-BE49-F238E27FC236}">
-                <a16:creationId xmlns:a16="http://schemas.microsoft.com/office/drawing/2014/main" id="{49C2FA9B-8333-4AC8-B604-6DA7FF617FD2}"/>
+                <a16:creationId xmlns:a16="http://schemas.microsoft.com/office/drawing/2014/main" xmlns="" id="{49C2FA9B-8333-4AC8-B604-6DA7FF617FD2}"/>
               </a:ext>
             </a:extLst>
           </p:cNvPr>
@@ -947,7 +1471,7 @@
           <p:cNvPr id="6" name="Slide Number Placeholder 5">
             <a:extLst>
               <a:ext uri="{FF2B5EF4-FFF2-40B4-BE49-F238E27FC236}">
-                <a16:creationId xmlns:a16="http://schemas.microsoft.com/office/drawing/2014/main" id="{9DF7D1F3-52D2-4029-B862-10440113C060}"/>
+                <a16:creationId xmlns:a16="http://schemas.microsoft.com/office/drawing/2014/main" xmlns="" id="{9DF7D1F3-52D2-4029-B862-10440113C060}"/>
               </a:ext>
             </a:extLst>
           </p:cNvPr>
@@ -1006,7 +1530,7 @@
           <p:cNvPr id="2" name="Title 1">
             <a:extLst>
               <a:ext uri="{FF2B5EF4-FFF2-40B4-BE49-F238E27FC236}">
-                <a16:creationId xmlns:a16="http://schemas.microsoft.com/office/drawing/2014/main" id="{7BA45855-39EF-47A0-A504-C639015C3B74}"/>
+                <a16:creationId xmlns:a16="http://schemas.microsoft.com/office/drawing/2014/main" xmlns="" id="{7BA45855-39EF-47A0-A504-C639015C3B74}"/>
               </a:ext>
             </a:extLst>
           </p:cNvPr>
@@ -1043,7 +1567,7 @@
           <p:cNvPr id="3" name="Text Placeholder 2">
             <a:extLst>
               <a:ext uri="{FF2B5EF4-FFF2-40B4-BE49-F238E27FC236}">
-                <a16:creationId xmlns:a16="http://schemas.microsoft.com/office/drawing/2014/main" id="{F98B8D24-F025-4281-B9EF-271FEE07FBF7}"/>
+                <a16:creationId xmlns:a16="http://schemas.microsoft.com/office/drawing/2014/main" xmlns="" id="{F98B8D24-F025-4281-B9EF-271FEE07FBF7}"/>
               </a:ext>
             </a:extLst>
           </p:cNvPr>
@@ -1168,7 +1692,7 @@
           <p:cNvPr id="4" name="Date Placeholder 3">
             <a:extLst>
               <a:ext uri="{FF2B5EF4-FFF2-40B4-BE49-F238E27FC236}">
-                <a16:creationId xmlns:a16="http://schemas.microsoft.com/office/drawing/2014/main" id="{24167402-33D3-402F-9A4F-0CC943C3D7EA}"/>
+                <a16:creationId xmlns:a16="http://schemas.microsoft.com/office/drawing/2014/main" xmlns="" id="{24167402-33D3-402F-9A4F-0CC943C3D7EA}"/>
               </a:ext>
             </a:extLst>
           </p:cNvPr>
@@ -1186,7 +1710,7 @@
           <a:p>
             <a:fld id="{1DF0471C-15C6-430F-A1D2-F5E2439A92BD}" type="datetimeFigureOut">
               <a:rPr lang="en-US" smtClean="0"/>
-              <a:t>12/19/2022</a:t>
+              <a:t>12/20/2022</a:t>
             </a:fld>
             <a:endParaRPr lang="en-US"/>
           </a:p>
@@ -1197,7 +1721,7 @@
           <p:cNvPr id="5" name="Footer Placeholder 4">
             <a:extLst>
               <a:ext uri="{FF2B5EF4-FFF2-40B4-BE49-F238E27FC236}">
-                <a16:creationId xmlns:a16="http://schemas.microsoft.com/office/drawing/2014/main" id="{E8406ADB-3CD4-4A9F-8E63-00F73D91CFD4}"/>
+                <a16:creationId xmlns:a16="http://schemas.microsoft.com/office/drawing/2014/main" xmlns="" id="{E8406ADB-3CD4-4A9F-8E63-00F73D91CFD4}"/>
               </a:ext>
             </a:extLst>
           </p:cNvPr>
@@ -1222,7 +1746,7 @@
           <p:cNvPr id="6" name="Slide Number Placeholder 5">
             <a:extLst>
               <a:ext uri="{FF2B5EF4-FFF2-40B4-BE49-F238E27FC236}">
-                <a16:creationId xmlns:a16="http://schemas.microsoft.com/office/drawing/2014/main" id="{FDF6385E-3E04-47C6-9AF2-E7AB2D906BB6}"/>
+                <a16:creationId xmlns:a16="http://schemas.microsoft.com/office/drawing/2014/main" xmlns="" id="{FDF6385E-3E04-47C6-9AF2-E7AB2D906BB6}"/>
               </a:ext>
             </a:extLst>
           </p:cNvPr>
@@ -1281,7 +1805,7 @@
           <p:cNvPr id="2" name="Title 1">
             <a:extLst>
               <a:ext uri="{FF2B5EF4-FFF2-40B4-BE49-F238E27FC236}">
-                <a16:creationId xmlns:a16="http://schemas.microsoft.com/office/drawing/2014/main" id="{ED6CCC0B-9F72-4E67-83AA-7B36B1965281}"/>
+                <a16:creationId xmlns:a16="http://schemas.microsoft.com/office/drawing/2014/main" xmlns="" id="{ED6CCC0B-9F72-4E67-83AA-7B36B1965281}"/>
               </a:ext>
             </a:extLst>
           </p:cNvPr>
@@ -1309,7 +1833,7 @@
           <p:cNvPr id="3" name="Content Placeholder 2">
             <a:extLst>
               <a:ext uri="{FF2B5EF4-FFF2-40B4-BE49-F238E27FC236}">
-                <a16:creationId xmlns:a16="http://schemas.microsoft.com/office/drawing/2014/main" id="{E7B63006-8859-4E31-9A7B-732066FD28D3}"/>
+                <a16:creationId xmlns:a16="http://schemas.microsoft.com/office/drawing/2014/main" xmlns="" id="{E7B63006-8859-4E31-9A7B-732066FD28D3}"/>
               </a:ext>
             </a:extLst>
           </p:cNvPr>
@@ -1371,7 +1895,7 @@
           <p:cNvPr id="4" name="Content Placeholder 3">
             <a:extLst>
               <a:ext uri="{FF2B5EF4-FFF2-40B4-BE49-F238E27FC236}">
-                <a16:creationId xmlns:a16="http://schemas.microsoft.com/office/drawing/2014/main" id="{5D54DF68-216B-42C3-9256-63ADC1AA0FBC}"/>
+                <a16:creationId xmlns:a16="http://schemas.microsoft.com/office/drawing/2014/main" xmlns="" id="{5D54DF68-216B-42C3-9256-63ADC1AA0FBC}"/>
               </a:ext>
             </a:extLst>
           </p:cNvPr>
@@ -1433,7 +1957,7 @@
           <p:cNvPr id="5" name="Date Placeholder 4">
             <a:extLst>
               <a:ext uri="{FF2B5EF4-FFF2-40B4-BE49-F238E27FC236}">
-                <a16:creationId xmlns:a16="http://schemas.microsoft.com/office/drawing/2014/main" id="{0F8CB3C2-36F1-4E0E-87E4-722E0A2B8830}"/>
+                <a16:creationId xmlns:a16="http://schemas.microsoft.com/office/drawing/2014/main" xmlns="" id="{0F8CB3C2-36F1-4E0E-87E4-722E0A2B8830}"/>
               </a:ext>
             </a:extLst>
           </p:cNvPr>
@@ -1451,7 +1975,7 @@
           <a:p>
             <a:fld id="{1DF0471C-15C6-430F-A1D2-F5E2439A92BD}" type="datetimeFigureOut">
               <a:rPr lang="en-US" smtClean="0"/>
-              <a:t>12/19/2022</a:t>
+              <a:t>12/20/2022</a:t>
             </a:fld>
             <a:endParaRPr lang="en-US"/>
           </a:p>
@@ -1462,7 +1986,7 @@
           <p:cNvPr id="6" name="Footer Placeholder 5">
             <a:extLst>
               <a:ext uri="{FF2B5EF4-FFF2-40B4-BE49-F238E27FC236}">
-                <a16:creationId xmlns:a16="http://schemas.microsoft.com/office/drawing/2014/main" id="{47A426AA-98E5-4C32-BD26-67433988AA7C}"/>
+                <a16:creationId xmlns:a16="http://schemas.microsoft.com/office/drawing/2014/main" xmlns="" id="{47A426AA-98E5-4C32-BD26-67433988AA7C}"/>
               </a:ext>
             </a:extLst>
           </p:cNvPr>
@@ -1487,7 +2011,7 @@
           <p:cNvPr id="7" name="Slide Number Placeholder 6">
             <a:extLst>
               <a:ext uri="{FF2B5EF4-FFF2-40B4-BE49-F238E27FC236}">
-                <a16:creationId xmlns:a16="http://schemas.microsoft.com/office/drawing/2014/main" id="{AEF93DAC-53DB-48BB-8C16-553726965EF3}"/>
+                <a16:creationId xmlns:a16="http://schemas.microsoft.com/office/drawing/2014/main" xmlns="" id="{AEF93DAC-53DB-48BB-8C16-553726965EF3}"/>
               </a:ext>
             </a:extLst>
           </p:cNvPr>
@@ -1546,7 +2070,7 @@
           <p:cNvPr id="2" name="Title 1">
             <a:extLst>
               <a:ext uri="{FF2B5EF4-FFF2-40B4-BE49-F238E27FC236}">
-                <a16:creationId xmlns:a16="http://schemas.microsoft.com/office/drawing/2014/main" id="{545ED9B5-95EB-42C7-9485-646F75953A7C}"/>
+                <a16:creationId xmlns:a16="http://schemas.microsoft.com/office/drawing/2014/main" xmlns="" id="{545ED9B5-95EB-42C7-9485-646F75953A7C}"/>
               </a:ext>
             </a:extLst>
           </p:cNvPr>
@@ -1579,7 +2103,7 @@
           <p:cNvPr id="3" name="Text Placeholder 2">
             <a:extLst>
               <a:ext uri="{FF2B5EF4-FFF2-40B4-BE49-F238E27FC236}">
-                <a16:creationId xmlns:a16="http://schemas.microsoft.com/office/drawing/2014/main" id="{433D3E70-C817-4747-B196-2EE7F616E55D}"/>
+                <a16:creationId xmlns:a16="http://schemas.microsoft.com/office/drawing/2014/main" xmlns="" id="{433D3E70-C817-4747-B196-2EE7F616E55D}"/>
               </a:ext>
             </a:extLst>
           </p:cNvPr>
@@ -1650,7 +2174,7 @@
           <p:cNvPr id="4" name="Content Placeholder 3">
             <a:extLst>
               <a:ext uri="{FF2B5EF4-FFF2-40B4-BE49-F238E27FC236}">
-                <a16:creationId xmlns:a16="http://schemas.microsoft.com/office/drawing/2014/main" id="{89E43232-D7AE-4CEA-B0CD-A62351B134BB}"/>
+                <a16:creationId xmlns:a16="http://schemas.microsoft.com/office/drawing/2014/main" xmlns="" id="{89E43232-D7AE-4CEA-B0CD-A62351B134BB}"/>
               </a:ext>
             </a:extLst>
           </p:cNvPr>
@@ -1712,7 +2236,7 @@
           <p:cNvPr id="5" name="Text Placeholder 4">
             <a:extLst>
               <a:ext uri="{FF2B5EF4-FFF2-40B4-BE49-F238E27FC236}">
-                <a16:creationId xmlns:a16="http://schemas.microsoft.com/office/drawing/2014/main" id="{F1BF8678-D57B-4B16-AA25-CD85B19E1B3A}"/>
+                <a16:creationId xmlns:a16="http://schemas.microsoft.com/office/drawing/2014/main" xmlns="" id="{F1BF8678-D57B-4B16-AA25-CD85B19E1B3A}"/>
               </a:ext>
             </a:extLst>
           </p:cNvPr>
@@ -1783,7 +2307,7 @@
           <p:cNvPr id="6" name="Content Placeholder 5">
             <a:extLst>
               <a:ext uri="{FF2B5EF4-FFF2-40B4-BE49-F238E27FC236}">
-                <a16:creationId xmlns:a16="http://schemas.microsoft.com/office/drawing/2014/main" id="{7DCBE630-179A-4327-878B-3847467281D3}"/>
+                <a16:creationId xmlns:a16="http://schemas.microsoft.com/office/drawing/2014/main" xmlns="" id="{7DCBE630-179A-4327-878B-3847467281D3}"/>
               </a:ext>
             </a:extLst>
           </p:cNvPr>
@@ -1845,7 +2369,7 @@
           <p:cNvPr id="7" name="Date Placeholder 6">
             <a:extLst>
               <a:ext uri="{FF2B5EF4-FFF2-40B4-BE49-F238E27FC236}">
-                <a16:creationId xmlns:a16="http://schemas.microsoft.com/office/drawing/2014/main" id="{E532529C-12B5-4D3A-A59C-5829E7D42567}"/>
+                <a16:creationId xmlns:a16="http://schemas.microsoft.com/office/drawing/2014/main" xmlns="" id="{E532529C-12B5-4D3A-A59C-5829E7D42567}"/>
               </a:ext>
             </a:extLst>
           </p:cNvPr>
@@ -1863,7 +2387,7 @@
           <a:p>
             <a:fld id="{1DF0471C-15C6-430F-A1D2-F5E2439A92BD}" type="datetimeFigureOut">
               <a:rPr lang="en-US" smtClean="0"/>
-              <a:t>12/19/2022</a:t>
+              <a:t>12/20/2022</a:t>
             </a:fld>
             <a:endParaRPr lang="en-US"/>
           </a:p>
@@ -1874,7 +2398,7 @@
           <p:cNvPr id="8" name="Footer Placeholder 7">
             <a:extLst>
               <a:ext uri="{FF2B5EF4-FFF2-40B4-BE49-F238E27FC236}">
-                <a16:creationId xmlns:a16="http://schemas.microsoft.com/office/drawing/2014/main" id="{D40F80FF-DCE0-4C7C-8044-57BFC37C586E}"/>
+                <a16:creationId xmlns:a16="http://schemas.microsoft.com/office/drawing/2014/main" xmlns="" id="{D40F80FF-DCE0-4C7C-8044-57BFC37C586E}"/>
               </a:ext>
             </a:extLst>
           </p:cNvPr>
@@ -1899,7 +2423,7 @@
           <p:cNvPr id="9" name="Slide Number Placeholder 8">
             <a:extLst>
               <a:ext uri="{FF2B5EF4-FFF2-40B4-BE49-F238E27FC236}">
-                <a16:creationId xmlns:a16="http://schemas.microsoft.com/office/drawing/2014/main" id="{C8F2F391-E1E7-4833-9AFF-E9A7A6123EA8}"/>
+                <a16:creationId xmlns:a16="http://schemas.microsoft.com/office/drawing/2014/main" xmlns="" id="{C8F2F391-E1E7-4833-9AFF-E9A7A6123EA8}"/>
               </a:ext>
             </a:extLst>
           </p:cNvPr>
@@ -1958,7 +2482,7 @@
           <p:cNvPr id="2" name="Title 1">
             <a:extLst>
               <a:ext uri="{FF2B5EF4-FFF2-40B4-BE49-F238E27FC236}">
-                <a16:creationId xmlns:a16="http://schemas.microsoft.com/office/drawing/2014/main" id="{6120F39E-D600-4EF7-8592-B5B8CA1FB8DE}"/>
+                <a16:creationId xmlns:a16="http://schemas.microsoft.com/office/drawing/2014/main" xmlns="" id="{6120F39E-D600-4EF7-8592-B5B8CA1FB8DE}"/>
               </a:ext>
             </a:extLst>
           </p:cNvPr>
@@ -1986,7 +2510,7 @@
           <p:cNvPr id="3" name="Date Placeholder 2">
             <a:extLst>
               <a:ext uri="{FF2B5EF4-FFF2-40B4-BE49-F238E27FC236}">
-                <a16:creationId xmlns:a16="http://schemas.microsoft.com/office/drawing/2014/main" id="{A5CB6ADA-F787-43FE-AC74-6E61D078A86D}"/>
+                <a16:creationId xmlns:a16="http://schemas.microsoft.com/office/drawing/2014/main" xmlns="" id="{A5CB6ADA-F787-43FE-AC74-6E61D078A86D}"/>
               </a:ext>
             </a:extLst>
           </p:cNvPr>
@@ -2004,7 +2528,7 @@
           <a:p>
             <a:fld id="{1DF0471C-15C6-430F-A1D2-F5E2439A92BD}" type="datetimeFigureOut">
               <a:rPr lang="en-US" smtClean="0"/>
-              <a:t>12/19/2022</a:t>
+              <a:t>12/20/2022</a:t>
             </a:fld>
             <a:endParaRPr lang="en-US"/>
           </a:p>
@@ -2015,7 +2539,7 @@
           <p:cNvPr id="4" name="Footer Placeholder 3">
             <a:extLst>
               <a:ext uri="{FF2B5EF4-FFF2-40B4-BE49-F238E27FC236}">
-                <a16:creationId xmlns:a16="http://schemas.microsoft.com/office/drawing/2014/main" id="{2EDD119A-D885-4E6D-A0EF-6EA781CCF1FA}"/>
+                <a16:creationId xmlns:a16="http://schemas.microsoft.com/office/drawing/2014/main" xmlns="" id="{2EDD119A-D885-4E6D-A0EF-6EA781CCF1FA}"/>
               </a:ext>
             </a:extLst>
           </p:cNvPr>
@@ -2040,7 +2564,7 @@
           <p:cNvPr id="5" name="Slide Number Placeholder 4">
             <a:extLst>
               <a:ext uri="{FF2B5EF4-FFF2-40B4-BE49-F238E27FC236}">
-                <a16:creationId xmlns:a16="http://schemas.microsoft.com/office/drawing/2014/main" id="{AE921555-C8FE-4D6F-9562-9BF9FC738B48}"/>
+                <a16:creationId xmlns:a16="http://schemas.microsoft.com/office/drawing/2014/main" xmlns="" id="{AE921555-C8FE-4D6F-9562-9BF9FC738B48}"/>
               </a:ext>
             </a:extLst>
           </p:cNvPr>
@@ -2099,7 +2623,7 @@
           <p:cNvPr id="2" name="Date Placeholder 1">
             <a:extLst>
               <a:ext uri="{FF2B5EF4-FFF2-40B4-BE49-F238E27FC236}">
-                <a16:creationId xmlns:a16="http://schemas.microsoft.com/office/drawing/2014/main" id="{A53558C2-1A82-4EF4-8BAA-764708819FAA}"/>
+                <a16:creationId xmlns:a16="http://schemas.microsoft.com/office/drawing/2014/main" xmlns="" id="{A53558C2-1A82-4EF4-8BAA-764708819FAA}"/>
               </a:ext>
             </a:extLst>
           </p:cNvPr>
@@ -2117,7 +2641,7 @@
           <a:p>
             <a:fld id="{1DF0471C-15C6-430F-A1D2-F5E2439A92BD}" type="datetimeFigureOut">
               <a:rPr lang="en-US" smtClean="0"/>
-              <a:t>12/19/2022</a:t>
+              <a:t>12/20/2022</a:t>
             </a:fld>
             <a:endParaRPr lang="en-US"/>
           </a:p>
@@ -2128,7 +2652,7 @@
           <p:cNvPr id="3" name="Footer Placeholder 2">
             <a:extLst>
               <a:ext uri="{FF2B5EF4-FFF2-40B4-BE49-F238E27FC236}">
-                <a16:creationId xmlns:a16="http://schemas.microsoft.com/office/drawing/2014/main" id="{99F012A8-7436-429E-8F24-73C22C8E09FE}"/>
+                <a16:creationId xmlns:a16="http://schemas.microsoft.com/office/drawing/2014/main" xmlns="" id="{99F012A8-7436-429E-8F24-73C22C8E09FE}"/>
               </a:ext>
             </a:extLst>
           </p:cNvPr>
@@ -2153,7 +2677,7 @@
           <p:cNvPr id="4" name="Slide Number Placeholder 3">
             <a:extLst>
               <a:ext uri="{FF2B5EF4-FFF2-40B4-BE49-F238E27FC236}">
-                <a16:creationId xmlns:a16="http://schemas.microsoft.com/office/drawing/2014/main" id="{6C8E85BE-B27C-485C-B2B0-085F09F7386A}"/>
+                <a16:creationId xmlns:a16="http://schemas.microsoft.com/office/drawing/2014/main" xmlns="" id="{6C8E85BE-B27C-485C-B2B0-085F09F7386A}"/>
               </a:ext>
             </a:extLst>
           </p:cNvPr>
@@ -2212,7 +2736,7 @@
           <p:cNvPr id="2" name="Title 1">
             <a:extLst>
               <a:ext uri="{FF2B5EF4-FFF2-40B4-BE49-F238E27FC236}">
-                <a16:creationId xmlns:a16="http://schemas.microsoft.com/office/drawing/2014/main" id="{C8EB7628-37D5-483E-BF2D-227BF43C7DD8}"/>
+                <a16:creationId xmlns:a16="http://schemas.microsoft.com/office/drawing/2014/main" xmlns="" id="{C8EB7628-37D5-483E-BF2D-227BF43C7DD8}"/>
               </a:ext>
             </a:extLst>
           </p:cNvPr>
@@ -2249,7 +2773,7 @@
           <p:cNvPr id="3" name="Content Placeholder 2">
             <a:extLst>
               <a:ext uri="{FF2B5EF4-FFF2-40B4-BE49-F238E27FC236}">
-                <a16:creationId xmlns:a16="http://schemas.microsoft.com/office/drawing/2014/main" id="{B6A4EEEF-9654-4C68-98D6-223555EE59D6}"/>
+                <a16:creationId xmlns:a16="http://schemas.microsoft.com/office/drawing/2014/main" xmlns="" id="{B6A4EEEF-9654-4C68-98D6-223555EE59D6}"/>
               </a:ext>
             </a:extLst>
           </p:cNvPr>
@@ -2339,7 +2863,7 @@
           <p:cNvPr id="4" name="Text Placeholder 3">
             <a:extLst>
               <a:ext uri="{FF2B5EF4-FFF2-40B4-BE49-F238E27FC236}">
-                <a16:creationId xmlns:a16="http://schemas.microsoft.com/office/drawing/2014/main" id="{00DA8380-51B0-4F28-85FC-067FB8CF17F4}"/>
+                <a16:creationId xmlns:a16="http://schemas.microsoft.com/office/drawing/2014/main" xmlns="" id="{00DA8380-51B0-4F28-85FC-067FB8CF17F4}"/>
               </a:ext>
             </a:extLst>
           </p:cNvPr>
@@ -2410,7 +2934,7 @@
           <p:cNvPr id="5" name="Date Placeholder 4">
             <a:extLst>
               <a:ext uri="{FF2B5EF4-FFF2-40B4-BE49-F238E27FC236}">
-                <a16:creationId xmlns:a16="http://schemas.microsoft.com/office/drawing/2014/main" id="{B43A1E1A-A745-4419-94DF-F1664473D5F9}"/>
+                <a16:creationId xmlns:a16="http://schemas.microsoft.com/office/drawing/2014/main" xmlns="" id="{B43A1E1A-A745-4419-94DF-F1664473D5F9}"/>
               </a:ext>
             </a:extLst>
           </p:cNvPr>
@@ -2428,7 +2952,7 @@
           <a:p>
             <a:fld id="{1DF0471C-15C6-430F-A1D2-F5E2439A92BD}" type="datetimeFigureOut">
               <a:rPr lang="en-US" smtClean="0"/>
-              <a:t>12/19/2022</a:t>
+              <a:t>12/20/2022</a:t>
             </a:fld>
             <a:endParaRPr lang="en-US"/>
           </a:p>
@@ -2439,7 +2963,7 @@
           <p:cNvPr id="6" name="Footer Placeholder 5">
             <a:extLst>
               <a:ext uri="{FF2B5EF4-FFF2-40B4-BE49-F238E27FC236}">
-                <a16:creationId xmlns:a16="http://schemas.microsoft.com/office/drawing/2014/main" id="{BE7AF249-9AA1-4A7B-ABEC-1DA340BA4725}"/>
+                <a16:creationId xmlns:a16="http://schemas.microsoft.com/office/drawing/2014/main" xmlns="" id="{BE7AF249-9AA1-4A7B-ABEC-1DA340BA4725}"/>
               </a:ext>
             </a:extLst>
           </p:cNvPr>
@@ -2464,7 +2988,7 @@
           <p:cNvPr id="7" name="Slide Number Placeholder 6">
             <a:extLst>
               <a:ext uri="{FF2B5EF4-FFF2-40B4-BE49-F238E27FC236}">
-                <a16:creationId xmlns:a16="http://schemas.microsoft.com/office/drawing/2014/main" id="{21A5C071-8445-4D81-8E03-FE52BB467EF3}"/>
+                <a16:creationId xmlns:a16="http://schemas.microsoft.com/office/drawing/2014/main" xmlns="" id="{21A5C071-8445-4D81-8E03-FE52BB467EF3}"/>
               </a:ext>
             </a:extLst>
           </p:cNvPr>
@@ -2523,7 +3047,7 @@
           <p:cNvPr id="2" name="Title 1">
             <a:extLst>
               <a:ext uri="{FF2B5EF4-FFF2-40B4-BE49-F238E27FC236}">
-                <a16:creationId xmlns:a16="http://schemas.microsoft.com/office/drawing/2014/main" id="{0E3F1C17-470B-42F4-9A17-35826AA08A57}"/>
+                <a16:creationId xmlns:a16="http://schemas.microsoft.com/office/drawing/2014/main" xmlns="" id="{0E3F1C17-470B-42F4-9A17-35826AA08A57}"/>
               </a:ext>
             </a:extLst>
           </p:cNvPr>
@@ -2560,7 +3084,7 @@
           <p:cNvPr id="3" name="Picture Placeholder 2">
             <a:extLst>
               <a:ext uri="{FF2B5EF4-FFF2-40B4-BE49-F238E27FC236}">
-                <a16:creationId xmlns:a16="http://schemas.microsoft.com/office/drawing/2014/main" id="{845AFDA6-55BA-4CCC-A3D1-0D28903D9F65}"/>
+                <a16:creationId xmlns:a16="http://schemas.microsoft.com/office/drawing/2014/main" xmlns="" id="{845AFDA6-55BA-4CCC-A3D1-0D28903D9F65}"/>
               </a:ext>
             </a:extLst>
           </p:cNvPr>
@@ -2627,7 +3151,7 @@
           <p:cNvPr id="4" name="Text Placeholder 3">
             <a:extLst>
               <a:ext uri="{FF2B5EF4-FFF2-40B4-BE49-F238E27FC236}">
-                <a16:creationId xmlns:a16="http://schemas.microsoft.com/office/drawing/2014/main" id="{42A2F931-34E2-4203-BC74-DBEDFA5F7D5E}"/>
+                <a16:creationId xmlns:a16="http://schemas.microsoft.com/office/drawing/2014/main" xmlns="" id="{42A2F931-34E2-4203-BC74-DBEDFA5F7D5E}"/>
               </a:ext>
             </a:extLst>
           </p:cNvPr>
@@ -2698,7 +3222,7 @@
           <p:cNvPr id="5" name="Date Placeholder 4">
             <a:extLst>
               <a:ext uri="{FF2B5EF4-FFF2-40B4-BE49-F238E27FC236}">
-                <a16:creationId xmlns:a16="http://schemas.microsoft.com/office/drawing/2014/main" id="{0AAC29A3-3865-4E50-8B48-16A0F74C0291}"/>
+                <a16:creationId xmlns:a16="http://schemas.microsoft.com/office/drawing/2014/main" xmlns="" id="{0AAC29A3-3865-4E50-8B48-16A0F74C0291}"/>
               </a:ext>
             </a:extLst>
           </p:cNvPr>
@@ -2716,7 +3240,7 @@
           <a:p>
             <a:fld id="{1DF0471C-15C6-430F-A1D2-F5E2439A92BD}" type="datetimeFigureOut">
               <a:rPr lang="en-US" smtClean="0"/>
-              <a:t>12/19/2022</a:t>
+              <a:t>12/20/2022</a:t>
             </a:fld>
             <a:endParaRPr lang="en-US"/>
           </a:p>
@@ -2727,7 +3251,7 @@
           <p:cNvPr id="6" name="Footer Placeholder 5">
             <a:extLst>
               <a:ext uri="{FF2B5EF4-FFF2-40B4-BE49-F238E27FC236}">
-                <a16:creationId xmlns:a16="http://schemas.microsoft.com/office/drawing/2014/main" id="{BDC00C21-8A04-424A-8FA8-1ECDEB8CD4CD}"/>
+                <a16:creationId xmlns:a16="http://schemas.microsoft.com/office/drawing/2014/main" xmlns="" id="{BDC00C21-8A04-424A-8FA8-1ECDEB8CD4CD}"/>
               </a:ext>
             </a:extLst>
           </p:cNvPr>
@@ -2752,7 +3276,7 @@
           <p:cNvPr id="7" name="Slide Number Placeholder 6">
             <a:extLst>
               <a:ext uri="{FF2B5EF4-FFF2-40B4-BE49-F238E27FC236}">
-                <a16:creationId xmlns:a16="http://schemas.microsoft.com/office/drawing/2014/main" id="{F42CD0FE-C8F0-4EAA-94BC-6E82306B6C79}"/>
+                <a16:creationId xmlns:a16="http://schemas.microsoft.com/office/drawing/2014/main" xmlns="" id="{F42CD0FE-C8F0-4EAA-94BC-6E82306B6C79}"/>
               </a:ext>
             </a:extLst>
           </p:cNvPr>
@@ -2816,7 +3340,7 @@
           <p:cNvPr id="2" name="Title Placeholder 1">
             <a:extLst>
               <a:ext uri="{FF2B5EF4-FFF2-40B4-BE49-F238E27FC236}">
-                <a16:creationId xmlns:a16="http://schemas.microsoft.com/office/drawing/2014/main" id="{940A7DD8-7706-4514-90E2-C24E40A94D91}"/>
+                <a16:creationId xmlns:a16="http://schemas.microsoft.com/office/drawing/2014/main" xmlns="" id="{940A7DD8-7706-4514-90E2-C24E40A94D91}"/>
               </a:ext>
             </a:extLst>
           </p:cNvPr>
@@ -2854,7 +3378,7 @@
           <p:cNvPr id="3" name="Text Placeholder 2">
             <a:extLst>
               <a:ext uri="{FF2B5EF4-FFF2-40B4-BE49-F238E27FC236}">
-                <a16:creationId xmlns:a16="http://schemas.microsoft.com/office/drawing/2014/main" id="{3981306D-1561-42BE-A13B-EA5C01B087BD}"/>
+                <a16:creationId xmlns:a16="http://schemas.microsoft.com/office/drawing/2014/main" xmlns="" id="{3981306D-1561-42BE-A13B-EA5C01B087BD}"/>
               </a:ext>
             </a:extLst>
           </p:cNvPr>
@@ -2921,7 +3445,7 @@
           <p:cNvPr id="4" name="Date Placeholder 3">
             <a:extLst>
               <a:ext uri="{FF2B5EF4-FFF2-40B4-BE49-F238E27FC236}">
-                <a16:creationId xmlns:a16="http://schemas.microsoft.com/office/drawing/2014/main" id="{97FBF928-F762-45BA-8F1B-7BF281188E37}"/>
+                <a16:creationId xmlns:a16="http://schemas.microsoft.com/office/drawing/2014/main" xmlns="" id="{97FBF928-F762-45BA-8F1B-7BF281188E37}"/>
               </a:ext>
             </a:extLst>
           </p:cNvPr>
@@ -2957,7 +3481,7 @@
           <a:p>
             <a:fld id="{1DF0471C-15C6-430F-A1D2-F5E2439A92BD}" type="datetimeFigureOut">
               <a:rPr lang="en-US" smtClean="0"/>
-              <a:t>12/19/2022</a:t>
+              <a:t>12/20/2022</a:t>
             </a:fld>
             <a:endParaRPr lang="en-US"/>
           </a:p>
@@ -2968,7 +3492,7 @@
           <p:cNvPr id="5" name="Footer Placeholder 4">
             <a:extLst>
               <a:ext uri="{FF2B5EF4-FFF2-40B4-BE49-F238E27FC236}">
-                <a16:creationId xmlns:a16="http://schemas.microsoft.com/office/drawing/2014/main" id="{8BE2224F-E8B6-4AA6-A581-266221933E49}"/>
+                <a16:creationId xmlns:a16="http://schemas.microsoft.com/office/drawing/2014/main" xmlns="" id="{8BE2224F-E8B6-4AA6-A581-266221933E49}"/>
               </a:ext>
             </a:extLst>
           </p:cNvPr>
@@ -3011,7 +3535,7 @@
           <p:cNvPr id="6" name="Slide Number Placeholder 5">
             <a:extLst>
               <a:ext uri="{FF2B5EF4-FFF2-40B4-BE49-F238E27FC236}">
-                <a16:creationId xmlns:a16="http://schemas.microsoft.com/office/drawing/2014/main" id="{16D3250F-2726-4163-8DC1-97CCB3BC9E2C}"/>
+                <a16:creationId xmlns:a16="http://schemas.microsoft.com/office/drawing/2014/main" xmlns="" id="{16D3250F-2726-4163-8DC1-97CCB3BC9E2C}"/>
               </a:ext>
             </a:extLst>
           </p:cNvPr>
@@ -3058,7 +3582,7 @@
           <p:cNvPr id="7" name="MSIPCMContentMarking" descr="{&quot;HashCode&quot;:1596673254,&quot;Placement&quot;:&quot;Footer&quot;,&quot;Top&quot;:524.1047,&quot;Left&quot;:923.827,&quot;SlideWidth&quot;:960,&quot;SlideHeight&quot;:540}">
             <a:extLst>
               <a:ext uri="{FF2B5EF4-FFF2-40B4-BE49-F238E27FC236}">
-                <a16:creationId xmlns:a16="http://schemas.microsoft.com/office/drawing/2014/main" id="{301E2244-036C-431A-A644-1C4D02F8E5C7}"/>
+                <a16:creationId xmlns:a16="http://schemas.microsoft.com/office/drawing/2014/main" xmlns="" id="{301E2244-036C-431A-A644-1C4D02F8E5C7}"/>
               </a:ext>
             </a:extLst>
           </p:cNvPr>
@@ -3461,7 +3985,7 @@
           <p:cNvPr id="10" name="Rectangle: Rounded Corners 9">
             <a:extLst>
               <a:ext uri="{FF2B5EF4-FFF2-40B4-BE49-F238E27FC236}">
-                <a16:creationId xmlns:a16="http://schemas.microsoft.com/office/drawing/2014/main" id="{280D6242-586B-4726-BC93-86C917CE8E52}"/>
+                <a16:creationId xmlns:a16="http://schemas.microsoft.com/office/drawing/2014/main" xmlns="" id="{280D6242-586B-4726-BC93-86C917CE8E52}"/>
               </a:ext>
             </a:extLst>
           </p:cNvPr>
@@ -3517,7 +4041,7 @@
           <p:cNvPr id="11" name="Rectangle: Rounded Corners 10">
             <a:extLst>
               <a:ext uri="{FF2B5EF4-FFF2-40B4-BE49-F238E27FC236}">
-                <a16:creationId xmlns:a16="http://schemas.microsoft.com/office/drawing/2014/main" id="{1AFD95DB-EE82-4014-8431-753B408C671F}"/>
+                <a16:creationId xmlns:a16="http://schemas.microsoft.com/office/drawing/2014/main" xmlns="" id="{1AFD95DB-EE82-4014-8431-753B408C671F}"/>
               </a:ext>
             </a:extLst>
           </p:cNvPr>
@@ -3593,7 +4117,7 @@
           <p:cNvPr id="12" name="Rectangle: Rounded Corners 11">
             <a:extLst>
               <a:ext uri="{FF2B5EF4-FFF2-40B4-BE49-F238E27FC236}">
-                <a16:creationId xmlns:a16="http://schemas.microsoft.com/office/drawing/2014/main" id="{5A1BEE6C-84E1-4224-B447-1AC8A888AAC0}"/>
+                <a16:creationId xmlns:a16="http://schemas.microsoft.com/office/drawing/2014/main" xmlns="" id="{5A1BEE6C-84E1-4224-B447-1AC8A888AAC0}"/>
               </a:ext>
             </a:extLst>
           </p:cNvPr>
@@ -3653,7 +4177,7 @@
           <p:cNvPr id="13" name="Rectangle: Rounded Corners 12">
             <a:extLst>
               <a:ext uri="{FF2B5EF4-FFF2-40B4-BE49-F238E27FC236}">
-                <a16:creationId xmlns:a16="http://schemas.microsoft.com/office/drawing/2014/main" id="{C39141B1-20FA-423F-B75B-5471535624C8}"/>
+                <a16:creationId xmlns:a16="http://schemas.microsoft.com/office/drawing/2014/main" xmlns="" id="{C39141B1-20FA-423F-B75B-5471535624C8}"/>
               </a:ext>
             </a:extLst>
           </p:cNvPr>
@@ -3705,7 +4229,7 @@
           <p:cNvPr id="14" name="Rectangle: Rounded Corners 13">
             <a:extLst>
               <a:ext uri="{FF2B5EF4-FFF2-40B4-BE49-F238E27FC236}">
-                <a16:creationId xmlns:a16="http://schemas.microsoft.com/office/drawing/2014/main" id="{81CE814C-51C2-45D8-9AA1-5DF8C38665AD}"/>
+                <a16:creationId xmlns:a16="http://schemas.microsoft.com/office/drawing/2014/main" xmlns="" id="{81CE814C-51C2-45D8-9AA1-5DF8C38665AD}"/>
               </a:ext>
             </a:extLst>
           </p:cNvPr>
@@ -3765,7 +4289,7 @@
           <p:cNvPr id="15" name="Rectangle: Rounded Corners 14">
             <a:extLst>
               <a:ext uri="{FF2B5EF4-FFF2-40B4-BE49-F238E27FC236}">
-                <a16:creationId xmlns:a16="http://schemas.microsoft.com/office/drawing/2014/main" id="{E25DC19F-6B3A-4545-BDB8-13C5481B9137}"/>
+                <a16:creationId xmlns:a16="http://schemas.microsoft.com/office/drawing/2014/main" xmlns="" id="{E25DC19F-6B3A-4545-BDB8-13C5481B9137}"/>
               </a:ext>
             </a:extLst>
           </p:cNvPr>
@@ -3817,7 +4341,7 @@
           <p:cNvPr id="3" name="Straight Arrow Connector 2">
             <a:extLst>
               <a:ext uri="{FF2B5EF4-FFF2-40B4-BE49-F238E27FC236}">
-                <a16:creationId xmlns:a16="http://schemas.microsoft.com/office/drawing/2014/main" id="{DA11DF66-EB94-42A7-A712-9922433548FE}"/>
+                <a16:creationId xmlns:a16="http://schemas.microsoft.com/office/drawing/2014/main" xmlns="" id="{DA11DF66-EB94-42A7-A712-9922433548FE}"/>
               </a:ext>
             </a:extLst>
           </p:cNvPr>
@@ -3859,7 +4383,7 @@
           <p:cNvPr id="16" name="TextBox 15">
             <a:extLst>
               <a:ext uri="{FF2B5EF4-FFF2-40B4-BE49-F238E27FC236}">
-                <a16:creationId xmlns:a16="http://schemas.microsoft.com/office/drawing/2014/main" id="{9ADF6F6C-444B-4360-9821-C523FAFE1E57}"/>
+                <a16:creationId xmlns:a16="http://schemas.microsoft.com/office/drawing/2014/main" xmlns="" id="{9ADF6F6C-444B-4360-9821-C523FAFE1E57}"/>
               </a:ext>
             </a:extLst>
           </p:cNvPr>
@@ -3899,7 +4423,7 @@
           <p:cNvPr id="17" name="Straight Arrow Connector 16">
             <a:extLst>
               <a:ext uri="{FF2B5EF4-FFF2-40B4-BE49-F238E27FC236}">
-                <a16:creationId xmlns:a16="http://schemas.microsoft.com/office/drawing/2014/main" id="{EB1F8E18-9264-4C4C-A388-691903EE6285}"/>
+                <a16:creationId xmlns:a16="http://schemas.microsoft.com/office/drawing/2014/main" xmlns="" id="{EB1F8E18-9264-4C4C-A388-691903EE6285}"/>
               </a:ext>
             </a:extLst>
           </p:cNvPr>
@@ -3942,7 +4466,7 @@
           <p:cNvPr id="18" name="Straight Arrow Connector 17">
             <a:extLst>
               <a:ext uri="{FF2B5EF4-FFF2-40B4-BE49-F238E27FC236}">
-                <a16:creationId xmlns:a16="http://schemas.microsoft.com/office/drawing/2014/main" id="{6EBEDE39-1CAE-42E5-98DB-1687FB9FF878}"/>
+                <a16:creationId xmlns:a16="http://schemas.microsoft.com/office/drawing/2014/main" xmlns="" id="{6EBEDE39-1CAE-42E5-98DB-1687FB9FF878}"/>
               </a:ext>
             </a:extLst>
           </p:cNvPr>
@@ -3981,7 +4505,7 @@
           <p:cNvPr id="20" name="TextBox 19">
             <a:extLst>
               <a:ext uri="{FF2B5EF4-FFF2-40B4-BE49-F238E27FC236}">
-                <a16:creationId xmlns:a16="http://schemas.microsoft.com/office/drawing/2014/main" id="{C0DE93DA-4E5B-4155-9045-9C20A40BBD7D}"/>
+                <a16:creationId xmlns:a16="http://schemas.microsoft.com/office/drawing/2014/main" xmlns="" id="{C0DE93DA-4E5B-4155-9045-9C20A40BBD7D}"/>
               </a:ext>
             </a:extLst>
           </p:cNvPr>
@@ -4016,7 +4540,7 @@
           <p:cNvPr id="21" name="Straight Arrow Connector 20">
             <a:extLst>
               <a:ext uri="{FF2B5EF4-FFF2-40B4-BE49-F238E27FC236}">
-                <a16:creationId xmlns:a16="http://schemas.microsoft.com/office/drawing/2014/main" id="{D8CA6A16-C24E-403F-92DA-24201808389D}"/>
+                <a16:creationId xmlns:a16="http://schemas.microsoft.com/office/drawing/2014/main" xmlns="" id="{D8CA6A16-C24E-403F-92DA-24201808389D}"/>
               </a:ext>
             </a:extLst>
           </p:cNvPr>
@@ -4058,7 +4582,7 @@
           <p:cNvPr id="22" name="Straight Arrow Connector 21">
             <a:extLst>
               <a:ext uri="{FF2B5EF4-FFF2-40B4-BE49-F238E27FC236}">
-                <a16:creationId xmlns:a16="http://schemas.microsoft.com/office/drawing/2014/main" id="{1AF07EEB-8486-4019-9959-3F0CBF0C6A66}"/>
+                <a16:creationId xmlns:a16="http://schemas.microsoft.com/office/drawing/2014/main" xmlns="" id="{1AF07EEB-8486-4019-9959-3F0CBF0C6A66}"/>
               </a:ext>
             </a:extLst>
           </p:cNvPr>
@@ -4099,7 +4623,7 @@
           <p:cNvPr id="23" name="TextBox 22">
             <a:extLst>
               <a:ext uri="{FF2B5EF4-FFF2-40B4-BE49-F238E27FC236}">
-                <a16:creationId xmlns:a16="http://schemas.microsoft.com/office/drawing/2014/main" id="{452BE8F3-0295-4B15-80B4-B2026225BC92}"/>
+                <a16:creationId xmlns:a16="http://schemas.microsoft.com/office/drawing/2014/main" xmlns="" id="{452BE8F3-0295-4B15-80B4-B2026225BC92}"/>
               </a:ext>
             </a:extLst>
           </p:cNvPr>
@@ -4144,6 +4668,1808 @@
   <p:clrMapOvr>
     <a:masterClrMapping/>
   </p:clrMapOvr>
+  <p:timing>
+    <p:tnLst>
+      <p:par>
+        <p:cTn id="1" dur="indefinite" restart="never" nodeType="tmRoot"/>
+      </p:par>
+    </p:tnLst>
+  </p:timing>
+</p:sld>
+</file>
+
+<file path=ppt/slides/slide2.xml><?xml version="1.0" encoding="utf-8"?>
+<p:sld xmlns:a="http://schemas.openxmlformats.org/drawingml/2006/main" xmlns:r="http://schemas.openxmlformats.org/officeDocument/2006/relationships" xmlns:p="http://schemas.openxmlformats.org/presentationml/2006/main" showMasterSp="0">
+  <p:cSld>
+    <p:bg>
+      <p:bgPr>
+        <a:solidFill>
+          <a:schemeClr val="bg1"/>
+        </a:solidFill>
+        <a:effectLst/>
+      </p:bgPr>
+    </p:bg>
+    <p:spTree>
+      <p:nvGrpSpPr>
+        <p:cNvPr id="1" name=""/>
+        <p:cNvGrpSpPr/>
+        <p:nvPr/>
+      </p:nvGrpSpPr>
+      <p:grpSpPr>
+        <a:xfrm>
+          <a:off x="0" y="0"/>
+          <a:ext cx="0" cy="0"/>
+          <a:chOff x="0" y="0"/>
+          <a:chExt cx="0" cy="0"/>
+        </a:xfrm>
+      </p:grpSpPr>
+      <p:sp>
+        <p:nvSpPr>
+          <p:cNvPr id="23" name="TextBox 22">
+            <a:extLst>
+              <a:ext uri="{FF2B5EF4-FFF2-40B4-BE49-F238E27FC236}">
+                <a16:creationId xmlns:a16="http://schemas.microsoft.com/office/drawing/2014/main" xmlns="" id="{452BE8F3-0295-4B15-80B4-B2026225BC92}"/>
+              </a:ext>
+            </a:extLst>
+          </p:cNvPr>
+          <p:cNvSpPr txBox="1"/>
+          <p:nvPr/>
+        </p:nvSpPr>
+        <p:spPr>
+          <a:xfrm>
+            <a:off x="1807617" y="587948"/>
+            <a:ext cx="1914038" cy="707886"/>
+          </a:xfrm>
+          <a:prstGeom prst="rect">
+            <a:avLst/>
+          </a:prstGeom>
+          <a:noFill/>
+        </p:spPr>
+        <p:txBody>
+          <a:bodyPr wrap="square">
+            <a:spAutoFit/>
+          </a:bodyPr>
+          <a:lstStyle/>
+          <a:p>
+            <a:pPr algn="ctr"/>
+            <a:r>
+              <a:rPr lang="en-US" sz="2000" dirty="0" smtClean="0">
+                <a:solidFill>
+                  <a:srgbClr val="002060"/>
+                </a:solidFill>
+              </a:rPr>
+              <a:t>Executed in </a:t>
+            </a:r>
+          </a:p>
+          <a:p>
+            <a:pPr algn="ctr"/>
+            <a:r>
+              <a:rPr lang="en-US" sz="2000" dirty="0" smtClean="0">
+                <a:solidFill>
+                  <a:srgbClr val="002060"/>
+                </a:solidFill>
+              </a:rPr>
+              <a:t>Transaction T1</a:t>
+            </a:r>
+            <a:endParaRPr lang="en-US" sz="2000" dirty="0"/>
+          </a:p>
+        </p:txBody>
+      </p:sp>
+      <p:sp>
+        <p:nvSpPr>
+          <p:cNvPr id="19" name="Rectangle: Rounded Corners 11">
+            <a:extLst>
+              <a:ext uri="{FF2B5EF4-FFF2-40B4-BE49-F238E27FC236}">
+                <a16:creationId xmlns:a16="http://schemas.microsoft.com/office/drawing/2014/main" xmlns="" id="{5A1BEE6C-84E1-4224-B447-1AC8A888AAC0}"/>
+              </a:ext>
+            </a:extLst>
+          </p:cNvPr>
+          <p:cNvSpPr/>
+          <p:nvPr/>
+        </p:nvSpPr>
+        <p:spPr>
+          <a:xfrm>
+            <a:off x="1331740" y="1503040"/>
+            <a:ext cx="2909334" cy="519987"/>
+          </a:xfrm>
+          <a:prstGeom prst="roundRect">
+            <a:avLst/>
+          </a:prstGeom>
+          <a:noFill/>
+        </p:spPr>
+        <p:style>
+          <a:lnRef idx="2">
+            <a:schemeClr val="accent1">
+              <a:shade val="50000"/>
+            </a:schemeClr>
+          </a:lnRef>
+          <a:fillRef idx="1">
+            <a:schemeClr val="accent1"/>
+          </a:fillRef>
+          <a:effectRef idx="0">
+            <a:schemeClr val="accent1"/>
+          </a:effectRef>
+          <a:fontRef idx="minor">
+            <a:schemeClr val="lt1"/>
+          </a:fontRef>
+        </p:style>
+        <p:txBody>
+          <a:bodyPr rtlCol="0" anchor="ctr"/>
+          <a:lstStyle/>
+          <a:p>
+            <a:r>
+              <a:rPr lang="en-US" sz="900" b="1" dirty="0" smtClean="0">
+                <a:solidFill>
+                  <a:schemeClr val="bg2">
+                    <a:lumMod val="75000"/>
+                  </a:schemeClr>
+                </a:solidFill>
+              </a:rPr>
+              <a:t>@Transactional</a:t>
+            </a:r>
+            <a:r>
+              <a:rPr lang="en-US" sz="900" dirty="0" smtClean="0">
+                <a:solidFill>
+                  <a:schemeClr val="tx1"/>
+                </a:solidFill>
+              </a:rPr>
+              <a:t>(propagation </a:t>
+            </a:r>
+            <a:r>
+              <a:rPr lang="en-US" sz="900" dirty="0">
+                <a:solidFill>
+                  <a:schemeClr val="tx1"/>
+                </a:solidFill>
+              </a:rPr>
+              <a:t>= Propagation.</a:t>
+            </a:r>
+            <a:r>
+              <a:rPr lang="en-US" sz="900" b="1" i="1" dirty="0">
+                <a:solidFill>
+                  <a:srgbClr val="0000FF"/>
+                </a:solidFill>
+              </a:rPr>
+              <a:t>REQUIRED</a:t>
+            </a:r>
+            <a:r>
+              <a:rPr lang="en-US" sz="900" i="1" dirty="0" smtClean="0">
+                <a:solidFill>
+                  <a:schemeClr val="tx1"/>
+                </a:solidFill>
+              </a:rPr>
+              <a:t>)</a:t>
+            </a:r>
+          </a:p>
+          <a:p>
+            <a:r>
+              <a:rPr lang="en-US" sz="900" b="1" dirty="0" smtClean="0">
+                <a:solidFill>
+                  <a:srgbClr val="FF0000"/>
+                </a:solidFill>
+              </a:rPr>
+              <a:t>public</a:t>
+            </a:r>
+            <a:r>
+              <a:rPr lang="en-US" sz="900" dirty="0" smtClean="0">
+                <a:solidFill>
+                  <a:srgbClr val="FF0000"/>
+                </a:solidFill>
+              </a:rPr>
+              <a:t> </a:t>
+            </a:r>
+            <a:r>
+              <a:rPr lang="en-US" sz="900" dirty="0">
+                <a:solidFill>
+                  <a:schemeClr val="tx1"/>
+                </a:solidFill>
+              </a:rPr>
+              <a:t>Employee addEmployee(Employee employee) {</a:t>
+            </a:r>
+          </a:p>
+          <a:p>
+            <a:r>
+              <a:rPr lang="en-US" sz="900" dirty="0" smtClean="0">
+                <a:solidFill>
+                  <a:schemeClr val="tx1"/>
+                </a:solidFill>
+              </a:rPr>
+              <a:t>}</a:t>
+            </a:r>
+            <a:endParaRPr lang="en-US" sz="900" dirty="0">
+              <a:solidFill>
+                <a:schemeClr val="tx1"/>
+              </a:solidFill>
+            </a:endParaRPr>
+          </a:p>
+        </p:txBody>
+      </p:sp>
+      <p:sp>
+        <p:nvSpPr>
+          <p:cNvPr id="24" name="Rectangle: Rounded Corners 14">
+            <a:extLst>
+              <a:ext uri="{FF2B5EF4-FFF2-40B4-BE49-F238E27FC236}">
+                <a16:creationId xmlns:a16="http://schemas.microsoft.com/office/drawing/2014/main" xmlns="" id="{E25DC19F-6B3A-4545-BDB8-13C5481B9137}"/>
+              </a:ext>
+            </a:extLst>
+          </p:cNvPr>
+          <p:cNvSpPr/>
+          <p:nvPr/>
+        </p:nvSpPr>
+        <p:spPr>
+          <a:xfrm>
+            <a:off x="1123407" y="1295834"/>
+            <a:ext cx="1202410" cy="212228"/>
+          </a:xfrm>
+          <a:prstGeom prst="roundRect">
+            <a:avLst/>
+          </a:prstGeom>
+          <a:solidFill>
+            <a:srgbClr val="FFC000"/>
+          </a:solidFill>
+        </p:spPr>
+        <p:style>
+          <a:lnRef idx="2">
+            <a:schemeClr val="accent1">
+              <a:shade val="50000"/>
+            </a:schemeClr>
+          </a:lnRef>
+          <a:fillRef idx="1">
+            <a:schemeClr val="accent1"/>
+          </a:fillRef>
+          <a:effectRef idx="0">
+            <a:schemeClr val="accent1"/>
+          </a:effectRef>
+          <a:fontRef idx="minor">
+            <a:schemeClr val="lt1"/>
+          </a:fontRef>
+        </p:style>
+        <p:txBody>
+          <a:bodyPr rtlCol="0" anchor="ctr"/>
+          <a:lstStyle/>
+          <a:p>
+            <a:pPr algn="ctr"/>
+            <a:r>
+              <a:rPr lang="en-US" sz="900" dirty="0" smtClean="0"/>
+              <a:t>Begin Transaction T1</a:t>
+            </a:r>
+            <a:endParaRPr lang="en-US" sz="900" dirty="0"/>
+          </a:p>
+        </p:txBody>
+      </p:sp>
+      <p:sp>
+        <p:nvSpPr>
+          <p:cNvPr id="6" name="Oval 5"/>
+          <p:cNvSpPr/>
+          <p:nvPr/>
+        </p:nvSpPr>
+        <p:spPr>
+          <a:xfrm>
+            <a:off x="905691" y="568641"/>
+            <a:ext cx="3483428" cy="2313896"/>
+          </a:xfrm>
+          <a:prstGeom prst="ellipse">
+            <a:avLst/>
+          </a:prstGeom>
+          <a:noFill/>
+        </p:spPr>
+        <p:style>
+          <a:lnRef idx="2">
+            <a:schemeClr val="accent1">
+              <a:shade val="50000"/>
+            </a:schemeClr>
+          </a:lnRef>
+          <a:fillRef idx="1">
+            <a:schemeClr val="accent1"/>
+          </a:fillRef>
+          <a:effectRef idx="0">
+            <a:schemeClr val="accent1"/>
+          </a:effectRef>
+          <a:fontRef idx="minor">
+            <a:schemeClr val="lt1"/>
+          </a:fontRef>
+        </p:style>
+        <p:txBody>
+          <a:bodyPr rtlCol="0" anchor="ctr"/>
+          <a:lstStyle/>
+          <a:p>
+            <a:pPr algn="ctr"/>
+            <a:endParaRPr lang="en-US"/>
+          </a:p>
+        </p:txBody>
+      </p:sp>
+      <p:pic>
+        <p:nvPicPr>
+          <p:cNvPr id="26" name="Picture 25"/>
+          <p:cNvPicPr>
+            <a:picLocks noChangeAspect="1"/>
+          </p:cNvPicPr>
+          <p:nvPr/>
+        </p:nvPicPr>
+        <p:blipFill>
+          <a:blip r:embed="rId3"/>
+          <a:stretch>
+            <a:fillRect/>
+          </a:stretch>
+        </p:blipFill>
+        <p:spPr>
+          <a:xfrm>
+            <a:off x="603069" y="3295062"/>
+            <a:ext cx="9296400" cy="5219700"/>
+          </a:xfrm>
+          <a:prstGeom prst="rect">
+            <a:avLst/>
+          </a:prstGeom>
+        </p:spPr>
+      </p:pic>
+      <p:sp>
+        <p:nvSpPr>
+          <p:cNvPr id="27" name="Rectangle: Rounded Corners 14">
+            <a:extLst>
+              <a:ext uri="{FF2B5EF4-FFF2-40B4-BE49-F238E27FC236}">
+                <a16:creationId xmlns:a16="http://schemas.microsoft.com/office/drawing/2014/main" xmlns="" id="{E25DC19F-6B3A-4545-BDB8-13C5481B9137}"/>
+              </a:ext>
+            </a:extLst>
+          </p:cNvPr>
+          <p:cNvSpPr/>
+          <p:nvPr/>
+        </p:nvSpPr>
+        <p:spPr>
+          <a:xfrm>
+            <a:off x="1123407" y="2026614"/>
+            <a:ext cx="1202410" cy="212228"/>
+          </a:xfrm>
+          <a:prstGeom prst="roundRect">
+            <a:avLst/>
+          </a:prstGeom>
+          <a:solidFill>
+            <a:srgbClr val="FFC000"/>
+          </a:solidFill>
+        </p:spPr>
+        <p:style>
+          <a:lnRef idx="2">
+            <a:schemeClr val="accent1">
+              <a:shade val="50000"/>
+            </a:schemeClr>
+          </a:lnRef>
+          <a:fillRef idx="1">
+            <a:schemeClr val="accent1"/>
+          </a:fillRef>
+          <a:effectRef idx="0">
+            <a:schemeClr val="accent1"/>
+          </a:effectRef>
+          <a:fontRef idx="minor">
+            <a:schemeClr val="lt1"/>
+          </a:fontRef>
+        </p:style>
+        <p:txBody>
+          <a:bodyPr rtlCol="0" anchor="ctr"/>
+          <a:lstStyle/>
+          <a:p>
+            <a:pPr algn="ctr"/>
+            <a:r>
+              <a:rPr lang="en-US" sz="900" dirty="0" smtClean="0"/>
+              <a:t>End Transaction T1</a:t>
+            </a:r>
+            <a:endParaRPr lang="en-US" sz="900" dirty="0"/>
+          </a:p>
+        </p:txBody>
+      </p:sp>
+      <p:sp>
+        <p:nvSpPr>
+          <p:cNvPr id="28" name="TextBox 27">
+            <a:extLst>
+              <a:ext uri="{FF2B5EF4-FFF2-40B4-BE49-F238E27FC236}">
+                <a16:creationId xmlns:a16="http://schemas.microsoft.com/office/drawing/2014/main" xmlns="" id="{452BE8F3-0295-4B15-80B4-B2026225BC92}"/>
+              </a:ext>
+            </a:extLst>
+          </p:cNvPr>
+          <p:cNvSpPr txBox="1"/>
+          <p:nvPr/>
+        </p:nvSpPr>
+        <p:spPr>
+          <a:xfrm>
+            <a:off x="6636520" y="587948"/>
+            <a:ext cx="1914038" cy="707886"/>
+          </a:xfrm>
+          <a:prstGeom prst="rect">
+            <a:avLst/>
+          </a:prstGeom>
+          <a:noFill/>
+        </p:spPr>
+        <p:txBody>
+          <a:bodyPr wrap="square">
+            <a:spAutoFit/>
+          </a:bodyPr>
+          <a:lstStyle/>
+          <a:p>
+            <a:pPr algn="ctr"/>
+            <a:r>
+              <a:rPr lang="en-US" sz="2000" dirty="0" smtClean="0">
+                <a:solidFill>
+                  <a:srgbClr val="002060"/>
+                </a:solidFill>
+              </a:rPr>
+              <a:t>Executed in </a:t>
+            </a:r>
+          </a:p>
+          <a:p>
+            <a:pPr algn="ctr"/>
+            <a:r>
+              <a:rPr lang="en-US" sz="2000" dirty="0" smtClean="0">
+                <a:solidFill>
+                  <a:srgbClr val="002060"/>
+                </a:solidFill>
+              </a:rPr>
+              <a:t>Transaction T1</a:t>
+            </a:r>
+            <a:endParaRPr lang="en-US" sz="2000" dirty="0"/>
+          </a:p>
+        </p:txBody>
+      </p:sp>
+      <p:sp>
+        <p:nvSpPr>
+          <p:cNvPr id="29" name="Rectangle: Rounded Corners 11">
+            <a:extLst>
+              <a:ext uri="{FF2B5EF4-FFF2-40B4-BE49-F238E27FC236}">
+                <a16:creationId xmlns:a16="http://schemas.microsoft.com/office/drawing/2014/main" xmlns="" id="{5A1BEE6C-84E1-4224-B447-1AC8A888AAC0}"/>
+              </a:ext>
+            </a:extLst>
+          </p:cNvPr>
+          <p:cNvSpPr/>
+          <p:nvPr/>
+        </p:nvSpPr>
+        <p:spPr>
+          <a:xfrm>
+            <a:off x="6160643" y="1503040"/>
+            <a:ext cx="2909334" cy="519987"/>
+          </a:xfrm>
+          <a:prstGeom prst="roundRect">
+            <a:avLst/>
+          </a:prstGeom>
+          <a:noFill/>
+        </p:spPr>
+        <p:style>
+          <a:lnRef idx="2">
+            <a:schemeClr val="accent1">
+              <a:shade val="50000"/>
+            </a:schemeClr>
+          </a:lnRef>
+          <a:fillRef idx="1">
+            <a:schemeClr val="accent1"/>
+          </a:fillRef>
+          <a:effectRef idx="0">
+            <a:schemeClr val="accent1"/>
+          </a:effectRef>
+          <a:fontRef idx="minor">
+            <a:schemeClr val="lt1"/>
+          </a:fontRef>
+        </p:style>
+        <p:txBody>
+          <a:bodyPr rtlCol="0" anchor="ctr"/>
+          <a:lstStyle/>
+          <a:p>
+            <a:r>
+              <a:rPr lang="en-US" sz="900" b="1" dirty="0" smtClean="0">
+                <a:solidFill>
+                  <a:schemeClr val="bg2">
+                    <a:lumMod val="75000"/>
+                  </a:schemeClr>
+                </a:solidFill>
+              </a:rPr>
+              <a:t>@Transactional</a:t>
+            </a:r>
+            <a:r>
+              <a:rPr lang="en-US" sz="900" dirty="0" smtClean="0">
+                <a:solidFill>
+                  <a:schemeClr val="tx1"/>
+                </a:solidFill>
+              </a:rPr>
+              <a:t>(propagation </a:t>
+            </a:r>
+            <a:r>
+              <a:rPr lang="en-US" sz="900" dirty="0">
+                <a:solidFill>
+                  <a:schemeClr val="tx1"/>
+                </a:solidFill>
+              </a:rPr>
+              <a:t>= Propagation.</a:t>
+            </a:r>
+            <a:r>
+              <a:rPr lang="en-US" sz="900" b="1" i="1" dirty="0">
+                <a:solidFill>
+                  <a:srgbClr val="0000FF"/>
+                </a:solidFill>
+              </a:rPr>
+              <a:t>REQUIRED</a:t>
+            </a:r>
+            <a:r>
+              <a:rPr lang="en-US" sz="900" i="1" dirty="0" smtClean="0">
+                <a:solidFill>
+                  <a:schemeClr val="tx1"/>
+                </a:solidFill>
+              </a:rPr>
+              <a:t>)</a:t>
+            </a:r>
+          </a:p>
+          <a:p>
+            <a:r>
+              <a:rPr lang="en-US" sz="900" b="1" dirty="0" smtClean="0">
+                <a:solidFill>
+                  <a:srgbClr val="FF0000"/>
+                </a:solidFill>
+              </a:rPr>
+              <a:t>public</a:t>
+            </a:r>
+            <a:r>
+              <a:rPr lang="en-US" sz="900" dirty="0" smtClean="0">
+                <a:solidFill>
+                  <a:srgbClr val="FF0000"/>
+                </a:solidFill>
+              </a:rPr>
+              <a:t> </a:t>
+            </a:r>
+            <a:r>
+              <a:rPr lang="en-US" sz="900" dirty="0">
+                <a:solidFill>
+                  <a:schemeClr val="tx1"/>
+                </a:solidFill>
+              </a:rPr>
+              <a:t>Employee addEmployee(Employee employee) {</a:t>
+            </a:r>
+          </a:p>
+          <a:p>
+            <a:r>
+              <a:rPr lang="en-US" sz="900" dirty="0" smtClean="0">
+                <a:solidFill>
+                  <a:schemeClr val="tx1"/>
+                </a:solidFill>
+              </a:rPr>
+              <a:t>}</a:t>
+            </a:r>
+            <a:endParaRPr lang="en-US" sz="900" dirty="0">
+              <a:solidFill>
+                <a:schemeClr val="tx1"/>
+              </a:solidFill>
+            </a:endParaRPr>
+          </a:p>
+        </p:txBody>
+      </p:sp>
+      <p:sp>
+        <p:nvSpPr>
+          <p:cNvPr id="30" name="Rectangle: Rounded Corners 14">
+            <a:extLst>
+              <a:ext uri="{FF2B5EF4-FFF2-40B4-BE49-F238E27FC236}">
+                <a16:creationId xmlns:a16="http://schemas.microsoft.com/office/drawing/2014/main" xmlns="" id="{E25DC19F-6B3A-4545-BDB8-13C5481B9137}"/>
+              </a:ext>
+            </a:extLst>
+          </p:cNvPr>
+          <p:cNvSpPr/>
+          <p:nvPr/>
+        </p:nvSpPr>
+        <p:spPr>
+          <a:xfrm>
+            <a:off x="5952310" y="1295834"/>
+            <a:ext cx="1202410" cy="212228"/>
+          </a:xfrm>
+          <a:prstGeom prst="roundRect">
+            <a:avLst/>
+          </a:prstGeom>
+          <a:solidFill>
+            <a:srgbClr val="FFC000"/>
+          </a:solidFill>
+        </p:spPr>
+        <p:style>
+          <a:lnRef idx="2">
+            <a:schemeClr val="accent1">
+              <a:shade val="50000"/>
+            </a:schemeClr>
+          </a:lnRef>
+          <a:fillRef idx="1">
+            <a:schemeClr val="accent1"/>
+          </a:fillRef>
+          <a:effectRef idx="0">
+            <a:schemeClr val="accent1"/>
+          </a:effectRef>
+          <a:fontRef idx="minor">
+            <a:schemeClr val="lt1"/>
+          </a:fontRef>
+        </p:style>
+        <p:txBody>
+          <a:bodyPr rtlCol="0" anchor="ctr"/>
+          <a:lstStyle/>
+          <a:p>
+            <a:pPr algn="ctr"/>
+            <a:r>
+              <a:rPr lang="en-US" sz="900" dirty="0" smtClean="0"/>
+              <a:t>Begin Transaction T1</a:t>
+            </a:r>
+            <a:endParaRPr lang="en-US" sz="900" dirty="0"/>
+          </a:p>
+        </p:txBody>
+      </p:sp>
+      <p:sp>
+        <p:nvSpPr>
+          <p:cNvPr id="31" name="Oval 30"/>
+          <p:cNvSpPr/>
+          <p:nvPr/>
+        </p:nvSpPr>
+        <p:spPr>
+          <a:xfrm>
+            <a:off x="5734594" y="568641"/>
+            <a:ext cx="3483428" cy="2313896"/>
+          </a:xfrm>
+          <a:prstGeom prst="ellipse">
+            <a:avLst/>
+          </a:prstGeom>
+          <a:noFill/>
+        </p:spPr>
+        <p:style>
+          <a:lnRef idx="2">
+            <a:schemeClr val="accent1">
+              <a:shade val="50000"/>
+            </a:schemeClr>
+          </a:lnRef>
+          <a:fillRef idx="1">
+            <a:schemeClr val="accent1"/>
+          </a:fillRef>
+          <a:effectRef idx="0">
+            <a:schemeClr val="accent1"/>
+          </a:effectRef>
+          <a:fontRef idx="minor">
+            <a:schemeClr val="lt1"/>
+          </a:fontRef>
+        </p:style>
+        <p:txBody>
+          <a:bodyPr rtlCol="0" anchor="ctr"/>
+          <a:lstStyle/>
+          <a:p>
+            <a:pPr algn="ctr"/>
+            <a:endParaRPr lang="en-US"/>
+          </a:p>
+        </p:txBody>
+      </p:sp>
+      <p:sp>
+        <p:nvSpPr>
+          <p:cNvPr id="32" name="Rectangle: Rounded Corners 14">
+            <a:extLst>
+              <a:ext uri="{FF2B5EF4-FFF2-40B4-BE49-F238E27FC236}">
+                <a16:creationId xmlns:a16="http://schemas.microsoft.com/office/drawing/2014/main" xmlns="" id="{E25DC19F-6B3A-4545-BDB8-13C5481B9137}"/>
+              </a:ext>
+            </a:extLst>
+          </p:cNvPr>
+          <p:cNvSpPr/>
+          <p:nvPr/>
+        </p:nvSpPr>
+        <p:spPr>
+          <a:xfrm>
+            <a:off x="5952310" y="2026614"/>
+            <a:ext cx="1202410" cy="212228"/>
+          </a:xfrm>
+          <a:prstGeom prst="roundRect">
+            <a:avLst/>
+          </a:prstGeom>
+          <a:solidFill>
+            <a:srgbClr val="FFC000"/>
+          </a:solidFill>
+        </p:spPr>
+        <p:style>
+          <a:lnRef idx="2">
+            <a:schemeClr val="accent1">
+              <a:shade val="50000"/>
+            </a:schemeClr>
+          </a:lnRef>
+          <a:fillRef idx="1">
+            <a:schemeClr val="accent1"/>
+          </a:fillRef>
+          <a:effectRef idx="0">
+            <a:schemeClr val="accent1"/>
+          </a:effectRef>
+          <a:fontRef idx="minor">
+            <a:schemeClr val="lt1"/>
+          </a:fontRef>
+        </p:style>
+        <p:txBody>
+          <a:bodyPr rtlCol="0" anchor="ctr"/>
+          <a:lstStyle/>
+          <a:p>
+            <a:pPr algn="ctr"/>
+            <a:r>
+              <a:rPr lang="en-US" sz="900" dirty="0" smtClean="0"/>
+              <a:t>End Transaction T1</a:t>
+            </a:r>
+            <a:endParaRPr lang="en-US" sz="900" dirty="0"/>
+          </a:p>
+        </p:txBody>
+      </p:sp>
+    </p:spTree>
+    <p:extLst>
+      <p:ext uri="{BB962C8B-B14F-4D97-AF65-F5344CB8AC3E}">
+        <p14:creationId xmlns:p14="http://schemas.microsoft.com/office/powerpoint/2010/main" val="1526942975"/>
+      </p:ext>
+    </p:extLst>
+  </p:cSld>
+  <p:clrMapOvr>
+    <a:masterClrMapping/>
+  </p:clrMapOvr>
+  <p:timing>
+    <p:tnLst>
+      <p:par>
+        <p:cTn id="1" dur="indefinite" restart="never" nodeType="tmRoot"/>
+      </p:par>
+    </p:tnLst>
+  </p:timing>
+</p:sld>
+</file>
+
+<file path=ppt/slides/slide3.xml><?xml version="1.0" encoding="utf-8"?>
+<p:sld xmlns:a="http://schemas.openxmlformats.org/drawingml/2006/main" xmlns:r="http://schemas.openxmlformats.org/officeDocument/2006/relationships" xmlns:p="http://schemas.openxmlformats.org/presentationml/2006/main" showMasterSp="0">
+  <p:cSld>
+    <p:bg>
+      <p:bgPr>
+        <a:solidFill>
+          <a:schemeClr val="bg1"/>
+        </a:solidFill>
+        <a:effectLst/>
+      </p:bgPr>
+    </p:bg>
+    <p:spTree>
+      <p:nvGrpSpPr>
+        <p:cNvPr id="1" name=""/>
+        <p:cNvGrpSpPr/>
+        <p:nvPr/>
+      </p:nvGrpSpPr>
+      <p:grpSpPr>
+        <a:xfrm>
+          <a:off x="0" y="0"/>
+          <a:ext cx="0" cy="0"/>
+          <a:chOff x="0" y="0"/>
+          <a:chExt cx="0" cy="0"/>
+        </a:xfrm>
+      </p:grpSpPr>
+      <p:sp>
+        <p:nvSpPr>
+          <p:cNvPr id="23" name="TextBox 22">
+            <a:extLst>
+              <a:ext uri="{FF2B5EF4-FFF2-40B4-BE49-F238E27FC236}">
+                <a16:creationId xmlns:a16="http://schemas.microsoft.com/office/drawing/2014/main" xmlns="" id="{452BE8F3-0295-4B15-80B4-B2026225BC92}"/>
+              </a:ext>
+            </a:extLst>
+          </p:cNvPr>
+          <p:cNvSpPr txBox="1"/>
+          <p:nvPr/>
+        </p:nvSpPr>
+        <p:spPr>
+          <a:xfrm>
+            <a:off x="2882517" y="455561"/>
+            <a:ext cx="1914038" cy="707886"/>
+          </a:xfrm>
+          <a:prstGeom prst="rect">
+            <a:avLst/>
+          </a:prstGeom>
+          <a:noFill/>
+        </p:spPr>
+        <p:txBody>
+          <a:bodyPr wrap="square">
+            <a:spAutoFit/>
+          </a:bodyPr>
+          <a:lstStyle/>
+          <a:p>
+            <a:pPr algn="ctr"/>
+            <a:r>
+              <a:rPr lang="en-US" sz="2000" dirty="0" smtClean="0">
+                <a:solidFill>
+                  <a:srgbClr val="002060"/>
+                </a:solidFill>
+              </a:rPr>
+              <a:t>Executed in </a:t>
+            </a:r>
+          </a:p>
+          <a:p>
+            <a:pPr algn="ctr"/>
+            <a:r>
+              <a:rPr lang="en-US" sz="2000" dirty="0" smtClean="0">
+                <a:solidFill>
+                  <a:srgbClr val="002060"/>
+                </a:solidFill>
+              </a:rPr>
+              <a:t>Transaction T1</a:t>
+            </a:r>
+            <a:endParaRPr lang="en-US" sz="2000" dirty="0"/>
+          </a:p>
+        </p:txBody>
+      </p:sp>
+      <p:sp>
+        <p:nvSpPr>
+          <p:cNvPr id="24" name="Rectangle: Rounded Corners 14">
+            <a:extLst>
+              <a:ext uri="{FF2B5EF4-FFF2-40B4-BE49-F238E27FC236}">
+                <a16:creationId xmlns:a16="http://schemas.microsoft.com/office/drawing/2014/main" xmlns="" id="{E25DC19F-6B3A-4545-BDB8-13C5481B9137}"/>
+              </a:ext>
+            </a:extLst>
+          </p:cNvPr>
+          <p:cNvSpPr/>
+          <p:nvPr/>
+        </p:nvSpPr>
+        <p:spPr>
+          <a:xfrm>
+            <a:off x="2281647" y="1156497"/>
+            <a:ext cx="1202410" cy="212228"/>
+          </a:xfrm>
+          <a:prstGeom prst="roundRect">
+            <a:avLst/>
+          </a:prstGeom>
+          <a:solidFill>
+            <a:srgbClr val="FFC000"/>
+          </a:solidFill>
+        </p:spPr>
+        <p:style>
+          <a:lnRef idx="2">
+            <a:schemeClr val="accent1">
+              <a:shade val="50000"/>
+            </a:schemeClr>
+          </a:lnRef>
+          <a:fillRef idx="1">
+            <a:schemeClr val="accent1"/>
+          </a:fillRef>
+          <a:effectRef idx="0">
+            <a:schemeClr val="accent1"/>
+          </a:effectRef>
+          <a:fontRef idx="minor">
+            <a:schemeClr val="lt1"/>
+          </a:fontRef>
+        </p:style>
+        <p:txBody>
+          <a:bodyPr rtlCol="0" anchor="ctr"/>
+          <a:lstStyle/>
+          <a:p>
+            <a:pPr algn="ctr"/>
+            <a:r>
+              <a:rPr lang="en-US" sz="900" dirty="0" smtClean="0"/>
+              <a:t>Begin Transaction T1</a:t>
+            </a:r>
+            <a:endParaRPr lang="en-US" sz="900" dirty="0"/>
+          </a:p>
+        </p:txBody>
+      </p:sp>
+      <p:sp>
+        <p:nvSpPr>
+          <p:cNvPr id="27" name="Rectangle: Rounded Corners 14">
+            <a:extLst>
+              <a:ext uri="{FF2B5EF4-FFF2-40B4-BE49-F238E27FC236}">
+                <a16:creationId xmlns:a16="http://schemas.microsoft.com/office/drawing/2014/main" xmlns="" id="{E25DC19F-6B3A-4545-BDB8-13C5481B9137}"/>
+              </a:ext>
+            </a:extLst>
+          </p:cNvPr>
+          <p:cNvSpPr/>
+          <p:nvPr/>
+        </p:nvSpPr>
+        <p:spPr>
+          <a:xfrm>
+            <a:off x="2281647" y="2172269"/>
+            <a:ext cx="1202410" cy="212228"/>
+          </a:xfrm>
+          <a:prstGeom prst="roundRect">
+            <a:avLst/>
+          </a:prstGeom>
+          <a:solidFill>
+            <a:srgbClr val="FFC000"/>
+          </a:solidFill>
+        </p:spPr>
+        <p:style>
+          <a:lnRef idx="2">
+            <a:schemeClr val="accent1">
+              <a:shade val="50000"/>
+            </a:schemeClr>
+          </a:lnRef>
+          <a:fillRef idx="1">
+            <a:schemeClr val="accent1"/>
+          </a:fillRef>
+          <a:effectRef idx="0">
+            <a:schemeClr val="accent1"/>
+          </a:effectRef>
+          <a:fontRef idx="minor">
+            <a:schemeClr val="lt1"/>
+          </a:fontRef>
+        </p:style>
+        <p:txBody>
+          <a:bodyPr rtlCol="0" anchor="ctr"/>
+          <a:lstStyle/>
+          <a:p>
+            <a:pPr algn="ctr"/>
+            <a:r>
+              <a:rPr lang="en-US" sz="900" dirty="0" smtClean="0"/>
+              <a:t>End Transaction T1</a:t>
+            </a:r>
+            <a:endParaRPr lang="en-US" sz="900" dirty="0"/>
+          </a:p>
+        </p:txBody>
+      </p:sp>
+      <p:sp>
+        <p:nvSpPr>
+          <p:cNvPr id="8" name="Rounded Rectangle 7"/>
+          <p:cNvSpPr/>
+          <p:nvPr/>
+        </p:nvSpPr>
+        <p:spPr>
+          <a:xfrm>
+            <a:off x="1976847" y="448611"/>
+            <a:ext cx="3666308" cy="2163961"/>
+          </a:xfrm>
+          <a:prstGeom prst="roundRect">
+            <a:avLst/>
+          </a:prstGeom>
+          <a:noFill/>
+        </p:spPr>
+        <p:style>
+          <a:lnRef idx="2">
+            <a:schemeClr val="accent1">
+              <a:shade val="50000"/>
+            </a:schemeClr>
+          </a:lnRef>
+          <a:fillRef idx="1">
+            <a:schemeClr val="accent1"/>
+          </a:fillRef>
+          <a:effectRef idx="0">
+            <a:schemeClr val="accent1"/>
+          </a:effectRef>
+          <a:fontRef idx="minor">
+            <a:schemeClr val="lt1"/>
+          </a:fontRef>
+        </p:style>
+        <p:txBody>
+          <a:bodyPr rtlCol="0" anchor="ctr"/>
+          <a:lstStyle/>
+          <a:p>
+            <a:pPr algn="ctr"/>
+            <a:endParaRPr lang="en-US"/>
+          </a:p>
+        </p:txBody>
+      </p:sp>
+      <p:cxnSp>
+        <p:nvCxnSpPr>
+          <p:cNvPr id="13" name="Straight Arrow Connector 12"/>
+          <p:cNvCxnSpPr/>
+          <p:nvPr/>
+        </p:nvCxnSpPr>
+        <p:spPr>
+          <a:xfrm>
+            <a:off x="2116184" y="1759132"/>
+            <a:ext cx="399923" cy="2583"/>
+          </a:xfrm>
+          <a:prstGeom prst="straightConnector1">
+            <a:avLst/>
+          </a:prstGeom>
+          <a:ln w="38100">
+            <a:tailEnd type="triangle"/>
+          </a:ln>
+        </p:spPr>
+        <p:style>
+          <a:lnRef idx="1">
+            <a:schemeClr val="accent1"/>
+          </a:lnRef>
+          <a:fillRef idx="0">
+            <a:schemeClr val="accent1"/>
+          </a:fillRef>
+          <a:effectRef idx="0">
+            <a:schemeClr val="accent1"/>
+          </a:effectRef>
+          <a:fontRef idx="minor">
+            <a:schemeClr val="tx1"/>
+          </a:fontRef>
+        </p:style>
+      </p:cxnSp>
+      <p:sp>
+        <p:nvSpPr>
+          <p:cNvPr id="36" name="TextBox 35">
+            <a:extLst>
+              <a:ext uri="{FF2B5EF4-FFF2-40B4-BE49-F238E27FC236}">
+                <a16:creationId xmlns:a16="http://schemas.microsoft.com/office/drawing/2014/main" xmlns="" id="{452BE8F3-0295-4B15-80B4-B2026225BC92}"/>
+              </a:ext>
+            </a:extLst>
+          </p:cNvPr>
+          <p:cNvSpPr txBox="1"/>
+          <p:nvPr/>
+        </p:nvSpPr>
+        <p:spPr>
+          <a:xfrm>
+            <a:off x="4638238" y="3405171"/>
+            <a:ext cx="1914038" cy="707886"/>
+          </a:xfrm>
+          <a:prstGeom prst="rect">
+            <a:avLst/>
+          </a:prstGeom>
+          <a:noFill/>
+        </p:spPr>
+        <p:txBody>
+          <a:bodyPr wrap="square">
+            <a:spAutoFit/>
+          </a:bodyPr>
+          <a:lstStyle/>
+          <a:p>
+            <a:pPr algn="ctr"/>
+            <a:r>
+              <a:rPr lang="en-US" sz="2000" dirty="0" smtClean="0">
+                <a:solidFill>
+                  <a:srgbClr val="002060"/>
+                </a:solidFill>
+              </a:rPr>
+              <a:t>Executed in </a:t>
+            </a:r>
+          </a:p>
+          <a:p>
+            <a:pPr algn="ctr"/>
+            <a:r>
+              <a:rPr lang="en-US" sz="2000" dirty="0" smtClean="0">
+                <a:solidFill>
+                  <a:srgbClr val="002060"/>
+                </a:solidFill>
+              </a:rPr>
+              <a:t>Transaction T1</a:t>
+            </a:r>
+            <a:endParaRPr lang="en-US" sz="2000" dirty="0"/>
+          </a:p>
+        </p:txBody>
+      </p:sp>
+      <p:sp>
+        <p:nvSpPr>
+          <p:cNvPr id="37" name="Rectangle: Rounded Corners 11">
+            <a:extLst>
+              <a:ext uri="{FF2B5EF4-FFF2-40B4-BE49-F238E27FC236}">
+                <a16:creationId xmlns:a16="http://schemas.microsoft.com/office/drawing/2014/main" xmlns="" id="{5A1BEE6C-84E1-4224-B447-1AC8A888AAC0}"/>
+              </a:ext>
+            </a:extLst>
+          </p:cNvPr>
+          <p:cNvSpPr/>
+          <p:nvPr/>
+        </p:nvSpPr>
+        <p:spPr>
+          <a:xfrm>
+            <a:off x="2516107" y="4320263"/>
+            <a:ext cx="2909334" cy="796023"/>
+          </a:xfrm>
+          <a:prstGeom prst="roundRect">
+            <a:avLst/>
+          </a:prstGeom>
+          <a:noFill/>
+        </p:spPr>
+        <p:style>
+          <a:lnRef idx="2">
+            <a:schemeClr val="accent1">
+              <a:shade val="50000"/>
+            </a:schemeClr>
+          </a:lnRef>
+          <a:fillRef idx="1">
+            <a:schemeClr val="accent1"/>
+          </a:fillRef>
+          <a:effectRef idx="0">
+            <a:schemeClr val="accent1"/>
+          </a:effectRef>
+          <a:fontRef idx="minor">
+            <a:schemeClr val="lt1"/>
+          </a:fontRef>
+        </p:style>
+        <p:txBody>
+          <a:bodyPr rtlCol="0" anchor="ctr"/>
+          <a:lstStyle/>
+          <a:p>
+            <a:pPr algn="ctr"/>
+            <a:r>
+              <a:rPr lang="en-US" sz="1100" b="1" dirty="0" smtClean="0">
+                <a:solidFill>
+                  <a:srgbClr val="7030A0"/>
+                </a:solidFill>
+              </a:rPr>
+              <a:t>OrganizationServiceImpl</a:t>
+            </a:r>
+          </a:p>
+          <a:p>
+            <a:r>
+              <a:rPr lang="en-US" sz="900" b="1" dirty="0" smtClean="0">
+                <a:solidFill>
+                  <a:schemeClr val="bg2">
+                    <a:lumMod val="75000"/>
+                  </a:schemeClr>
+                </a:solidFill>
+              </a:rPr>
+              <a:t>@Transactional</a:t>
+            </a:r>
+            <a:r>
+              <a:rPr lang="en-US" sz="900" dirty="0" smtClean="0">
+                <a:solidFill>
+                  <a:schemeClr val="tx1"/>
+                </a:solidFill>
+              </a:rPr>
+              <a:t>(propagation = Propagation.</a:t>
+            </a:r>
+            <a:r>
+              <a:rPr lang="en-US" sz="900" b="1" i="1" dirty="0" smtClean="0">
+                <a:solidFill>
+                  <a:srgbClr val="0000FF"/>
+                </a:solidFill>
+              </a:rPr>
+              <a:t>REQUIRED</a:t>
+            </a:r>
+            <a:r>
+              <a:rPr lang="en-US" sz="900" i="1" dirty="0" smtClean="0">
+                <a:solidFill>
+                  <a:schemeClr val="tx1"/>
+                </a:solidFill>
+              </a:rPr>
+              <a:t>)</a:t>
+            </a:r>
+          </a:p>
+          <a:p>
+            <a:r>
+              <a:rPr lang="en-US" sz="900" b="1" dirty="0">
+                <a:solidFill>
+                  <a:srgbClr val="FF0000"/>
+                </a:solidFill>
+              </a:rPr>
+              <a:t>public</a:t>
+            </a:r>
+            <a:r>
+              <a:rPr lang="en-US" sz="900" dirty="0">
+                <a:solidFill>
+                  <a:schemeClr val="tx1"/>
+                </a:solidFill>
+              </a:rPr>
+              <a:t> void </a:t>
+            </a:r>
+            <a:r>
+              <a:rPr lang="en-US" sz="900" b="1" dirty="0">
+                <a:solidFill>
+                  <a:srgbClr val="C00000"/>
+                </a:solidFill>
+              </a:rPr>
+              <a:t>joinOrganization</a:t>
+            </a:r>
+            <a:r>
+              <a:rPr lang="en-US" sz="900" dirty="0">
+                <a:solidFill>
+                  <a:schemeClr val="tx1"/>
+                </a:solidFill>
+              </a:rPr>
+              <a:t>() {</a:t>
+            </a:r>
+          </a:p>
+          <a:p>
+            <a:r>
+              <a:rPr lang="en-US" sz="900" dirty="0">
+                <a:solidFill>
+                  <a:schemeClr val="tx1"/>
+                </a:solidFill>
+              </a:rPr>
+              <a:t>}</a:t>
+            </a:r>
+            <a:endParaRPr lang="en-US" sz="900" dirty="0">
+              <a:solidFill>
+                <a:schemeClr val="tx1"/>
+              </a:solidFill>
+            </a:endParaRPr>
+          </a:p>
+        </p:txBody>
+      </p:sp>
+      <p:sp>
+        <p:nvSpPr>
+          <p:cNvPr id="38" name="Rectangle: Rounded Corners 14">
+            <a:extLst>
+              <a:ext uri="{FF2B5EF4-FFF2-40B4-BE49-F238E27FC236}">
+                <a16:creationId xmlns:a16="http://schemas.microsoft.com/office/drawing/2014/main" xmlns="" id="{E25DC19F-6B3A-4545-BDB8-13C5481B9137}"/>
+              </a:ext>
+            </a:extLst>
+          </p:cNvPr>
+          <p:cNvSpPr/>
+          <p:nvPr/>
+        </p:nvSpPr>
+        <p:spPr>
+          <a:xfrm>
+            <a:off x="2281647" y="4113057"/>
+            <a:ext cx="1202410" cy="212228"/>
+          </a:xfrm>
+          <a:prstGeom prst="roundRect">
+            <a:avLst/>
+          </a:prstGeom>
+          <a:solidFill>
+            <a:srgbClr val="FFC000"/>
+          </a:solidFill>
+        </p:spPr>
+        <p:style>
+          <a:lnRef idx="2">
+            <a:schemeClr val="accent1">
+              <a:shade val="50000"/>
+            </a:schemeClr>
+          </a:lnRef>
+          <a:fillRef idx="1">
+            <a:schemeClr val="accent1"/>
+          </a:fillRef>
+          <a:effectRef idx="0">
+            <a:schemeClr val="accent1"/>
+          </a:effectRef>
+          <a:fontRef idx="minor">
+            <a:schemeClr val="lt1"/>
+          </a:fontRef>
+        </p:style>
+        <p:txBody>
+          <a:bodyPr rtlCol="0" anchor="ctr"/>
+          <a:lstStyle/>
+          <a:p>
+            <a:pPr algn="ctr"/>
+            <a:r>
+              <a:rPr lang="en-US" sz="900" dirty="0" smtClean="0"/>
+              <a:t>Begin Transaction T1</a:t>
+            </a:r>
+            <a:endParaRPr lang="en-US" sz="900" dirty="0"/>
+          </a:p>
+        </p:txBody>
+      </p:sp>
+      <p:sp>
+        <p:nvSpPr>
+          <p:cNvPr id="39" name="Rectangle: Rounded Corners 14">
+            <a:extLst>
+              <a:ext uri="{FF2B5EF4-FFF2-40B4-BE49-F238E27FC236}">
+                <a16:creationId xmlns:a16="http://schemas.microsoft.com/office/drawing/2014/main" xmlns="" id="{E25DC19F-6B3A-4545-BDB8-13C5481B9137}"/>
+              </a:ext>
+            </a:extLst>
+          </p:cNvPr>
+          <p:cNvSpPr/>
+          <p:nvPr/>
+        </p:nvSpPr>
+        <p:spPr>
+          <a:xfrm>
+            <a:off x="2281647" y="5128829"/>
+            <a:ext cx="1202410" cy="212228"/>
+          </a:xfrm>
+          <a:prstGeom prst="roundRect">
+            <a:avLst/>
+          </a:prstGeom>
+          <a:solidFill>
+            <a:srgbClr val="FFC000"/>
+          </a:solidFill>
+        </p:spPr>
+        <p:style>
+          <a:lnRef idx="2">
+            <a:schemeClr val="accent1">
+              <a:shade val="50000"/>
+            </a:schemeClr>
+          </a:lnRef>
+          <a:fillRef idx="1">
+            <a:schemeClr val="accent1"/>
+          </a:fillRef>
+          <a:effectRef idx="0">
+            <a:schemeClr val="accent1"/>
+          </a:effectRef>
+          <a:fontRef idx="minor">
+            <a:schemeClr val="lt1"/>
+          </a:fontRef>
+        </p:style>
+        <p:txBody>
+          <a:bodyPr rtlCol="0" anchor="ctr"/>
+          <a:lstStyle/>
+          <a:p>
+            <a:pPr algn="ctr"/>
+            <a:r>
+              <a:rPr lang="en-US" sz="900" dirty="0" smtClean="0"/>
+              <a:t>End Transaction T1</a:t>
+            </a:r>
+            <a:endParaRPr lang="en-US" sz="900" dirty="0"/>
+          </a:p>
+        </p:txBody>
+      </p:sp>
+      <p:sp>
+        <p:nvSpPr>
+          <p:cNvPr id="40" name="Rounded Rectangle 39"/>
+          <p:cNvSpPr/>
+          <p:nvPr/>
+        </p:nvSpPr>
+        <p:spPr>
+          <a:xfrm>
+            <a:off x="1976846" y="3405171"/>
+            <a:ext cx="7123611" cy="2163961"/>
+          </a:xfrm>
+          <a:prstGeom prst="roundRect">
+            <a:avLst/>
+          </a:prstGeom>
+          <a:noFill/>
+        </p:spPr>
+        <p:style>
+          <a:lnRef idx="2">
+            <a:schemeClr val="accent1">
+              <a:shade val="50000"/>
+            </a:schemeClr>
+          </a:lnRef>
+          <a:fillRef idx="1">
+            <a:schemeClr val="accent1"/>
+          </a:fillRef>
+          <a:effectRef idx="0">
+            <a:schemeClr val="accent1"/>
+          </a:effectRef>
+          <a:fontRef idx="minor">
+            <a:schemeClr val="lt1"/>
+          </a:fontRef>
+        </p:style>
+        <p:txBody>
+          <a:bodyPr rtlCol="0" anchor="ctr"/>
+          <a:lstStyle/>
+          <a:p>
+            <a:pPr algn="ctr"/>
+            <a:endParaRPr lang="en-US"/>
+          </a:p>
+        </p:txBody>
+      </p:sp>
+      <p:sp>
+        <p:nvSpPr>
+          <p:cNvPr id="41" name="Rectangle: Rounded Corners 11">
+            <a:extLst>
+              <a:ext uri="{FF2B5EF4-FFF2-40B4-BE49-F238E27FC236}">
+                <a16:creationId xmlns:a16="http://schemas.microsoft.com/office/drawing/2014/main" xmlns="" id="{5A1BEE6C-84E1-4224-B447-1AC8A888AAC0}"/>
+              </a:ext>
+            </a:extLst>
+          </p:cNvPr>
+          <p:cNvSpPr/>
+          <p:nvPr/>
+        </p:nvSpPr>
+        <p:spPr>
+          <a:xfrm>
+            <a:off x="5973409" y="4332806"/>
+            <a:ext cx="2909334" cy="796023"/>
+          </a:xfrm>
+          <a:prstGeom prst="roundRect">
+            <a:avLst/>
+          </a:prstGeom>
+          <a:noFill/>
+        </p:spPr>
+        <p:style>
+          <a:lnRef idx="2">
+            <a:schemeClr val="accent1">
+              <a:shade val="50000"/>
+            </a:schemeClr>
+          </a:lnRef>
+          <a:fillRef idx="1">
+            <a:schemeClr val="accent1"/>
+          </a:fillRef>
+          <a:effectRef idx="0">
+            <a:schemeClr val="accent1"/>
+          </a:effectRef>
+          <a:fontRef idx="minor">
+            <a:schemeClr val="lt1"/>
+          </a:fontRef>
+        </p:style>
+        <p:txBody>
+          <a:bodyPr rtlCol="0" anchor="ctr"/>
+          <a:lstStyle/>
+          <a:p>
+            <a:pPr algn="ctr"/>
+            <a:r>
+              <a:rPr lang="en-US" sz="1100" b="1" dirty="0" smtClean="0">
+                <a:solidFill>
+                  <a:srgbClr val="7030A0"/>
+                </a:solidFill>
+              </a:rPr>
+              <a:t>EmployeeServiceImpl</a:t>
+            </a:r>
+          </a:p>
+          <a:p>
+            <a:r>
+              <a:rPr lang="en-US" sz="900" b="1" dirty="0" smtClean="0">
+                <a:solidFill>
+                  <a:schemeClr val="bg2">
+                    <a:lumMod val="75000"/>
+                  </a:schemeClr>
+                </a:solidFill>
+              </a:rPr>
+              <a:t>@Transactional</a:t>
+            </a:r>
+            <a:r>
+              <a:rPr lang="en-US" sz="900" dirty="0" smtClean="0">
+                <a:solidFill>
+                  <a:schemeClr val="tx1"/>
+                </a:solidFill>
+              </a:rPr>
+              <a:t>(propagation </a:t>
+            </a:r>
+            <a:r>
+              <a:rPr lang="en-US" sz="900" dirty="0">
+                <a:solidFill>
+                  <a:schemeClr val="tx1"/>
+                </a:solidFill>
+              </a:rPr>
+              <a:t>= Propagation.</a:t>
+            </a:r>
+            <a:r>
+              <a:rPr lang="en-US" sz="900" b="1" i="1" dirty="0">
+                <a:solidFill>
+                  <a:srgbClr val="0000FF"/>
+                </a:solidFill>
+              </a:rPr>
+              <a:t>REQUIRED</a:t>
+            </a:r>
+            <a:r>
+              <a:rPr lang="en-US" sz="900" i="1" dirty="0" smtClean="0">
+                <a:solidFill>
+                  <a:schemeClr val="tx1"/>
+                </a:solidFill>
+              </a:rPr>
+              <a:t>)</a:t>
+            </a:r>
+          </a:p>
+          <a:p>
+            <a:r>
+              <a:rPr lang="en-US" sz="900" b="1" dirty="0" smtClean="0">
+                <a:solidFill>
+                  <a:srgbClr val="FF0000"/>
+                </a:solidFill>
+              </a:rPr>
+              <a:t>public</a:t>
+            </a:r>
+            <a:r>
+              <a:rPr lang="en-US" sz="900" dirty="0" smtClean="0">
+                <a:solidFill>
+                  <a:srgbClr val="FF0000"/>
+                </a:solidFill>
+              </a:rPr>
+              <a:t> </a:t>
+            </a:r>
+            <a:r>
+              <a:rPr lang="en-US" sz="900" dirty="0">
+                <a:solidFill>
+                  <a:schemeClr val="tx1"/>
+                </a:solidFill>
+              </a:rPr>
+              <a:t>Employee </a:t>
+            </a:r>
+            <a:r>
+              <a:rPr lang="en-US" sz="900" b="1" dirty="0" smtClean="0">
+                <a:solidFill>
+                  <a:srgbClr val="C00000"/>
+                </a:solidFill>
+              </a:rPr>
+              <a:t>addEmployee</a:t>
+            </a:r>
+            <a:r>
+              <a:rPr lang="en-US" sz="900" dirty="0" smtClean="0">
+                <a:solidFill>
+                  <a:schemeClr val="tx1"/>
+                </a:solidFill>
+              </a:rPr>
+              <a:t>() </a:t>
+            </a:r>
+            <a:r>
+              <a:rPr lang="en-US" sz="900" dirty="0">
+                <a:solidFill>
+                  <a:schemeClr val="tx1"/>
+                </a:solidFill>
+              </a:rPr>
+              <a:t>{</a:t>
+            </a:r>
+          </a:p>
+          <a:p>
+            <a:r>
+              <a:rPr lang="en-US" sz="900" dirty="0" smtClean="0">
+                <a:solidFill>
+                  <a:schemeClr val="tx1"/>
+                </a:solidFill>
+              </a:rPr>
+              <a:t>}</a:t>
+            </a:r>
+            <a:endParaRPr lang="en-US" sz="900" dirty="0">
+              <a:solidFill>
+                <a:schemeClr val="tx1"/>
+              </a:solidFill>
+            </a:endParaRPr>
+          </a:p>
+        </p:txBody>
+      </p:sp>
+      <p:cxnSp>
+        <p:nvCxnSpPr>
+          <p:cNvPr id="42" name="Straight Arrow Connector 41"/>
+          <p:cNvCxnSpPr>
+            <a:endCxn id="37" idx="1"/>
+          </p:cNvCxnSpPr>
+          <p:nvPr/>
+        </p:nvCxnSpPr>
+        <p:spPr>
+          <a:xfrm>
+            <a:off x="2116184" y="4715692"/>
+            <a:ext cx="399923" cy="2583"/>
+          </a:xfrm>
+          <a:prstGeom prst="straightConnector1">
+            <a:avLst/>
+          </a:prstGeom>
+          <a:ln w="38100">
+            <a:tailEnd type="triangle"/>
+          </a:ln>
+        </p:spPr>
+        <p:style>
+          <a:lnRef idx="1">
+            <a:schemeClr val="accent1"/>
+          </a:lnRef>
+          <a:fillRef idx="0">
+            <a:schemeClr val="accent1"/>
+          </a:fillRef>
+          <a:effectRef idx="0">
+            <a:schemeClr val="accent1"/>
+          </a:effectRef>
+          <a:fontRef idx="minor">
+            <a:schemeClr val="tx1"/>
+          </a:fontRef>
+        </p:style>
+      </p:cxnSp>
+      <p:cxnSp>
+        <p:nvCxnSpPr>
+          <p:cNvPr id="43" name="Straight Arrow Connector 42"/>
+          <p:cNvCxnSpPr>
+            <a:endCxn id="41" idx="1"/>
+          </p:cNvCxnSpPr>
+          <p:nvPr/>
+        </p:nvCxnSpPr>
+        <p:spPr>
+          <a:xfrm>
+            <a:off x="5442857" y="4730817"/>
+            <a:ext cx="530552" cy="1"/>
+          </a:xfrm>
+          <a:prstGeom prst="straightConnector1">
+            <a:avLst/>
+          </a:prstGeom>
+          <a:ln w="38100">
+            <a:tailEnd type="triangle"/>
+          </a:ln>
+        </p:spPr>
+        <p:style>
+          <a:lnRef idx="1">
+            <a:schemeClr val="accent1"/>
+          </a:lnRef>
+          <a:fillRef idx="0">
+            <a:schemeClr val="accent1"/>
+          </a:fillRef>
+          <a:effectRef idx="0">
+            <a:schemeClr val="accent1"/>
+          </a:effectRef>
+          <a:fontRef idx="minor">
+            <a:schemeClr val="tx1"/>
+          </a:fontRef>
+        </p:style>
+      </p:cxnSp>
+      <p:sp>
+        <p:nvSpPr>
+          <p:cNvPr id="44" name="Rectangle: Rounded Corners 11">
+            <a:extLst>
+              <a:ext uri="{FF2B5EF4-FFF2-40B4-BE49-F238E27FC236}">
+                <a16:creationId xmlns:a16="http://schemas.microsoft.com/office/drawing/2014/main" xmlns="" id="{5A1BEE6C-84E1-4224-B447-1AC8A888AAC0}"/>
+              </a:ext>
+            </a:extLst>
+          </p:cNvPr>
+          <p:cNvSpPr/>
+          <p:nvPr/>
+        </p:nvSpPr>
+        <p:spPr>
+          <a:xfrm>
+            <a:off x="2516107" y="1368724"/>
+            <a:ext cx="2909334" cy="796023"/>
+          </a:xfrm>
+          <a:prstGeom prst="roundRect">
+            <a:avLst/>
+          </a:prstGeom>
+          <a:noFill/>
+        </p:spPr>
+        <p:style>
+          <a:lnRef idx="2">
+            <a:schemeClr val="accent1">
+              <a:shade val="50000"/>
+            </a:schemeClr>
+          </a:lnRef>
+          <a:fillRef idx="1">
+            <a:schemeClr val="accent1"/>
+          </a:fillRef>
+          <a:effectRef idx="0">
+            <a:schemeClr val="accent1"/>
+          </a:effectRef>
+          <a:fontRef idx="minor">
+            <a:schemeClr val="lt1"/>
+          </a:fontRef>
+        </p:style>
+        <p:txBody>
+          <a:bodyPr rtlCol="0" anchor="ctr"/>
+          <a:lstStyle/>
+          <a:p>
+            <a:pPr algn="ctr"/>
+            <a:r>
+              <a:rPr lang="en-US" sz="1100" b="1" dirty="0" smtClean="0">
+                <a:solidFill>
+                  <a:srgbClr val="7030A0"/>
+                </a:solidFill>
+              </a:rPr>
+              <a:t>EmployeeServiceImpl</a:t>
+            </a:r>
+          </a:p>
+          <a:p>
+            <a:r>
+              <a:rPr lang="en-US" sz="900" b="1" dirty="0" smtClean="0">
+                <a:solidFill>
+                  <a:schemeClr val="bg2">
+                    <a:lumMod val="75000"/>
+                  </a:schemeClr>
+                </a:solidFill>
+              </a:rPr>
+              <a:t>@Transactional</a:t>
+            </a:r>
+            <a:r>
+              <a:rPr lang="en-US" sz="900" dirty="0" smtClean="0">
+                <a:solidFill>
+                  <a:schemeClr val="tx1"/>
+                </a:solidFill>
+              </a:rPr>
+              <a:t>(propagation </a:t>
+            </a:r>
+            <a:r>
+              <a:rPr lang="en-US" sz="900" dirty="0">
+                <a:solidFill>
+                  <a:schemeClr val="tx1"/>
+                </a:solidFill>
+              </a:rPr>
+              <a:t>= Propagation.</a:t>
+            </a:r>
+            <a:r>
+              <a:rPr lang="en-US" sz="900" b="1" i="1" dirty="0">
+                <a:solidFill>
+                  <a:srgbClr val="0000FF"/>
+                </a:solidFill>
+              </a:rPr>
+              <a:t>REQUIRED</a:t>
+            </a:r>
+            <a:r>
+              <a:rPr lang="en-US" sz="900" i="1" dirty="0" smtClean="0">
+                <a:solidFill>
+                  <a:schemeClr val="tx1"/>
+                </a:solidFill>
+              </a:rPr>
+              <a:t>)</a:t>
+            </a:r>
+          </a:p>
+          <a:p>
+            <a:r>
+              <a:rPr lang="en-US" sz="900" b="1" dirty="0" smtClean="0">
+                <a:solidFill>
+                  <a:srgbClr val="FF0000"/>
+                </a:solidFill>
+              </a:rPr>
+              <a:t>public</a:t>
+            </a:r>
+            <a:r>
+              <a:rPr lang="en-US" sz="900" dirty="0" smtClean="0">
+                <a:solidFill>
+                  <a:srgbClr val="FF0000"/>
+                </a:solidFill>
+              </a:rPr>
+              <a:t> </a:t>
+            </a:r>
+            <a:r>
+              <a:rPr lang="en-US" sz="900" dirty="0">
+                <a:solidFill>
+                  <a:schemeClr val="tx1"/>
+                </a:solidFill>
+              </a:rPr>
+              <a:t>Employee </a:t>
+            </a:r>
+            <a:r>
+              <a:rPr lang="en-US" sz="900" b="1" dirty="0" smtClean="0">
+                <a:solidFill>
+                  <a:srgbClr val="C00000"/>
+                </a:solidFill>
+              </a:rPr>
+              <a:t>addEmployee</a:t>
+            </a:r>
+            <a:r>
+              <a:rPr lang="en-US" sz="900" dirty="0" smtClean="0">
+                <a:solidFill>
+                  <a:schemeClr val="tx1"/>
+                </a:solidFill>
+              </a:rPr>
+              <a:t>() </a:t>
+            </a:r>
+            <a:r>
+              <a:rPr lang="en-US" sz="900" dirty="0">
+                <a:solidFill>
+                  <a:schemeClr val="tx1"/>
+                </a:solidFill>
+              </a:rPr>
+              <a:t>{</a:t>
+            </a:r>
+          </a:p>
+          <a:p>
+            <a:r>
+              <a:rPr lang="en-US" sz="900" dirty="0" smtClean="0">
+                <a:solidFill>
+                  <a:schemeClr val="tx1"/>
+                </a:solidFill>
+              </a:rPr>
+              <a:t>}</a:t>
+            </a:r>
+            <a:endParaRPr lang="en-US" sz="900" dirty="0">
+              <a:solidFill>
+                <a:schemeClr val="tx1"/>
+              </a:solidFill>
+            </a:endParaRPr>
+          </a:p>
+        </p:txBody>
+      </p:sp>
+    </p:spTree>
+    <p:extLst>
+      <p:ext uri="{BB962C8B-B14F-4D97-AF65-F5344CB8AC3E}">
+        <p14:creationId xmlns:p14="http://schemas.microsoft.com/office/powerpoint/2010/main" val="1901695508"/>
+      </p:ext>
+    </p:extLst>
+  </p:cSld>
+  <p:clrMapOvr>
+    <a:masterClrMapping/>
+  </p:clrMapOvr>
+  <p:timing>
+    <p:tnLst>
+      <p:par>
+        <p:cTn id="1" dur="indefinite" restart="never" nodeType="tmRoot"/>
+      </p:par>
+    </p:tnLst>
+  </p:timing>
+</p:sld>
+</file>
+
+<file path=ppt/slides/slide4.xml><?xml version="1.0" encoding="utf-8"?>
+<p:sld xmlns:a="http://schemas.openxmlformats.org/drawingml/2006/main" xmlns:r="http://schemas.openxmlformats.org/officeDocument/2006/relationships" xmlns:p="http://schemas.openxmlformats.org/presentationml/2006/main">
+  <p:cSld>
+    <p:spTree>
+      <p:nvGrpSpPr>
+        <p:cNvPr id="1" name=""/>
+        <p:cNvGrpSpPr/>
+        <p:nvPr/>
+      </p:nvGrpSpPr>
+      <p:grpSpPr>
+        <a:xfrm>
+          <a:off x="0" y="0"/>
+          <a:ext cx="0" cy="0"/>
+          <a:chOff x="0" y="0"/>
+          <a:chExt cx="0" cy="0"/>
+        </a:xfrm>
+      </p:grpSpPr>
+      <p:pic>
+        <p:nvPicPr>
+          <p:cNvPr id="2" name="Picture 1"/>
+          <p:cNvPicPr>
+            <a:picLocks noChangeAspect="1"/>
+          </p:cNvPicPr>
+          <p:nvPr/>
+        </p:nvPicPr>
+        <p:blipFill>
+          <a:blip r:embed="rId2"/>
+          <a:stretch>
+            <a:fillRect/>
+          </a:stretch>
+        </p:blipFill>
+        <p:spPr>
+          <a:xfrm>
+            <a:off x="1447800" y="819150"/>
+            <a:ext cx="9296400" cy="5219700"/>
+          </a:xfrm>
+          <a:prstGeom prst="rect">
+            <a:avLst/>
+          </a:prstGeom>
+        </p:spPr>
+      </p:pic>
+    </p:spTree>
+    <p:extLst>
+      <p:ext uri="{BB962C8B-B14F-4D97-AF65-F5344CB8AC3E}">
+        <p14:creationId xmlns:p14="http://schemas.microsoft.com/office/powerpoint/2010/main" val="2221092892"/>
+      </p:ext>
+    </p:extLst>
+  </p:cSld>
+  <p:clrMapOvr>
+    <a:masterClrMapping/>
+  </p:clrMapOvr>
+  <p:timing>
+    <p:tnLst>
+      <p:par>
+        <p:cTn id="1" dur="indefinite" restart="never" nodeType="tmRoot"/>
+      </p:par>
+    </p:tnLst>
+  </p:timing>
 </p:sld>
 </file>
 
@@ -4440,4 +6766,265 @@
     </a:ext>
   </a:extLst>
 </a:theme>
+</file>
+
+<file path=ppt/theme/theme2.xml><?xml version="1.0" encoding="utf-8"?>
+<a:theme xmlns:a="http://schemas.openxmlformats.org/drawingml/2006/main" name="Office Theme">
+  <a:themeElements>
+    <a:clrScheme name="Office">
+      <a:dk1>
+        <a:sysClr val="windowText" lastClr="000000"/>
+      </a:dk1>
+      <a:lt1>
+        <a:sysClr val="window" lastClr="FFFFFF"/>
+      </a:lt1>
+      <a:dk2>
+        <a:srgbClr val="44546A"/>
+      </a:dk2>
+      <a:lt2>
+        <a:srgbClr val="E7E6E6"/>
+      </a:lt2>
+      <a:accent1>
+        <a:srgbClr val="5B9BD5"/>
+      </a:accent1>
+      <a:accent2>
+        <a:srgbClr val="ED7D31"/>
+      </a:accent2>
+      <a:accent3>
+        <a:srgbClr val="A5A5A5"/>
+      </a:accent3>
+      <a:accent4>
+        <a:srgbClr val="FFC000"/>
+      </a:accent4>
+      <a:accent5>
+        <a:srgbClr val="4472C4"/>
+      </a:accent5>
+      <a:accent6>
+        <a:srgbClr val="70AD47"/>
+      </a:accent6>
+      <a:hlink>
+        <a:srgbClr val="0563C1"/>
+      </a:hlink>
+      <a:folHlink>
+        <a:srgbClr val="954F72"/>
+      </a:folHlink>
+    </a:clrScheme>
+    <a:fontScheme name="Office">
+      <a:majorFont>
+        <a:latin typeface="Calibri Light" panose="020F0302020204030204"/>
+        <a:ea typeface=""/>
+        <a:cs typeface=""/>
+        <a:font script="Jpan" typeface="ＭＳ Ｐゴシック"/>
+        <a:font script="Hang" typeface="맑은 고딕"/>
+        <a:font script="Hans" typeface="宋体"/>
+        <a:font script="Hant" typeface="新細明體"/>
+        <a:font script="Arab" typeface="Times New Roman"/>
+        <a:font script="Hebr" typeface="Times New Roman"/>
+        <a:font script="Thai" typeface="Angsana New"/>
+        <a:font script="Ethi" typeface="Nyala"/>
+        <a:font script="Beng" typeface="Vrinda"/>
+        <a:font script="Gujr" typeface="Shruti"/>
+        <a:font script="Khmr" typeface="MoolBoran"/>
+        <a:font script="Knda" typeface="Tunga"/>
+        <a:font script="Guru" typeface="Raavi"/>
+        <a:font script="Cans" typeface="Euphemia"/>
+        <a:font script="Cher" typeface="Plantagenet Cherokee"/>
+        <a:font script="Yiii" typeface="Microsoft Yi Baiti"/>
+        <a:font script="Tibt" typeface="Microsoft Himalaya"/>
+        <a:font script="Thaa" typeface="MV Boli"/>
+        <a:font script="Deva" typeface="Mangal"/>
+        <a:font script="Telu" typeface="Gautami"/>
+        <a:font script="Taml" typeface="Latha"/>
+        <a:font script="Syrc" typeface="Estrangelo Edessa"/>
+        <a:font script="Orya" typeface="Kalinga"/>
+        <a:font script="Mlym" typeface="Kartika"/>
+        <a:font script="Laoo" typeface="DokChampa"/>
+        <a:font script="Sinh" typeface="Iskoola Pota"/>
+        <a:font script="Mong" typeface="Mongolian Baiti"/>
+        <a:font script="Viet" typeface="Times New Roman"/>
+        <a:font script="Uigh" typeface="Microsoft Uighur"/>
+        <a:font script="Geor" typeface="Sylfaen"/>
+      </a:majorFont>
+      <a:minorFont>
+        <a:latin typeface="Calibri" panose="020F0502020204030204"/>
+        <a:ea typeface=""/>
+        <a:cs typeface=""/>
+        <a:font script="Jpan" typeface="ＭＳ Ｐゴシック"/>
+        <a:font script="Hang" typeface="맑은 고딕"/>
+        <a:font script="Hans" typeface="宋体"/>
+        <a:font script="Hant" typeface="新細明體"/>
+        <a:font script="Arab" typeface="Arial"/>
+        <a:font script="Hebr" typeface="Arial"/>
+        <a:font script="Thai" typeface="Cordia New"/>
+        <a:font script="Ethi" typeface="Nyala"/>
+        <a:font script="Beng" typeface="Vrinda"/>
+        <a:font script="Gujr" typeface="Shruti"/>
+        <a:font script="Khmr" typeface="DaunPenh"/>
+        <a:font script="Knda" typeface="Tunga"/>
+        <a:font script="Guru" typeface="Raavi"/>
+        <a:font script="Cans" typeface="Euphemia"/>
+        <a:font script="Cher" typeface="Plantagenet Cherokee"/>
+        <a:font script="Yiii" typeface="Microsoft Yi Baiti"/>
+        <a:font script="Tibt" typeface="Microsoft Himalaya"/>
+        <a:font script="Thaa" typeface="MV Boli"/>
+        <a:font script="Deva" typeface="Mangal"/>
+        <a:font script="Telu" typeface="Gautami"/>
+        <a:font script="Taml" typeface="Latha"/>
+        <a:font script="Syrc" typeface="Estrangelo Edessa"/>
+        <a:font script="Orya" typeface="Kalinga"/>
+        <a:font script="Mlym" typeface="Kartika"/>
+        <a:font script="Laoo" typeface="DokChampa"/>
+        <a:font script="Sinh" typeface="Iskoola Pota"/>
+        <a:font script="Mong" typeface="Mongolian Baiti"/>
+        <a:font script="Viet" typeface="Arial"/>
+        <a:font script="Uigh" typeface="Microsoft Uighur"/>
+        <a:font script="Geor" typeface="Sylfaen"/>
+      </a:minorFont>
+    </a:fontScheme>
+    <a:fmtScheme name="Office">
+      <a:fillStyleLst>
+        <a:solidFill>
+          <a:schemeClr val="phClr"/>
+        </a:solidFill>
+        <a:gradFill rotWithShape="1">
+          <a:gsLst>
+            <a:gs pos="0">
+              <a:schemeClr val="phClr">
+                <a:lumMod val="110000"/>
+                <a:satMod val="105000"/>
+                <a:tint val="67000"/>
+              </a:schemeClr>
+            </a:gs>
+            <a:gs pos="50000">
+              <a:schemeClr val="phClr">
+                <a:lumMod val="105000"/>
+                <a:satMod val="103000"/>
+                <a:tint val="73000"/>
+              </a:schemeClr>
+            </a:gs>
+            <a:gs pos="100000">
+              <a:schemeClr val="phClr">
+                <a:lumMod val="105000"/>
+                <a:satMod val="109000"/>
+                <a:tint val="81000"/>
+              </a:schemeClr>
+            </a:gs>
+          </a:gsLst>
+          <a:lin ang="5400000" scaled="0"/>
+        </a:gradFill>
+        <a:gradFill rotWithShape="1">
+          <a:gsLst>
+            <a:gs pos="0">
+              <a:schemeClr val="phClr">
+                <a:satMod val="103000"/>
+                <a:lumMod val="102000"/>
+                <a:tint val="94000"/>
+              </a:schemeClr>
+            </a:gs>
+            <a:gs pos="50000">
+              <a:schemeClr val="phClr">
+                <a:satMod val="110000"/>
+                <a:lumMod val="100000"/>
+                <a:shade val="100000"/>
+              </a:schemeClr>
+            </a:gs>
+            <a:gs pos="100000">
+              <a:schemeClr val="phClr">
+                <a:lumMod val="99000"/>
+                <a:satMod val="120000"/>
+                <a:shade val="78000"/>
+              </a:schemeClr>
+            </a:gs>
+          </a:gsLst>
+          <a:lin ang="5400000" scaled="0"/>
+        </a:gradFill>
+      </a:fillStyleLst>
+      <a:lnStyleLst>
+        <a:ln w="6350" cap="flat" cmpd="sng" algn="ctr">
+          <a:solidFill>
+            <a:schemeClr val="phClr"/>
+          </a:solidFill>
+          <a:prstDash val="solid"/>
+          <a:miter lim="800000"/>
+        </a:ln>
+        <a:ln w="12700" cap="flat" cmpd="sng" algn="ctr">
+          <a:solidFill>
+            <a:schemeClr val="phClr"/>
+          </a:solidFill>
+          <a:prstDash val="solid"/>
+          <a:miter lim="800000"/>
+        </a:ln>
+        <a:ln w="19050" cap="flat" cmpd="sng" algn="ctr">
+          <a:solidFill>
+            <a:schemeClr val="phClr"/>
+          </a:solidFill>
+          <a:prstDash val="solid"/>
+          <a:miter lim="800000"/>
+        </a:ln>
+      </a:lnStyleLst>
+      <a:effectStyleLst>
+        <a:effectStyle>
+          <a:effectLst/>
+        </a:effectStyle>
+        <a:effectStyle>
+          <a:effectLst/>
+        </a:effectStyle>
+        <a:effectStyle>
+          <a:effectLst>
+            <a:outerShdw blurRad="57150" dist="19050" dir="5400000" algn="ctr" rotWithShape="0">
+              <a:srgbClr val="000000">
+                <a:alpha val="63000"/>
+              </a:srgbClr>
+            </a:outerShdw>
+          </a:effectLst>
+        </a:effectStyle>
+      </a:effectStyleLst>
+      <a:bgFillStyleLst>
+        <a:solidFill>
+          <a:schemeClr val="phClr"/>
+        </a:solidFill>
+        <a:solidFill>
+          <a:schemeClr val="phClr">
+            <a:tint val="95000"/>
+            <a:satMod val="170000"/>
+          </a:schemeClr>
+        </a:solidFill>
+        <a:gradFill rotWithShape="1">
+          <a:gsLst>
+            <a:gs pos="0">
+              <a:schemeClr val="phClr">
+                <a:tint val="93000"/>
+                <a:satMod val="150000"/>
+                <a:shade val="98000"/>
+                <a:lumMod val="102000"/>
+              </a:schemeClr>
+            </a:gs>
+            <a:gs pos="50000">
+              <a:schemeClr val="phClr">
+                <a:tint val="98000"/>
+                <a:satMod val="130000"/>
+                <a:shade val="90000"/>
+                <a:lumMod val="103000"/>
+              </a:schemeClr>
+            </a:gs>
+            <a:gs pos="100000">
+              <a:schemeClr val="phClr">
+                <a:shade val="63000"/>
+                <a:satMod val="120000"/>
+              </a:schemeClr>
+            </a:gs>
+          </a:gsLst>
+          <a:lin ang="5400000" scaled="0"/>
+        </a:gradFill>
+      </a:bgFillStyleLst>
+    </a:fmtScheme>
+  </a:themeElements>
+  <a:objectDefaults/>
+  <a:extraClrSchemeLst/>
+  <a:extLst>
+    <a:ext uri="{05A4C25C-085E-4340-85A3-A5531E510DB2}">
+      <thm15:themeFamily xmlns:thm15="http://schemas.microsoft.com/office/thememl/2012/main" name="Office Theme" id="{62F939B6-93AF-4DB8-9C6B-D6C7DFDC589F}" vid="{4A3C46E8-61CC-4603-A589-7422A47A8E4A}"/>
+    </a:ext>
+  </a:extLst>
+</a:theme>
 </file>
--- a/05-Transaction-Management/Transaction_management.pptx
+++ b/05-Transaction-Management/Transaction_management.pptx
@@ -5,13 +5,11 @@
     <p:sldMasterId id="2147483648" r:id="rId1"/>
   </p:sldMasterIdLst>
   <p:notesMasterIdLst>
-    <p:notesMasterId r:id="rId6"/>
+    <p:notesMasterId r:id="rId4"/>
   </p:notesMasterIdLst>
   <p:sldIdLst>
     <p:sldId id="256" r:id="rId2"/>
-    <p:sldId id="258" r:id="rId3"/>
-    <p:sldId id="259" r:id="rId4"/>
-    <p:sldId id="257" r:id="rId5"/>
+    <p:sldId id="259" r:id="rId3"/>
   </p:sldIdLst>
   <p:sldSz cx="12192000" cy="6858000"/>
   <p:notesSz cx="6858000" cy="9144000"/>
@@ -125,6 +123,9 @@
         </p15:guide>
       </p15:sldGuideLst>
     </p:ext>
+    <p:ext uri="{2D200454-40CA-4A62-9FC3-DE9A4176ACB9}">
+      <p15:notesGuideLst xmlns:p15="http://schemas.microsoft.com/office/powerpoint/2012/main"/>
+    </p:ext>
   </p:extLst>
 </p:presentation>
 </file>
@@ -248,7 +249,7 @@
           <a:p>
             <a:fld id="{D35A715A-4E3D-47D0-A386-7DBD8CC75CAA}" type="datetimeFigureOut">
               <a:rPr lang="en-US" smtClean="0"/>
-              <a:t>12/20/2022</a:t>
+              <a:t>12/21/2022</a:t>
             </a:fld>
             <a:endParaRPr lang="en-US"/>
           </a:p>
@@ -590,90 +591,6 @@
     </p:spTree>
     <p:extLst>
       <p:ext uri="{BB962C8B-B14F-4D97-AF65-F5344CB8AC3E}">
-        <p14:creationId xmlns:p14="http://schemas.microsoft.com/office/powerpoint/2010/main" val="2236422455"/>
-      </p:ext>
-    </p:extLst>
-  </p:cSld>
-  <p:clrMapOvr>
-    <a:masterClrMapping/>
-  </p:clrMapOvr>
-</p:notes>
-</file>
-
-<file path=ppt/notesSlides/notesSlide2.xml><?xml version="1.0" encoding="utf-8"?>
-<p:notes xmlns:a="http://schemas.openxmlformats.org/drawingml/2006/main" xmlns:r="http://schemas.openxmlformats.org/officeDocument/2006/relationships" xmlns:p="http://schemas.openxmlformats.org/presentationml/2006/main">
-  <p:cSld>
-    <p:spTree>
-      <p:nvGrpSpPr>
-        <p:cNvPr id="1" name=""/>
-        <p:cNvGrpSpPr/>
-        <p:nvPr/>
-      </p:nvGrpSpPr>
-      <p:grpSpPr>
-        <a:xfrm>
-          <a:off x="0" y="0"/>
-          <a:ext cx="0" cy="0"/>
-          <a:chOff x="0" y="0"/>
-          <a:chExt cx="0" cy="0"/>
-        </a:xfrm>
-      </p:grpSpPr>
-      <p:sp>
-        <p:nvSpPr>
-          <p:cNvPr id="2" name="Slide Image Placeholder 1"/>
-          <p:cNvSpPr>
-            <a:spLocks noGrp="1" noRot="1" noChangeAspect="1"/>
-          </p:cNvSpPr>
-          <p:nvPr>
-            <p:ph type="sldImg"/>
-          </p:nvPr>
-        </p:nvSpPr>
-        <p:spPr/>
-      </p:sp>
-      <p:sp>
-        <p:nvSpPr>
-          <p:cNvPr id="3" name="Notes Placeholder 2"/>
-          <p:cNvSpPr>
-            <a:spLocks noGrp="1"/>
-          </p:cNvSpPr>
-          <p:nvPr>
-            <p:ph type="body" idx="1"/>
-          </p:nvPr>
-        </p:nvSpPr>
-        <p:spPr/>
-        <p:txBody>
-          <a:bodyPr/>
-          <a:lstStyle/>
-          <a:p>
-            <a:endParaRPr lang="en-US"/>
-          </a:p>
-        </p:txBody>
-      </p:sp>
-      <p:sp>
-        <p:nvSpPr>
-          <p:cNvPr id="4" name="Slide Number Placeholder 3"/>
-          <p:cNvSpPr>
-            <a:spLocks noGrp="1"/>
-          </p:cNvSpPr>
-          <p:nvPr>
-            <p:ph type="sldNum" sz="quarter" idx="10"/>
-          </p:nvPr>
-        </p:nvSpPr>
-        <p:spPr/>
-        <p:txBody>
-          <a:bodyPr/>
-          <a:lstStyle/>
-          <a:p>
-            <a:fld id="{7FBCA59B-B642-4ED7-B3DB-3E8740693BC1}" type="slidenum">
-              <a:rPr lang="en-US" smtClean="0"/>
-              <a:t>3</a:t>
-            </a:fld>
-            <a:endParaRPr lang="en-US"/>
-          </a:p>
-        </p:txBody>
-      </p:sp>
-    </p:spTree>
-    <p:extLst>
-      <p:ext uri="{BB962C8B-B14F-4D97-AF65-F5344CB8AC3E}">
         <p14:creationId xmlns:p14="http://schemas.microsoft.com/office/powerpoint/2010/main" val="3456782783"/>
       </p:ext>
     </p:extLst>
@@ -706,7 +623,7 @@
           <p:cNvPr id="2" name="Title 1">
             <a:extLst>
               <a:ext uri="{FF2B5EF4-FFF2-40B4-BE49-F238E27FC236}">
-                <a16:creationId xmlns:a16="http://schemas.microsoft.com/office/drawing/2014/main" xmlns="" id="{7F986473-48FF-48D2-BE87-8E6EF1DE5CB7}"/>
+                <a16:creationId xmlns="" xmlns:a16="http://schemas.microsoft.com/office/drawing/2014/main" id="{7F986473-48FF-48D2-BE87-8E6EF1DE5CB7}"/>
               </a:ext>
             </a:extLst>
           </p:cNvPr>
@@ -743,7 +660,7 @@
           <p:cNvPr id="3" name="Subtitle 2">
             <a:extLst>
               <a:ext uri="{FF2B5EF4-FFF2-40B4-BE49-F238E27FC236}">
-                <a16:creationId xmlns:a16="http://schemas.microsoft.com/office/drawing/2014/main" xmlns="" id="{34E5E0FE-6852-4CAB-B62E-982090E13B7E}"/>
+                <a16:creationId xmlns="" xmlns:a16="http://schemas.microsoft.com/office/drawing/2014/main" id="{34E5E0FE-6852-4CAB-B62E-982090E13B7E}"/>
               </a:ext>
             </a:extLst>
           </p:cNvPr>
@@ -813,7 +730,7 @@
           <p:cNvPr id="4" name="Date Placeholder 3">
             <a:extLst>
               <a:ext uri="{FF2B5EF4-FFF2-40B4-BE49-F238E27FC236}">
-                <a16:creationId xmlns:a16="http://schemas.microsoft.com/office/drawing/2014/main" xmlns="" id="{02AD77F6-FA2D-48AC-A2E1-97A3C253D053}"/>
+                <a16:creationId xmlns="" xmlns:a16="http://schemas.microsoft.com/office/drawing/2014/main" id="{02AD77F6-FA2D-48AC-A2E1-97A3C253D053}"/>
               </a:ext>
             </a:extLst>
           </p:cNvPr>
@@ -831,7 +748,7 @@
           <a:p>
             <a:fld id="{1DF0471C-15C6-430F-A1D2-F5E2439A92BD}" type="datetimeFigureOut">
               <a:rPr lang="en-US" smtClean="0"/>
-              <a:t>12/20/2022</a:t>
+              <a:t>12/21/2022</a:t>
             </a:fld>
             <a:endParaRPr lang="en-US"/>
           </a:p>
@@ -842,7 +759,7 @@
           <p:cNvPr id="5" name="Footer Placeholder 4">
             <a:extLst>
               <a:ext uri="{FF2B5EF4-FFF2-40B4-BE49-F238E27FC236}">
-                <a16:creationId xmlns:a16="http://schemas.microsoft.com/office/drawing/2014/main" xmlns="" id="{B06C71EF-5AB6-482F-82DD-661F92C0EB81}"/>
+                <a16:creationId xmlns="" xmlns:a16="http://schemas.microsoft.com/office/drawing/2014/main" id="{B06C71EF-5AB6-482F-82DD-661F92C0EB81}"/>
               </a:ext>
             </a:extLst>
           </p:cNvPr>
@@ -867,7 +784,7 @@
           <p:cNvPr id="6" name="Slide Number Placeholder 5">
             <a:extLst>
               <a:ext uri="{FF2B5EF4-FFF2-40B4-BE49-F238E27FC236}">
-                <a16:creationId xmlns:a16="http://schemas.microsoft.com/office/drawing/2014/main" xmlns="" id="{45B588E1-4B96-4D36-ABFE-54B521327534}"/>
+                <a16:creationId xmlns="" xmlns:a16="http://schemas.microsoft.com/office/drawing/2014/main" id="{45B588E1-4B96-4D36-ABFE-54B521327534}"/>
               </a:ext>
             </a:extLst>
           </p:cNvPr>
@@ -926,7 +843,7 @@
           <p:cNvPr id="2" name="Title 1">
             <a:extLst>
               <a:ext uri="{FF2B5EF4-FFF2-40B4-BE49-F238E27FC236}">
-                <a16:creationId xmlns:a16="http://schemas.microsoft.com/office/drawing/2014/main" xmlns="" id="{F8B4BF2C-5868-4FE8-A0A8-0C99FC85D853}"/>
+                <a16:creationId xmlns="" xmlns:a16="http://schemas.microsoft.com/office/drawing/2014/main" id="{F8B4BF2C-5868-4FE8-A0A8-0C99FC85D853}"/>
               </a:ext>
             </a:extLst>
           </p:cNvPr>
@@ -954,7 +871,7 @@
           <p:cNvPr id="3" name="Vertical Text Placeholder 2">
             <a:extLst>
               <a:ext uri="{FF2B5EF4-FFF2-40B4-BE49-F238E27FC236}">
-                <a16:creationId xmlns:a16="http://schemas.microsoft.com/office/drawing/2014/main" xmlns="" id="{608961FA-067D-4E13-AEE4-DEB564415E2A}"/>
+                <a16:creationId xmlns="" xmlns:a16="http://schemas.microsoft.com/office/drawing/2014/main" id="{608961FA-067D-4E13-AEE4-DEB564415E2A}"/>
               </a:ext>
             </a:extLst>
           </p:cNvPr>
@@ -1011,7 +928,7 @@
           <p:cNvPr id="4" name="Date Placeholder 3">
             <a:extLst>
               <a:ext uri="{FF2B5EF4-FFF2-40B4-BE49-F238E27FC236}">
-                <a16:creationId xmlns:a16="http://schemas.microsoft.com/office/drawing/2014/main" xmlns="" id="{F8A3B194-BC00-4F26-B44D-AE804D4EE358}"/>
+                <a16:creationId xmlns="" xmlns:a16="http://schemas.microsoft.com/office/drawing/2014/main" id="{F8A3B194-BC00-4F26-B44D-AE804D4EE358}"/>
               </a:ext>
             </a:extLst>
           </p:cNvPr>
@@ -1029,7 +946,7 @@
           <a:p>
             <a:fld id="{1DF0471C-15C6-430F-A1D2-F5E2439A92BD}" type="datetimeFigureOut">
               <a:rPr lang="en-US" smtClean="0"/>
-              <a:t>12/20/2022</a:t>
+              <a:t>12/21/2022</a:t>
             </a:fld>
             <a:endParaRPr lang="en-US"/>
           </a:p>
@@ -1040,7 +957,7 @@
           <p:cNvPr id="5" name="Footer Placeholder 4">
             <a:extLst>
               <a:ext uri="{FF2B5EF4-FFF2-40B4-BE49-F238E27FC236}">
-                <a16:creationId xmlns:a16="http://schemas.microsoft.com/office/drawing/2014/main" xmlns="" id="{36DF11C2-1180-4F31-81D4-FA146263DBB1}"/>
+                <a16:creationId xmlns="" xmlns:a16="http://schemas.microsoft.com/office/drawing/2014/main" id="{36DF11C2-1180-4F31-81D4-FA146263DBB1}"/>
               </a:ext>
             </a:extLst>
           </p:cNvPr>
@@ -1065,7 +982,7 @@
           <p:cNvPr id="6" name="Slide Number Placeholder 5">
             <a:extLst>
               <a:ext uri="{FF2B5EF4-FFF2-40B4-BE49-F238E27FC236}">
-                <a16:creationId xmlns:a16="http://schemas.microsoft.com/office/drawing/2014/main" xmlns="" id="{F8B629C9-776A-494E-89FD-1C76FE331BBB}"/>
+                <a16:creationId xmlns="" xmlns:a16="http://schemas.microsoft.com/office/drawing/2014/main" id="{F8B629C9-776A-494E-89FD-1C76FE331BBB}"/>
               </a:ext>
             </a:extLst>
           </p:cNvPr>
@@ -1124,7 +1041,7 @@
           <p:cNvPr id="2" name="Vertical Title 1">
             <a:extLst>
               <a:ext uri="{FF2B5EF4-FFF2-40B4-BE49-F238E27FC236}">
-                <a16:creationId xmlns:a16="http://schemas.microsoft.com/office/drawing/2014/main" xmlns="" id="{70D0F334-FD00-46CD-A061-98BDFB571FD9}"/>
+                <a16:creationId xmlns="" xmlns:a16="http://schemas.microsoft.com/office/drawing/2014/main" id="{70D0F334-FD00-46CD-A061-98BDFB571FD9}"/>
               </a:ext>
             </a:extLst>
           </p:cNvPr>
@@ -1157,7 +1074,7 @@
           <p:cNvPr id="3" name="Vertical Text Placeholder 2">
             <a:extLst>
               <a:ext uri="{FF2B5EF4-FFF2-40B4-BE49-F238E27FC236}">
-                <a16:creationId xmlns:a16="http://schemas.microsoft.com/office/drawing/2014/main" xmlns="" id="{FFEBB3B4-1969-4250-84C3-4B5990EF6885}"/>
+                <a16:creationId xmlns="" xmlns:a16="http://schemas.microsoft.com/office/drawing/2014/main" id="{FFEBB3B4-1969-4250-84C3-4B5990EF6885}"/>
               </a:ext>
             </a:extLst>
           </p:cNvPr>
@@ -1219,7 +1136,7 @@
           <p:cNvPr id="4" name="Date Placeholder 3">
             <a:extLst>
               <a:ext uri="{FF2B5EF4-FFF2-40B4-BE49-F238E27FC236}">
-                <a16:creationId xmlns:a16="http://schemas.microsoft.com/office/drawing/2014/main" xmlns="" id="{DB3F33DF-0039-4597-9B92-BE74F88DB2F0}"/>
+                <a16:creationId xmlns="" xmlns:a16="http://schemas.microsoft.com/office/drawing/2014/main" id="{DB3F33DF-0039-4597-9B92-BE74F88DB2F0}"/>
               </a:ext>
             </a:extLst>
           </p:cNvPr>
@@ -1237,7 +1154,7 @@
           <a:p>
             <a:fld id="{1DF0471C-15C6-430F-A1D2-F5E2439A92BD}" type="datetimeFigureOut">
               <a:rPr lang="en-US" smtClean="0"/>
-              <a:t>12/20/2022</a:t>
+              <a:t>12/21/2022</a:t>
             </a:fld>
             <a:endParaRPr lang="en-US"/>
           </a:p>
@@ -1248,7 +1165,7 @@
           <p:cNvPr id="5" name="Footer Placeholder 4">
             <a:extLst>
               <a:ext uri="{FF2B5EF4-FFF2-40B4-BE49-F238E27FC236}">
-                <a16:creationId xmlns:a16="http://schemas.microsoft.com/office/drawing/2014/main" xmlns="" id="{509961BE-F2FE-448E-9C62-B734E083CBFA}"/>
+                <a16:creationId xmlns="" xmlns:a16="http://schemas.microsoft.com/office/drawing/2014/main" id="{509961BE-F2FE-448E-9C62-B734E083CBFA}"/>
               </a:ext>
             </a:extLst>
           </p:cNvPr>
@@ -1273,7 +1190,7 @@
           <p:cNvPr id="6" name="Slide Number Placeholder 5">
             <a:extLst>
               <a:ext uri="{FF2B5EF4-FFF2-40B4-BE49-F238E27FC236}">
-                <a16:creationId xmlns:a16="http://schemas.microsoft.com/office/drawing/2014/main" xmlns="" id="{5E7319AA-624B-41FF-A3D7-333FA6DA8759}"/>
+                <a16:creationId xmlns="" xmlns:a16="http://schemas.microsoft.com/office/drawing/2014/main" id="{5E7319AA-624B-41FF-A3D7-333FA6DA8759}"/>
               </a:ext>
             </a:extLst>
           </p:cNvPr>
@@ -1332,7 +1249,7 @@
           <p:cNvPr id="2" name="Title 1">
             <a:extLst>
               <a:ext uri="{FF2B5EF4-FFF2-40B4-BE49-F238E27FC236}">
-                <a16:creationId xmlns:a16="http://schemas.microsoft.com/office/drawing/2014/main" xmlns="" id="{CEF0529E-423B-4047-9641-A0394321EB46}"/>
+                <a16:creationId xmlns="" xmlns:a16="http://schemas.microsoft.com/office/drawing/2014/main" id="{CEF0529E-423B-4047-9641-A0394321EB46}"/>
               </a:ext>
             </a:extLst>
           </p:cNvPr>
@@ -1360,7 +1277,7 @@
           <p:cNvPr id="3" name="Content Placeholder 2">
             <a:extLst>
               <a:ext uri="{FF2B5EF4-FFF2-40B4-BE49-F238E27FC236}">
-                <a16:creationId xmlns:a16="http://schemas.microsoft.com/office/drawing/2014/main" xmlns="" id="{175E3BE1-1952-422C-8C38-09A610ED5095}"/>
+                <a16:creationId xmlns="" xmlns:a16="http://schemas.microsoft.com/office/drawing/2014/main" id="{175E3BE1-1952-422C-8C38-09A610ED5095}"/>
               </a:ext>
             </a:extLst>
           </p:cNvPr>
@@ -1417,7 +1334,7 @@
           <p:cNvPr id="4" name="Date Placeholder 3">
             <a:extLst>
               <a:ext uri="{FF2B5EF4-FFF2-40B4-BE49-F238E27FC236}">
-                <a16:creationId xmlns:a16="http://schemas.microsoft.com/office/drawing/2014/main" xmlns="" id="{594F9D89-0318-45AB-8EF4-E4DBA4A04380}"/>
+                <a16:creationId xmlns="" xmlns:a16="http://schemas.microsoft.com/office/drawing/2014/main" id="{594F9D89-0318-45AB-8EF4-E4DBA4A04380}"/>
               </a:ext>
             </a:extLst>
           </p:cNvPr>
@@ -1435,7 +1352,7 @@
           <a:p>
             <a:fld id="{1DF0471C-15C6-430F-A1D2-F5E2439A92BD}" type="datetimeFigureOut">
               <a:rPr lang="en-US" smtClean="0"/>
-              <a:t>12/20/2022</a:t>
+              <a:t>12/21/2022</a:t>
             </a:fld>
             <a:endParaRPr lang="en-US"/>
           </a:p>
@@ -1446,7 +1363,7 @@
           <p:cNvPr id="5" name="Footer Placeholder 4">
             <a:extLst>
               <a:ext uri="{FF2B5EF4-FFF2-40B4-BE49-F238E27FC236}">
-                <a16:creationId xmlns:a16="http://schemas.microsoft.com/office/drawing/2014/main" xmlns="" id="{49C2FA9B-8333-4AC8-B604-6DA7FF617FD2}"/>
+                <a16:creationId xmlns="" xmlns:a16="http://schemas.microsoft.com/office/drawing/2014/main" id="{49C2FA9B-8333-4AC8-B604-6DA7FF617FD2}"/>
               </a:ext>
             </a:extLst>
           </p:cNvPr>
@@ -1471,7 +1388,7 @@
           <p:cNvPr id="6" name="Slide Number Placeholder 5">
             <a:extLst>
               <a:ext uri="{FF2B5EF4-FFF2-40B4-BE49-F238E27FC236}">
-                <a16:creationId xmlns:a16="http://schemas.microsoft.com/office/drawing/2014/main" xmlns="" id="{9DF7D1F3-52D2-4029-B862-10440113C060}"/>
+                <a16:creationId xmlns="" xmlns:a16="http://schemas.microsoft.com/office/drawing/2014/main" id="{9DF7D1F3-52D2-4029-B862-10440113C060}"/>
               </a:ext>
             </a:extLst>
           </p:cNvPr>
@@ -1530,7 +1447,7 @@
           <p:cNvPr id="2" name="Title 1">
             <a:extLst>
               <a:ext uri="{FF2B5EF4-FFF2-40B4-BE49-F238E27FC236}">
-                <a16:creationId xmlns:a16="http://schemas.microsoft.com/office/drawing/2014/main" xmlns="" id="{7BA45855-39EF-47A0-A504-C639015C3B74}"/>
+                <a16:creationId xmlns="" xmlns:a16="http://schemas.microsoft.com/office/drawing/2014/main" id="{7BA45855-39EF-47A0-A504-C639015C3B74}"/>
               </a:ext>
             </a:extLst>
           </p:cNvPr>
@@ -1567,7 +1484,7 @@
           <p:cNvPr id="3" name="Text Placeholder 2">
             <a:extLst>
               <a:ext uri="{FF2B5EF4-FFF2-40B4-BE49-F238E27FC236}">
-                <a16:creationId xmlns:a16="http://schemas.microsoft.com/office/drawing/2014/main" xmlns="" id="{F98B8D24-F025-4281-B9EF-271FEE07FBF7}"/>
+                <a16:creationId xmlns="" xmlns:a16="http://schemas.microsoft.com/office/drawing/2014/main" id="{F98B8D24-F025-4281-B9EF-271FEE07FBF7}"/>
               </a:ext>
             </a:extLst>
           </p:cNvPr>
@@ -1692,7 +1609,7 @@
           <p:cNvPr id="4" name="Date Placeholder 3">
             <a:extLst>
               <a:ext uri="{FF2B5EF4-FFF2-40B4-BE49-F238E27FC236}">
-                <a16:creationId xmlns:a16="http://schemas.microsoft.com/office/drawing/2014/main" xmlns="" id="{24167402-33D3-402F-9A4F-0CC943C3D7EA}"/>
+                <a16:creationId xmlns="" xmlns:a16="http://schemas.microsoft.com/office/drawing/2014/main" id="{24167402-33D3-402F-9A4F-0CC943C3D7EA}"/>
               </a:ext>
             </a:extLst>
           </p:cNvPr>
@@ -1710,7 +1627,7 @@
           <a:p>
             <a:fld id="{1DF0471C-15C6-430F-A1D2-F5E2439A92BD}" type="datetimeFigureOut">
               <a:rPr lang="en-US" smtClean="0"/>
-              <a:t>12/20/2022</a:t>
+              <a:t>12/21/2022</a:t>
             </a:fld>
             <a:endParaRPr lang="en-US"/>
           </a:p>
@@ -1721,7 +1638,7 @@
           <p:cNvPr id="5" name="Footer Placeholder 4">
             <a:extLst>
               <a:ext uri="{FF2B5EF4-FFF2-40B4-BE49-F238E27FC236}">
-                <a16:creationId xmlns:a16="http://schemas.microsoft.com/office/drawing/2014/main" xmlns="" id="{E8406ADB-3CD4-4A9F-8E63-00F73D91CFD4}"/>
+                <a16:creationId xmlns="" xmlns:a16="http://schemas.microsoft.com/office/drawing/2014/main" id="{E8406ADB-3CD4-4A9F-8E63-00F73D91CFD4}"/>
               </a:ext>
             </a:extLst>
           </p:cNvPr>
@@ -1746,7 +1663,7 @@
           <p:cNvPr id="6" name="Slide Number Placeholder 5">
             <a:extLst>
               <a:ext uri="{FF2B5EF4-FFF2-40B4-BE49-F238E27FC236}">
-                <a16:creationId xmlns:a16="http://schemas.microsoft.com/office/drawing/2014/main" xmlns="" id="{FDF6385E-3E04-47C6-9AF2-E7AB2D906BB6}"/>
+                <a16:creationId xmlns="" xmlns:a16="http://schemas.microsoft.com/office/drawing/2014/main" id="{FDF6385E-3E04-47C6-9AF2-E7AB2D906BB6}"/>
               </a:ext>
             </a:extLst>
           </p:cNvPr>
@@ -1805,7 +1722,7 @@
           <p:cNvPr id="2" name="Title 1">
             <a:extLst>
               <a:ext uri="{FF2B5EF4-FFF2-40B4-BE49-F238E27FC236}">
-                <a16:creationId xmlns:a16="http://schemas.microsoft.com/office/drawing/2014/main" xmlns="" id="{ED6CCC0B-9F72-4E67-83AA-7B36B1965281}"/>
+                <a16:creationId xmlns="" xmlns:a16="http://schemas.microsoft.com/office/drawing/2014/main" id="{ED6CCC0B-9F72-4E67-83AA-7B36B1965281}"/>
               </a:ext>
             </a:extLst>
           </p:cNvPr>
@@ -1833,7 +1750,7 @@
           <p:cNvPr id="3" name="Content Placeholder 2">
             <a:extLst>
               <a:ext uri="{FF2B5EF4-FFF2-40B4-BE49-F238E27FC236}">
-                <a16:creationId xmlns:a16="http://schemas.microsoft.com/office/drawing/2014/main" xmlns="" id="{E7B63006-8859-4E31-9A7B-732066FD28D3}"/>
+                <a16:creationId xmlns="" xmlns:a16="http://schemas.microsoft.com/office/drawing/2014/main" id="{E7B63006-8859-4E31-9A7B-732066FD28D3}"/>
               </a:ext>
             </a:extLst>
           </p:cNvPr>
@@ -1895,7 +1812,7 @@
           <p:cNvPr id="4" name="Content Placeholder 3">
             <a:extLst>
               <a:ext uri="{FF2B5EF4-FFF2-40B4-BE49-F238E27FC236}">
-                <a16:creationId xmlns:a16="http://schemas.microsoft.com/office/drawing/2014/main" xmlns="" id="{5D54DF68-216B-42C3-9256-63ADC1AA0FBC}"/>
+                <a16:creationId xmlns="" xmlns:a16="http://schemas.microsoft.com/office/drawing/2014/main" id="{5D54DF68-216B-42C3-9256-63ADC1AA0FBC}"/>
               </a:ext>
             </a:extLst>
           </p:cNvPr>
@@ -1957,7 +1874,7 @@
           <p:cNvPr id="5" name="Date Placeholder 4">
             <a:extLst>
               <a:ext uri="{FF2B5EF4-FFF2-40B4-BE49-F238E27FC236}">
-                <a16:creationId xmlns:a16="http://schemas.microsoft.com/office/drawing/2014/main" xmlns="" id="{0F8CB3C2-36F1-4E0E-87E4-722E0A2B8830}"/>
+                <a16:creationId xmlns="" xmlns:a16="http://schemas.microsoft.com/office/drawing/2014/main" id="{0F8CB3C2-36F1-4E0E-87E4-722E0A2B8830}"/>
               </a:ext>
             </a:extLst>
           </p:cNvPr>
@@ -1975,7 +1892,7 @@
           <a:p>
             <a:fld id="{1DF0471C-15C6-430F-A1D2-F5E2439A92BD}" type="datetimeFigureOut">
               <a:rPr lang="en-US" smtClean="0"/>
-              <a:t>12/20/2022</a:t>
+              <a:t>12/21/2022</a:t>
             </a:fld>
             <a:endParaRPr lang="en-US"/>
           </a:p>
@@ -1986,7 +1903,7 @@
           <p:cNvPr id="6" name="Footer Placeholder 5">
             <a:extLst>
               <a:ext uri="{FF2B5EF4-FFF2-40B4-BE49-F238E27FC236}">
-                <a16:creationId xmlns:a16="http://schemas.microsoft.com/office/drawing/2014/main" xmlns="" id="{47A426AA-98E5-4C32-BD26-67433988AA7C}"/>
+                <a16:creationId xmlns="" xmlns:a16="http://schemas.microsoft.com/office/drawing/2014/main" id="{47A426AA-98E5-4C32-BD26-67433988AA7C}"/>
               </a:ext>
             </a:extLst>
           </p:cNvPr>
@@ -2011,7 +1928,7 @@
           <p:cNvPr id="7" name="Slide Number Placeholder 6">
             <a:extLst>
               <a:ext uri="{FF2B5EF4-FFF2-40B4-BE49-F238E27FC236}">
-                <a16:creationId xmlns:a16="http://schemas.microsoft.com/office/drawing/2014/main" xmlns="" id="{AEF93DAC-53DB-48BB-8C16-553726965EF3}"/>
+                <a16:creationId xmlns="" xmlns:a16="http://schemas.microsoft.com/office/drawing/2014/main" id="{AEF93DAC-53DB-48BB-8C16-553726965EF3}"/>
               </a:ext>
             </a:extLst>
           </p:cNvPr>
@@ -2070,7 +1987,7 @@
           <p:cNvPr id="2" name="Title 1">
             <a:extLst>
               <a:ext uri="{FF2B5EF4-FFF2-40B4-BE49-F238E27FC236}">
-                <a16:creationId xmlns:a16="http://schemas.microsoft.com/office/drawing/2014/main" xmlns="" id="{545ED9B5-95EB-42C7-9485-646F75953A7C}"/>
+                <a16:creationId xmlns="" xmlns:a16="http://schemas.microsoft.com/office/drawing/2014/main" id="{545ED9B5-95EB-42C7-9485-646F75953A7C}"/>
               </a:ext>
             </a:extLst>
           </p:cNvPr>
@@ -2103,7 +2020,7 @@
           <p:cNvPr id="3" name="Text Placeholder 2">
             <a:extLst>
               <a:ext uri="{FF2B5EF4-FFF2-40B4-BE49-F238E27FC236}">
-                <a16:creationId xmlns:a16="http://schemas.microsoft.com/office/drawing/2014/main" xmlns="" id="{433D3E70-C817-4747-B196-2EE7F616E55D}"/>
+                <a16:creationId xmlns="" xmlns:a16="http://schemas.microsoft.com/office/drawing/2014/main" id="{433D3E70-C817-4747-B196-2EE7F616E55D}"/>
               </a:ext>
             </a:extLst>
           </p:cNvPr>
@@ -2174,7 +2091,7 @@
           <p:cNvPr id="4" name="Content Placeholder 3">
             <a:extLst>
               <a:ext uri="{FF2B5EF4-FFF2-40B4-BE49-F238E27FC236}">
-                <a16:creationId xmlns:a16="http://schemas.microsoft.com/office/drawing/2014/main" xmlns="" id="{89E43232-D7AE-4CEA-B0CD-A62351B134BB}"/>
+                <a16:creationId xmlns="" xmlns:a16="http://schemas.microsoft.com/office/drawing/2014/main" id="{89E43232-D7AE-4CEA-B0CD-A62351B134BB}"/>
               </a:ext>
             </a:extLst>
           </p:cNvPr>
@@ -2236,7 +2153,7 @@
           <p:cNvPr id="5" name="Text Placeholder 4">
             <a:extLst>
               <a:ext uri="{FF2B5EF4-FFF2-40B4-BE49-F238E27FC236}">
-                <a16:creationId xmlns:a16="http://schemas.microsoft.com/office/drawing/2014/main" xmlns="" id="{F1BF8678-D57B-4B16-AA25-CD85B19E1B3A}"/>
+                <a16:creationId xmlns="" xmlns:a16="http://schemas.microsoft.com/office/drawing/2014/main" id="{F1BF8678-D57B-4B16-AA25-CD85B19E1B3A}"/>
               </a:ext>
             </a:extLst>
           </p:cNvPr>
@@ -2307,7 +2224,7 @@
           <p:cNvPr id="6" name="Content Placeholder 5">
             <a:extLst>
               <a:ext uri="{FF2B5EF4-FFF2-40B4-BE49-F238E27FC236}">
-                <a16:creationId xmlns:a16="http://schemas.microsoft.com/office/drawing/2014/main" xmlns="" id="{7DCBE630-179A-4327-878B-3847467281D3}"/>
+                <a16:creationId xmlns="" xmlns:a16="http://schemas.microsoft.com/office/drawing/2014/main" id="{7DCBE630-179A-4327-878B-3847467281D3}"/>
               </a:ext>
             </a:extLst>
           </p:cNvPr>
@@ -2369,7 +2286,7 @@
           <p:cNvPr id="7" name="Date Placeholder 6">
             <a:extLst>
               <a:ext uri="{FF2B5EF4-FFF2-40B4-BE49-F238E27FC236}">
-                <a16:creationId xmlns:a16="http://schemas.microsoft.com/office/drawing/2014/main" xmlns="" id="{E532529C-12B5-4D3A-A59C-5829E7D42567}"/>
+                <a16:creationId xmlns="" xmlns:a16="http://schemas.microsoft.com/office/drawing/2014/main" id="{E532529C-12B5-4D3A-A59C-5829E7D42567}"/>
               </a:ext>
             </a:extLst>
           </p:cNvPr>
@@ -2387,7 +2304,7 @@
           <a:p>
             <a:fld id="{1DF0471C-15C6-430F-A1D2-F5E2439A92BD}" type="datetimeFigureOut">
               <a:rPr lang="en-US" smtClean="0"/>
-              <a:t>12/20/2022</a:t>
+              <a:t>12/21/2022</a:t>
             </a:fld>
             <a:endParaRPr lang="en-US"/>
           </a:p>
@@ -2398,7 +2315,7 @@
           <p:cNvPr id="8" name="Footer Placeholder 7">
             <a:extLst>
               <a:ext uri="{FF2B5EF4-FFF2-40B4-BE49-F238E27FC236}">
-                <a16:creationId xmlns:a16="http://schemas.microsoft.com/office/drawing/2014/main" xmlns="" id="{D40F80FF-DCE0-4C7C-8044-57BFC37C586E}"/>
+                <a16:creationId xmlns="" xmlns:a16="http://schemas.microsoft.com/office/drawing/2014/main" id="{D40F80FF-DCE0-4C7C-8044-57BFC37C586E}"/>
               </a:ext>
             </a:extLst>
           </p:cNvPr>
@@ -2423,7 +2340,7 @@
           <p:cNvPr id="9" name="Slide Number Placeholder 8">
             <a:extLst>
               <a:ext uri="{FF2B5EF4-FFF2-40B4-BE49-F238E27FC236}">
-                <a16:creationId xmlns:a16="http://schemas.microsoft.com/office/drawing/2014/main" xmlns="" id="{C8F2F391-E1E7-4833-9AFF-E9A7A6123EA8}"/>
+                <a16:creationId xmlns="" xmlns:a16="http://schemas.microsoft.com/office/drawing/2014/main" id="{C8F2F391-E1E7-4833-9AFF-E9A7A6123EA8}"/>
               </a:ext>
             </a:extLst>
           </p:cNvPr>
@@ -2482,7 +2399,7 @@
           <p:cNvPr id="2" name="Title 1">
             <a:extLst>
               <a:ext uri="{FF2B5EF4-FFF2-40B4-BE49-F238E27FC236}">
-                <a16:creationId xmlns:a16="http://schemas.microsoft.com/office/drawing/2014/main" xmlns="" id="{6120F39E-D600-4EF7-8592-B5B8CA1FB8DE}"/>
+                <a16:creationId xmlns="" xmlns:a16="http://schemas.microsoft.com/office/drawing/2014/main" id="{6120F39E-D600-4EF7-8592-B5B8CA1FB8DE}"/>
               </a:ext>
             </a:extLst>
           </p:cNvPr>
@@ -2510,7 +2427,7 @@
           <p:cNvPr id="3" name="Date Placeholder 2">
             <a:extLst>
               <a:ext uri="{FF2B5EF4-FFF2-40B4-BE49-F238E27FC236}">
-                <a16:creationId xmlns:a16="http://schemas.microsoft.com/office/drawing/2014/main" xmlns="" id="{A5CB6ADA-F787-43FE-AC74-6E61D078A86D}"/>
+                <a16:creationId xmlns="" xmlns:a16="http://schemas.microsoft.com/office/drawing/2014/main" id="{A5CB6ADA-F787-43FE-AC74-6E61D078A86D}"/>
               </a:ext>
             </a:extLst>
           </p:cNvPr>
@@ -2528,7 +2445,7 @@
           <a:p>
             <a:fld id="{1DF0471C-15C6-430F-A1D2-F5E2439A92BD}" type="datetimeFigureOut">
               <a:rPr lang="en-US" smtClean="0"/>
-              <a:t>12/20/2022</a:t>
+              <a:t>12/21/2022</a:t>
             </a:fld>
             <a:endParaRPr lang="en-US"/>
           </a:p>
@@ -2539,7 +2456,7 @@
           <p:cNvPr id="4" name="Footer Placeholder 3">
             <a:extLst>
               <a:ext uri="{FF2B5EF4-FFF2-40B4-BE49-F238E27FC236}">
-                <a16:creationId xmlns:a16="http://schemas.microsoft.com/office/drawing/2014/main" xmlns="" id="{2EDD119A-D885-4E6D-A0EF-6EA781CCF1FA}"/>
+                <a16:creationId xmlns="" xmlns:a16="http://schemas.microsoft.com/office/drawing/2014/main" id="{2EDD119A-D885-4E6D-A0EF-6EA781CCF1FA}"/>
               </a:ext>
             </a:extLst>
           </p:cNvPr>
@@ -2564,7 +2481,7 @@
           <p:cNvPr id="5" name="Slide Number Placeholder 4">
             <a:extLst>
               <a:ext uri="{FF2B5EF4-FFF2-40B4-BE49-F238E27FC236}">
-                <a16:creationId xmlns:a16="http://schemas.microsoft.com/office/drawing/2014/main" xmlns="" id="{AE921555-C8FE-4D6F-9562-9BF9FC738B48}"/>
+                <a16:creationId xmlns="" xmlns:a16="http://schemas.microsoft.com/office/drawing/2014/main" id="{AE921555-C8FE-4D6F-9562-9BF9FC738B48}"/>
               </a:ext>
             </a:extLst>
           </p:cNvPr>
@@ -2623,7 +2540,7 @@
           <p:cNvPr id="2" name="Date Placeholder 1">
             <a:extLst>
               <a:ext uri="{FF2B5EF4-FFF2-40B4-BE49-F238E27FC236}">
-                <a16:creationId xmlns:a16="http://schemas.microsoft.com/office/drawing/2014/main" xmlns="" id="{A53558C2-1A82-4EF4-8BAA-764708819FAA}"/>
+                <a16:creationId xmlns="" xmlns:a16="http://schemas.microsoft.com/office/drawing/2014/main" id="{A53558C2-1A82-4EF4-8BAA-764708819FAA}"/>
               </a:ext>
             </a:extLst>
           </p:cNvPr>
@@ -2641,7 +2558,7 @@
           <a:p>
             <a:fld id="{1DF0471C-15C6-430F-A1D2-F5E2439A92BD}" type="datetimeFigureOut">
               <a:rPr lang="en-US" smtClean="0"/>
-              <a:t>12/20/2022</a:t>
+              <a:t>12/21/2022</a:t>
             </a:fld>
             <a:endParaRPr lang="en-US"/>
           </a:p>
@@ -2652,7 +2569,7 @@
           <p:cNvPr id="3" name="Footer Placeholder 2">
             <a:extLst>
               <a:ext uri="{FF2B5EF4-FFF2-40B4-BE49-F238E27FC236}">
-                <a16:creationId xmlns:a16="http://schemas.microsoft.com/office/drawing/2014/main" xmlns="" id="{99F012A8-7436-429E-8F24-73C22C8E09FE}"/>
+                <a16:creationId xmlns="" xmlns:a16="http://schemas.microsoft.com/office/drawing/2014/main" id="{99F012A8-7436-429E-8F24-73C22C8E09FE}"/>
               </a:ext>
             </a:extLst>
           </p:cNvPr>
@@ -2677,7 +2594,7 @@
           <p:cNvPr id="4" name="Slide Number Placeholder 3">
             <a:extLst>
               <a:ext uri="{FF2B5EF4-FFF2-40B4-BE49-F238E27FC236}">
-                <a16:creationId xmlns:a16="http://schemas.microsoft.com/office/drawing/2014/main" xmlns="" id="{6C8E85BE-B27C-485C-B2B0-085F09F7386A}"/>
+                <a16:creationId xmlns="" xmlns:a16="http://schemas.microsoft.com/office/drawing/2014/main" id="{6C8E85BE-B27C-485C-B2B0-085F09F7386A}"/>
               </a:ext>
             </a:extLst>
           </p:cNvPr>
@@ -2736,7 +2653,7 @@
           <p:cNvPr id="2" name="Title 1">
             <a:extLst>
               <a:ext uri="{FF2B5EF4-FFF2-40B4-BE49-F238E27FC236}">
-                <a16:creationId xmlns:a16="http://schemas.microsoft.com/office/drawing/2014/main" xmlns="" id="{C8EB7628-37D5-483E-BF2D-227BF43C7DD8}"/>
+                <a16:creationId xmlns="" xmlns:a16="http://schemas.microsoft.com/office/drawing/2014/main" id="{C8EB7628-37D5-483E-BF2D-227BF43C7DD8}"/>
               </a:ext>
             </a:extLst>
           </p:cNvPr>
@@ -2773,7 +2690,7 @@
           <p:cNvPr id="3" name="Content Placeholder 2">
             <a:extLst>
               <a:ext uri="{FF2B5EF4-FFF2-40B4-BE49-F238E27FC236}">
-                <a16:creationId xmlns:a16="http://schemas.microsoft.com/office/drawing/2014/main" xmlns="" id="{B6A4EEEF-9654-4C68-98D6-223555EE59D6}"/>
+                <a16:creationId xmlns="" xmlns:a16="http://schemas.microsoft.com/office/drawing/2014/main" id="{B6A4EEEF-9654-4C68-98D6-223555EE59D6}"/>
               </a:ext>
             </a:extLst>
           </p:cNvPr>
@@ -2863,7 +2780,7 @@
           <p:cNvPr id="4" name="Text Placeholder 3">
             <a:extLst>
               <a:ext uri="{FF2B5EF4-FFF2-40B4-BE49-F238E27FC236}">
-                <a16:creationId xmlns:a16="http://schemas.microsoft.com/office/drawing/2014/main" xmlns="" id="{00DA8380-51B0-4F28-85FC-067FB8CF17F4}"/>
+                <a16:creationId xmlns="" xmlns:a16="http://schemas.microsoft.com/office/drawing/2014/main" id="{00DA8380-51B0-4F28-85FC-067FB8CF17F4}"/>
               </a:ext>
             </a:extLst>
           </p:cNvPr>
@@ -2934,7 +2851,7 @@
           <p:cNvPr id="5" name="Date Placeholder 4">
             <a:extLst>
               <a:ext uri="{FF2B5EF4-FFF2-40B4-BE49-F238E27FC236}">
-                <a16:creationId xmlns:a16="http://schemas.microsoft.com/office/drawing/2014/main" xmlns="" id="{B43A1E1A-A745-4419-94DF-F1664473D5F9}"/>
+                <a16:creationId xmlns="" xmlns:a16="http://schemas.microsoft.com/office/drawing/2014/main" id="{B43A1E1A-A745-4419-94DF-F1664473D5F9}"/>
               </a:ext>
             </a:extLst>
           </p:cNvPr>
@@ -2952,7 +2869,7 @@
           <a:p>
             <a:fld id="{1DF0471C-15C6-430F-A1D2-F5E2439A92BD}" type="datetimeFigureOut">
               <a:rPr lang="en-US" smtClean="0"/>
-              <a:t>12/20/2022</a:t>
+              <a:t>12/21/2022</a:t>
             </a:fld>
             <a:endParaRPr lang="en-US"/>
           </a:p>
@@ -2963,7 +2880,7 @@
           <p:cNvPr id="6" name="Footer Placeholder 5">
             <a:extLst>
               <a:ext uri="{FF2B5EF4-FFF2-40B4-BE49-F238E27FC236}">
-                <a16:creationId xmlns:a16="http://schemas.microsoft.com/office/drawing/2014/main" xmlns="" id="{BE7AF249-9AA1-4A7B-ABEC-1DA340BA4725}"/>
+                <a16:creationId xmlns="" xmlns:a16="http://schemas.microsoft.com/office/drawing/2014/main" id="{BE7AF249-9AA1-4A7B-ABEC-1DA340BA4725}"/>
               </a:ext>
             </a:extLst>
           </p:cNvPr>
@@ -2988,7 +2905,7 @@
           <p:cNvPr id="7" name="Slide Number Placeholder 6">
             <a:extLst>
               <a:ext uri="{FF2B5EF4-FFF2-40B4-BE49-F238E27FC236}">
-                <a16:creationId xmlns:a16="http://schemas.microsoft.com/office/drawing/2014/main" xmlns="" id="{21A5C071-8445-4D81-8E03-FE52BB467EF3}"/>
+                <a16:creationId xmlns="" xmlns:a16="http://schemas.microsoft.com/office/drawing/2014/main" id="{21A5C071-8445-4D81-8E03-FE52BB467EF3}"/>
               </a:ext>
             </a:extLst>
           </p:cNvPr>
@@ -3047,7 +2964,7 @@
           <p:cNvPr id="2" name="Title 1">
             <a:extLst>
               <a:ext uri="{FF2B5EF4-FFF2-40B4-BE49-F238E27FC236}">
-                <a16:creationId xmlns:a16="http://schemas.microsoft.com/office/drawing/2014/main" xmlns="" id="{0E3F1C17-470B-42F4-9A17-35826AA08A57}"/>
+                <a16:creationId xmlns="" xmlns:a16="http://schemas.microsoft.com/office/drawing/2014/main" id="{0E3F1C17-470B-42F4-9A17-35826AA08A57}"/>
               </a:ext>
             </a:extLst>
           </p:cNvPr>
@@ -3084,7 +3001,7 @@
           <p:cNvPr id="3" name="Picture Placeholder 2">
             <a:extLst>
               <a:ext uri="{FF2B5EF4-FFF2-40B4-BE49-F238E27FC236}">
-                <a16:creationId xmlns:a16="http://schemas.microsoft.com/office/drawing/2014/main" xmlns="" id="{845AFDA6-55BA-4CCC-A3D1-0D28903D9F65}"/>
+                <a16:creationId xmlns="" xmlns:a16="http://schemas.microsoft.com/office/drawing/2014/main" id="{845AFDA6-55BA-4CCC-A3D1-0D28903D9F65}"/>
               </a:ext>
             </a:extLst>
           </p:cNvPr>
@@ -3151,7 +3068,7 @@
           <p:cNvPr id="4" name="Text Placeholder 3">
             <a:extLst>
               <a:ext uri="{FF2B5EF4-FFF2-40B4-BE49-F238E27FC236}">
-                <a16:creationId xmlns:a16="http://schemas.microsoft.com/office/drawing/2014/main" xmlns="" id="{42A2F931-34E2-4203-BC74-DBEDFA5F7D5E}"/>
+                <a16:creationId xmlns="" xmlns:a16="http://schemas.microsoft.com/office/drawing/2014/main" id="{42A2F931-34E2-4203-BC74-DBEDFA5F7D5E}"/>
               </a:ext>
             </a:extLst>
           </p:cNvPr>
@@ -3222,7 +3139,7 @@
           <p:cNvPr id="5" name="Date Placeholder 4">
             <a:extLst>
               <a:ext uri="{FF2B5EF4-FFF2-40B4-BE49-F238E27FC236}">
-                <a16:creationId xmlns:a16="http://schemas.microsoft.com/office/drawing/2014/main" xmlns="" id="{0AAC29A3-3865-4E50-8B48-16A0F74C0291}"/>
+                <a16:creationId xmlns="" xmlns:a16="http://schemas.microsoft.com/office/drawing/2014/main" id="{0AAC29A3-3865-4E50-8B48-16A0F74C0291}"/>
               </a:ext>
             </a:extLst>
           </p:cNvPr>
@@ -3240,7 +3157,7 @@
           <a:p>
             <a:fld id="{1DF0471C-15C6-430F-A1D2-F5E2439A92BD}" type="datetimeFigureOut">
               <a:rPr lang="en-US" smtClean="0"/>
-              <a:t>12/20/2022</a:t>
+              <a:t>12/21/2022</a:t>
             </a:fld>
             <a:endParaRPr lang="en-US"/>
           </a:p>
@@ -3251,7 +3168,7 @@
           <p:cNvPr id="6" name="Footer Placeholder 5">
             <a:extLst>
               <a:ext uri="{FF2B5EF4-FFF2-40B4-BE49-F238E27FC236}">
-                <a16:creationId xmlns:a16="http://schemas.microsoft.com/office/drawing/2014/main" xmlns="" id="{BDC00C21-8A04-424A-8FA8-1ECDEB8CD4CD}"/>
+                <a16:creationId xmlns="" xmlns:a16="http://schemas.microsoft.com/office/drawing/2014/main" id="{BDC00C21-8A04-424A-8FA8-1ECDEB8CD4CD}"/>
               </a:ext>
             </a:extLst>
           </p:cNvPr>
@@ -3276,7 +3193,7 @@
           <p:cNvPr id="7" name="Slide Number Placeholder 6">
             <a:extLst>
               <a:ext uri="{FF2B5EF4-FFF2-40B4-BE49-F238E27FC236}">
-                <a16:creationId xmlns:a16="http://schemas.microsoft.com/office/drawing/2014/main" xmlns="" id="{F42CD0FE-C8F0-4EAA-94BC-6E82306B6C79}"/>
+                <a16:creationId xmlns="" xmlns:a16="http://schemas.microsoft.com/office/drawing/2014/main" id="{F42CD0FE-C8F0-4EAA-94BC-6E82306B6C79}"/>
               </a:ext>
             </a:extLst>
           </p:cNvPr>
@@ -3340,7 +3257,7 @@
           <p:cNvPr id="2" name="Title Placeholder 1">
             <a:extLst>
               <a:ext uri="{FF2B5EF4-FFF2-40B4-BE49-F238E27FC236}">
-                <a16:creationId xmlns:a16="http://schemas.microsoft.com/office/drawing/2014/main" xmlns="" id="{940A7DD8-7706-4514-90E2-C24E40A94D91}"/>
+                <a16:creationId xmlns="" xmlns:a16="http://schemas.microsoft.com/office/drawing/2014/main" id="{940A7DD8-7706-4514-90E2-C24E40A94D91}"/>
               </a:ext>
             </a:extLst>
           </p:cNvPr>
@@ -3378,7 +3295,7 @@
           <p:cNvPr id="3" name="Text Placeholder 2">
             <a:extLst>
               <a:ext uri="{FF2B5EF4-FFF2-40B4-BE49-F238E27FC236}">
-                <a16:creationId xmlns:a16="http://schemas.microsoft.com/office/drawing/2014/main" xmlns="" id="{3981306D-1561-42BE-A13B-EA5C01B087BD}"/>
+                <a16:creationId xmlns="" xmlns:a16="http://schemas.microsoft.com/office/drawing/2014/main" id="{3981306D-1561-42BE-A13B-EA5C01B087BD}"/>
               </a:ext>
             </a:extLst>
           </p:cNvPr>
@@ -3445,7 +3362,7 @@
           <p:cNvPr id="4" name="Date Placeholder 3">
             <a:extLst>
               <a:ext uri="{FF2B5EF4-FFF2-40B4-BE49-F238E27FC236}">
-                <a16:creationId xmlns:a16="http://schemas.microsoft.com/office/drawing/2014/main" xmlns="" id="{97FBF928-F762-45BA-8F1B-7BF281188E37}"/>
+                <a16:creationId xmlns="" xmlns:a16="http://schemas.microsoft.com/office/drawing/2014/main" id="{97FBF928-F762-45BA-8F1B-7BF281188E37}"/>
               </a:ext>
             </a:extLst>
           </p:cNvPr>
@@ -3481,7 +3398,7 @@
           <a:p>
             <a:fld id="{1DF0471C-15C6-430F-A1D2-F5E2439A92BD}" type="datetimeFigureOut">
               <a:rPr lang="en-US" smtClean="0"/>
-              <a:t>12/20/2022</a:t>
+              <a:t>12/21/2022</a:t>
             </a:fld>
             <a:endParaRPr lang="en-US"/>
           </a:p>
@@ -3492,7 +3409,7 @@
           <p:cNvPr id="5" name="Footer Placeholder 4">
             <a:extLst>
               <a:ext uri="{FF2B5EF4-FFF2-40B4-BE49-F238E27FC236}">
-                <a16:creationId xmlns:a16="http://schemas.microsoft.com/office/drawing/2014/main" xmlns="" id="{8BE2224F-E8B6-4AA6-A581-266221933E49}"/>
+                <a16:creationId xmlns="" xmlns:a16="http://schemas.microsoft.com/office/drawing/2014/main" id="{8BE2224F-E8B6-4AA6-A581-266221933E49}"/>
               </a:ext>
             </a:extLst>
           </p:cNvPr>
@@ -3535,7 +3452,7 @@
           <p:cNvPr id="6" name="Slide Number Placeholder 5">
             <a:extLst>
               <a:ext uri="{FF2B5EF4-FFF2-40B4-BE49-F238E27FC236}">
-                <a16:creationId xmlns:a16="http://schemas.microsoft.com/office/drawing/2014/main" xmlns="" id="{16D3250F-2726-4163-8DC1-97CCB3BC9E2C}"/>
+                <a16:creationId xmlns="" xmlns:a16="http://schemas.microsoft.com/office/drawing/2014/main" id="{16D3250F-2726-4163-8DC1-97CCB3BC9E2C}"/>
               </a:ext>
             </a:extLst>
           </p:cNvPr>
@@ -3582,7 +3499,7 @@
           <p:cNvPr id="7" name="MSIPCMContentMarking" descr="{&quot;HashCode&quot;:1596673254,&quot;Placement&quot;:&quot;Footer&quot;,&quot;Top&quot;:524.1047,&quot;Left&quot;:923.827,&quot;SlideWidth&quot;:960,&quot;SlideHeight&quot;:540}">
             <a:extLst>
               <a:ext uri="{FF2B5EF4-FFF2-40B4-BE49-F238E27FC236}">
-                <a16:creationId xmlns:a16="http://schemas.microsoft.com/office/drawing/2014/main" xmlns="" id="{301E2244-036C-431A-A644-1C4D02F8E5C7}"/>
+                <a16:creationId xmlns="" xmlns:a16="http://schemas.microsoft.com/office/drawing/2014/main" id="{301E2244-036C-431A-A644-1C4D02F8E5C7}"/>
               </a:ext>
             </a:extLst>
           </p:cNvPr>
@@ -3985,7 +3902,7 @@
           <p:cNvPr id="10" name="Rectangle: Rounded Corners 9">
             <a:extLst>
               <a:ext uri="{FF2B5EF4-FFF2-40B4-BE49-F238E27FC236}">
-                <a16:creationId xmlns:a16="http://schemas.microsoft.com/office/drawing/2014/main" xmlns="" id="{280D6242-586B-4726-BC93-86C917CE8E52}"/>
+                <a16:creationId xmlns="" xmlns:a16="http://schemas.microsoft.com/office/drawing/2014/main" id="{280D6242-586B-4726-BC93-86C917CE8E52}"/>
               </a:ext>
             </a:extLst>
           </p:cNvPr>
@@ -4041,7 +3958,7 @@
           <p:cNvPr id="11" name="Rectangle: Rounded Corners 10">
             <a:extLst>
               <a:ext uri="{FF2B5EF4-FFF2-40B4-BE49-F238E27FC236}">
-                <a16:creationId xmlns:a16="http://schemas.microsoft.com/office/drawing/2014/main" xmlns="" id="{1AFD95DB-EE82-4014-8431-753B408C671F}"/>
+                <a16:creationId xmlns="" xmlns:a16="http://schemas.microsoft.com/office/drawing/2014/main" id="{1AFD95DB-EE82-4014-8431-753B408C671F}"/>
               </a:ext>
             </a:extLst>
           </p:cNvPr>
@@ -4117,7 +4034,7 @@
           <p:cNvPr id="12" name="Rectangle: Rounded Corners 11">
             <a:extLst>
               <a:ext uri="{FF2B5EF4-FFF2-40B4-BE49-F238E27FC236}">
-                <a16:creationId xmlns:a16="http://schemas.microsoft.com/office/drawing/2014/main" xmlns="" id="{5A1BEE6C-84E1-4224-B447-1AC8A888AAC0}"/>
+                <a16:creationId xmlns="" xmlns:a16="http://schemas.microsoft.com/office/drawing/2014/main" id="{5A1BEE6C-84E1-4224-B447-1AC8A888AAC0}"/>
               </a:ext>
             </a:extLst>
           </p:cNvPr>
@@ -4177,7 +4094,7 @@
           <p:cNvPr id="13" name="Rectangle: Rounded Corners 12">
             <a:extLst>
               <a:ext uri="{FF2B5EF4-FFF2-40B4-BE49-F238E27FC236}">
-                <a16:creationId xmlns:a16="http://schemas.microsoft.com/office/drawing/2014/main" xmlns="" id="{C39141B1-20FA-423F-B75B-5471535624C8}"/>
+                <a16:creationId xmlns="" xmlns:a16="http://schemas.microsoft.com/office/drawing/2014/main" id="{C39141B1-20FA-423F-B75B-5471535624C8}"/>
               </a:ext>
             </a:extLst>
           </p:cNvPr>
@@ -4229,7 +4146,7 @@
           <p:cNvPr id="14" name="Rectangle: Rounded Corners 13">
             <a:extLst>
               <a:ext uri="{FF2B5EF4-FFF2-40B4-BE49-F238E27FC236}">
-                <a16:creationId xmlns:a16="http://schemas.microsoft.com/office/drawing/2014/main" xmlns="" id="{81CE814C-51C2-45D8-9AA1-5DF8C38665AD}"/>
+                <a16:creationId xmlns="" xmlns:a16="http://schemas.microsoft.com/office/drawing/2014/main" id="{81CE814C-51C2-45D8-9AA1-5DF8C38665AD}"/>
               </a:ext>
             </a:extLst>
           </p:cNvPr>
@@ -4289,7 +4206,7 @@
           <p:cNvPr id="15" name="Rectangle: Rounded Corners 14">
             <a:extLst>
               <a:ext uri="{FF2B5EF4-FFF2-40B4-BE49-F238E27FC236}">
-                <a16:creationId xmlns:a16="http://schemas.microsoft.com/office/drawing/2014/main" xmlns="" id="{E25DC19F-6B3A-4545-BDB8-13C5481B9137}"/>
+                <a16:creationId xmlns="" xmlns:a16="http://schemas.microsoft.com/office/drawing/2014/main" id="{E25DC19F-6B3A-4545-BDB8-13C5481B9137}"/>
               </a:ext>
             </a:extLst>
           </p:cNvPr>
@@ -4341,7 +4258,7 @@
           <p:cNvPr id="3" name="Straight Arrow Connector 2">
             <a:extLst>
               <a:ext uri="{FF2B5EF4-FFF2-40B4-BE49-F238E27FC236}">
-                <a16:creationId xmlns:a16="http://schemas.microsoft.com/office/drawing/2014/main" xmlns="" id="{DA11DF66-EB94-42A7-A712-9922433548FE}"/>
+                <a16:creationId xmlns="" xmlns:a16="http://schemas.microsoft.com/office/drawing/2014/main" id="{DA11DF66-EB94-42A7-A712-9922433548FE}"/>
               </a:ext>
             </a:extLst>
           </p:cNvPr>
@@ -4383,7 +4300,7 @@
           <p:cNvPr id="16" name="TextBox 15">
             <a:extLst>
               <a:ext uri="{FF2B5EF4-FFF2-40B4-BE49-F238E27FC236}">
-                <a16:creationId xmlns:a16="http://schemas.microsoft.com/office/drawing/2014/main" xmlns="" id="{9ADF6F6C-444B-4360-9821-C523FAFE1E57}"/>
+                <a16:creationId xmlns="" xmlns:a16="http://schemas.microsoft.com/office/drawing/2014/main" id="{9ADF6F6C-444B-4360-9821-C523FAFE1E57}"/>
               </a:ext>
             </a:extLst>
           </p:cNvPr>
@@ -4423,7 +4340,7 @@
           <p:cNvPr id="17" name="Straight Arrow Connector 16">
             <a:extLst>
               <a:ext uri="{FF2B5EF4-FFF2-40B4-BE49-F238E27FC236}">
-                <a16:creationId xmlns:a16="http://schemas.microsoft.com/office/drawing/2014/main" xmlns="" id="{EB1F8E18-9264-4C4C-A388-691903EE6285}"/>
+                <a16:creationId xmlns="" xmlns:a16="http://schemas.microsoft.com/office/drawing/2014/main" id="{EB1F8E18-9264-4C4C-A388-691903EE6285}"/>
               </a:ext>
             </a:extLst>
           </p:cNvPr>
@@ -4466,7 +4383,7 @@
           <p:cNvPr id="18" name="Straight Arrow Connector 17">
             <a:extLst>
               <a:ext uri="{FF2B5EF4-FFF2-40B4-BE49-F238E27FC236}">
-                <a16:creationId xmlns:a16="http://schemas.microsoft.com/office/drawing/2014/main" xmlns="" id="{6EBEDE39-1CAE-42E5-98DB-1687FB9FF878}"/>
+                <a16:creationId xmlns="" xmlns:a16="http://schemas.microsoft.com/office/drawing/2014/main" id="{6EBEDE39-1CAE-42E5-98DB-1687FB9FF878}"/>
               </a:ext>
             </a:extLst>
           </p:cNvPr>
@@ -4505,7 +4422,7 @@
           <p:cNvPr id="20" name="TextBox 19">
             <a:extLst>
               <a:ext uri="{FF2B5EF4-FFF2-40B4-BE49-F238E27FC236}">
-                <a16:creationId xmlns:a16="http://schemas.microsoft.com/office/drawing/2014/main" xmlns="" id="{C0DE93DA-4E5B-4155-9045-9C20A40BBD7D}"/>
+                <a16:creationId xmlns="" xmlns:a16="http://schemas.microsoft.com/office/drawing/2014/main" id="{C0DE93DA-4E5B-4155-9045-9C20A40BBD7D}"/>
               </a:ext>
             </a:extLst>
           </p:cNvPr>
@@ -4540,7 +4457,7 @@
           <p:cNvPr id="21" name="Straight Arrow Connector 20">
             <a:extLst>
               <a:ext uri="{FF2B5EF4-FFF2-40B4-BE49-F238E27FC236}">
-                <a16:creationId xmlns:a16="http://schemas.microsoft.com/office/drawing/2014/main" xmlns="" id="{D8CA6A16-C24E-403F-92DA-24201808389D}"/>
+                <a16:creationId xmlns="" xmlns:a16="http://schemas.microsoft.com/office/drawing/2014/main" id="{D8CA6A16-C24E-403F-92DA-24201808389D}"/>
               </a:ext>
             </a:extLst>
           </p:cNvPr>
@@ -4582,7 +4499,7 @@
           <p:cNvPr id="22" name="Straight Arrow Connector 21">
             <a:extLst>
               <a:ext uri="{FF2B5EF4-FFF2-40B4-BE49-F238E27FC236}">
-                <a16:creationId xmlns:a16="http://schemas.microsoft.com/office/drawing/2014/main" xmlns="" id="{1AF07EEB-8486-4019-9959-3F0CBF0C6A66}"/>
+                <a16:creationId xmlns="" xmlns:a16="http://schemas.microsoft.com/office/drawing/2014/main" id="{1AF07EEB-8486-4019-9959-3F0CBF0C6A66}"/>
               </a:ext>
             </a:extLst>
           </p:cNvPr>
@@ -4623,7 +4540,7 @@
           <p:cNvPr id="23" name="TextBox 22">
             <a:extLst>
               <a:ext uri="{FF2B5EF4-FFF2-40B4-BE49-F238E27FC236}">
-                <a16:creationId xmlns:a16="http://schemas.microsoft.com/office/drawing/2014/main" xmlns="" id="{452BE8F3-0295-4B15-80B4-B2026225BC92}"/>
+                <a16:creationId xmlns="" xmlns:a16="http://schemas.microsoft.com/office/drawing/2014/main" id="{452BE8F3-0295-4B15-80B4-B2026225BC92}"/>
               </a:ext>
             </a:extLst>
           </p:cNvPr>
@@ -4708,730 +4625,7 @@
           <p:cNvPr id="23" name="TextBox 22">
             <a:extLst>
               <a:ext uri="{FF2B5EF4-FFF2-40B4-BE49-F238E27FC236}">
-                <a16:creationId xmlns:a16="http://schemas.microsoft.com/office/drawing/2014/main" xmlns="" id="{452BE8F3-0295-4B15-80B4-B2026225BC92}"/>
-              </a:ext>
-            </a:extLst>
-          </p:cNvPr>
-          <p:cNvSpPr txBox="1"/>
-          <p:nvPr/>
-        </p:nvSpPr>
-        <p:spPr>
-          <a:xfrm>
-            <a:off x="1807617" y="587948"/>
-            <a:ext cx="1914038" cy="707886"/>
-          </a:xfrm>
-          <a:prstGeom prst="rect">
-            <a:avLst/>
-          </a:prstGeom>
-          <a:noFill/>
-        </p:spPr>
-        <p:txBody>
-          <a:bodyPr wrap="square">
-            <a:spAutoFit/>
-          </a:bodyPr>
-          <a:lstStyle/>
-          <a:p>
-            <a:pPr algn="ctr"/>
-            <a:r>
-              <a:rPr lang="en-US" sz="2000" dirty="0" smtClean="0">
-                <a:solidFill>
-                  <a:srgbClr val="002060"/>
-                </a:solidFill>
-              </a:rPr>
-              <a:t>Executed in </a:t>
-            </a:r>
-          </a:p>
-          <a:p>
-            <a:pPr algn="ctr"/>
-            <a:r>
-              <a:rPr lang="en-US" sz="2000" dirty="0" smtClean="0">
-                <a:solidFill>
-                  <a:srgbClr val="002060"/>
-                </a:solidFill>
-              </a:rPr>
-              <a:t>Transaction T1</a:t>
-            </a:r>
-            <a:endParaRPr lang="en-US" sz="2000" dirty="0"/>
-          </a:p>
-        </p:txBody>
-      </p:sp>
-      <p:sp>
-        <p:nvSpPr>
-          <p:cNvPr id="19" name="Rectangle: Rounded Corners 11">
-            <a:extLst>
-              <a:ext uri="{FF2B5EF4-FFF2-40B4-BE49-F238E27FC236}">
-                <a16:creationId xmlns:a16="http://schemas.microsoft.com/office/drawing/2014/main" xmlns="" id="{5A1BEE6C-84E1-4224-B447-1AC8A888AAC0}"/>
-              </a:ext>
-            </a:extLst>
-          </p:cNvPr>
-          <p:cNvSpPr/>
-          <p:nvPr/>
-        </p:nvSpPr>
-        <p:spPr>
-          <a:xfrm>
-            <a:off x="1331740" y="1503040"/>
-            <a:ext cx="2909334" cy="519987"/>
-          </a:xfrm>
-          <a:prstGeom prst="roundRect">
-            <a:avLst/>
-          </a:prstGeom>
-          <a:noFill/>
-        </p:spPr>
-        <p:style>
-          <a:lnRef idx="2">
-            <a:schemeClr val="accent1">
-              <a:shade val="50000"/>
-            </a:schemeClr>
-          </a:lnRef>
-          <a:fillRef idx="1">
-            <a:schemeClr val="accent1"/>
-          </a:fillRef>
-          <a:effectRef idx="0">
-            <a:schemeClr val="accent1"/>
-          </a:effectRef>
-          <a:fontRef idx="minor">
-            <a:schemeClr val="lt1"/>
-          </a:fontRef>
-        </p:style>
-        <p:txBody>
-          <a:bodyPr rtlCol="0" anchor="ctr"/>
-          <a:lstStyle/>
-          <a:p>
-            <a:r>
-              <a:rPr lang="en-US" sz="900" b="1" dirty="0" smtClean="0">
-                <a:solidFill>
-                  <a:schemeClr val="bg2">
-                    <a:lumMod val="75000"/>
-                  </a:schemeClr>
-                </a:solidFill>
-              </a:rPr>
-              <a:t>@Transactional</a:t>
-            </a:r>
-            <a:r>
-              <a:rPr lang="en-US" sz="900" dirty="0" smtClean="0">
-                <a:solidFill>
-                  <a:schemeClr val="tx1"/>
-                </a:solidFill>
-              </a:rPr>
-              <a:t>(propagation </a:t>
-            </a:r>
-            <a:r>
-              <a:rPr lang="en-US" sz="900" dirty="0">
-                <a:solidFill>
-                  <a:schemeClr val="tx1"/>
-                </a:solidFill>
-              </a:rPr>
-              <a:t>= Propagation.</a:t>
-            </a:r>
-            <a:r>
-              <a:rPr lang="en-US" sz="900" b="1" i="1" dirty="0">
-                <a:solidFill>
-                  <a:srgbClr val="0000FF"/>
-                </a:solidFill>
-              </a:rPr>
-              <a:t>REQUIRED</a:t>
-            </a:r>
-            <a:r>
-              <a:rPr lang="en-US" sz="900" i="1" dirty="0" smtClean="0">
-                <a:solidFill>
-                  <a:schemeClr val="tx1"/>
-                </a:solidFill>
-              </a:rPr>
-              <a:t>)</a:t>
-            </a:r>
-          </a:p>
-          <a:p>
-            <a:r>
-              <a:rPr lang="en-US" sz="900" b="1" dirty="0" smtClean="0">
-                <a:solidFill>
-                  <a:srgbClr val="FF0000"/>
-                </a:solidFill>
-              </a:rPr>
-              <a:t>public</a:t>
-            </a:r>
-            <a:r>
-              <a:rPr lang="en-US" sz="900" dirty="0" smtClean="0">
-                <a:solidFill>
-                  <a:srgbClr val="FF0000"/>
-                </a:solidFill>
-              </a:rPr>
-              <a:t> </a:t>
-            </a:r>
-            <a:r>
-              <a:rPr lang="en-US" sz="900" dirty="0">
-                <a:solidFill>
-                  <a:schemeClr val="tx1"/>
-                </a:solidFill>
-              </a:rPr>
-              <a:t>Employee addEmployee(Employee employee) {</a:t>
-            </a:r>
-          </a:p>
-          <a:p>
-            <a:r>
-              <a:rPr lang="en-US" sz="900" dirty="0" smtClean="0">
-                <a:solidFill>
-                  <a:schemeClr val="tx1"/>
-                </a:solidFill>
-              </a:rPr>
-              <a:t>}</a:t>
-            </a:r>
-            <a:endParaRPr lang="en-US" sz="900" dirty="0">
-              <a:solidFill>
-                <a:schemeClr val="tx1"/>
-              </a:solidFill>
-            </a:endParaRPr>
-          </a:p>
-        </p:txBody>
-      </p:sp>
-      <p:sp>
-        <p:nvSpPr>
-          <p:cNvPr id="24" name="Rectangle: Rounded Corners 14">
-            <a:extLst>
-              <a:ext uri="{FF2B5EF4-FFF2-40B4-BE49-F238E27FC236}">
-                <a16:creationId xmlns:a16="http://schemas.microsoft.com/office/drawing/2014/main" xmlns="" id="{E25DC19F-6B3A-4545-BDB8-13C5481B9137}"/>
-              </a:ext>
-            </a:extLst>
-          </p:cNvPr>
-          <p:cNvSpPr/>
-          <p:nvPr/>
-        </p:nvSpPr>
-        <p:spPr>
-          <a:xfrm>
-            <a:off x="1123407" y="1295834"/>
-            <a:ext cx="1202410" cy="212228"/>
-          </a:xfrm>
-          <a:prstGeom prst="roundRect">
-            <a:avLst/>
-          </a:prstGeom>
-          <a:solidFill>
-            <a:srgbClr val="FFC000"/>
-          </a:solidFill>
-        </p:spPr>
-        <p:style>
-          <a:lnRef idx="2">
-            <a:schemeClr val="accent1">
-              <a:shade val="50000"/>
-            </a:schemeClr>
-          </a:lnRef>
-          <a:fillRef idx="1">
-            <a:schemeClr val="accent1"/>
-          </a:fillRef>
-          <a:effectRef idx="0">
-            <a:schemeClr val="accent1"/>
-          </a:effectRef>
-          <a:fontRef idx="minor">
-            <a:schemeClr val="lt1"/>
-          </a:fontRef>
-        </p:style>
-        <p:txBody>
-          <a:bodyPr rtlCol="0" anchor="ctr"/>
-          <a:lstStyle/>
-          <a:p>
-            <a:pPr algn="ctr"/>
-            <a:r>
-              <a:rPr lang="en-US" sz="900" dirty="0" smtClean="0"/>
-              <a:t>Begin Transaction T1</a:t>
-            </a:r>
-            <a:endParaRPr lang="en-US" sz="900" dirty="0"/>
-          </a:p>
-        </p:txBody>
-      </p:sp>
-      <p:sp>
-        <p:nvSpPr>
-          <p:cNvPr id="6" name="Oval 5"/>
-          <p:cNvSpPr/>
-          <p:nvPr/>
-        </p:nvSpPr>
-        <p:spPr>
-          <a:xfrm>
-            <a:off x="905691" y="568641"/>
-            <a:ext cx="3483428" cy="2313896"/>
-          </a:xfrm>
-          <a:prstGeom prst="ellipse">
-            <a:avLst/>
-          </a:prstGeom>
-          <a:noFill/>
-        </p:spPr>
-        <p:style>
-          <a:lnRef idx="2">
-            <a:schemeClr val="accent1">
-              <a:shade val="50000"/>
-            </a:schemeClr>
-          </a:lnRef>
-          <a:fillRef idx="1">
-            <a:schemeClr val="accent1"/>
-          </a:fillRef>
-          <a:effectRef idx="0">
-            <a:schemeClr val="accent1"/>
-          </a:effectRef>
-          <a:fontRef idx="minor">
-            <a:schemeClr val="lt1"/>
-          </a:fontRef>
-        </p:style>
-        <p:txBody>
-          <a:bodyPr rtlCol="0" anchor="ctr"/>
-          <a:lstStyle/>
-          <a:p>
-            <a:pPr algn="ctr"/>
-            <a:endParaRPr lang="en-US"/>
-          </a:p>
-        </p:txBody>
-      </p:sp>
-      <p:pic>
-        <p:nvPicPr>
-          <p:cNvPr id="26" name="Picture 25"/>
-          <p:cNvPicPr>
-            <a:picLocks noChangeAspect="1"/>
-          </p:cNvPicPr>
-          <p:nvPr/>
-        </p:nvPicPr>
-        <p:blipFill>
-          <a:blip r:embed="rId3"/>
-          <a:stretch>
-            <a:fillRect/>
-          </a:stretch>
-        </p:blipFill>
-        <p:spPr>
-          <a:xfrm>
-            <a:off x="603069" y="3295062"/>
-            <a:ext cx="9296400" cy="5219700"/>
-          </a:xfrm>
-          <a:prstGeom prst="rect">
-            <a:avLst/>
-          </a:prstGeom>
-        </p:spPr>
-      </p:pic>
-      <p:sp>
-        <p:nvSpPr>
-          <p:cNvPr id="27" name="Rectangle: Rounded Corners 14">
-            <a:extLst>
-              <a:ext uri="{FF2B5EF4-FFF2-40B4-BE49-F238E27FC236}">
-                <a16:creationId xmlns:a16="http://schemas.microsoft.com/office/drawing/2014/main" xmlns="" id="{E25DC19F-6B3A-4545-BDB8-13C5481B9137}"/>
-              </a:ext>
-            </a:extLst>
-          </p:cNvPr>
-          <p:cNvSpPr/>
-          <p:nvPr/>
-        </p:nvSpPr>
-        <p:spPr>
-          <a:xfrm>
-            <a:off x="1123407" y="2026614"/>
-            <a:ext cx="1202410" cy="212228"/>
-          </a:xfrm>
-          <a:prstGeom prst="roundRect">
-            <a:avLst/>
-          </a:prstGeom>
-          <a:solidFill>
-            <a:srgbClr val="FFC000"/>
-          </a:solidFill>
-        </p:spPr>
-        <p:style>
-          <a:lnRef idx="2">
-            <a:schemeClr val="accent1">
-              <a:shade val="50000"/>
-            </a:schemeClr>
-          </a:lnRef>
-          <a:fillRef idx="1">
-            <a:schemeClr val="accent1"/>
-          </a:fillRef>
-          <a:effectRef idx="0">
-            <a:schemeClr val="accent1"/>
-          </a:effectRef>
-          <a:fontRef idx="minor">
-            <a:schemeClr val="lt1"/>
-          </a:fontRef>
-        </p:style>
-        <p:txBody>
-          <a:bodyPr rtlCol="0" anchor="ctr"/>
-          <a:lstStyle/>
-          <a:p>
-            <a:pPr algn="ctr"/>
-            <a:r>
-              <a:rPr lang="en-US" sz="900" dirty="0" smtClean="0"/>
-              <a:t>End Transaction T1</a:t>
-            </a:r>
-            <a:endParaRPr lang="en-US" sz="900" dirty="0"/>
-          </a:p>
-        </p:txBody>
-      </p:sp>
-      <p:sp>
-        <p:nvSpPr>
-          <p:cNvPr id="28" name="TextBox 27">
-            <a:extLst>
-              <a:ext uri="{FF2B5EF4-FFF2-40B4-BE49-F238E27FC236}">
-                <a16:creationId xmlns:a16="http://schemas.microsoft.com/office/drawing/2014/main" xmlns="" id="{452BE8F3-0295-4B15-80B4-B2026225BC92}"/>
-              </a:ext>
-            </a:extLst>
-          </p:cNvPr>
-          <p:cNvSpPr txBox="1"/>
-          <p:nvPr/>
-        </p:nvSpPr>
-        <p:spPr>
-          <a:xfrm>
-            <a:off x="6636520" y="587948"/>
-            <a:ext cx="1914038" cy="707886"/>
-          </a:xfrm>
-          <a:prstGeom prst="rect">
-            <a:avLst/>
-          </a:prstGeom>
-          <a:noFill/>
-        </p:spPr>
-        <p:txBody>
-          <a:bodyPr wrap="square">
-            <a:spAutoFit/>
-          </a:bodyPr>
-          <a:lstStyle/>
-          <a:p>
-            <a:pPr algn="ctr"/>
-            <a:r>
-              <a:rPr lang="en-US" sz="2000" dirty="0" smtClean="0">
-                <a:solidFill>
-                  <a:srgbClr val="002060"/>
-                </a:solidFill>
-              </a:rPr>
-              <a:t>Executed in </a:t>
-            </a:r>
-          </a:p>
-          <a:p>
-            <a:pPr algn="ctr"/>
-            <a:r>
-              <a:rPr lang="en-US" sz="2000" dirty="0" smtClean="0">
-                <a:solidFill>
-                  <a:srgbClr val="002060"/>
-                </a:solidFill>
-              </a:rPr>
-              <a:t>Transaction T1</a:t>
-            </a:r>
-            <a:endParaRPr lang="en-US" sz="2000" dirty="0"/>
-          </a:p>
-        </p:txBody>
-      </p:sp>
-      <p:sp>
-        <p:nvSpPr>
-          <p:cNvPr id="29" name="Rectangle: Rounded Corners 11">
-            <a:extLst>
-              <a:ext uri="{FF2B5EF4-FFF2-40B4-BE49-F238E27FC236}">
-                <a16:creationId xmlns:a16="http://schemas.microsoft.com/office/drawing/2014/main" xmlns="" id="{5A1BEE6C-84E1-4224-B447-1AC8A888AAC0}"/>
-              </a:ext>
-            </a:extLst>
-          </p:cNvPr>
-          <p:cNvSpPr/>
-          <p:nvPr/>
-        </p:nvSpPr>
-        <p:spPr>
-          <a:xfrm>
-            <a:off x="6160643" y="1503040"/>
-            <a:ext cx="2909334" cy="519987"/>
-          </a:xfrm>
-          <a:prstGeom prst="roundRect">
-            <a:avLst/>
-          </a:prstGeom>
-          <a:noFill/>
-        </p:spPr>
-        <p:style>
-          <a:lnRef idx="2">
-            <a:schemeClr val="accent1">
-              <a:shade val="50000"/>
-            </a:schemeClr>
-          </a:lnRef>
-          <a:fillRef idx="1">
-            <a:schemeClr val="accent1"/>
-          </a:fillRef>
-          <a:effectRef idx="0">
-            <a:schemeClr val="accent1"/>
-          </a:effectRef>
-          <a:fontRef idx="minor">
-            <a:schemeClr val="lt1"/>
-          </a:fontRef>
-        </p:style>
-        <p:txBody>
-          <a:bodyPr rtlCol="0" anchor="ctr"/>
-          <a:lstStyle/>
-          <a:p>
-            <a:r>
-              <a:rPr lang="en-US" sz="900" b="1" dirty="0" smtClean="0">
-                <a:solidFill>
-                  <a:schemeClr val="bg2">
-                    <a:lumMod val="75000"/>
-                  </a:schemeClr>
-                </a:solidFill>
-              </a:rPr>
-              <a:t>@Transactional</a:t>
-            </a:r>
-            <a:r>
-              <a:rPr lang="en-US" sz="900" dirty="0" smtClean="0">
-                <a:solidFill>
-                  <a:schemeClr val="tx1"/>
-                </a:solidFill>
-              </a:rPr>
-              <a:t>(propagation </a:t>
-            </a:r>
-            <a:r>
-              <a:rPr lang="en-US" sz="900" dirty="0">
-                <a:solidFill>
-                  <a:schemeClr val="tx1"/>
-                </a:solidFill>
-              </a:rPr>
-              <a:t>= Propagation.</a:t>
-            </a:r>
-            <a:r>
-              <a:rPr lang="en-US" sz="900" b="1" i="1" dirty="0">
-                <a:solidFill>
-                  <a:srgbClr val="0000FF"/>
-                </a:solidFill>
-              </a:rPr>
-              <a:t>REQUIRED</a:t>
-            </a:r>
-            <a:r>
-              <a:rPr lang="en-US" sz="900" i="1" dirty="0" smtClean="0">
-                <a:solidFill>
-                  <a:schemeClr val="tx1"/>
-                </a:solidFill>
-              </a:rPr>
-              <a:t>)</a:t>
-            </a:r>
-          </a:p>
-          <a:p>
-            <a:r>
-              <a:rPr lang="en-US" sz="900" b="1" dirty="0" smtClean="0">
-                <a:solidFill>
-                  <a:srgbClr val="FF0000"/>
-                </a:solidFill>
-              </a:rPr>
-              <a:t>public</a:t>
-            </a:r>
-            <a:r>
-              <a:rPr lang="en-US" sz="900" dirty="0" smtClean="0">
-                <a:solidFill>
-                  <a:srgbClr val="FF0000"/>
-                </a:solidFill>
-              </a:rPr>
-              <a:t> </a:t>
-            </a:r>
-            <a:r>
-              <a:rPr lang="en-US" sz="900" dirty="0">
-                <a:solidFill>
-                  <a:schemeClr val="tx1"/>
-                </a:solidFill>
-              </a:rPr>
-              <a:t>Employee addEmployee(Employee employee) {</a:t>
-            </a:r>
-          </a:p>
-          <a:p>
-            <a:r>
-              <a:rPr lang="en-US" sz="900" dirty="0" smtClean="0">
-                <a:solidFill>
-                  <a:schemeClr val="tx1"/>
-                </a:solidFill>
-              </a:rPr>
-              <a:t>}</a:t>
-            </a:r>
-            <a:endParaRPr lang="en-US" sz="900" dirty="0">
-              <a:solidFill>
-                <a:schemeClr val="tx1"/>
-              </a:solidFill>
-            </a:endParaRPr>
-          </a:p>
-        </p:txBody>
-      </p:sp>
-      <p:sp>
-        <p:nvSpPr>
-          <p:cNvPr id="30" name="Rectangle: Rounded Corners 14">
-            <a:extLst>
-              <a:ext uri="{FF2B5EF4-FFF2-40B4-BE49-F238E27FC236}">
-                <a16:creationId xmlns:a16="http://schemas.microsoft.com/office/drawing/2014/main" xmlns="" id="{E25DC19F-6B3A-4545-BDB8-13C5481B9137}"/>
-              </a:ext>
-            </a:extLst>
-          </p:cNvPr>
-          <p:cNvSpPr/>
-          <p:nvPr/>
-        </p:nvSpPr>
-        <p:spPr>
-          <a:xfrm>
-            <a:off x="5952310" y="1295834"/>
-            <a:ext cx="1202410" cy="212228"/>
-          </a:xfrm>
-          <a:prstGeom prst="roundRect">
-            <a:avLst/>
-          </a:prstGeom>
-          <a:solidFill>
-            <a:srgbClr val="FFC000"/>
-          </a:solidFill>
-        </p:spPr>
-        <p:style>
-          <a:lnRef idx="2">
-            <a:schemeClr val="accent1">
-              <a:shade val="50000"/>
-            </a:schemeClr>
-          </a:lnRef>
-          <a:fillRef idx="1">
-            <a:schemeClr val="accent1"/>
-          </a:fillRef>
-          <a:effectRef idx="0">
-            <a:schemeClr val="accent1"/>
-          </a:effectRef>
-          <a:fontRef idx="minor">
-            <a:schemeClr val="lt1"/>
-          </a:fontRef>
-        </p:style>
-        <p:txBody>
-          <a:bodyPr rtlCol="0" anchor="ctr"/>
-          <a:lstStyle/>
-          <a:p>
-            <a:pPr algn="ctr"/>
-            <a:r>
-              <a:rPr lang="en-US" sz="900" dirty="0" smtClean="0"/>
-              <a:t>Begin Transaction T1</a:t>
-            </a:r>
-            <a:endParaRPr lang="en-US" sz="900" dirty="0"/>
-          </a:p>
-        </p:txBody>
-      </p:sp>
-      <p:sp>
-        <p:nvSpPr>
-          <p:cNvPr id="31" name="Oval 30"/>
-          <p:cNvSpPr/>
-          <p:nvPr/>
-        </p:nvSpPr>
-        <p:spPr>
-          <a:xfrm>
-            <a:off x="5734594" y="568641"/>
-            <a:ext cx="3483428" cy="2313896"/>
-          </a:xfrm>
-          <a:prstGeom prst="ellipse">
-            <a:avLst/>
-          </a:prstGeom>
-          <a:noFill/>
-        </p:spPr>
-        <p:style>
-          <a:lnRef idx="2">
-            <a:schemeClr val="accent1">
-              <a:shade val="50000"/>
-            </a:schemeClr>
-          </a:lnRef>
-          <a:fillRef idx="1">
-            <a:schemeClr val="accent1"/>
-          </a:fillRef>
-          <a:effectRef idx="0">
-            <a:schemeClr val="accent1"/>
-          </a:effectRef>
-          <a:fontRef idx="minor">
-            <a:schemeClr val="lt1"/>
-          </a:fontRef>
-        </p:style>
-        <p:txBody>
-          <a:bodyPr rtlCol="0" anchor="ctr"/>
-          <a:lstStyle/>
-          <a:p>
-            <a:pPr algn="ctr"/>
-            <a:endParaRPr lang="en-US"/>
-          </a:p>
-        </p:txBody>
-      </p:sp>
-      <p:sp>
-        <p:nvSpPr>
-          <p:cNvPr id="32" name="Rectangle: Rounded Corners 14">
-            <a:extLst>
-              <a:ext uri="{FF2B5EF4-FFF2-40B4-BE49-F238E27FC236}">
-                <a16:creationId xmlns:a16="http://schemas.microsoft.com/office/drawing/2014/main" xmlns="" id="{E25DC19F-6B3A-4545-BDB8-13C5481B9137}"/>
-              </a:ext>
-            </a:extLst>
-          </p:cNvPr>
-          <p:cNvSpPr/>
-          <p:nvPr/>
-        </p:nvSpPr>
-        <p:spPr>
-          <a:xfrm>
-            <a:off x="5952310" y="2026614"/>
-            <a:ext cx="1202410" cy="212228"/>
-          </a:xfrm>
-          <a:prstGeom prst="roundRect">
-            <a:avLst/>
-          </a:prstGeom>
-          <a:solidFill>
-            <a:srgbClr val="FFC000"/>
-          </a:solidFill>
-        </p:spPr>
-        <p:style>
-          <a:lnRef idx="2">
-            <a:schemeClr val="accent1">
-              <a:shade val="50000"/>
-            </a:schemeClr>
-          </a:lnRef>
-          <a:fillRef idx="1">
-            <a:schemeClr val="accent1"/>
-          </a:fillRef>
-          <a:effectRef idx="0">
-            <a:schemeClr val="accent1"/>
-          </a:effectRef>
-          <a:fontRef idx="minor">
-            <a:schemeClr val="lt1"/>
-          </a:fontRef>
-        </p:style>
-        <p:txBody>
-          <a:bodyPr rtlCol="0" anchor="ctr"/>
-          <a:lstStyle/>
-          <a:p>
-            <a:pPr algn="ctr"/>
-            <a:r>
-              <a:rPr lang="en-US" sz="900" dirty="0" smtClean="0"/>
-              <a:t>End Transaction T1</a:t>
-            </a:r>
-            <a:endParaRPr lang="en-US" sz="900" dirty="0"/>
-          </a:p>
-        </p:txBody>
-      </p:sp>
-    </p:spTree>
-    <p:extLst>
-      <p:ext uri="{BB962C8B-B14F-4D97-AF65-F5344CB8AC3E}">
-        <p14:creationId xmlns:p14="http://schemas.microsoft.com/office/powerpoint/2010/main" val="1526942975"/>
-      </p:ext>
-    </p:extLst>
-  </p:cSld>
-  <p:clrMapOvr>
-    <a:masterClrMapping/>
-  </p:clrMapOvr>
-  <p:timing>
-    <p:tnLst>
-      <p:par>
-        <p:cTn id="1" dur="indefinite" restart="never" nodeType="tmRoot"/>
-      </p:par>
-    </p:tnLst>
-  </p:timing>
-</p:sld>
-</file>
-
-<file path=ppt/slides/slide3.xml><?xml version="1.0" encoding="utf-8"?>
-<p:sld xmlns:a="http://schemas.openxmlformats.org/drawingml/2006/main" xmlns:r="http://schemas.openxmlformats.org/officeDocument/2006/relationships" xmlns:p="http://schemas.openxmlformats.org/presentationml/2006/main" showMasterSp="0">
-  <p:cSld>
-    <p:bg>
-      <p:bgPr>
-        <a:solidFill>
-          <a:schemeClr val="bg1"/>
-        </a:solidFill>
-        <a:effectLst/>
-      </p:bgPr>
-    </p:bg>
-    <p:spTree>
-      <p:nvGrpSpPr>
-        <p:cNvPr id="1" name=""/>
-        <p:cNvGrpSpPr/>
-        <p:nvPr/>
-      </p:nvGrpSpPr>
-      <p:grpSpPr>
-        <a:xfrm>
-          <a:off x="0" y="0"/>
-          <a:ext cx="0" cy="0"/>
-          <a:chOff x="0" y="0"/>
-          <a:chExt cx="0" cy="0"/>
-        </a:xfrm>
-      </p:grpSpPr>
-      <p:sp>
-        <p:nvSpPr>
-          <p:cNvPr id="23" name="TextBox 22">
-            <a:extLst>
-              <a:ext uri="{FF2B5EF4-FFF2-40B4-BE49-F238E27FC236}">
-                <a16:creationId xmlns:a16="http://schemas.microsoft.com/office/drawing/2014/main" xmlns="" id="{452BE8F3-0295-4B15-80B4-B2026225BC92}"/>
+                <a16:creationId xmlns="" xmlns:a16="http://schemas.microsoft.com/office/drawing/2014/main" id="{452BE8F3-0295-4B15-80B4-B2026225BC92}"/>
               </a:ext>
             </a:extLst>
           </p:cNvPr>
@@ -5483,7 +4677,7 @@
           <p:cNvPr id="24" name="Rectangle: Rounded Corners 14">
             <a:extLst>
               <a:ext uri="{FF2B5EF4-FFF2-40B4-BE49-F238E27FC236}">
-                <a16:creationId xmlns:a16="http://schemas.microsoft.com/office/drawing/2014/main" xmlns="" id="{E25DC19F-6B3A-4545-BDB8-13C5481B9137}"/>
+                <a16:creationId xmlns="" xmlns:a16="http://schemas.microsoft.com/office/drawing/2014/main" id="{E25DC19F-6B3A-4545-BDB8-13C5481B9137}"/>
               </a:ext>
             </a:extLst>
           </p:cNvPr>
@@ -5536,7 +4730,7 @@
           <p:cNvPr id="27" name="Rectangle: Rounded Corners 14">
             <a:extLst>
               <a:ext uri="{FF2B5EF4-FFF2-40B4-BE49-F238E27FC236}">
-                <a16:creationId xmlns:a16="http://schemas.microsoft.com/office/drawing/2014/main" xmlns="" id="{E25DC19F-6B3A-4545-BDB8-13C5481B9137}"/>
+                <a16:creationId xmlns="" xmlns:a16="http://schemas.microsoft.com/office/drawing/2014/main" id="{E25DC19F-6B3A-4545-BDB8-13C5481B9137}"/>
               </a:ext>
             </a:extLst>
           </p:cNvPr>
@@ -5663,7 +4857,7 @@
           <p:cNvPr id="36" name="TextBox 35">
             <a:extLst>
               <a:ext uri="{FF2B5EF4-FFF2-40B4-BE49-F238E27FC236}">
-                <a16:creationId xmlns:a16="http://schemas.microsoft.com/office/drawing/2014/main" xmlns="" id="{452BE8F3-0295-4B15-80B4-B2026225BC92}"/>
+                <a16:creationId xmlns="" xmlns:a16="http://schemas.microsoft.com/office/drawing/2014/main" id="{452BE8F3-0295-4B15-80B4-B2026225BC92}"/>
               </a:ext>
             </a:extLst>
           </p:cNvPr>
@@ -5715,7 +4909,7 @@
           <p:cNvPr id="37" name="Rectangle: Rounded Corners 11">
             <a:extLst>
               <a:ext uri="{FF2B5EF4-FFF2-40B4-BE49-F238E27FC236}">
-                <a16:creationId xmlns:a16="http://schemas.microsoft.com/office/drawing/2014/main" xmlns="" id="{5A1BEE6C-84E1-4224-B447-1AC8A888AAC0}"/>
+                <a16:creationId xmlns="" xmlns:a16="http://schemas.microsoft.com/office/drawing/2014/main" id="{5A1BEE6C-84E1-4224-B447-1AC8A888AAC0}"/>
               </a:ext>
             </a:extLst>
           </p:cNvPr>
@@ -5841,11 +5035,6 @@
               </a:rPr>
               <a:t>}</a:t>
             </a:r>
-            <a:endParaRPr lang="en-US" sz="900" dirty="0">
-              <a:solidFill>
-                <a:schemeClr val="tx1"/>
-              </a:solidFill>
-            </a:endParaRPr>
           </a:p>
         </p:txBody>
       </p:sp>
@@ -5854,7 +5043,7 @@
           <p:cNvPr id="38" name="Rectangle: Rounded Corners 14">
             <a:extLst>
               <a:ext uri="{FF2B5EF4-FFF2-40B4-BE49-F238E27FC236}">
-                <a16:creationId xmlns:a16="http://schemas.microsoft.com/office/drawing/2014/main" xmlns="" id="{E25DC19F-6B3A-4545-BDB8-13C5481B9137}"/>
+                <a16:creationId xmlns="" xmlns:a16="http://schemas.microsoft.com/office/drawing/2014/main" id="{E25DC19F-6B3A-4545-BDB8-13C5481B9137}"/>
               </a:ext>
             </a:extLst>
           </p:cNvPr>
@@ -5907,7 +5096,7 @@
           <p:cNvPr id="39" name="Rectangle: Rounded Corners 14">
             <a:extLst>
               <a:ext uri="{FF2B5EF4-FFF2-40B4-BE49-F238E27FC236}">
-                <a16:creationId xmlns:a16="http://schemas.microsoft.com/office/drawing/2014/main" xmlns="" id="{E25DC19F-6B3A-4545-BDB8-13C5481B9137}"/>
+                <a16:creationId xmlns="" xmlns:a16="http://schemas.microsoft.com/office/drawing/2014/main" id="{E25DC19F-6B3A-4545-BDB8-13C5481B9137}"/>
               </a:ext>
             </a:extLst>
           </p:cNvPr>
@@ -6001,7 +5190,7 @@
           <p:cNvPr id="41" name="Rectangle: Rounded Corners 11">
             <a:extLst>
               <a:ext uri="{FF2B5EF4-FFF2-40B4-BE49-F238E27FC236}">
-                <a16:creationId xmlns:a16="http://schemas.microsoft.com/office/drawing/2014/main" xmlns="" id="{5A1BEE6C-84E1-4224-B447-1AC8A888AAC0}"/>
+                <a16:creationId xmlns="" xmlns:a16="http://schemas.microsoft.com/office/drawing/2014/main" id="{5A1BEE6C-84E1-4224-B447-1AC8A888AAC0}"/>
               </a:ext>
             </a:extLst>
           </p:cNvPr>
@@ -6234,7 +5423,7 @@
           <p:cNvPr id="44" name="Rectangle: Rounded Corners 11">
             <a:extLst>
               <a:ext uri="{FF2B5EF4-FFF2-40B4-BE49-F238E27FC236}">
-                <a16:creationId xmlns:a16="http://schemas.microsoft.com/office/drawing/2014/main" xmlns="" id="{5A1BEE6C-84E1-4224-B447-1AC8A888AAC0}"/>
+                <a16:creationId xmlns="" xmlns:a16="http://schemas.microsoft.com/office/drawing/2014/main" id="{5A1BEE6C-84E1-4224-B447-1AC8A888AAC0}"/>
               </a:ext>
             </a:extLst>
           </p:cNvPr>
@@ -6396,67 +5585,6 @@
     <p:extLst>
       <p:ext uri="{BB962C8B-B14F-4D97-AF65-F5344CB8AC3E}">
         <p14:creationId xmlns:p14="http://schemas.microsoft.com/office/powerpoint/2010/main" val="1901695508"/>
-      </p:ext>
-    </p:extLst>
-  </p:cSld>
-  <p:clrMapOvr>
-    <a:masterClrMapping/>
-  </p:clrMapOvr>
-  <p:timing>
-    <p:tnLst>
-      <p:par>
-        <p:cTn id="1" dur="indefinite" restart="never" nodeType="tmRoot"/>
-      </p:par>
-    </p:tnLst>
-  </p:timing>
-</p:sld>
-</file>
-
-<file path=ppt/slides/slide4.xml><?xml version="1.0" encoding="utf-8"?>
-<p:sld xmlns:a="http://schemas.openxmlformats.org/drawingml/2006/main" xmlns:r="http://schemas.openxmlformats.org/officeDocument/2006/relationships" xmlns:p="http://schemas.openxmlformats.org/presentationml/2006/main">
-  <p:cSld>
-    <p:spTree>
-      <p:nvGrpSpPr>
-        <p:cNvPr id="1" name=""/>
-        <p:cNvGrpSpPr/>
-        <p:nvPr/>
-      </p:nvGrpSpPr>
-      <p:grpSpPr>
-        <a:xfrm>
-          <a:off x="0" y="0"/>
-          <a:ext cx="0" cy="0"/>
-          <a:chOff x="0" y="0"/>
-          <a:chExt cx="0" cy="0"/>
-        </a:xfrm>
-      </p:grpSpPr>
-      <p:pic>
-        <p:nvPicPr>
-          <p:cNvPr id="2" name="Picture 1"/>
-          <p:cNvPicPr>
-            <a:picLocks noChangeAspect="1"/>
-          </p:cNvPicPr>
-          <p:nvPr/>
-        </p:nvPicPr>
-        <p:blipFill>
-          <a:blip r:embed="rId2"/>
-          <a:stretch>
-            <a:fillRect/>
-          </a:stretch>
-        </p:blipFill>
-        <p:spPr>
-          <a:xfrm>
-            <a:off x="1447800" y="819150"/>
-            <a:ext cx="9296400" cy="5219700"/>
-          </a:xfrm>
-          <a:prstGeom prst="rect">
-            <a:avLst/>
-          </a:prstGeom>
-        </p:spPr>
-      </p:pic>
-    </p:spTree>
-    <p:extLst>
-      <p:ext uri="{BB962C8B-B14F-4D97-AF65-F5344CB8AC3E}">
-        <p14:creationId xmlns:p14="http://schemas.microsoft.com/office/powerpoint/2010/main" val="2221092892"/>
       </p:ext>
     </p:extLst>
   </p:cSld>

--- a/05-Transaction-Management/Transaction_management.pptx
+++ b/05-Transaction-Management/Transaction_management.pptx
@@ -5,11 +5,12 @@
     <p:sldMasterId id="2147483648" r:id="rId1"/>
   </p:sldMasterIdLst>
   <p:notesMasterIdLst>
-    <p:notesMasterId r:id="rId4"/>
+    <p:notesMasterId r:id="rId5"/>
   </p:notesMasterIdLst>
   <p:sldIdLst>
     <p:sldId id="256" r:id="rId2"/>
     <p:sldId id="259" r:id="rId3"/>
+    <p:sldId id="260" r:id="rId4"/>
   </p:sldIdLst>
   <p:sldSz cx="12192000" cy="6858000"/>
   <p:notesSz cx="6858000" cy="9144000"/>
@@ -249,7 +250,7 @@
           <a:p>
             <a:fld id="{D35A715A-4E3D-47D0-A386-7DBD8CC75CAA}" type="datetimeFigureOut">
               <a:rPr lang="en-US" smtClean="0"/>
-              <a:t>12/21/2022</a:t>
+              <a:t>12/22/2022</a:t>
             </a:fld>
             <a:endParaRPr lang="en-US"/>
           </a:p>
@@ -601,6 +602,90 @@
 </p:notes>
 </file>
 
+<file path=ppt/notesSlides/notesSlide2.xml><?xml version="1.0" encoding="utf-8"?>
+<p:notes xmlns:a="http://schemas.openxmlformats.org/drawingml/2006/main" xmlns:r="http://schemas.openxmlformats.org/officeDocument/2006/relationships" xmlns:p="http://schemas.openxmlformats.org/presentationml/2006/main">
+  <p:cSld>
+    <p:spTree>
+      <p:nvGrpSpPr>
+        <p:cNvPr id="1" name=""/>
+        <p:cNvGrpSpPr/>
+        <p:nvPr/>
+      </p:nvGrpSpPr>
+      <p:grpSpPr>
+        <a:xfrm>
+          <a:off x="0" y="0"/>
+          <a:ext cx="0" cy="0"/>
+          <a:chOff x="0" y="0"/>
+          <a:chExt cx="0" cy="0"/>
+        </a:xfrm>
+      </p:grpSpPr>
+      <p:sp>
+        <p:nvSpPr>
+          <p:cNvPr id="2" name="Slide Image Placeholder 1"/>
+          <p:cNvSpPr>
+            <a:spLocks noGrp="1" noRot="1" noChangeAspect="1"/>
+          </p:cNvSpPr>
+          <p:nvPr>
+            <p:ph type="sldImg"/>
+          </p:nvPr>
+        </p:nvSpPr>
+        <p:spPr/>
+      </p:sp>
+      <p:sp>
+        <p:nvSpPr>
+          <p:cNvPr id="3" name="Notes Placeholder 2"/>
+          <p:cNvSpPr>
+            <a:spLocks noGrp="1"/>
+          </p:cNvSpPr>
+          <p:nvPr>
+            <p:ph type="body" idx="1"/>
+          </p:nvPr>
+        </p:nvSpPr>
+        <p:spPr/>
+        <p:txBody>
+          <a:bodyPr/>
+          <a:lstStyle/>
+          <a:p>
+            <a:endParaRPr lang="en-US"/>
+          </a:p>
+        </p:txBody>
+      </p:sp>
+      <p:sp>
+        <p:nvSpPr>
+          <p:cNvPr id="4" name="Slide Number Placeholder 3"/>
+          <p:cNvSpPr>
+            <a:spLocks noGrp="1"/>
+          </p:cNvSpPr>
+          <p:nvPr>
+            <p:ph type="sldNum" sz="quarter" idx="10"/>
+          </p:nvPr>
+        </p:nvSpPr>
+        <p:spPr/>
+        <p:txBody>
+          <a:bodyPr/>
+          <a:lstStyle/>
+          <a:p>
+            <a:fld id="{7FBCA59B-B642-4ED7-B3DB-3E8740693BC1}" type="slidenum">
+              <a:rPr lang="en-US" smtClean="0"/>
+              <a:t>3</a:t>
+            </a:fld>
+            <a:endParaRPr lang="en-US"/>
+          </a:p>
+        </p:txBody>
+      </p:sp>
+    </p:spTree>
+    <p:extLst>
+      <p:ext uri="{BB962C8B-B14F-4D97-AF65-F5344CB8AC3E}">
+        <p14:creationId xmlns:p14="http://schemas.microsoft.com/office/powerpoint/2010/main" val="727543046"/>
+      </p:ext>
+    </p:extLst>
+  </p:cSld>
+  <p:clrMapOvr>
+    <a:masterClrMapping/>
+  </p:clrMapOvr>
+</p:notes>
+</file>
+
 <file path=ppt/slideLayouts/slideLayout1.xml><?xml version="1.0" encoding="utf-8"?>
 <p:sldLayout xmlns:a="http://schemas.openxmlformats.org/drawingml/2006/main" xmlns:r="http://schemas.openxmlformats.org/officeDocument/2006/relationships" xmlns:p="http://schemas.openxmlformats.org/presentationml/2006/main" type="title" preserve="1">
   <p:cSld name="Title Slide">
@@ -623,7 +708,7 @@
           <p:cNvPr id="2" name="Title 1">
             <a:extLst>
               <a:ext uri="{FF2B5EF4-FFF2-40B4-BE49-F238E27FC236}">
-                <a16:creationId xmlns="" xmlns:a16="http://schemas.microsoft.com/office/drawing/2014/main" id="{7F986473-48FF-48D2-BE87-8E6EF1DE5CB7}"/>
+                <a16:creationId xmlns:a16="http://schemas.microsoft.com/office/drawing/2014/main" xmlns="" id="{7F986473-48FF-48D2-BE87-8E6EF1DE5CB7}"/>
               </a:ext>
             </a:extLst>
           </p:cNvPr>
@@ -660,7 +745,7 @@
           <p:cNvPr id="3" name="Subtitle 2">
             <a:extLst>
               <a:ext uri="{FF2B5EF4-FFF2-40B4-BE49-F238E27FC236}">
-                <a16:creationId xmlns="" xmlns:a16="http://schemas.microsoft.com/office/drawing/2014/main" id="{34E5E0FE-6852-4CAB-B62E-982090E13B7E}"/>
+                <a16:creationId xmlns:a16="http://schemas.microsoft.com/office/drawing/2014/main" xmlns="" id="{34E5E0FE-6852-4CAB-B62E-982090E13B7E}"/>
               </a:ext>
             </a:extLst>
           </p:cNvPr>
@@ -730,7 +815,7 @@
           <p:cNvPr id="4" name="Date Placeholder 3">
             <a:extLst>
               <a:ext uri="{FF2B5EF4-FFF2-40B4-BE49-F238E27FC236}">
-                <a16:creationId xmlns="" xmlns:a16="http://schemas.microsoft.com/office/drawing/2014/main" id="{02AD77F6-FA2D-48AC-A2E1-97A3C253D053}"/>
+                <a16:creationId xmlns:a16="http://schemas.microsoft.com/office/drawing/2014/main" xmlns="" id="{02AD77F6-FA2D-48AC-A2E1-97A3C253D053}"/>
               </a:ext>
             </a:extLst>
           </p:cNvPr>
@@ -748,7 +833,7 @@
           <a:p>
             <a:fld id="{1DF0471C-15C6-430F-A1D2-F5E2439A92BD}" type="datetimeFigureOut">
               <a:rPr lang="en-US" smtClean="0"/>
-              <a:t>12/21/2022</a:t>
+              <a:t>12/22/2022</a:t>
             </a:fld>
             <a:endParaRPr lang="en-US"/>
           </a:p>
@@ -759,7 +844,7 @@
           <p:cNvPr id="5" name="Footer Placeholder 4">
             <a:extLst>
               <a:ext uri="{FF2B5EF4-FFF2-40B4-BE49-F238E27FC236}">
-                <a16:creationId xmlns="" xmlns:a16="http://schemas.microsoft.com/office/drawing/2014/main" id="{B06C71EF-5AB6-482F-82DD-661F92C0EB81}"/>
+                <a16:creationId xmlns:a16="http://schemas.microsoft.com/office/drawing/2014/main" xmlns="" id="{B06C71EF-5AB6-482F-82DD-661F92C0EB81}"/>
               </a:ext>
             </a:extLst>
           </p:cNvPr>
@@ -784,7 +869,7 @@
           <p:cNvPr id="6" name="Slide Number Placeholder 5">
             <a:extLst>
               <a:ext uri="{FF2B5EF4-FFF2-40B4-BE49-F238E27FC236}">
-                <a16:creationId xmlns="" xmlns:a16="http://schemas.microsoft.com/office/drawing/2014/main" id="{45B588E1-4B96-4D36-ABFE-54B521327534}"/>
+                <a16:creationId xmlns:a16="http://schemas.microsoft.com/office/drawing/2014/main" xmlns="" id="{45B588E1-4B96-4D36-ABFE-54B521327534}"/>
               </a:ext>
             </a:extLst>
           </p:cNvPr>
@@ -843,7 +928,7 @@
           <p:cNvPr id="2" name="Title 1">
             <a:extLst>
               <a:ext uri="{FF2B5EF4-FFF2-40B4-BE49-F238E27FC236}">
-                <a16:creationId xmlns="" xmlns:a16="http://schemas.microsoft.com/office/drawing/2014/main" id="{F8B4BF2C-5868-4FE8-A0A8-0C99FC85D853}"/>
+                <a16:creationId xmlns:a16="http://schemas.microsoft.com/office/drawing/2014/main" xmlns="" id="{F8B4BF2C-5868-4FE8-A0A8-0C99FC85D853}"/>
               </a:ext>
             </a:extLst>
           </p:cNvPr>
@@ -871,7 +956,7 @@
           <p:cNvPr id="3" name="Vertical Text Placeholder 2">
             <a:extLst>
               <a:ext uri="{FF2B5EF4-FFF2-40B4-BE49-F238E27FC236}">
-                <a16:creationId xmlns="" xmlns:a16="http://schemas.microsoft.com/office/drawing/2014/main" id="{608961FA-067D-4E13-AEE4-DEB564415E2A}"/>
+                <a16:creationId xmlns:a16="http://schemas.microsoft.com/office/drawing/2014/main" xmlns="" id="{608961FA-067D-4E13-AEE4-DEB564415E2A}"/>
               </a:ext>
             </a:extLst>
           </p:cNvPr>
@@ -928,7 +1013,7 @@
           <p:cNvPr id="4" name="Date Placeholder 3">
             <a:extLst>
               <a:ext uri="{FF2B5EF4-FFF2-40B4-BE49-F238E27FC236}">
-                <a16:creationId xmlns="" xmlns:a16="http://schemas.microsoft.com/office/drawing/2014/main" id="{F8A3B194-BC00-4F26-B44D-AE804D4EE358}"/>
+                <a16:creationId xmlns:a16="http://schemas.microsoft.com/office/drawing/2014/main" xmlns="" id="{F8A3B194-BC00-4F26-B44D-AE804D4EE358}"/>
               </a:ext>
             </a:extLst>
           </p:cNvPr>
@@ -946,7 +1031,7 @@
           <a:p>
             <a:fld id="{1DF0471C-15C6-430F-A1D2-F5E2439A92BD}" type="datetimeFigureOut">
               <a:rPr lang="en-US" smtClean="0"/>
-              <a:t>12/21/2022</a:t>
+              <a:t>12/22/2022</a:t>
             </a:fld>
             <a:endParaRPr lang="en-US"/>
           </a:p>
@@ -957,7 +1042,7 @@
           <p:cNvPr id="5" name="Footer Placeholder 4">
             <a:extLst>
               <a:ext uri="{FF2B5EF4-FFF2-40B4-BE49-F238E27FC236}">
-                <a16:creationId xmlns="" xmlns:a16="http://schemas.microsoft.com/office/drawing/2014/main" id="{36DF11C2-1180-4F31-81D4-FA146263DBB1}"/>
+                <a16:creationId xmlns:a16="http://schemas.microsoft.com/office/drawing/2014/main" xmlns="" id="{36DF11C2-1180-4F31-81D4-FA146263DBB1}"/>
               </a:ext>
             </a:extLst>
           </p:cNvPr>
@@ -982,7 +1067,7 @@
           <p:cNvPr id="6" name="Slide Number Placeholder 5">
             <a:extLst>
               <a:ext uri="{FF2B5EF4-FFF2-40B4-BE49-F238E27FC236}">
-                <a16:creationId xmlns="" xmlns:a16="http://schemas.microsoft.com/office/drawing/2014/main" id="{F8B629C9-776A-494E-89FD-1C76FE331BBB}"/>
+                <a16:creationId xmlns:a16="http://schemas.microsoft.com/office/drawing/2014/main" xmlns="" id="{F8B629C9-776A-494E-89FD-1C76FE331BBB}"/>
               </a:ext>
             </a:extLst>
           </p:cNvPr>
@@ -1041,7 +1126,7 @@
           <p:cNvPr id="2" name="Vertical Title 1">
             <a:extLst>
               <a:ext uri="{FF2B5EF4-FFF2-40B4-BE49-F238E27FC236}">
-                <a16:creationId xmlns="" xmlns:a16="http://schemas.microsoft.com/office/drawing/2014/main" id="{70D0F334-FD00-46CD-A061-98BDFB571FD9}"/>
+                <a16:creationId xmlns:a16="http://schemas.microsoft.com/office/drawing/2014/main" xmlns="" id="{70D0F334-FD00-46CD-A061-98BDFB571FD9}"/>
               </a:ext>
             </a:extLst>
           </p:cNvPr>
@@ -1074,7 +1159,7 @@
           <p:cNvPr id="3" name="Vertical Text Placeholder 2">
             <a:extLst>
               <a:ext uri="{FF2B5EF4-FFF2-40B4-BE49-F238E27FC236}">
-                <a16:creationId xmlns="" xmlns:a16="http://schemas.microsoft.com/office/drawing/2014/main" id="{FFEBB3B4-1969-4250-84C3-4B5990EF6885}"/>
+                <a16:creationId xmlns:a16="http://schemas.microsoft.com/office/drawing/2014/main" xmlns="" id="{FFEBB3B4-1969-4250-84C3-4B5990EF6885}"/>
               </a:ext>
             </a:extLst>
           </p:cNvPr>
@@ -1136,7 +1221,7 @@
           <p:cNvPr id="4" name="Date Placeholder 3">
             <a:extLst>
               <a:ext uri="{FF2B5EF4-FFF2-40B4-BE49-F238E27FC236}">
-                <a16:creationId xmlns="" xmlns:a16="http://schemas.microsoft.com/office/drawing/2014/main" id="{DB3F33DF-0039-4597-9B92-BE74F88DB2F0}"/>
+                <a16:creationId xmlns:a16="http://schemas.microsoft.com/office/drawing/2014/main" xmlns="" id="{DB3F33DF-0039-4597-9B92-BE74F88DB2F0}"/>
               </a:ext>
             </a:extLst>
           </p:cNvPr>
@@ -1154,7 +1239,7 @@
           <a:p>
             <a:fld id="{1DF0471C-15C6-430F-A1D2-F5E2439A92BD}" type="datetimeFigureOut">
               <a:rPr lang="en-US" smtClean="0"/>
-              <a:t>12/21/2022</a:t>
+              <a:t>12/22/2022</a:t>
             </a:fld>
             <a:endParaRPr lang="en-US"/>
           </a:p>
@@ -1165,7 +1250,7 @@
           <p:cNvPr id="5" name="Footer Placeholder 4">
             <a:extLst>
               <a:ext uri="{FF2B5EF4-FFF2-40B4-BE49-F238E27FC236}">
-                <a16:creationId xmlns="" xmlns:a16="http://schemas.microsoft.com/office/drawing/2014/main" id="{509961BE-F2FE-448E-9C62-B734E083CBFA}"/>
+                <a16:creationId xmlns:a16="http://schemas.microsoft.com/office/drawing/2014/main" xmlns="" id="{509961BE-F2FE-448E-9C62-B734E083CBFA}"/>
               </a:ext>
             </a:extLst>
           </p:cNvPr>
@@ -1190,7 +1275,7 @@
           <p:cNvPr id="6" name="Slide Number Placeholder 5">
             <a:extLst>
               <a:ext uri="{FF2B5EF4-FFF2-40B4-BE49-F238E27FC236}">
-                <a16:creationId xmlns="" xmlns:a16="http://schemas.microsoft.com/office/drawing/2014/main" id="{5E7319AA-624B-41FF-A3D7-333FA6DA8759}"/>
+                <a16:creationId xmlns:a16="http://schemas.microsoft.com/office/drawing/2014/main" xmlns="" id="{5E7319AA-624B-41FF-A3D7-333FA6DA8759}"/>
               </a:ext>
             </a:extLst>
           </p:cNvPr>
@@ -1249,7 +1334,7 @@
           <p:cNvPr id="2" name="Title 1">
             <a:extLst>
               <a:ext uri="{FF2B5EF4-FFF2-40B4-BE49-F238E27FC236}">
-                <a16:creationId xmlns="" xmlns:a16="http://schemas.microsoft.com/office/drawing/2014/main" id="{CEF0529E-423B-4047-9641-A0394321EB46}"/>
+                <a16:creationId xmlns:a16="http://schemas.microsoft.com/office/drawing/2014/main" xmlns="" id="{CEF0529E-423B-4047-9641-A0394321EB46}"/>
               </a:ext>
             </a:extLst>
           </p:cNvPr>
@@ -1277,7 +1362,7 @@
           <p:cNvPr id="3" name="Content Placeholder 2">
             <a:extLst>
               <a:ext uri="{FF2B5EF4-FFF2-40B4-BE49-F238E27FC236}">
-                <a16:creationId xmlns="" xmlns:a16="http://schemas.microsoft.com/office/drawing/2014/main" id="{175E3BE1-1952-422C-8C38-09A610ED5095}"/>
+                <a16:creationId xmlns:a16="http://schemas.microsoft.com/office/drawing/2014/main" xmlns="" id="{175E3BE1-1952-422C-8C38-09A610ED5095}"/>
               </a:ext>
             </a:extLst>
           </p:cNvPr>
@@ -1334,7 +1419,7 @@
           <p:cNvPr id="4" name="Date Placeholder 3">
             <a:extLst>
               <a:ext uri="{FF2B5EF4-FFF2-40B4-BE49-F238E27FC236}">
-                <a16:creationId xmlns="" xmlns:a16="http://schemas.microsoft.com/office/drawing/2014/main" id="{594F9D89-0318-45AB-8EF4-E4DBA4A04380}"/>
+                <a16:creationId xmlns:a16="http://schemas.microsoft.com/office/drawing/2014/main" xmlns="" id="{594F9D89-0318-45AB-8EF4-E4DBA4A04380}"/>
               </a:ext>
             </a:extLst>
           </p:cNvPr>
@@ -1352,7 +1437,7 @@
           <a:p>
             <a:fld id="{1DF0471C-15C6-430F-A1D2-F5E2439A92BD}" type="datetimeFigureOut">
               <a:rPr lang="en-US" smtClean="0"/>
-              <a:t>12/21/2022</a:t>
+              <a:t>12/22/2022</a:t>
             </a:fld>
             <a:endParaRPr lang="en-US"/>
           </a:p>
@@ -1363,7 +1448,7 @@
           <p:cNvPr id="5" name="Footer Placeholder 4">
             <a:extLst>
               <a:ext uri="{FF2B5EF4-FFF2-40B4-BE49-F238E27FC236}">
-                <a16:creationId xmlns="" xmlns:a16="http://schemas.microsoft.com/office/drawing/2014/main" id="{49C2FA9B-8333-4AC8-B604-6DA7FF617FD2}"/>
+                <a16:creationId xmlns:a16="http://schemas.microsoft.com/office/drawing/2014/main" xmlns="" id="{49C2FA9B-8333-4AC8-B604-6DA7FF617FD2}"/>
               </a:ext>
             </a:extLst>
           </p:cNvPr>
@@ -1388,7 +1473,7 @@
           <p:cNvPr id="6" name="Slide Number Placeholder 5">
             <a:extLst>
               <a:ext uri="{FF2B5EF4-FFF2-40B4-BE49-F238E27FC236}">
-                <a16:creationId xmlns="" xmlns:a16="http://schemas.microsoft.com/office/drawing/2014/main" id="{9DF7D1F3-52D2-4029-B862-10440113C060}"/>
+                <a16:creationId xmlns:a16="http://schemas.microsoft.com/office/drawing/2014/main" xmlns="" id="{9DF7D1F3-52D2-4029-B862-10440113C060}"/>
               </a:ext>
             </a:extLst>
           </p:cNvPr>
@@ -1447,7 +1532,7 @@
           <p:cNvPr id="2" name="Title 1">
             <a:extLst>
               <a:ext uri="{FF2B5EF4-FFF2-40B4-BE49-F238E27FC236}">
-                <a16:creationId xmlns="" xmlns:a16="http://schemas.microsoft.com/office/drawing/2014/main" id="{7BA45855-39EF-47A0-A504-C639015C3B74}"/>
+                <a16:creationId xmlns:a16="http://schemas.microsoft.com/office/drawing/2014/main" xmlns="" id="{7BA45855-39EF-47A0-A504-C639015C3B74}"/>
               </a:ext>
             </a:extLst>
           </p:cNvPr>
@@ -1484,7 +1569,7 @@
           <p:cNvPr id="3" name="Text Placeholder 2">
             <a:extLst>
               <a:ext uri="{FF2B5EF4-FFF2-40B4-BE49-F238E27FC236}">
-                <a16:creationId xmlns="" xmlns:a16="http://schemas.microsoft.com/office/drawing/2014/main" id="{F98B8D24-F025-4281-B9EF-271FEE07FBF7}"/>
+                <a16:creationId xmlns:a16="http://schemas.microsoft.com/office/drawing/2014/main" xmlns="" id="{F98B8D24-F025-4281-B9EF-271FEE07FBF7}"/>
               </a:ext>
             </a:extLst>
           </p:cNvPr>
@@ -1609,7 +1694,7 @@
           <p:cNvPr id="4" name="Date Placeholder 3">
             <a:extLst>
               <a:ext uri="{FF2B5EF4-FFF2-40B4-BE49-F238E27FC236}">
-                <a16:creationId xmlns="" xmlns:a16="http://schemas.microsoft.com/office/drawing/2014/main" id="{24167402-33D3-402F-9A4F-0CC943C3D7EA}"/>
+                <a16:creationId xmlns:a16="http://schemas.microsoft.com/office/drawing/2014/main" xmlns="" id="{24167402-33D3-402F-9A4F-0CC943C3D7EA}"/>
               </a:ext>
             </a:extLst>
           </p:cNvPr>
@@ -1627,7 +1712,7 @@
           <a:p>
             <a:fld id="{1DF0471C-15C6-430F-A1D2-F5E2439A92BD}" type="datetimeFigureOut">
               <a:rPr lang="en-US" smtClean="0"/>
-              <a:t>12/21/2022</a:t>
+              <a:t>12/22/2022</a:t>
             </a:fld>
             <a:endParaRPr lang="en-US"/>
           </a:p>
@@ -1638,7 +1723,7 @@
           <p:cNvPr id="5" name="Footer Placeholder 4">
             <a:extLst>
               <a:ext uri="{FF2B5EF4-FFF2-40B4-BE49-F238E27FC236}">
-                <a16:creationId xmlns="" xmlns:a16="http://schemas.microsoft.com/office/drawing/2014/main" id="{E8406ADB-3CD4-4A9F-8E63-00F73D91CFD4}"/>
+                <a16:creationId xmlns:a16="http://schemas.microsoft.com/office/drawing/2014/main" xmlns="" id="{E8406ADB-3CD4-4A9F-8E63-00F73D91CFD4}"/>
               </a:ext>
             </a:extLst>
           </p:cNvPr>
@@ -1663,7 +1748,7 @@
           <p:cNvPr id="6" name="Slide Number Placeholder 5">
             <a:extLst>
               <a:ext uri="{FF2B5EF4-FFF2-40B4-BE49-F238E27FC236}">
-                <a16:creationId xmlns="" xmlns:a16="http://schemas.microsoft.com/office/drawing/2014/main" id="{FDF6385E-3E04-47C6-9AF2-E7AB2D906BB6}"/>
+                <a16:creationId xmlns:a16="http://schemas.microsoft.com/office/drawing/2014/main" xmlns="" id="{FDF6385E-3E04-47C6-9AF2-E7AB2D906BB6}"/>
               </a:ext>
             </a:extLst>
           </p:cNvPr>
@@ -1722,7 +1807,7 @@
           <p:cNvPr id="2" name="Title 1">
             <a:extLst>
               <a:ext uri="{FF2B5EF4-FFF2-40B4-BE49-F238E27FC236}">
-                <a16:creationId xmlns="" xmlns:a16="http://schemas.microsoft.com/office/drawing/2014/main" id="{ED6CCC0B-9F72-4E67-83AA-7B36B1965281}"/>
+                <a16:creationId xmlns:a16="http://schemas.microsoft.com/office/drawing/2014/main" xmlns="" id="{ED6CCC0B-9F72-4E67-83AA-7B36B1965281}"/>
               </a:ext>
             </a:extLst>
           </p:cNvPr>
@@ -1750,7 +1835,7 @@
           <p:cNvPr id="3" name="Content Placeholder 2">
             <a:extLst>
               <a:ext uri="{FF2B5EF4-FFF2-40B4-BE49-F238E27FC236}">
-                <a16:creationId xmlns="" xmlns:a16="http://schemas.microsoft.com/office/drawing/2014/main" id="{E7B63006-8859-4E31-9A7B-732066FD28D3}"/>
+                <a16:creationId xmlns:a16="http://schemas.microsoft.com/office/drawing/2014/main" xmlns="" id="{E7B63006-8859-4E31-9A7B-732066FD28D3}"/>
               </a:ext>
             </a:extLst>
           </p:cNvPr>
@@ -1812,7 +1897,7 @@
           <p:cNvPr id="4" name="Content Placeholder 3">
             <a:extLst>
               <a:ext uri="{FF2B5EF4-FFF2-40B4-BE49-F238E27FC236}">
-                <a16:creationId xmlns="" xmlns:a16="http://schemas.microsoft.com/office/drawing/2014/main" id="{5D54DF68-216B-42C3-9256-63ADC1AA0FBC}"/>
+                <a16:creationId xmlns:a16="http://schemas.microsoft.com/office/drawing/2014/main" xmlns="" id="{5D54DF68-216B-42C3-9256-63ADC1AA0FBC}"/>
               </a:ext>
             </a:extLst>
           </p:cNvPr>
@@ -1874,7 +1959,7 @@
           <p:cNvPr id="5" name="Date Placeholder 4">
             <a:extLst>
               <a:ext uri="{FF2B5EF4-FFF2-40B4-BE49-F238E27FC236}">
-                <a16:creationId xmlns="" xmlns:a16="http://schemas.microsoft.com/office/drawing/2014/main" id="{0F8CB3C2-36F1-4E0E-87E4-722E0A2B8830}"/>
+                <a16:creationId xmlns:a16="http://schemas.microsoft.com/office/drawing/2014/main" xmlns="" id="{0F8CB3C2-36F1-4E0E-87E4-722E0A2B8830}"/>
               </a:ext>
             </a:extLst>
           </p:cNvPr>
@@ -1892,7 +1977,7 @@
           <a:p>
             <a:fld id="{1DF0471C-15C6-430F-A1D2-F5E2439A92BD}" type="datetimeFigureOut">
               <a:rPr lang="en-US" smtClean="0"/>
-              <a:t>12/21/2022</a:t>
+              <a:t>12/22/2022</a:t>
             </a:fld>
             <a:endParaRPr lang="en-US"/>
           </a:p>
@@ -1903,7 +1988,7 @@
           <p:cNvPr id="6" name="Footer Placeholder 5">
             <a:extLst>
               <a:ext uri="{FF2B5EF4-FFF2-40B4-BE49-F238E27FC236}">
-                <a16:creationId xmlns="" xmlns:a16="http://schemas.microsoft.com/office/drawing/2014/main" id="{47A426AA-98E5-4C32-BD26-67433988AA7C}"/>
+                <a16:creationId xmlns:a16="http://schemas.microsoft.com/office/drawing/2014/main" xmlns="" id="{47A426AA-98E5-4C32-BD26-67433988AA7C}"/>
               </a:ext>
             </a:extLst>
           </p:cNvPr>
@@ -1928,7 +2013,7 @@
           <p:cNvPr id="7" name="Slide Number Placeholder 6">
             <a:extLst>
               <a:ext uri="{FF2B5EF4-FFF2-40B4-BE49-F238E27FC236}">
-                <a16:creationId xmlns="" xmlns:a16="http://schemas.microsoft.com/office/drawing/2014/main" id="{AEF93DAC-53DB-48BB-8C16-553726965EF3}"/>
+                <a16:creationId xmlns:a16="http://schemas.microsoft.com/office/drawing/2014/main" xmlns="" id="{AEF93DAC-53DB-48BB-8C16-553726965EF3}"/>
               </a:ext>
             </a:extLst>
           </p:cNvPr>
@@ -1987,7 +2072,7 @@
           <p:cNvPr id="2" name="Title 1">
             <a:extLst>
               <a:ext uri="{FF2B5EF4-FFF2-40B4-BE49-F238E27FC236}">
-                <a16:creationId xmlns="" xmlns:a16="http://schemas.microsoft.com/office/drawing/2014/main" id="{545ED9B5-95EB-42C7-9485-646F75953A7C}"/>
+                <a16:creationId xmlns:a16="http://schemas.microsoft.com/office/drawing/2014/main" xmlns="" id="{545ED9B5-95EB-42C7-9485-646F75953A7C}"/>
               </a:ext>
             </a:extLst>
           </p:cNvPr>
@@ -2020,7 +2105,7 @@
           <p:cNvPr id="3" name="Text Placeholder 2">
             <a:extLst>
               <a:ext uri="{FF2B5EF4-FFF2-40B4-BE49-F238E27FC236}">
-                <a16:creationId xmlns="" xmlns:a16="http://schemas.microsoft.com/office/drawing/2014/main" id="{433D3E70-C817-4747-B196-2EE7F616E55D}"/>
+                <a16:creationId xmlns:a16="http://schemas.microsoft.com/office/drawing/2014/main" xmlns="" id="{433D3E70-C817-4747-B196-2EE7F616E55D}"/>
               </a:ext>
             </a:extLst>
           </p:cNvPr>
@@ -2091,7 +2176,7 @@
           <p:cNvPr id="4" name="Content Placeholder 3">
             <a:extLst>
               <a:ext uri="{FF2B5EF4-FFF2-40B4-BE49-F238E27FC236}">
-                <a16:creationId xmlns="" xmlns:a16="http://schemas.microsoft.com/office/drawing/2014/main" id="{89E43232-D7AE-4CEA-B0CD-A62351B134BB}"/>
+                <a16:creationId xmlns:a16="http://schemas.microsoft.com/office/drawing/2014/main" xmlns="" id="{89E43232-D7AE-4CEA-B0CD-A62351B134BB}"/>
               </a:ext>
             </a:extLst>
           </p:cNvPr>
@@ -2153,7 +2238,7 @@
           <p:cNvPr id="5" name="Text Placeholder 4">
             <a:extLst>
               <a:ext uri="{FF2B5EF4-FFF2-40B4-BE49-F238E27FC236}">
-                <a16:creationId xmlns="" xmlns:a16="http://schemas.microsoft.com/office/drawing/2014/main" id="{F1BF8678-D57B-4B16-AA25-CD85B19E1B3A}"/>
+                <a16:creationId xmlns:a16="http://schemas.microsoft.com/office/drawing/2014/main" xmlns="" id="{F1BF8678-D57B-4B16-AA25-CD85B19E1B3A}"/>
               </a:ext>
             </a:extLst>
           </p:cNvPr>
@@ -2224,7 +2309,7 @@
           <p:cNvPr id="6" name="Content Placeholder 5">
             <a:extLst>
               <a:ext uri="{FF2B5EF4-FFF2-40B4-BE49-F238E27FC236}">
-                <a16:creationId xmlns="" xmlns:a16="http://schemas.microsoft.com/office/drawing/2014/main" id="{7DCBE630-179A-4327-878B-3847467281D3}"/>
+                <a16:creationId xmlns:a16="http://schemas.microsoft.com/office/drawing/2014/main" xmlns="" id="{7DCBE630-179A-4327-878B-3847467281D3}"/>
               </a:ext>
             </a:extLst>
           </p:cNvPr>
@@ -2286,7 +2371,7 @@
           <p:cNvPr id="7" name="Date Placeholder 6">
             <a:extLst>
               <a:ext uri="{FF2B5EF4-FFF2-40B4-BE49-F238E27FC236}">
-                <a16:creationId xmlns="" xmlns:a16="http://schemas.microsoft.com/office/drawing/2014/main" id="{E532529C-12B5-4D3A-A59C-5829E7D42567}"/>
+                <a16:creationId xmlns:a16="http://schemas.microsoft.com/office/drawing/2014/main" xmlns="" id="{E532529C-12B5-4D3A-A59C-5829E7D42567}"/>
               </a:ext>
             </a:extLst>
           </p:cNvPr>
@@ -2304,7 +2389,7 @@
           <a:p>
             <a:fld id="{1DF0471C-15C6-430F-A1D2-F5E2439A92BD}" type="datetimeFigureOut">
               <a:rPr lang="en-US" smtClean="0"/>
-              <a:t>12/21/2022</a:t>
+              <a:t>12/22/2022</a:t>
             </a:fld>
             <a:endParaRPr lang="en-US"/>
           </a:p>
@@ -2315,7 +2400,7 @@
           <p:cNvPr id="8" name="Footer Placeholder 7">
             <a:extLst>
               <a:ext uri="{FF2B5EF4-FFF2-40B4-BE49-F238E27FC236}">
-                <a16:creationId xmlns="" xmlns:a16="http://schemas.microsoft.com/office/drawing/2014/main" id="{D40F80FF-DCE0-4C7C-8044-57BFC37C586E}"/>
+                <a16:creationId xmlns:a16="http://schemas.microsoft.com/office/drawing/2014/main" xmlns="" id="{D40F80FF-DCE0-4C7C-8044-57BFC37C586E}"/>
               </a:ext>
             </a:extLst>
           </p:cNvPr>
@@ -2340,7 +2425,7 @@
           <p:cNvPr id="9" name="Slide Number Placeholder 8">
             <a:extLst>
               <a:ext uri="{FF2B5EF4-FFF2-40B4-BE49-F238E27FC236}">
-                <a16:creationId xmlns="" xmlns:a16="http://schemas.microsoft.com/office/drawing/2014/main" id="{C8F2F391-E1E7-4833-9AFF-E9A7A6123EA8}"/>
+                <a16:creationId xmlns:a16="http://schemas.microsoft.com/office/drawing/2014/main" xmlns="" id="{C8F2F391-E1E7-4833-9AFF-E9A7A6123EA8}"/>
               </a:ext>
             </a:extLst>
           </p:cNvPr>
@@ -2399,7 +2484,7 @@
           <p:cNvPr id="2" name="Title 1">
             <a:extLst>
               <a:ext uri="{FF2B5EF4-FFF2-40B4-BE49-F238E27FC236}">
-                <a16:creationId xmlns="" xmlns:a16="http://schemas.microsoft.com/office/drawing/2014/main" id="{6120F39E-D600-4EF7-8592-B5B8CA1FB8DE}"/>
+                <a16:creationId xmlns:a16="http://schemas.microsoft.com/office/drawing/2014/main" xmlns="" id="{6120F39E-D600-4EF7-8592-B5B8CA1FB8DE}"/>
               </a:ext>
             </a:extLst>
           </p:cNvPr>
@@ -2427,7 +2512,7 @@
           <p:cNvPr id="3" name="Date Placeholder 2">
             <a:extLst>
               <a:ext uri="{FF2B5EF4-FFF2-40B4-BE49-F238E27FC236}">
-                <a16:creationId xmlns="" xmlns:a16="http://schemas.microsoft.com/office/drawing/2014/main" id="{A5CB6ADA-F787-43FE-AC74-6E61D078A86D}"/>
+                <a16:creationId xmlns:a16="http://schemas.microsoft.com/office/drawing/2014/main" xmlns="" id="{A5CB6ADA-F787-43FE-AC74-6E61D078A86D}"/>
               </a:ext>
             </a:extLst>
           </p:cNvPr>
@@ -2445,7 +2530,7 @@
           <a:p>
             <a:fld id="{1DF0471C-15C6-430F-A1D2-F5E2439A92BD}" type="datetimeFigureOut">
               <a:rPr lang="en-US" smtClean="0"/>
-              <a:t>12/21/2022</a:t>
+              <a:t>12/22/2022</a:t>
             </a:fld>
             <a:endParaRPr lang="en-US"/>
           </a:p>
@@ -2456,7 +2541,7 @@
           <p:cNvPr id="4" name="Footer Placeholder 3">
             <a:extLst>
               <a:ext uri="{FF2B5EF4-FFF2-40B4-BE49-F238E27FC236}">
-                <a16:creationId xmlns="" xmlns:a16="http://schemas.microsoft.com/office/drawing/2014/main" id="{2EDD119A-D885-4E6D-A0EF-6EA781CCF1FA}"/>
+                <a16:creationId xmlns:a16="http://schemas.microsoft.com/office/drawing/2014/main" xmlns="" id="{2EDD119A-D885-4E6D-A0EF-6EA781CCF1FA}"/>
               </a:ext>
             </a:extLst>
           </p:cNvPr>
@@ -2481,7 +2566,7 @@
           <p:cNvPr id="5" name="Slide Number Placeholder 4">
             <a:extLst>
               <a:ext uri="{FF2B5EF4-FFF2-40B4-BE49-F238E27FC236}">
-                <a16:creationId xmlns="" xmlns:a16="http://schemas.microsoft.com/office/drawing/2014/main" id="{AE921555-C8FE-4D6F-9562-9BF9FC738B48}"/>
+                <a16:creationId xmlns:a16="http://schemas.microsoft.com/office/drawing/2014/main" xmlns="" id="{AE921555-C8FE-4D6F-9562-9BF9FC738B48}"/>
               </a:ext>
             </a:extLst>
           </p:cNvPr>
@@ -2540,7 +2625,7 @@
           <p:cNvPr id="2" name="Date Placeholder 1">
             <a:extLst>
               <a:ext uri="{FF2B5EF4-FFF2-40B4-BE49-F238E27FC236}">
-                <a16:creationId xmlns="" xmlns:a16="http://schemas.microsoft.com/office/drawing/2014/main" id="{A53558C2-1A82-4EF4-8BAA-764708819FAA}"/>
+                <a16:creationId xmlns:a16="http://schemas.microsoft.com/office/drawing/2014/main" xmlns="" id="{A53558C2-1A82-4EF4-8BAA-764708819FAA}"/>
               </a:ext>
             </a:extLst>
           </p:cNvPr>
@@ -2558,7 +2643,7 @@
           <a:p>
             <a:fld id="{1DF0471C-15C6-430F-A1D2-F5E2439A92BD}" type="datetimeFigureOut">
               <a:rPr lang="en-US" smtClean="0"/>
-              <a:t>12/21/2022</a:t>
+              <a:t>12/22/2022</a:t>
             </a:fld>
             <a:endParaRPr lang="en-US"/>
           </a:p>
@@ -2569,7 +2654,7 @@
           <p:cNvPr id="3" name="Footer Placeholder 2">
             <a:extLst>
               <a:ext uri="{FF2B5EF4-FFF2-40B4-BE49-F238E27FC236}">
-                <a16:creationId xmlns="" xmlns:a16="http://schemas.microsoft.com/office/drawing/2014/main" id="{99F012A8-7436-429E-8F24-73C22C8E09FE}"/>
+                <a16:creationId xmlns:a16="http://schemas.microsoft.com/office/drawing/2014/main" xmlns="" id="{99F012A8-7436-429E-8F24-73C22C8E09FE}"/>
               </a:ext>
             </a:extLst>
           </p:cNvPr>
@@ -2594,7 +2679,7 @@
           <p:cNvPr id="4" name="Slide Number Placeholder 3">
             <a:extLst>
               <a:ext uri="{FF2B5EF4-FFF2-40B4-BE49-F238E27FC236}">
-                <a16:creationId xmlns="" xmlns:a16="http://schemas.microsoft.com/office/drawing/2014/main" id="{6C8E85BE-B27C-485C-B2B0-085F09F7386A}"/>
+                <a16:creationId xmlns:a16="http://schemas.microsoft.com/office/drawing/2014/main" xmlns="" id="{6C8E85BE-B27C-485C-B2B0-085F09F7386A}"/>
               </a:ext>
             </a:extLst>
           </p:cNvPr>
@@ -2653,7 +2738,7 @@
           <p:cNvPr id="2" name="Title 1">
             <a:extLst>
               <a:ext uri="{FF2B5EF4-FFF2-40B4-BE49-F238E27FC236}">
-                <a16:creationId xmlns="" xmlns:a16="http://schemas.microsoft.com/office/drawing/2014/main" id="{C8EB7628-37D5-483E-BF2D-227BF43C7DD8}"/>
+                <a16:creationId xmlns:a16="http://schemas.microsoft.com/office/drawing/2014/main" xmlns="" id="{C8EB7628-37D5-483E-BF2D-227BF43C7DD8}"/>
               </a:ext>
             </a:extLst>
           </p:cNvPr>
@@ -2690,7 +2775,7 @@
           <p:cNvPr id="3" name="Content Placeholder 2">
             <a:extLst>
               <a:ext uri="{FF2B5EF4-FFF2-40B4-BE49-F238E27FC236}">
-                <a16:creationId xmlns="" xmlns:a16="http://schemas.microsoft.com/office/drawing/2014/main" id="{B6A4EEEF-9654-4C68-98D6-223555EE59D6}"/>
+                <a16:creationId xmlns:a16="http://schemas.microsoft.com/office/drawing/2014/main" xmlns="" id="{B6A4EEEF-9654-4C68-98D6-223555EE59D6}"/>
               </a:ext>
             </a:extLst>
           </p:cNvPr>
@@ -2780,7 +2865,7 @@
           <p:cNvPr id="4" name="Text Placeholder 3">
             <a:extLst>
               <a:ext uri="{FF2B5EF4-FFF2-40B4-BE49-F238E27FC236}">
-                <a16:creationId xmlns="" xmlns:a16="http://schemas.microsoft.com/office/drawing/2014/main" id="{00DA8380-51B0-4F28-85FC-067FB8CF17F4}"/>
+                <a16:creationId xmlns:a16="http://schemas.microsoft.com/office/drawing/2014/main" xmlns="" id="{00DA8380-51B0-4F28-85FC-067FB8CF17F4}"/>
               </a:ext>
             </a:extLst>
           </p:cNvPr>
@@ -2851,7 +2936,7 @@
           <p:cNvPr id="5" name="Date Placeholder 4">
             <a:extLst>
               <a:ext uri="{FF2B5EF4-FFF2-40B4-BE49-F238E27FC236}">
-                <a16:creationId xmlns="" xmlns:a16="http://schemas.microsoft.com/office/drawing/2014/main" id="{B43A1E1A-A745-4419-94DF-F1664473D5F9}"/>
+                <a16:creationId xmlns:a16="http://schemas.microsoft.com/office/drawing/2014/main" xmlns="" id="{B43A1E1A-A745-4419-94DF-F1664473D5F9}"/>
               </a:ext>
             </a:extLst>
           </p:cNvPr>
@@ -2869,7 +2954,7 @@
           <a:p>
             <a:fld id="{1DF0471C-15C6-430F-A1D2-F5E2439A92BD}" type="datetimeFigureOut">
               <a:rPr lang="en-US" smtClean="0"/>
-              <a:t>12/21/2022</a:t>
+              <a:t>12/22/2022</a:t>
             </a:fld>
             <a:endParaRPr lang="en-US"/>
           </a:p>
@@ -2880,7 +2965,7 @@
           <p:cNvPr id="6" name="Footer Placeholder 5">
             <a:extLst>
               <a:ext uri="{FF2B5EF4-FFF2-40B4-BE49-F238E27FC236}">
-                <a16:creationId xmlns="" xmlns:a16="http://schemas.microsoft.com/office/drawing/2014/main" id="{BE7AF249-9AA1-4A7B-ABEC-1DA340BA4725}"/>
+                <a16:creationId xmlns:a16="http://schemas.microsoft.com/office/drawing/2014/main" xmlns="" id="{BE7AF249-9AA1-4A7B-ABEC-1DA340BA4725}"/>
               </a:ext>
             </a:extLst>
           </p:cNvPr>
@@ -2905,7 +2990,7 @@
           <p:cNvPr id="7" name="Slide Number Placeholder 6">
             <a:extLst>
               <a:ext uri="{FF2B5EF4-FFF2-40B4-BE49-F238E27FC236}">
-                <a16:creationId xmlns="" xmlns:a16="http://schemas.microsoft.com/office/drawing/2014/main" id="{21A5C071-8445-4D81-8E03-FE52BB467EF3}"/>
+                <a16:creationId xmlns:a16="http://schemas.microsoft.com/office/drawing/2014/main" xmlns="" id="{21A5C071-8445-4D81-8E03-FE52BB467EF3}"/>
               </a:ext>
             </a:extLst>
           </p:cNvPr>
@@ -2964,7 +3049,7 @@
           <p:cNvPr id="2" name="Title 1">
             <a:extLst>
               <a:ext uri="{FF2B5EF4-FFF2-40B4-BE49-F238E27FC236}">
-                <a16:creationId xmlns="" xmlns:a16="http://schemas.microsoft.com/office/drawing/2014/main" id="{0E3F1C17-470B-42F4-9A17-35826AA08A57}"/>
+                <a16:creationId xmlns:a16="http://schemas.microsoft.com/office/drawing/2014/main" xmlns="" id="{0E3F1C17-470B-42F4-9A17-35826AA08A57}"/>
               </a:ext>
             </a:extLst>
           </p:cNvPr>
@@ -3001,7 +3086,7 @@
           <p:cNvPr id="3" name="Picture Placeholder 2">
             <a:extLst>
               <a:ext uri="{FF2B5EF4-FFF2-40B4-BE49-F238E27FC236}">
-                <a16:creationId xmlns="" xmlns:a16="http://schemas.microsoft.com/office/drawing/2014/main" id="{845AFDA6-55BA-4CCC-A3D1-0D28903D9F65}"/>
+                <a16:creationId xmlns:a16="http://schemas.microsoft.com/office/drawing/2014/main" xmlns="" id="{845AFDA6-55BA-4CCC-A3D1-0D28903D9F65}"/>
               </a:ext>
             </a:extLst>
           </p:cNvPr>
@@ -3068,7 +3153,7 @@
           <p:cNvPr id="4" name="Text Placeholder 3">
             <a:extLst>
               <a:ext uri="{FF2B5EF4-FFF2-40B4-BE49-F238E27FC236}">
-                <a16:creationId xmlns="" xmlns:a16="http://schemas.microsoft.com/office/drawing/2014/main" id="{42A2F931-34E2-4203-BC74-DBEDFA5F7D5E}"/>
+                <a16:creationId xmlns:a16="http://schemas.microsoft.com/office/drawing/2014/main" xmlns="" id="{42A2F931-34E2-4203-BC74-DBEDFA5F7D5E}"/>
               </a:ext>
             </a:extLst>
           </p:cNvPr>
@@ -3139,7 +3224,7 @@
           <p:cNvPr id="5" name="Date Placeholder 4">
             <a:extLst>
               <a:ext uri="{FF2B5EF4-FFF2-40B4-BE49-F238E27FC236}">
-                <a16:creationId xmlns="" xmlns:a16="http://schemas.microsoft.com/office/drawing/2014/main" id="{0AAC29A3-3865-4E50-8B48-16A0F74C0291}"/>
+                <a16:creationId xmlns:a16="http://schemas.microsoft.com/office/drawing/2014/main" xmlns="" id="{0AAC29A3-3865-4E50-8B48-16A0F74C0291}"/>
               </a:ext>
             </a:extLst>
           </p:cNvPr>
@@ -3157,7 +3242,7 @@
           <a:p>
             <a:fld id="{1DF0471C-15C6-430F-A1D2-F5E2439A92BD}" type="datetimeFigureOut">
               <a:rPr lang="en-US" smtClean="0"/>
-              <a:t>12/21/2022</a:t>
+              <a:t>12/22/2022</a:t>
             </a:fld>
             <a:endParaRPr lang="en-US"/>
           </a:p>
@@ -3168,7 +3253,7 @@
           <p:cNvPr id="6" name="Footer Placeholder 5">
             <a:extLst>
               <a:ext uri="{FF2B5EF4-FFF2-40B4-BE49-F238E27FC236}">
-                <a16:creationId xmlns="" xmlns:a16="http://schemas.microsoft.com/office/drawing/2014/main" id="{BDC00C21-8A04-424A-8FA8-1ECDEB8CD4CD}"/>
+                <a16:creationId xmlns:a16="http://schemas.microsoft.com/office/drawing/2014/main" xmlns="" id="{BDC00C21-8A04-424A-8FA8-1ECDEB8CD4CD}"/>
               </a:ext>
             </a:extLst>
           </p:cNvPr>
@@ -3193,7 +3278,7 @@
           <p:cNvPr id="7" name="Slide Number Placeholder 6">
             <a:extLst>
               <a:ext uri="{FF2B5EF4-FFF2-40B4-BE49-F238E27FC236}">
-                <a16:creationId xmlns="" xmlns:a16="http://schemas.microsoft.com/office/drawing/2014/main" id="{F42CD0FE-C8F0-4EAA-94BC-6E82306B6C79}"/>
+                <a16:creationId xmlns:a16="http://schemas.microsoft.com/office/drawing/2014/main" xmlns="" id="{F42CD0FE-C8F0-4EAA-94BC-6E82306B6C79}"/>
               </a:ext>
             </a:extLst>
           </p:cNvPr>
@@ -3257,7 +3342,7 @@
           <p:cNvPr id="2" name="Title Placeholder 1">
             <a:extLst>
               <a:ext uri="{FF2B5EF4-FFF2-40B4-BE49-F238E27FC236}">
-                <a16:creationId xmlns="" xmlns:a16="http://schemas.microsoft.com/office/drawing/2014/main" id="{940A7DD8-7706-4514-90E2-C24E40A94D91}"/>
+                <a16:creationId xmlns:a16="http://schemas.microsoft.com/office/drawing/2014/main" xmlns="" id="{940A7DD8-7706-4514-90E2-C24E40A94D91}"/>
               </a:ext>
             </a:extLst>
           </p:cNvPr>
@@ -3295,7 +3380,7 @@
           <p:cNvPr id="3" name="Text Placeholder 2">
             <a:extLst>
               <a:ext uri="{FF2B5EF4-FFF2-40B4-BE49-F238E27FC236}">
-                <a16:creationId xmlns="" xmlns:a16="http://schemas.microsoft.com/office/drawing/2014/main" id="{3981306D-1561-42BE-A13B-EA5C01B087BD}"/>
+                <a16:creationId xmlns:a16="http://schemas.microsoft.com/office/drawing/2014/main" xmlns="" id="{3981306D-1561-42BE-A13B-EA5C01B087BD}"/>
               </a:ext>
             </a:extLst>
           </p:cNvPr>
@@ -3362,7 +3447,7 @@
           <p:cNvPr id="4" name="Date Placeholder 3">
             <a:extLst>
               <a:ext uri="{FF2B5EF4-FFF2-40B4-BE49-F238E27FC236}">
-                <a16:creationId xmlns="" xmlns:a16="http://schemas.microsoft.com/office/drawing/2014/main" id="{97FBF928-F762-45BA-8F1B-7BF281188E37}"/>
+                <a16:creationId xmlns:a16="http://schemas.microsoft.com/office/drawing/2014/main" xmlns="" id="{97FBF928-F762-45BA-8F1B-7BF281188E37}"/>
               </a:ext>
             </a:extLst>
           </p:cNvPr>
@@ -3398,7 +3483,7 @@
           <a:p>
             <a:fld id="{1DF0471C-15C6-430F-A1D2-F5E2439A92BD}" type="datetimeFigureOut">
               <a:rPr lang="en-US" smtClean="0"/>
-              <a:t>12/21/2022</a:t>
+              <a:t>12/22/2022</a:t>
             </a:fld>
             <a:endParaRPr lang="en-US"/>
           </a:p>
@@ -3409,7 +3494,7 @@
           <p:cNvPr id="5" name="Footer Placeholder 4">
             <a:extLst>
               <a:ext uri="{FF2B5EF4-FFF2-40B4-BE49-F238E27FC236}">
-                <a16:creationId xmlns="" xmlns:a16="http://schemas.microsoft.com/office/drawing/2014/main" id="{8BE2224F-E8B6-4AA6-A581-266221933E49}"/>
+                <a16:creationId xmlns:a16="http://schemas.microsoft.com/office/drawing/2014/main" xmlns="" id="{8BE2224F-E8B6-4AA6-A581-266221933E49}"/>
               </a:ext>
             </a:extLst>
           </p:cNvPr>
@@ -3452,7 +3537,7 @@
           <p:cNvPr id="6" name="Slide Number Placeholder 5">
             <a:extLst>
               <a:ext uri="{FF2B5EF4-FFF2-40B4-BE49-F238E27FC236}">
-                <a16:creationId xmlns="" xmlns:a16="http://schemas.microsoft.com/office/drawing/2014/main" id="{16D3250F-2726-4163-8DC1-97CCB3BC9E2C}"/>
+                <a16:creationId xmlns:a16="http://schemas.microsoft.com/office/drawing/2014/main" xmlns="" id="{16D3250F-2726-4163-8DC1-97CCB3BC9E2C}"/>
               </a:ext>
             </a:extLst>
           </p:cNvPr>
@@ -3499,7 +3584,7 @@
           <p:cNvPr id="7" name="MSIPCMContentMarking" descr="{&quot;HashCode&quot;:1596673254,&quot;Placement&quot;:&quot;Footer&quot;,&quot;Top&quot;:524.1047,&quot;Left&quot;:923.827,&quot;SlideWidth&quot;:960,&quot;SlideHeight&quot;:540}">
             <a:extLst>
               <a:ext uri="{FF2B5EF4-FFF2-40B4-BE49-F238E27FC236}">
-                <a16:creationId xmlns="" xmlns:a16="http://schemas.microsoft.com/office/drawing/2014/main" id="{301E2244-036C-431A-A644-1C4D02F8E5C7}"/>
+                <a16:creationId xmlns:a16="http://schemas.microsoft.com/office/drawing/2014/main" xmlns="" id="{301E2244-036C-431A-A644-1C4D02F8E5C7}"/>
               </a:ext>
             </a:extLst>
           </p:cNvPr>
@@ -3902,7 +3987,7 @@
           <p:cNvPr id="10" name="Rectangle: Rounded Corners 9">
             <a:extLst>
               <a:ext uri="{FF2B5EF4-FFF2-40B4-BE49-F238E27FC236}">
-                <a16:creationId xmlns="" xmlns:a16="http://schemas.microsoft.com/office/drawing/2014/main" id="{280D6242-586B-4726-BC93-86C917CE8E52}"/>
+                <a16:creationId xmlns:a16="http://schemas.microsoft.com/office/drawing/2014/main" xmlns="" id="{280D6242-586B-4726-BC93-86C917CE8E52}"/>
               </a:ext>
             </a:extLst>
           </p:cNvPr>
@@ -3958,7 +4043,7 @@
           <p:cNvPr id="11" name="Rectangle: Rounded Corners 10">
             <a:extLst>
               <a:ext uri="{FF2B5EF4-FFF2-40B4-BE49-F238E27FC236}">
-                <a16:creationId xmlns="" xmlns:a16="http://schemas.microsoft.com/office/drawing/2014/main" id="{1AFD95DB-EE82-4014-8431-753B408C671F}"/>
+                <a16:creationId xmlns:a16="http://schemas.microsoft.com/office/drawing/2014/main" xmlns="" id="{1AFD95DB-EE82-4014-8431-753B408C671F}"/>
               </a:ext>
             </a:extLst>
           </p:cNvPr>
@@ -4034,7 +4119,7 @@
           <p:cNvPr id="12" name="Rectangle: Rounded Corners 11">
             <a:extLst>
               <a:ext uri="{FF2B5EF4-FFF2-40B4-BE49-F238E27FC236}">
-                <a16:creationId xmlns="" xmlns:a16="http://schemas.microsoft.com/office/drawing/2014/main" id="{5A1BEE6C-84E1-4224-B447-1AC8A888AAC0}"/>
+                <a16:creationId xmlns:a16="http://schemas.microsoft.com/office/drawing/2014/main" xmlns="" id="{5A1BEE6C-84E1-4224-B447-1AC8A888AAC0}"/>
               </a:ext>
             </a:extLst>
           </p:cNvPr>
@@ -4094,7 +4179,7 @@
           <p:cNvPr id="13" name="Rectangle: Rounded Corners 12">
             <a:extLst>
               <a:ext uri="{FF2B5EF4-FFF2-40B4-BE49-F238E27FC236}">
-                <a16:creationId xmlns="" xmlns:a16="http://schemas.microsoft.com/office/drawing/2014/main" id="{C39141B1-20FA-423F-B75B-5471535624C8}"/>
+                <a16:creationId xmlns:a16="http://schemas.microsoft.com/office/drawing/2014/main" xmlns="" id="{C39141B1-20FA-423F-B75B-5471535624C8}"/>
               </a:ext>
             </a:extLst>
           </p:cNvPr>
@@ -4146,7 +4231,7 @@
           <p:cNvPr id="14" name="Rectangle: Rounded Corners 13">
             <a:extLst>
               <a:ext uri="{FF2B5EF4-FFF2-40B4-BE49-F238E27FC236}">
-                <a16:creationId xmlns="" xmlns:a16="http://schemas.microsoft.com/office/drawing/2014/main" id="{81CE814C-51C2-45D8-9AA1-5DF8C38665AD}"/>
+                <a16:creationId xmlns:a16="http://schemas.microsoft.com/office/drawing/2014/main" xmlns="" id="{81CE814C-51C2-45D8-9AA1-5DF8C38665AD}"/>
               </a:ext>
             </a:extLst>
           </p:cNvPr>
@@ -4206,7 +4291,7 @@
           <p:cNvPr id="15" name="Rectangle: Rounded Corners 14">
             <a:extLst>
               <a:ext uri="{FF2B5EF4-FFF2-40B4-BE49-F238E27FC236}">
-                <a16:creationId xmlns="" xmlns:a16="http://schemas.microsoft.com/office/drawing/2014/main" id="{E25DC19F-6B3A-4545-BDB8-13C5481B9137}"/>
+                <a16:creationId xmlns:a16="http://schemas.microsoft.com/office/drawing/2014/main" xmlns="" id="{E25DC19F-6B3A-4545-BDB8-13C5481B9137}"/>
               </a:ext>
             </a:extLst>
           </p:cNvPr>
@@ -4258,7 +4343,7 @@
           <p:cNvPr id="3" name="Straight Arrow Connector 2">
             <a:extLst>
               <a:ext uri="{FF2B5EF4-FFF2-40B4-BE49-F238E27FC236}">
-                <a16:creationId xmlns="" xmlns:a16="http://schemas.microsoft.com/office/drawing/2014/main" id="{DA11DF66-EB94-42A7-A712-9922433548FE}"/>
+                <a16:creationId xmlns:a16="http://schemas.microsoft.com/office/drawing/2014/main" xmlns="" id="{DA11DF66-EB94-42A7-A712-9922433548FE}"/>
               </a:ext>
             </a:extLst>
           </p:cNvPr>
@@ -4300,7 +4385,7 @@
           <p:cNvPr id="16" name="TextBox 15">
             <a:extLst>
               <a:ext uri="{FF2B5EF4-FFF2-40B4-BE49-F238E27FC236}">
-                <a16:creationId xmlns="" xmlns:a16="http://schemas.microsoft.com/office/drawing/2014/main" id="{9ADF6F6C-444B-4360-9821-C523FAFE1E57}"/>
+                <a16:creationId xmlns:a16="http://schemas.microsoft.com/office/drawing/2014/main" xmlns="" id="{9ADF6F6C-444B-4360-9821-C523FAFE1E57}"/>
               </a:ext>
             </a:extLst>
           </p:cNvPr>
@@ -4340,7 +4425,7 @@
           <p:cNvPr id="17" name="Straight Arrow Connector 16">
             <a:extLst>
               <a:ext uri="{FF2B5EF4-FFF2-40B4-BE49-F238E27FC236}">
-                <a16:creationId xmlns="" xmlns:a16="http://schemas.microsoft.com/office/drawing/2014/main" id="{EB1F8E18-9264-4C4C-A388-691903EE6285}"/>
+                <a16:creationId xmlns:a16="http://schemas.microsoft.com/office/drawing/2014/main" xmlns="" id="{EB1F8E18-9264-4C4C-A388-691903EE6285}"/>
               </a:ext>
             </a:extLst>
           </p:cNvPr>
@@ -4383,7 +4468,7 @@
           <p:cNvPr id="18" name="Straight Arrow Connector 17">
             <a:extLst>
               <a:ext uri="{FF2B5EF4-FFF2-40B4-BE49-F238E27FC236}">
-                <a16:creationId xmlns="" xmlns:a16="http://schemas.microsoft.com/office/drawing/2014/main" id="{6EBEDE39-1CAE-42E5-98DB-1687FB9FF878}"/>
+                <a16:creationId xmlns:a16="http://schemas.microsoft.com/office/drawing/2014/main" xmlns="" id="{6EBEDE39-1CAE-42E5-98DB-1687FB9FF878}"/>
               </a:ext>
             </a:extLst>
           </p:cNvPr>
@@ -4422,7 +4507,7 @@
           <p:cNvPr id="20" name="TextBox 19">
             <a:extLst>
               <a:ext uri="{FF2B5EF4-FFF2-40B4-BE49-F238E27FC236}">
-                <a16:creationId xmlns="" xmlns:a16="http://schemas.microsoft.com/office/drawing/2014/main" id="{C0DE93DA-4E5B-4155-9045-9C20A40BBD7D}"/>
+                <a16:creationId xmlns:a16="http://schemas.microsoft.com/office/drawing/2014/main" xmlns="" id="{C0DE93DA-4E5B-4155-9045-9C20A40BBD7D}"/>
               </a:ext>
             </a:extLst>
           </p:cNvPr>
@@ -4457,7 +4542,7 @@
           <p:cNvPr id="21" name="Straight Arrow Connector 20">
             <a:extLst>
               <a:ext uri="{FF2B5EF4-FFF2-40B4-BE49-F238E27FC236}">
-                <a16:creationId xmlns="" xmlns:a16="http://schemas.microsoft.com/office/drawing/2014/main" id="{D8CA6A16-C24E-403F-92DA-24201808389D}"/>
+                <a16:creationId xmlns:a16="http://schemas.microsoft.com/office/drawing/2014/main" xmlns="" id="{D8CA6A16-C24E-403F-92DA-24201808389D}"/>
               </a:ext>
             </a:extLst>
           </p:cNvPr>
@@ -4499,7 +4584,7 @@
           <p:cNvPr id="22" name="Straight Arrow Connector 21">
             <a:extLst>
               <a:ext uri="{FF2B5EF4-FFF2-40B4-BE49-F238E27FC236}">
-                <a16:creationId xmlns="" xmlns:a16="http://schemas.microsoft.com/office/drawing/2014/main" id="{1AF07EEB-8486-4019-9959-3F0CBF0C6A66}"/>
+                <a16:creationId xmlns:a16="http://schemas.microsoft.com/office/drawing/2014/main" xmlns="" id="{1AF07EEB-8486-4019-9959-3F0CBF0C6A66}"/>
               </a:ext>
             </a:extLst>
           </p:cNvPr>
@@ -4540,7 +4625,7 @@
           <p:cNvPr id="23" name="TextBox 22">
             <a:extLst>
               <a:ext uri="{FF2B5EF4-FFF2-40B4-BE49-F238E27FC236}">
-                <a16:creationId xmlns="" xmlns:a16="http://schemas.microsoft.com/office/drawing/2014/main" id="{452BE8F3-0295-4B15-80B4-B2026225BC92}"/>
+                <a16:creationId xmlns:a16="http://schemas.microsoft.com/office/drawing/2014/main" xmlns="" id="{452BE8F3-0295-4B15-80B4-B2026225BC92}"/>
               </a:ext>
             </a:extLst>
           </p:cNvPr>
@@ -4625,7 +4710,7 @@
           <p:cNvPr id="23" name="TextBox 22">
             <a:extLst>
               <a:ext uri="{FF2B5EF4-FFF2-40B4-BE49-F238E27FC236}">
-                <a16:creationId xmlns="" xmlns:a16="http://schemas.microsoft.com/office/drawing/2014/main" id="{452BE8F3-0295-4B15-80B4-B2026225BC92}"/>
+                <a16:creationId xmlns:a16="http://schemas.microsoft.com/office/drawing/2014/main" xmlns="" id="{452BE8F3-0295-4B15-80B4-B2026225BC92}"/>
               </a:ext>
             </a:extLst>
           </p:cNvPr>
@@ -4677,7 +4762,7 @@
           <p:cNvPr id="24" name="Rectangle: Rounded Corners 14">
             <a:extLst>
               <a:ext uri="{FF2B5EF4-FFF2-40B4-BE49-F238E27FC236}">
-                <a16:creationId xmlns="" xmlns:a16="http://schemas.microsoft.com/office/drawing/2014/main" id="{E25DC19F-6B3A-4545-BDB8-13C5481B9137}"/>
+                <a16:creationId xmlns:a16="http://schemas.microsoft.com/office/drawing/2014/main" xmlns="" id="{E25DC19F-6B3A-4545-BDB8-13C5481B9137}"/>
               </a:ext>
             </a:extLst>
           </p:cNvPr>
@@ -4730,7 +4815,7 @@
           <p:cNvPr id="27" name="Rectangle: Rounded Corners 14">
             <a:extLst>
               <a:ext uri="{FF2B5EF4-FFF2-40B4-BE49-F238E27FC236}">
-                <a16:creationId xmlns="" xmlns:a16="http://schemas.microsoft.com/office/drawing/2014/main" id="{E25DC19F-6B3A-4545-BDB8-13C5481B9137}"/>
+                <a16:creationId xmlns:a16="http://schemas.microsoft.com/office/drawing/2014/main" xmlns="" id="{E25DC19F-6B3A-4545-BDB8-13C5481B9137}"/>
               </a:ext>
             </a:extLst>
           </p:cNvPr>
@@ -4857,7 +4942,7 @@
           <p:cNvPr id="36" name="TextBox 35">
             <a:extLst>
               <a:ext uri="{FF2B5EF4-FFF2-40B4-BE49-F238E27FC236}">
-                <a16:creationId xmlns="" xmlns:a16="http://schemas.microsoft.com/office/drawing/2014/main" id="{452BE8F3-0295-4B15-80B4-B2026225BC92}"/>
+                <a16:creationId xmlns:a16="http://schemas.microsoft.com/office/drawing/2014/main" xmlns="" id="{452BE8F3-0295-4B15-80B4-B2026225BC92}"/>
               </a:ext>
             </a:extLst>
           </p:cNvPr>
@@ -4909,7 +4994,7 @@
           <p:cNvPr id="37" name="Rectangle: Rounded Corners 11">
             <a:extLst>
               <a:ext uri="{FF2B5EF4-FFF2-40B4-BE49-F238E27FC236}">
-                <a16:creationId xmlns="" xmlns:a16="http://schemas.microsoft.com/office/drawing/2014/main" id="{5A1BEE6C-84E1-4224-B447-1AC8A888AAC0}"/>
+                <a16:creationId xmlns:a16="http://schemas.microsoft.com/office/drawing/2014/main" xmlns="" id="{5A1BEE6C-84E1-4224-B447-1AC8A888AAC0}"/>
               </a:ext>
             </a:extLst>
           </p:cNvPr>
@@ -5043,7 +5128,7 @@
           <p:cNvPr id="38" name="Rectangle: Rounded Corners 14">
             <a:extLst>
               <a:ext uri="{FF2B5EF4-FFF2-40B4-BE49-F238E27FC236}">
-                <a16:creationId xmlns="" xmlns:a16="http://schemas.microsoft.com/office/drawing/2014/main" id="{E25DC19F-6B3A-4545-BDB8-13C5481B9137}"/>
+                <a16:creationId xmlns:a16="http://schemas.microsoft.com/office/drawing/2014/main" xmlns="" id="{E25DC19F-6B3A-4545-BDB8-13C5481B9137}"/>
               </a:ext>
             </a:extLst>
           </p:cNvPr>
@@ -5096,7 +5181,7 @@
           <p:cNvPr id="39" name="Rectangle: Rounded Corners 14">
             <a:extLst>
               <a:ext uri="{FF2B5EF4-FFF2-40B4-BE49-F238E27FC236}">
-                <a16:creationId xmlns="" xmlns:a16="http://schemas.microsoft.com/office/drawing/2014/main" id="{E25DC19F-6B3A-4545-BDB8-13C5481B9137}"/>
+                <a16:creationId xmlns:a16="http://schemas.microsoft.com/office/drawing/2014/main" xmlns="" id="{E25DC19F-6B3A-4545-BDB8-13C5481B9137}"/>
               </a:ext>
             </a:extLst>
           </p:cNvPr>
@@ -5190,7 +5275,7 @@
           <p:cNvPr id="41" name="Rectangle: Rounded Corners 11">
             <a:extLst>
               <a:ext uri="{FF2B5EF4-FFF2-40B4-BE49-F238E27FC236}">
-                <a16:creationId xmlns="" xmlns:a16="http://schemas.microsoft.com/office/drawing/2014/main" id="{5A1BEE6C-84E1-4224-B447-1AC8A888AAC0}"/>
+                <a16:creationId xmlns:a16="http://schemas.microsoft.com/office/drawing/2014/main" xmlns="" id="{5A1BEE6C-84E1-4224-B447-1AC8A888AAC0}"/>
               </a:ext>
             </a:extLst>
           </p:cNvPr>
@@ -5423,7 +5508,7 @@
           <p:cNvPr id="44" name="Rectangle: Rounded Corners 11">
             <a:extLst>
               <a:ext uri="{FF2B5EF4-FFF2-40B4-BE49-F238E27FC236}">
-                <a16:creationId xmlns="" xmlns:a16="http://schemas.microsoft.com/office/drawing/2014/main" id="{5A1BEE6C-84E1-4224-B447-1AC8A888AAC0}"/>
+                <a16:creationId xmlns:a16="http://schemas.microsoft.com/office/drawing/2014/main" xmlns="" id="{5A1BEE6C-84E1-4224-B447-1AC8A888AAC0}"/>
               </a:ext>
             </a:extLst>
           </p:cNvPr>
@@ -5581,10 +5666,1082 @@
           </a:p>
         </p:txBody>
       </p:sp>
+      <p:sp>
+        <p:nvSpPr>
+          <p:cNvPr id="2" name="Rectangle 1"/>
+          <p:cNvSpPr/>
+          <p:nvPr/>
+        </p:nvSpPr>
+        <p:spPr>
+          <a:xfrm>
+            <a:off x="6039625" y="147784"/>
+            <a:ext cx="4719305" cy="615553"/>
+          </a:xfrm>
+          <a:prstGeom prst="rect">
+            <a:avLst/>
+          </a:prstGeom>
+          <a:noFill/>
+        </p:spPr>
+        <p:txBody>
+          <a:bodyPr wrap="none" lIns="91440" tIns="45720" rIns="91440" bIns="45720">
+            <a:spAutoFit/>
+          </a:bodyPr>
+          <a:lstStyle/>
+          <a:p>
+            <a:pPr algn="ctr"/>
+            <a:r>
+              <a:rPr lang="en-US" sz="3400" b="0" u="sng" cap="none" spc="0" dirty="0" smtClean="0">
+                <a:ln w="0"/>
+                <a:solidFill>
+                  <a:schemeClr val="tx1"/>
+                </a:solidFill>
+                <a:effectLst>
+                  <a:outerShdw blurRad="38100" dist="19050" dir="2700000" algn="tl" rotWithShape="0">
+                    <a:schemeClr val="dk1">
+                      <a:alpha val="40000"/>
+                    </a:schemeClr>
+                  </a:outerShdw>
+                </a:effectLst>
+              </a:rPr>
+              <a:t>PROPAGATION.</a:t>
+            </a:r>
+            <a:r>
+              <a:rPr lang="en-US" sz="3400" b="0" i="1" u="sng" cap="none" spc="0" dirty="0" smtClean="0">
+                <a:ln w="0"/>
+                <a:solidFill>
+                  <a:srgbClr val="0000FF"/>
+                </a:solidFill>
+                <a:effectLst>
+                  <a:outerShdw blurRad="38100" dist="19050" dir="2700000" algn="tl" rotWithShape="0">
+                    <a:schemeClr val="dk1">
+                      <a:alpha val="40000"/>
+                    </a:schemeClr>
+                  </a:outerShdw>
+                </a:effectLst>
+              </a:rPr>
+              <a:t>REQUIRED</a:t>
+            </a:r>
+            <a:endParaRPr lang="en-US" sz="3400" b="0" i="1" u="sng" cap="none" spc="0" dirty="0">
+              <a:ln w="0"/>
+              <a:solidFill>
+                <a:srgbClr val="0000FF"/>
+              </a:solidFill>
+              <a:effectLst>
+                <a:outerShdw blurRad="38100" dist="19050" dir="2700000" algn="tl" rotWithShape="0">
+                  <a:schemeClr val="dk1">
+                    <a:alpha val="40000"/>
+                  </a:schemeClr>
+                </a:outerShdw>
+              </a:effectLst>
+            </a:endParaRPr>
+          </a:p>
+        </p:txBody>
+      </p:sp>
     </p:spTree>
     <p:extLst>
       <p:ext uri="{BB962C8B-B14F-4D97-AF65-F5344CB8AC3E}">
         <p14:creationId xmlns:p14="http://schemas.microsoft.com/office/powerpoint/2010/main" val="1901695508"/>
+      </p:ext>
+    </p:extLst>
+  </p:cSld>
+  <p:clrMapOvr>
+    <a:masterClrMapping/>
+  </p:clrMapOvr>
+  <p:timing>
+    <p:tnLst>
+      <p:par>
+        <p:cTn id="1" dur="indefinite" restart="never" nodeType="tmRoot"/>
+      </p:par>
+    </p:tnLst>
+  </p:timing>
+</p:sld>
+</file>
+
+<file path=ppt/slides/slide3.xml><?xml version="1.0" encoding="utf-8"?>
+<p:sld xmlns:a="http://schemas.openxmlformats.org/drawingml/2006/main" xmlns:r="http://schemas.openxmlformats.org/officeDocument/2006/relationships" xmlns:p="http://schemas.openxmlformats.org/presentationml/2006/main">
+  <p:cSld>
+    <p:spTree>
+      <p:nvGrpSpPr>
+        <p:cNvPr id="1" name=""/>
+        <p:cNvGrpSpPr/>
+        <p:nvPr/>
+      </p:nvGrpSpPr>
+      <p:grpSpPr>
+        <a:xfrm>
+          <a:off x="0" y="0"/>
+          <a:ext cx="0" cy="0"/>
+          <a:chOff x="0" y="0"/>
+          <a:chExt cx="0" cy="0"/>
+        </a:xfrm>
+      </p:grpSpPr>
+      <p:sp>
+        <p:nvSpPr>
+          <p:cNvPr id="23" name="TextBox 22">
+            <a:extLst>
+              <a:ext uri="{FF2B5EF4-FFF2-40B4-BE49-F238E27FC236}">
+                <a16:creationId xmlns:a16="http://schemas.microsoft.com/office/drawing/2014/main" xmlns="" id="{452BE8F3-0295-4B15-80B4-B2026225BC92}"/>
+              </a:ext>
+            </a:extLst>
+          </p:cNvPr>
+          <p:cNvSpPr txBox="1"/>
+          <p:nvPr/>
+        </p:nvSpPr>
+        <p:spPr>
+          <a:xfrm>
+            <a:off x="2882517" y="455561"/>
+            <a:ext cx="1914038" cy="707886"/>
+          </a:xfrm>
+          <a:prstGeom prst="rect">
+            <a:avLst/>
+          </a:prstGeom>
+          <a:noFill/>
+        </p:spPr>
+        <p:txBody>
+          <a:bodyPr wrap="square">
+            <a:spAutoFit/>
+          </a:bodyPr>
+          <a:lstStyle/>
+          <a:p>
+            <a:pPr algn="ctr"/>
+            <a:r>
+              <a:rPr lang="en-US" sz="2000" dirty="0" smtClean="0">
+                <a:solidFill>
+                  <a:srgbClr val="002060"/>
+                </a:solidFill>
+              </a:rPr>
+              <a:t>Executed in </a:t>
+            </a:r>
+          </a:p>
+          <a:p>
+            <a:pPr algn="ctr"/>
+            <a:r>
+              <a:rPr lang="en-US" sz="2000" dirty="0" smtClean="0">
+                <a:solidFill>
+                  <a:srgbClr val="002060"/>
+                </a:solidFill>
+              </a:rPr>
+              <a:t>Transaction </a:t>
+            </a:r>
+            <a:r>
+              <a:rPr lang="en-US" sz="2000" b="1" i="1" u="sng" dirty="0" smtClean="0">
+                <a:solidFill>
+                  <a:srgbClr val="FF0000"/>
+                </a:solidFill>
+              </a:rPr>
+              <a:t>NO</a:t>
+            </a:r>
+            <a:endParaRPr lang="en-US" sz="2000" b="1" i="1" u="sng" dirty="0">
+              <a:solidFill>
+                <a:srgbClr val="FF0000"/>
+              </a:solidFill>
+            </a:endParaRPr>
+          </a:p>
+        </p:txBody>
+      </p:sp>
+      <p:sp>
+        <p:nvSpPr>
+          <p:cNvPr id="8" name="Rounded Rectangle 7"/>
+          <p:cNvSpPr/>
+          <p:nvPr/>
+        </p:nvSpPr>
+        <p:spPr>
+          <a:xfrm>
+            <a:off x="1976847" y="448611"/>
+            <a:ext cx="3666308" cy="2163961"/>
+          </a:xfrm>
+          <a:prstGeom prst="roundRect">
+            <a:avLst/>
+          </a:prstGeom>
+          <a:noFill/>
+        </p:spPr>
+        <p:style>
+          <a:lnRef idx="2">
+            <a:schemeClr val="accent1">
+              <a:shade val="50000"/>
+            </a:schemeClr>
+          </a:lnRef>
+          <a:fillRef idx="1">
+            <a:schemeClr val="accent1"/>
+          </a:fillRef>
+          <a:effectRef idx="0">
+            <a:schemeClr val="accent1"/>
+          </a:effectRef>
+          <a:fontRef idx="minor">
+            <a:schemeClr val="lt1"/>
+          </a:fontRef>
+        </p:style>
+        <p:txBody>
+          <a:bodyPr rtlCol="0" anchor="ctr"/>
+          <a:lstStyle/>
+          <a:p>
+            <a:pPr algn="ctr"/>
+            <a:endParaRPr lang="en-US"/>
+          </a:p>
+        </p:txBody>
+      </p:sp>
+      <p:cxnSp>
+        <p:nvCxnSpPr>
+          <p:cNvPr id="13" name="Straight Arrow Connector 12"/>
+          <p:cNvCxnSpPr/>
+          <p:nvPr/>
+        </p:nvCxnSpPr>
+        <p:spPr>
+          <a:xfrm>
+            <a:off x="2116184" y="1759132"/>
+            <a:ext cx="399923" cy="2583"/>
+          </a:xfrm>
+          <a:prstGeom prst="straightConnector1">
+            <a:avLst/>
+          </a:prstGeom>
+          <a:ln w="38100">
+            <a:tailEnd type="triangle"/>
+          </a:ln>
+        </p:spPr>
+        <p:style>
+          <a:lnRef idx="1">
+            <a:schemeClr val="accent1"/>
+          </a:lnRef>
+          <a:fillRef idx="0">
+            <a:schemeClr val="accent1"/>
+          </a:fillRef>
+          <a:effectRef idx="0">
+            <a:schemeClr val="accent1"/>
+          </a:effectRef>
+          <a:fontRef idx="minor">
+            <a:schemeClr val="tx1"/>
+          </a:fontRef>
+        </p:style>
+      </p:cxnSp>
+      <p:sp>
+        <p:nvSpPr>
+          <p:cNvPr id="36" name="TextBox 35">
+            <a:extLst>
+              <a:ext uri="{FF2B5EF4-FFF2-40B4-BE49-F238E27FC236}">
+                <a16:creationId xmlns:a16="http://schemas.microsoft.com/office/drawing/2014/main" xmlns="" id="{452BE8F3-0295-4B15-80B4-B2026225BC92}"/>
+              </a:ext>
+            </a:extLst>
+          </p:cNvPr>
+          <p:cNvSpPr txBox="1"/>
+          <p:nvPr/>
+        </p:nvSpPr>
+        <p:spPr>
+          <a:xfrm>
+            <a:off x="4638238" y="3405171"/>
+            <a:ext cx="1914038" cy="707886"/>
+          </a:xfrm>
+          <a:prstGeom prst="rect">
+            <a:avLst/>
+          </a:prstGeom>
+          <a:noFill/>
+        </p:spPr>
+        <p:txBody>
+          <a:bodyPr wrap="square">
+            <a:spAutoFit/>
+          </a:bodyPr>
+          <a:lstStyle/>
+          <a:p>
+            <a:pPr algn="ctr"/>
+            <a:r>
+              <a:rPr lang="en-US" sz="2000" dirty="0" smtClean="0">
+                <a:solidFill>
+                  <a:srgbClr val="002060"/>
+                </a:solidFill>
+              </a:rPr>
+              <a:t>Executed in </a:t>
+            </a:r>
+          </a:p>
+          <a:p>
+            <a:pPr algn="ctr"/>
+            <a:r>
+              <a:rPr lang="en-US" sz="2000" dirty="0" smtClean="0">
+                <a:solidFill>
+                  <a:srgbClr val="002060"/>
+                </a:solidFill>
+              </a:rPr>
+              <a:t>Transaction T1</a:t>
+            </a:r>
+            <a:endParaRPr lang="en-US" sz="2000" dirty="0"/>
+          </a:p>
+        </p:txBody>
+      </p:sp>
+      <p:sp>
+        <p:nvSpPr>
+          <p:cNvPr id="37" name="Rectangle: Rounded Corners 11">
+            <a:extLst>
+              <a:ext uri="{FF2B5EF4-FFF2-40B4-BE49-F238E27FC236}">
+                <a16:creationId xmlns:a16="http://schemas.microsoft.com/office/drawing/2014/main" xmlns="" id="{5A1BEE6C-84E1-4224-B447-1AC8A888AAC0}"/>
+              </a:ext>
+            </a:extLst>
+          </p:cNvPr>
+          <p:cNvSpPr/>
+          <p:nvPr/>
+        </p:nvSpPr>
+        <p:spPr>
+          <a:xfrm>
+            <a:off x="2516107" y="4320263"/>
+            <a:ext cx="2909334" cy="796023"/>
+          </a:xfrm>
+          <a:prstGeom prst="roundRect">
+            <a:avLst/>
+          </a:prstGeom>
+          <a:noFill/>
+        </p:spPr>
+        <p:style>
+          <a:lnRef idx="2">
+            <a:schemeClr val="accent1">
+              <a:shade val="50000"/>
+            </a:schemeClr>
+          </a:lnRef>
+          <a:fillRef idx="1">
+            <a:schemeClr val="accent1"/>
+          </a:fillRef>
+          <a:effectRef idx="0">
+            <a:schemeClr val="accent1"/>
+          </a:effectRef>
+          <a:fontRef idx="minor">
+            <a:schemeClr val="lt1"/>
+          </a:fontRef>
+        </p:style>
+        <p:txBody>
+          <a:bodyPr rtlCol="0" anchor="ctr"/>
+          <a:lstStyle/>
+          <a:p>
+            <a:pPr algn="ctr"/>
+            <a:r>
+              <a:rPr lang="en-US" sz="1100" b="1" dirty="0" smtClean="0">
+                <a:solidFill>
+                  <a:srgbClr val="7030A0"/>
+                </a:solidFill>
+              </a:rPr>
+              <a:t>OrganizationServiceImpl</a:t>
+            </a:r>
+          </a:p>
+          <a:p>
+            <a:r>
+              <a:rPr lang="en-US" sz="900" b="1" dirty="0" smtClean="0">
+                <a:solidFill>
+                  <a:schemeClr val="bg2">
+                    <a:lumMod val="75000"/>
+                  </a:schemeClr>
+                </a:solidFill>
+              </a:rPr>
+              <a:t>@Transactional</a:t>
+            </a:r>
+            <a:r>
+              <a:rPr lang="en-US" sz="900" dirty="0" smtClean="0">
+                <a:solidFill>
+                  <a:schemeClr val="tx1"/>
+                </a:solidFill>
+              </a:rPr>
+              <a:t>(propagation = Propagation.</a:t>
+            </a:r>
+            <a:r>
+              <a:rPr lang="en-US" sz="900" b="1" i="1" dirty="0" smtClean="0">
+                <a:solidFill>
+                  <a:srgbClr val="0000FF"/>
+                </a:solidFill>
+              </a:rPr>
+              <a:t>REQUIRED</a:t>
+            </a:r>
+            <a:r>
+              <a:rPr lang="en-US" sz="900" i="1" dirty="0" smtClean="0">
+                <a:solidFill>
+                  <a:schemeClr val="tx1"/>
+                </a:solidFill>
+              </a:rPr>
+              <a:t>)</a:t>
+            </a:r>
+          </a:p>
+          <a:p>
+            <a:r>
+              <a:rPr lang="en-US" sz="900" b="1" dirty="0">
+                <a:solidFill>
+                  <a:srgbClr val="FF0000"/>
+                </a:solidFill>
+              </a:rPr>
+              <a:t>public</a:t>
+            </a:r>
+            <a:r>
+              <a:rPr lang="en-US" sz="900" dirty="0">
+                <a:solidFill>
+                  <a:schemeClr val="tx1"/>
+                </a:solidFill>
+              </a:rPr>
+              <a:t> void </a:t>
+            </a:r>
+            <a:r>
+              <a:rPr lang="en-US" sz="900" b="1" dirty="0">
+                <a:solidFill>
+                  <a:srgbClr val="C00000"/>
+                </a:solidFill>
+              </a:rPr>
+              <a:t>joinOrganization</a:t>
+            </a:r>
+            <a:r>
+              <a:rPr lang="en-US" sz="900" dirty="0">
+                <a:solidFill>
+                  <a:schemeClr val="tx1"/>
+                </a:solidFill>
+              </a:rPr>
+              <a:t>() {</a:t>
+            </a:r>
+          </a:p>
+          <a:p>
+            <a:r>
+              <a:rPr lang="en-US" sz="900" dirty="0">
+                <a:solidFill>
+                  <a:schemeClr val="tx1"/>
+                </a:solidFill>
+              </a:rPr>
+              <a:t>}</a:t>
+            </a:r>
+          </a:p>
+        </p:txBody>
+      </p:sp>
+      <p:sp>
+        <p:nvSpPr>
+          <p:cNvPr id="38" name="Rectangle: Rounded Corners 14">
+            <a:extLst>
+              <a:ext uri="{FF2B5EF4-FFF2-40B4-BE49-F238E27FC236}">
+                <a16:creationId xmlns:a16="http://schemas.microsoft.com/office/drawing/2014/main" xmlns="" id="{E25DC19F-6B3A-4545-BDB8-13C5481B9137}"/>
+              </a:ext>
+            </a:extLst>
+          </p:cNvPr>
+          <p:cNvSpPr/>
+          <p:nvPr/>
+        </p:nvSpPr>
+        <p:spPr>
+          <a:xfrm>
+            <a:off x="2281647" y="4113057"/>
+            <a:ext cx="1202410" cy="212228"/>
+          </a:xfrm>
+          <a:prstGeom prst="roundRect">
+            <a:avLst/>
+          </a:prstGeom>
+          <a:solidFill>
+            <a:srgbClr val="FFC000"/>
+          </a:solidFill>
+        </p:spPr>
+        <p:style>
+          <a:lnRef idx="2">
+            <a:schemeClr val="accent1">
+              <a:shade val="50000"/>
+            </a:schemeClr>
+          </a:lnRef>
+          <a:fillRef idx="1">
+            <a:schemeClr val="accent1"/>
+          </a:fillRef>
+          <a:effectRef idx="0">
+            <a:schemeClr val="accent1"/>
+          </a:effectRef>
+          <a:fontRef idx="minor">
+            <a:schemeClr val="lt1"/>
+          </a:fontRef>
+        </p:style>
+        <p:txBody>
+          <a:bodyPr rtlCol="0" anchor="ctr"/>
+          <a:lstStyle/>
+          <a:p>
+            <a:pPr algn="ctr"/>
+            <a:r>
+              <a:rPr lang="en-US" sz="900" dirty="0" smtClean="0"/>
+              <a:t>Begin Transaction T1</a:t>
+            </a:r>
+            <a:endParaRPr lang="en-US" sz="900" dirty="0"/>
+          </a:p>
+        </p:txBody>
+      </p:sp>
+      <p:sp>
+        <p:nvSpPr>
+          <p:cNvPr id="39" name="Rectangle: Rounded Corners 14">
+            <a:extLst>
+              <a:ext uri="{FF2B5EF4-FFF2-40B4-BE49-F238E27FC236}">
+                <a16:creationId xmlns:a16="http://schemas.microsoft.com/office/drawing/2014/main" xmlns="" id="{E25DC19F-6B3A-4545-BDB8-13C5481B9137}"/>
+              </a:ext>
+            </a:extLst>
+          </p:cNvPr>
+          <p:cNvSpPr/>
+          <p:nvPr/>
+        </p:nvSpPr>
+        <p:spPr>
+          <a:xfrm>
+            <a:off x="2281647" y="5128829"/>
+            <a:ext cx="1202410" cy="212228"/>
+          </a:xfrm>
+          <a:prstGeom prst="roundRect">
+            <a:avLst/>
+          </a:prstGeom>
+          <a:solidFill>
+            <a:srgbClr val="FFC000"/>
+          </a:solidFill>
+        </p:spPr>
+        <p:style>
+          <a:lnRef idx="2">
+            <a:schemeClr val="accent1">
+              <a:shade val="50000"/>
+            </a:schemeClr>
+          </a:lnRef>
+          <a:fillRef idx="1">
+            <a:schemeClr val="accent1"/>
+          </a:fillRef>
+          <a:effectRef idx="0">
+            <a:schemeClr val="accent1"/>
+          </a:effectRef>
+          <a:fontRef idx="minor">
+            <a:schemeClr val="lt1"/>
+          </a:fontRef>
+        </p:style>
+        <p:txBody>
+          <a:bodyPr rtlCol="0" anchor="ctr"/>
+          <a:lstStyle/>
+          <a:p>
+            <a:pPr algn="ctr"/>
+            <a:r>
+              <a:rPr lang="en-US" sz="900" dirty="0" smtClean="0"/>
+              <a:t>End Transaction T1</a:t>
+            </a:r>
+            <a:endParaRPr lang="en-US" sz="900" dirty="0"/>
+          </a:p>
+        </p:txBody>
+      </p:sp>
+      <p:sp>
+        <p:nvSpPr>
+          <p:cNvPr id="40" name="Rounded Rectangle 39"/>
+          <p:cNvSpPr/>
+          <p:nvPr/>
+        </p:nvSpPr>
+        <p:spPr>
+          <a:xfrm>
+            <a:off x="1976846" y="3405171"/>
+            <a:ext cx="7123611" cy="2163961"/>
+          </a:xfrm>
+          <a:prstGeom prst="roundRect">
+            <a:avLst/>
+          </a:prstGeom>
+          <a:noFill/>
+        </p:spPr>
+        <p:style>
+          <a:lnRef idx="2">
+            <a:schemeClr val="accent1">
+              <a:shade val="50000"/>
+            </a:schemeClr>
+          </a:lnRef>
+          <a:fillRef idx="1">
+            <a:schemeClr val="accent1"/>
+          </a:fillRef>
+          <a:effectRef idx="0">
+            <a:schemeClr val="accent1"/>
+          </a:effectRef>
+          <a:fontRef idx="minor">
+            <a:schemeClr val="lt1"/>
+          </a:fontRef>
+        </p:style>
+        <p:txBody>
+          <a:bodyPr rtlCol="0" anchor="ctr"/>
+          <a:lstStyle/>
+          <a:p>
+            <a:pPr algn="ctr"/>
+            <a:endParaRPr lang="en-US"/>
+          </a:p>
+        </p:txBody>
+      </p:sp>
+      <p:sp>
+        <p:nvSpPr>
+          <p:cNvPr id="41" name="Rectangle: Rounded Corners 11">
+            <a:extLst>
+              <a:ext uri="{FF2B5EF4-FFF2-40B4-BE49-F238E27FC236}">
+                <a16:creationId xmlns:a16="http://schemas.microsoft.com/office/drawing/2014/main" xmlns="" id="{5A1BEE6C-84E1-4224-B447-1AC8A888AAC0}"/>
+              </a:ext>
+            </a:extLst>
+          </p:cNvPr>
+          <p:cNvSpPr/>
+          <p:nvPr/>
+        </p:nvSpPr>
+        <p:spPr>
+          <a:xfrm>
+            <a:off x="5973409" y="4332806"/>
+            <a:ext cx="2909334" cy="796023"/>
+          </a:xfrm>
+          <a:prstGeom prst="roundRect">
+            <a:avLst/>
+          </a:prstGeom>
+          <a:noFill/>
+        </p:spPr>
+        <p:style>
+          <a:lnRef idx="2">
+            <a:schemeClr val="accent1">
+              <a:shade val="50000"/>
+            </a:schemeClr>
+          </a:lnRef>
+          <a:fillRef idx="1">
+            <a:schemeClr val="accent1"/>
+          </a:fillRef>
+          <a:effectRef idx="0">
+            <a:schemeClr val="accent1"/>
+          </a:effectRef>
+          <a:fontRef idx="minor">
+            <a:schemeClr val="lt1"/>
+          </a:fontRef>
+        </p:style>
+        <p:txBody>
+          <a:bodyPr rtlCol="0" anchor="ctr"/>
+          <a:lstStyle/>
+          <a:p>
+            <a:pPr algn="ctr"/>
+            <a:r>
+              <a:rPr lang="en-US" sz="1100" b="1" dirty="0" smtClean="0">
+                <a:solidFill>
+                  <a:srgbClr val="7030A0"/>
+                </a:solidFill>
+              </a:rPr>
+              <a:t>EmployeeServiceImpl</a:t>
+            </a:r>
+          </a:p>
+          <a:p>
+            <a:r>
+              <a:rPr lang="en-US" sz="900" b="1" dirty="0" smtClean="0">
+                <a:solidFill>
+                  <a:schemeClr val="bg2">
+                    <a:lumMod val="75000"/>
+                  </a:schemeClr>
+                </a:solidFill>
+              </a:rPr>
+              <a:t>@Transactional</a:t>
+            </a:r>
+            <a:r>
+              <a:rPr lang="en-US" sz="900" dirty="0" smtClean="0">
+                <a:solidFill>
+                  <a:schemeClr val="tx1"/>
+                </a:solidFill>
+              </a:rPr>
+              <a:t>(propagation </a:t>
+            </a:r>
+            <a:r>
+              <a:rPr lang="en-US" sz="900" dirty="0">
+                <a:solidFill>
+                  <a:schemeClr val="tx1"/>
+                </a:solidFill>
+              </a:rPr>
+              <a:t>= </a:t>
+            </a:r>
+            <a:r>
+              <a:rPr lang="en-US" sz="900" dirty="0">
+                <a:solidFill>
+                  <a:schemeClr val="tx1"/>
+                </a:solidFill>
+              </a:rPr>
+              <a:t>Propagation.</a:t>
+            </a:r>
+            <a:r>
+              <a:rPr lang="en-US" sz="900" b="1" i="1" dirty="0">
+                <a:solidFill>
+                  <a:srgbClr val="0000FF"/>
+                </a:solidFill>
+              </a:rPr>
+              <a:t>SUPPORTS</a:t>
+            </a:r>
+            <a:r>
+              <a:rPr lang="en-US" sz="900" i="1" dirty="0" smtClean="0">
+                <a:solidFill>
+                  <a:schemeClr val="tx1"/>
+                </a:solidFill>
+              </a:rPr>
+              <a:t>)</a:t>
+            </a:r>
+            <a:endParaRPr lang="en-US" sz="900" i="1" dirty="0" smtClean="0">
+              <a:solidFill>
+                <a:schemeClr val="tx1"/>
+              </a:solidFill>
+            </a:endParaRPr>
+          </a:p>
+          <a:p>
+            <a:r>
+              <a:rPr lang="en-US" sz="900" b="1" dirty="0" smtClean="0">
+                <a:solidFill>
+                  <a:srgbClr val="FF0000"/>
+                </a:solidFill>
+              </a:rPr>
+              <a:t>public</a:t>
+            </a:r>
+            <a:r>
+              <a:rPr lang="en-US" sz="900" dirty="0" smtClean="0">
+                <a:solidFill>
+                  <a:srgbClr val="FF0000"/>
+                </a:solidFill>
+              </a:rPr>
+              <a:t> </a:t>
+            </a:r>
+            <a:r>
+              <a:rPr lang="en-US" sz="900" dirty="0">
+                <a:solidFill>
+                  <a:schemeClr val="tx1"/>
+                </a:solidFill>
+              </a:rPr>
+              <a:t>Employee </a:t>
+            </a:r>
+            <a:r>
+              <a:rPr lang="en-US" sz="900" b="1" dirty="0" smtClean="0">
+                <a:solidFill>
+                  <a:srgbClr val="C00000"/>
+                </a:solidFill>
+              </a:rPr>
+              <a:t>addEmployee</a:t>
+            </a:r>
+            <a:r>
+              <a:rPr lang="en-US" sz="900" dirty="0" smtClean="0">
+                <a:solidFill>
+                  <a:schemeClr val="tx1"/>
+                </a:solidFill>
+              </a:rPr>
+              <a:t>() </a:t>
+            </a:r>
+            <a:r>
+              <a:rPr lang="en-US" sz="900" dirty="0">
+                <a:solidFill>
+                  <a:schemeClr val="tx1"/>
+                </a:solidFill>
+              </a:rPr>
+              <a:t>{</a:t>
+            </a:r>
+          </a:p>
+          <a:p>
+            <a:r>
+              <a:rPr lang="en-US" sz="900" dirty="0" smtClean="0">
+                <a:solidFill>
+                  <a:schemeClr val="tx1"/>
+                </a:solidFill>
+              </a:rPr>
+              <a:t>}</a:t>
+            </a:r>
+            <a:endParaRPr lang="en-US" sz="900" dirty="0">
+              <a:solidFill>
+                <a:schemeClr val="tx1"/>
+              </a:solidFill>
+            </a:endParaRPr>
+          </a:p>
+        </p:txBody>
+      </p:sp>
+      <p:cxnSp>
+        <p:nvCxnSpPr>
+          <p:cNvPr id="42" name="Straight Arrow Connector 41"/>
+          <p:cNvCxnSpPr>
+            <a:endCxn id="37" idx="1"/>
+          </p:cNvCxnSpPr>
+          <p:nvPr/>
+        </p:nvCxnSpPr>
+        <p:spPr>
+          <a:xfrm>
+            <a:off x="2116184" y="4715692"/>
+            <a:ext cx="399923" cy="2583"/>
+          </a:xfrm>
+          <a:prstGeom prst="straightConnector1">
+            <a:avLst/>
+          </a:prstGeom>
+          <a:ln w="38100">
+            <a:tailEnd type="triangle"/>
+          </a:ln>
+        </p:spPr>
+        <p:style>
+          <a:lnRef idx="1">
+            <a:schemeClr val="accent1"/>
+          </a:lnRef>
+          <a:fillRef idx="0">
+            <a:schemeClr val="accent1"/>
+          </a:fillRef>
+          <a:effectRef idx="0">
+            <a:schemeClr val="accent1"/>
+          </a:effectRef>
+          <a:fontRef idx="minor">
+            <a:schemeClr val="tx1"/>
+          </a:fontRef>
+        </p:style>
+      </p:cxnSp>
+      <p:cxnSp>
+        <p:nvCxnSpPr>
+          <p:cNvPr id="43" name="Straight Arrow Connector 42"/>
+          <p:cNvCxnSpPr>
+            <a:endCxn id="41" idx="1"/>
+          </p:cNvCxnSpPr>
+          <p:nvPr/>
+        </p:nvCxnSpPr>
+        <p:spPr>
+          <a:xfrm>
+            <a:off x="5442857" y="4730817"/>
+            <a:ext cx="530552" cy="1"/>
+          </a:xfrm>
+          <a:prstGeom prst="straightConnector1">
+            <a:avLst/>
+          </a:prstGeom>
+          <a:ln w="38100">
+            <a:tailEnd type="triangle"/>
+          </a:ln>
+        </p:spPr>
+        <p:style>
+          <a:lnRef idx="1">
+            <a:schemeClr val="accent1"/>
+          </a:lnRef>
+          <a:fillRef idx="0">
+            <a:schemeClr val="accent1"/>
+          </a:fillRef>
+          <a:effectRef idx="0">
+            <a:schemeClr val="accent1"/>
+          </a:effectRef>
+          <a:fontRef idx="minor">
+            <a:schemeClr val="tx1"/>
+          </a:fontRef>
+        </p:style>
+      </p:cxnSp>
+      <p:sp>
+        <p:nvSpPr>
+          <p:cNvPr id="44" name="Rectangle: Rounded Corners 11">
+            <a:extLst>
+              <a:ext uri="{FF2B5EF4-FFF2-40B4-BE49-F238E27FC236}">
+                <a16:creationId xmlns:a16="http://schemas.microsoft.com/office/drawing/2014/main" xmlns="" id="{5A1BEE6C-84E1-4224-B447-1AC8A888AAC0}"/>
+              </a:ext>
+            </a:extLst>
+          </p:cNvPr>
+          <p:cNvSpPr/>
+          <p:nvPr/>
+        </p:nvSpPr>
+        <p:spPr>
+          <a:xfrm>
+            <a:off x="2516107" y="1368724"/>
+            <a:ext cx="2909334" cy="796023"/>
+          </a:xfrm>
+          <a:prstGeom prst="roundRect">
+            <a:avLst/>
+          </a:prstGeom>
+          <a:noFill/>
+        </p:spPr>
+        <p:style>
+          <a:lnRef idx="2">
+            <a:schemeClr val="accent1">
+              <a:shade val="50000"/>
+            </a:schemeClr>
+          </a:lnRef>
+          <a:fillRef idx="1">
+            <a:schemeClr val="accent1"/>
+          </a:fillRef>
+          <a:effectRef idx="0">
+            <a:schemeClr val="accent1"/>
+          </a:effectRef>
+          <a:fontRef idx="minor">
+            <a:schemeClr val="lt1"/>
+          </a:fontRef>
+        </p:style>
+        <p:txBody>
+          <a:bodyPr rtlCol="0" anchor="ctr"/>
+          <a:lstStyle/>
+          <a:p>
+            <a:pPr algn="ctr"/>
+            <a:r>
+              <a:rPr lang="en-US" sz="1100" b="1" dirty="0" smtClean="0">
+                <a:solidFill>
+                  <a:srgbClr val="7030A0"/>
+                </a:solidFill>
+              </a:rPr>
+              <a:t>EmployeeServiceImpl</a:t>
+            </a:r>
+          </a:p>
+          <a:p>
+            <a:r>
+              <a:rPr lang="en-US" sz="900" b="1" dirty="0" smtClean="0">
+                <a:solidFill>
+                  <a:schemeClr val="bg2">
+                    <a:lumMod val="75000"/>
+                  </a:schemeClr>
+                </a:solidFill>
+              </a:rPr>
+              <a:t>@Transactional</a:t>
+            </a:r>
+            <a:r>
+              <a:rPr lang="en-US" sz="900" dirty="0" smtClean="0">
+                <a:solidFill>
+                  <a:schemeClr val="tx1"/>
+                </a:solidFill>
+              </a:rPr>
+              <a:t>(propagation </a:t>
+            </a:r>
+            <a:r>
+              <a:rPr lang="en-US" sz="900" dirty="0">
+                <a:solidFill>
+                  <a:schemeClr val="tx1"/>
+                </a:solidFill>
+              </a:rPr>
+              <a:t>= </a:t>
+            </a:r>
+            <a:r>
+              <a:rPr lang="en-US" sz="900" dirty="0" smtClean="0">
+                <a:solidFill>
+                  <a:schemeClr val="tx1"/>
+                </a:solidFill>
+              </a:rPr>
+              <a:t>Propagation.</a:t>
+            </a:r>
+            <a:r>
+              <a:rPr lang="en-US" sz="900" b="1" i="1" dirty="0" smtClean="0">
+                <a:solidFill>
+                  <a:srgbClr val="0000FF"/>
+                </a:solidFill>
+              </a:rPr>
+              <a:t>SUPPORTS</a:t>
+            </a:r>
+            <a:r>
+              <a:rPr lang="en-US" sz="900" i="1" dirty="0" smtClean="0">
+                <a:solidFill>
+                  <a:schemeClr val="tx1"/>
+                </a:solidFill>
+              </a:rPr>
+              <a:t>)</a:t>
+            </a:r>
+            <a:endParaRPr lang="en-US" sz="900" i="1" dirty="0" smtClean="0">
+              <a:solidFill>
+                <a:schemeClr val="tx1"/>
+              </a:solidFill>
+            </a:endParaRPr>
+          </a:p>
+          <a:p>
+            <a:r>
+              <a:rPr lang="en-US" sz="900" b="1" dirty="0" smtClean="0">
+                <a:solidFill>
+                  <a:srgbClr val="FF0000"/>
+                </a:solidFill>
+              </a:rPr>
+              <a:t>public</a:t>
+            </a:r>
+            <a:r>
+              <a:rPr lang="en-US" sz="900" dirty="0" smtClean="0">
+                <a:solidFill>
+                  <a:srgbClr val="FF0000"/>
+                </a:solidFill>
+              </a:rPr>
+              <a:t> </a:t>
+            </a:r>
+            <a:r>
+              <a:rPr lang="en-US" sz="900" dirty="0">
+                <a:solidFill>
+                  <a:schemeClr val="tx1"/>
+                </a:solidFill>
+              </a:rPr>
+              <a:t>Employee </a:t>
+            </a:r>
+            <a:r>
+              <a:rPr lang="en-US" sz="900" b="1" dirty="0" smtClean="0">
+                <a:solidFill>
+                  <a:srgbClr val="C00000"/>
+                </a:solidFill>
+              </a:rPr>
+              <a:t>addEmployee</a:t>
+            </a:r>
+            <a:r>
+              <a:rPr lang="en-US" sz="900" dirty="0" smtClean="0">
+                <a:solidFill>
+                  <a:schemeClr val="tx1"/>
+                </a:solidFill>
+              </a:rPr>
+              <a:t>() </a:t>
+            </a:r>
+            <a:r>
+              <a:rPr lang="en-US" sz="900" dirty="0">
+                <a:solidFill>
+                  <a:schemeClr val="tx1"/>
+                </a:solidFill>
+              </a:rPr>
+              <a:t>{</a:t>
+            </a:r>
+          </a:p>
+          <a:p>
+            <a:r>
+              <a:rPr lang="en-US" sz="900" dirty="0" smtClean="0">
+                <a:solidFill>
+                  <a:schemeClr val="tx1"/>
+                </a:solidFill>
+              </a:rPr>
+              <a:t>}</a:t>
+            </a:r>
+            <a:endParaRPr lang="en-US" sz="900" dirty="0">
+              <a:solidFill>
+                <a:schemeClr val="tx1"/>
+              </a:solidFill>
+            </a:endParaRPr>
+          </a:p>
+        </p:txBody>
+      </p:sp>
+      <p:sp>
+        <p:nvSpPr>
+          <p:cNvPr id="16" name="Rectangle 15"/>
+          <p:cNvSpPr/>
+          <p:nvPr/>
+        </p:nvSpPr>
+        <p:spPr>
+          <a:xfrm>
+            <a:off x="6036741" y="147784"/>
+            <a:ext cx="4725076" cy="615553"/>
+          </a:xfrm>
+          <a:prstGeom prst="rect">
+            <a:avLst/>
+          </a:prstGeom>
+          <a:noFill/>
+        </p:spPr>
+        <p:txBody>
+          <a:bodyPr wrap="none" lIns="91440" tIns="45720" rIns="91440" bIns="45720">
+            <a:spAutoFit/>
+          </a:bodyPr>
+          <a:lstStyle/>
+          <a:p>
+            <a:pPr algn="ctr"/>
+            <a:r>
+              <a:rPr lang="en-US" sz="3400" b="0" u="sng" cap="none" spc="0" dirty="0" smtClean="0">
+                <a:ln w="0"/>
+                <a:solidFill>
+                  <a:schemeClr val="tx1"/>
+                </a:solidFill>
+                <a:effectLst>
+                  <a:outerShdw blurRad="38100" dist="19050" dir="2700000" algn="tl" rotWithShape="0">
+                    <a:schemeClr val="dk1">
+                      <a:alpha val="40000"/>
+                    </a:schemeClr>
+                  </a:outerShdw>
+                </a:effectLst>
+              </a:rPr>
+              <a:t>PROPAGATION.</a:t>
+            </a:r>
+            <a:r>
+              <a:rPr lang="en-US" sz="3400" b="0" i="1" u="sng" cap="none" spc="0" dirty="0" smtClean="0">
+                <a:ln w="0"/>
+                <a:solidFill>
+                  <a:srgbClr val="0000FF"/>
+                </a:solidFill>
+                <a:effectLst>
+                  <a:outerShdw blurRad="38100" dist="19050" dir="2700000" algn="tl" rotWithShape="0">
+                    <a:schemeClr val="dk1">
+                      <a:alpha val="40000"/>
+                    </a:schemeClr>
+                  </a:outerShdw>
+                </a:effectLst>
+              </a:rPr>
+              <a:t>SUPPORTS</a:t>
+            </a:r>
+            <a:endParaRPr lang="en-US" sz="3400" b="0" i="1" u="sng" cap="none" spc="0" dirty="0">
+              <a:ln w="0"/>
+              <a:solidFill>
+                <a:srgbClr val="0000FF"/>
+              </a:solidFill>
+              <a:effectLst>
+                <a:outerShdw blurRad="38100" dist="19050" dir="2700000" algn="tl" rotWithShape="0">
+                  <a:schemeClr val="dk1">
+                    <a:alpha val="40000"/>
+                  </a:schemeClr>
+                </a:outerShdw>
+              </a:effectLst>
+            </a:endParaRPr>
+          </a:p>
+        </p:txBody>
+      </p:sp>
+    </p:spTree>
+    <p:extLst>
+      <p:ext uri="{BB962C8B-B14F-4D97-AF65-F5344CB8AC3E}">
+        <p14:creationId xmlns:p14="http://schemas.microsoft.com/office/powerpoint/2010/main" val="542041219"/>
       </p:ext>
     </p:extLst>
   </p:cSld>

--- a/05-Transaction-Management/Transaction_management.pptx
+++ b/05-Transaction-Management/Transaction_management.pptx
@@ -5,12 +5,14 @@
     <p:sldMasterId id="2147483648" r:id="rId1"/>
   </p:sldMasterIdLst>
   <p:notesMasterIdLst>
-    <p:notesMasterId r:id="rId5"/>
+    <p:notesMasterId r:id="rId7"/>
   </p:notesMasterIdLst>
   <p:sldIdLst>
     <p:sldId id="256" r:id="rId2"/>
     <p:sldId id="259" r:id="rId3"/>
     <p:sldId id="260" r:id="rId4"/>
+    <p:sldId id="261" r:id="rId5"/>
+    <p:sldId id="262" r:id="rId6"/>
   </p:sldIdLst>
   <p:sldSz cx="12192000" cy="6858000"/>
   <p:notesSz cx="6858000" cy="9144000"/>
@@ -250,7 +252,7 @@
           <a:p>
             <a:fld id="{D35A715A-4E3D-47D0-A386-7DBD8CC75CAA}" type="datetimeFigureOut">
               <a:rPr lang="en-US" smtClean="0"/>
-              <a:t>12/22/2022</a:t>
+              <a:t>12/24/2022</a:t>
             </a:fld>
             <a:endParaRPr lang="en-US"/>
           </a:p>
@@ -686,6 +688,174 @@
 </p:notes>
 </file>
 
+<file path=ppt/notesSlides/notesSlide3.xml><?xml version="1.0" encoding="utf-8"?>
+<p:notes xmlns:a="http://schemas.openxmlformats.org/drawingml/2006/main" xmlns:r="http://schemas.openxmlformats.org/officeDocument/2006/relationships" xmlns:p="http://schemas.openxmlformats.org/presentationml/2006/main">
+  <p:cSld>
+    <p:spTree>
+      <p:nvGrpSpPr>
+        <p:cNvPr id="1" name=""/>
+        <p:cNvGrpSpPr/>
+        <p:nvPr/>
+      </p:nvGrpSpPr>
+      <p:grpSpPr>
+        <a:xfrm>
+          <a:off x="0" y="0"/>
+          <a:ext cx="0" cy="0"/>
+          <a:chOff x="0" y="0"/>
+          <a:chExt cx="0" cy="0"/>
+        </a:xfrm>
+      </p:grpSpPr>
+      <p:sp>
+        <p:nvSpPr>
+          <p:cNvPr id="2" name="Slide Image Placeholder 1"/>
+          <p:cNvSpPr>
+            <a:spLocks noGrp="1" noRot="1" noChangeAspect="1"/>
+          </p:cNvSpPr>
+          <p:nvPr>
+            <p:ph type="sldImg"/>
+          </p:nvPr>
+        </p:nvSpPr>
+        <p:spPr/>
+      </p:sp>
+      <p:sp>
+        <p:nvSpPr>
+          <p:cNvPr id="3" name="Notes Placeholder 2"/>
+          <p:cNvSpPr>
+            <a:spLocks noGrp="1"/>
+          </p:cNvSpPr>
+          <p:nvPr>
+            <p:ph type="body" idx="1"/>
+          </p:nvPr>
+        </p:nvSpPr>
+        <p:spPr/>
+        <p:txBody>
+          <a:bodyPr/>
+          <a:lstStyle/>
+          <a:p>
+            <a:endParaRPr lang="en-US"/>
+          </a:p>
+        </p:txBody>
+      </p:sp>
+      <p:sp>
+        <p:nvSpPr>
+          <p:cNvPr id="4" name="Slide Number Placeholder 3"/>
+          <p:cNvSpPr>
+            <a:spLocks noGrp="1"/>
+          </p:cNvSpPr>
+          <p:nvPr>
+            <p:ph type="sldNum" sz="quarter" idx="10"/>
+          </p:nvPr>
+        </p:nvSpPr>
+        <p:spPr/>
+        <p:txBody>
+          <a:bodyPr/>
+          <a:lstStyle/>
+          <a:p>
+            <a:fld id="{7FBCA59B-B642-4ED7-B3DB-3E8740693BC1}" type="slidenum">
+              <a:rPr lang="en-US" smtClean="0"/>
+              <a:t>4</a:t>
+            </a:fld>
+            <a:endParaRPr lang="en-US"/>
+          </a:p>
+        </p:txBody>
+      </p:sp>
+    </p:spTree>
+    <p:extLst>
+      <p:ext uri="{BB962C8B-B14F-4D97-AF65-F5344CB8AC3E}">
+        <p14:creationId xmlns:p14="http://schemas.microsoft.com/office/powerpoint/2010/main" val="3284512956"/>
+      </p:ext>
+    </p:extLst>
+  </p:cSld>
+  <p:clrMapOvr>
+    <a:masterClrMapping/>
+  </p:clrMapOvr>
+</p:notes>
+</file>
+
+<file path=ppt/notesSlides/notesSlide4.xml><?xml version="1.0" encoding="utf-8"?>
+<p:notes xmlns:a="http://schemas.openxmlformats.org/drawingml/2006/main" xmlns:r="http://schemas.openxmlformats.org/officeDocument/2006/relationships" xmlns:p="http://schemas.openxmlformats.org/presentationml/2006/main">
+  <p:cSld>
+    <p:spTree>
+      <p:nvGrpSpPr>
+        <p:cNvPr id="1" name=""/>
+        <p:cNvGrpSpPr/>
+        <p:nvPr/>
+      </p:nvGrpSpPr>
+      <p:grpSpPr>
+        <a:xfrm>
+          <a:off x="0" y="0"/>
+          <a:ext cx="0" cy="0"/>
+          <a:chOff x="0" y="0"/>
+          <a:chExt cx="0" cy="0"/>
+        </a:xfrm>
+      </p:grpSpPr>
+      <p:sp>
+        <p:nvSpPr>
+          <p:cNvPr id="2" name="Slide Image Placeholder 1"/>
+          <p:cNvSpPr>
+            <a:spLocks noGrp="1" noRot="1" noChangeAspect="1"/>
+          </p:cNvSpPr>
+          <p:nvPr>
+            <p:ph type="sldImg"/>
+          </p:nvPr>
+        </p:nvSpPr>
+        <p:spPr/>
+      </p:sp>
+      <p:sp>
+        <p:nvSpPr>
+          <p:cNvPr id="3" name="Notes Placeholder 2"/>
+          <p:cNvSpPr>
+            <a:spLocks noGrp="1"/>
+          </p:cNvSpPr>
+          <p:nvPr>
+            <p:ph type="body" idx="1"/>
+          </p:nvPr>
+        </p:nvSpPr>
+        <p:spPr/>
+        <p:txBody>
+          <a:bodyPr/>
+          <a:lstStyle/>
+          <a:p>
+            <a:endParaRPr lang="en-US"/>
+          </a:p>
+        </p:txBody>
+      </p:sp>
+      <p:sp>
+        <p:nvSpPr>
+          <p:cNvPr id="4" name="Slide Number Placeholder 3"/>
+          <p:cNvSpPr>
+            <a:spLocks noGrp="1"/>
+          </p:cNvSpPr>
+          <p:nvPr>
+            <p:ph type="sldNum" sz="quarter" idx="10"/>
+          </p:nvPr>
+        </p:nvSpPr>
+        <p:spPr/>
+        <p:txBody>
+          <a:bodyPr/>
+          <a:lstStyle/>
+          <a:p>
+            <a:fld id="{7FBCA59B-B642-4ED7-B3DB-3E8740693BC1}" type="slidenum">
+              <a:rPr lang="en-US" smtClean="0"/>
+              <a:t>5</a:t>
+            </a:fld>
+            <a:endParaRPr lang="en-US"/>
+          </a:p>
+        </p:txBody>
+      </p:sp>
+    </p:spTree>
+    <p:extLst>
+      <p:ext uri="{BB962C8B-B14F-4D97-AF65-F5344CB8AC3E}">
+        <p14:creationId xmlns:p14="http://schemas.microsoft.com/office/powerpoint/2010/main" val="1974055800"/>
+      </p:ext>
+    </p:extLst>
+  </p:cSld>
+  <p:clrMapOvr>
+    <a:masterClrMapping/>
+  </p:clrMapOvr>
+</p:notes>
+</file>
+
 <file path=ppt/slideLayouts/slideLayout1.xml><?xml version="1.0" encoding="utf-8"?>
 <p:sldLayout xmlns:a="http://schemas.openxmlformats.org/drawingml/2006/main" xmlns:r="http://schemas.openxmlformats.org/officeDocument/2006/relationships" xmlns:p="http://schemas.openxmlformats.org/presentationml/2006/main" type="title" preserve="1">
   <p:cSld name="Title Slide">
@@ -708,7 +878,7 @@
           <p:cNvPr id="2" name="Title 1">
             <a:extLst>
               <a:ext uri="{FF2B5EF4-FFF2-40B4-BE49-F238E27FC236}">
-                <a16:creationId xmlns:a16="http://schemas.microsoft.com/office/drawing/2014/main" xmlns="" id="{7F986473-48FF-48D2-BE87-8E6EF1DE5CB7}"/>
+                <a16:creationId xmlns="" xmlns:a16="http://schemas.microsoft.com/office/drawing/2014/main" id="{7F986473-48FF-48D2-BE87-8E6EF1DE5CB7}"/>
               </a:ext>
             </a:extLst>
           </p:cNvPr>
@@ -745,7 +915,7 @@
           <p:cNvPr id="3" name="Subtitle 2">
             <a:extLst>
               <a:ext uri="{FF2B5EF4-FFF2-40B4-BE49-F238E27FC236}">
-                <a16:creationId xmlns:a16="http://schemas.microsoft.com/office/drawing/2014/main" xmlns="" id="{34E5E0FE-6852-4CAB-B62E-982090E13B7E}"/>
+                <a16:creationId xmlns="" xmlns:a16="http://schemas.microsoft.com/office/drawing/2014/main" id="{34E5E0FE-6852-4CAB-B62E-982090E13B7E}"/>
               </a:ext>
             </a:extLst>
           </p:cNvPr>
@@ -815,7 +985,7 @@
           <p:cNvPr id="4" name="Date Placeholder 3">
             <a:extLst>
               <a:ext uri="{FF2B5EF4-FFF2-40B4-BE49-F238E27FC236}">
-                <a16:creationId xmlns:a16="http://schemas.microsoft.com/office/drawing/2014/main" xmlns="" id="{02AD77F6-FA2D-48AC-A2E1-97A3C253D053}"/>
+                <a16:creationId xmlns="" xmlns:a16="http://schemas.microsoft.com/office/drawing/2014/main" id="{02AD77F6-FA2D-48AC-A2E1-97A3C253D053}"/>
               </a:ext>
             </a:extLst>
           </p:cNvPr>
@@ -833,7 +1003,7 @@
           <a:p>
             <a:fld id="{1DF0471C-15C6-430F-A1D2-F5E2439A92BD}" type="datetimeFigureOut">
               <a:rPr lang="en-US" smtClean="0"/>
-              <a:t>12/22/2022</a:t>
+              <a:t>12/24/2022</a:t>
             </a:fld>
             <a:endParaRPr lang="en-US"/>
           </a:p>
@@ -844,7 +1014,7 @@
           <p:cNvPr id="5" name="Footer Placeholder 4">
             <a:extLst>
               <a:ext uri="{FF2B5EF4-FFF2-40B4-BE49-F238E27FC236}">
-                <a16:creationId xmlns:a16="http://schemas.microsoft.com/office/drawing/2014/main" xmlns="" id="{B06C71EF-5AB6-482F-82DD-661F92C0EB81}"/>
+                <a16:creationId xmlns="" xmlns:a16="http://schemas.microsoft.com/office/drawing/2014/main" id="{B06C71EF-5AB6-482F-82DD-661F92C0EB81}"/>
               </a:ext>
             </a:extLst>
           </p:cNvPr>
@@ -869,7 +1039,7 @@
           <p:cNvPr id="6" name="Slide Number Placeholder 5">
             <a:extLst>
               <a:ext uri="{FF2B5EF4-FFF2-40B4-BE49-F238E27FC236}">
-                <a16:creationId xmlns:a16="http://schemas.microsoft.com/office/drawing/2014/main" xmlns="" id="{45B588E1-4B96-4D36-ABFE-54B521327534}"/>
+                <a16:creationId xmlns="" xmlns:a16="http://schemas.microsoft.com/office/drawing/2014/main" id="{45B588E1-4B96-4D36-ABFE-54B521327534}"/>
               </a:ext>
             </a:extLst>
           </p:cNvPr>
@@ -928,7 +1098,7 @@
           <p:cNvPr id="2" name="Title 1">
             <a:extLst>
               <a:ext uri="{FF2B5EF4-FFF2-40B4-BE49-F238E27FC236}">
-                <a16:creationId xmlns:a16="http://schemas.microsoft.com/office/drawing/2014/main" xmlns="" id="{F8B4BF2C-5868-4FE8-A0A8-0C99FC85D853}"/>
+                <a16:creationId xmlns="" xmlns:a16="http://schemas.microsoft.com/office/drawing/2014/main" id="{F8B4BF2C-5868-4FE8-A0A8-0C99FC85D853}"/>
               </a:ext>
             </a:extLst>
           </p:cNvPr>
@@ -956,7 +1126,7 @@
           <p:cNvPr id="3" name="Vertical Text Placeholder 2">
             <a:extLst>
               <a:ext uri="{FF2B5EF4-FFF2-40B4-BE49-F238E27FC236}">
-                <a16:creationId xmlns:a16="http://schemas.microsoft.com/office/drawing/2014/main" xmlns="" id="{608961FA-067D-4E13-AEE4-DEB564415E2A}"/>
+                <a16:creationId xmlns="" xmlns:a16="http://schemas.microsoft.com/office/drawing/2014/main" id="{608961FA-067D-4E13-AEE4-DEB564415E2A}"/>
               </a:ext>
             </a:extLst>
           </p:cNvPr>
@@ -1013,7 +1183,7 @@
           <p:cNvPr id="4" name="Date Placeholder 3">
             <a:extLst>
               <a:ext uri="{FF2B5EF4-FFF2-40B4-BE49-F238E27FC236}">
-                <a16:creationId xmlns:a16="http://schemas.microsoft.com/office/drawing/2014/main" xmlns="" id="{F8A3B194-BC00-4F26-B44D-AE804D4EE358}"/>
+                <a16:creationId xmlns="" xmlns:a16="http://schemas.microsoft.com/office/drawing/2014/main" id="{F8A3B194-BC00-4F26-B44D-AE804D4EE358}"/>
               </a:ext>
             </a:extLst>
           </p:cNvPr>
@@ -1031,7 +1201,7 @@
           <a:p>
             <a:fld id="{1DF0471C-15C6-430F-A1D2-F5E2439A92BD}" type="datetimeFigureOut">
               <a:rPr lang="en-US" smtClean="0"/>
-              <a:t>12/22/2022</a:t>
+              <a:t>12/24/2022</a:t>
             </a:fld>
             <a:endParaRPr lang="en-US"/>
           </a:p>
@@ -1042,7 +1212,7 @@
           <p:cNvPr id="5" name="Footer Placeholder 4">
             <a:extLst>
               <a:ext uri="{FF2B5EF4-FFF2-40B4-BE49-F238E27FC236}">
-                <a16:creationId xmlns:a16="http://schemas.microsoft.com/office/drawing/2014/main" xmlns="" id="{36DF11C2-1180-4F31-81D4-FA146263DBB1}"/>
+                <a16:creationId xmlns="" xmlns:a16="http://schemas.microsoft.com/office/drawing/2014/main" id="{36DF11C2-1180-4F31-81D4-FA146263DBB1}"/>
               </a:ext>
             </a:extLst>
           </p:cNvPr>
@@ -1067,7 +1237,7 @@
           <p:cNvPr id="6" name="Slide Number Placeholder 5">
             <a:extLst>
               <a:ext uri="{FF2B5EF4-FFF2-40B4-BE49-F238E27FC236}">
-                <a16:creationId xmlns:a16="http://schemas.microsoft.com/office/drawing/2014/main" xmlns="" id="{F8B629C9-776A-494E-89FD-1C76FE331BBB}"/>
+                <a16:creationId xmlns="" xmlns:a16="http://schemas.microsoft.com/office/drawing/2014/main" id="{F8B629C9-776A-494E-89FD-1C76FE331BBB}"/>
               </a:ext>
             </a:extLst>
           </p:cNvPr>
@@ -1126,7 +1296,7 @@
           <p:cNvPr id="2" name="Vertical Title 1">
             <a:extLst>
               <a:ext uri="{FF2B5EF4-FFF2-40B4-BE49-F238E27FC236}">
-                <a16:creationId xmlns:a16="http://schemas.microsoft.com/office/drawing/2014/main" xmlns="" id="{70D0F334-FD00-46CD-A061-98BDFB571FD9}"/>
+                <a16:creationId xmlns="" xmlns:a16="http://schemas.microsoft.com/office/drawing/2014/main" id="{70D0F334-FD00-46CD-A061-98BDFB571FD9}"/>
               </a:ext>
             </a:extLst>
           </p:cNvPr>
@@ -1159,7 +1329,7 @@
           <p:cNvPr id="3" name="Vertical Text Placeholder 2">
             <a:extLst>
               <a:ext uri="{FF2B5EF4-FFF2-40B4-BE49-F238E27FC236}">
-                <a16:creationId xmlns:a16="http://schemas.microsoft.com/office/drawing/2014/main" xmlns="" id="{FFEBB3B4-1969-4250-84C3-4B5990EF6885}"/>
+                <a16:creationId xmlns="" xmlns:a16="http://schemas.microsoft.com/office/drawing/2014/main" id="{FFEBB3B4-1969-4250-84C3-4B5990EF6885}"/>
               </a:ext>
             </a:extLst>
           </p:cNvPr>
@@ -1221,7 +1391,7 @@
           <p:cNvPr id="4" name="Date Placeholder 3">
             <a:extLst>
               <a:ext uri="{FF2B5EF4-FFF2-40B4-BE49-F238E27FC236}">
-                <a16:creationId xmlns:a16="http://schemas.microsoft.com/office/drawing/2014/main" xmlns="" id="{DB3F33DF-0039-4597-9B92-BE74F88DB2F0}"/>
+                <a16:creationId xmlns="" xmlns:a16="http://schemas.microsoft.com/office/drawing/2014/main" id="{DB3F33DF-0039-4597-9B92-BE74F88DB2F0}"/>
               </a:ext>
             </a:extLst>
           </p:cNvPr>
@@ -1239,7 +1409,7 @@
           <a:p>
             <a:fld id="{1DF0471C-15C6-430F-A1D2-F5E2439A92BD}" type="datetimeFigureOut">
               <a:rPr lang="en-US" smtClean="0"/>
-              <a:t>12/22/2022</a:t>
+              <a:t>12/24/2022</a:t>
             </a:fld>
             <a:endParaRPr lang="en-US"/>
           </a:p>
@@ -1250,7 +1420,7 @@
           <p:cNvPr id="5" name="Footer Placeholder 4">
             <a:extLst>
               <a:ext uri="{FF2B5EF4-FFF2-40B4-BE49-F238E27FC236}">
-                <a16:creationId xmlns:a16="http://schemas.microsoft.com/office/drawing/2014/main" xmlns="" id="{509961BE-F2FE-448E-9C62-B734E083CBFA}"/>
+                <a16:creationId xmlns="" xmlns:a16="http://schemas.microsoft.com/office/drawing/2014/main" id="{509961BE-F2FE-448E-9C62-B734E083CBFA}"/>
               </a:ext>
             </a:extLst>
           </p:cNvPr>
@@ -1275,7 +1445,7 @@
           <p:cNvPr id="6" name="Slide Number Placeholder 5">
             <a:extLst>
               <a:ext uri="{FF2B5EF4-FFF2-40B4-BE49-F238E27FC236}">
-                <a16:creationId xmlns:a16="http://schemas.microsoft.com/office/drawing/2014/main" xmlns="" id="{5E7319AA-624B-41FF-A3D7-333FA6DA8759}"/>
+                <a16:creationId xmlns="" xmlns:a16="http://schemas.microsoft.com/office/drawing/2014/main" id="{5E7319AA-624B-41FF-A3D7-333FA6DA8759}"/>
               </a:ext>
             </a:extLst>
           </p:cNvPr>
@@ -1334,7 +1504,7 @@
           <p:cNvPr id="2" name="Title 1">
             <a:extLst>
               <a:ext uri="{FF2B5EF4-FFF2-40B4-BE49-F238E27FC236}">
-                <a16:creationId xmlns:a16="http://schemas.microsoft.com/office/drawing/2014/main" xmlns="" id="{CEF0529E-423B-4047-9641-A0394321EB46}"/>
+                <a16:creationId xmlns="" xmlns:a16="http://schemas.microsoft.com/office/drawing/2014/main" id="{CEF0529E-423B-4047-9641-A0394321EB46}"/>
               </a:ext>
             </a:extLst>
           </p:cNvPr>
@@ -1362,7 +1532,7 @@
           <p:cNvPr id="3" name="Content Placeholder 2">
             <a:extLst>
               <a:ext uri="{FF2B5EF4-FFF2-40B4-BE49-F238E27FC236}">
-                <a16:creationId xmlns:a16="http://schemas.microsoft.com/office/drawing/2014/main" xmlns="" id="{175E3BE1-1952-422C-8C38-09A610ED5095}"/>
+                <a16:creationId xmlns="" xmlns:a16="http://schemas.microsoft.com/office/drawing/2014/main" id="{175E3BE1-1952-422C-8C38-09A610ED5095}"/>
               </a:ext>
             </a:extLst>
           </p:cNvPr>
@@ -1419,7 +1589,7 @@
           <p:cNvPr id="4" name="Date Placeholder 3">
             <a:extLst>
               <a:ext uri="{FF2B5EF4-FFF2-40B4-BE49-F238E27FC236}">
-                <a16:creationId xmlns:a16="http://schemas.microsoft.com/office/drawing/2014/main" xmlns="" id="{594F9D89-0318-45AB-8EF4-E4DBA4A04380}"/>
+                <a16:creationId xmlns="" xmlns:a16="http://schemas.microsoft.com/office/drawing/2014/main" id="{594F9D89-0318-45AB-8EF4-E4DBA4A04380}"/>
               </a:ext>
             </a:extLst>
           </p:cNvPr>
@@ -1437,7 +1607,7 @@
           <a:p>
             <a:fld id="{1DF0471C-15C6-430F-A1D2-F5E2439A92BD}" type="datetimeFigureOut">
               <a:rPr lang="en-US" smtClean="0"/>
-              <a:t>12/22/2022</a:t>
+              <a:t>12/24/2022</a:t>
             </a:fld>
             <a:endParaRPr lang="en-US"/>
           </a:p>
@@ -1448,7 +1618,7 @@
           <p:cNvPr id="5" name="Footer Placeholder 4">
             <a:extLst>
               <a:ext uri="{FF2B5EF4-FFF2-40B4-BE49-F238E27FC236}">
-                <a16:creationId xmlns:a16="http://schemas.microsoft.com/office/drawing/2014/main" xmlns="" id="{49C2FA9B-8333-4AC8-B604-6DA7FF617FD2}"/>
+                <a16:creationId xmlns="" xmlns:a16="http://schemas.microsoft.com/office/drawing/2014/main" id="{49C2FA9B-8333-4AC8-B604-6DA7FF617FD2}"/>
               </a:ext>
             </a:extLst>
           </p:cNvPr>
@@ -1473,7 +1643,7 @@
           <p:cNvPr id="6" name="Slide Number Placeholder 5">
             <a:extLst>
               <a:ext uri="{FF2B5EF4-FFF2-40B4-BE49-F238E27FC236}">
-                <a16:creationId xmlns:a16="http://schemas.microsoft.com/office/drawing/2014/main" xmlns="" id="{9DF7D1F3-52D2-4029-B862-10440113C060}"/>
+                <a16:creationId xmlns="" xmlns:a16="http://schemas.microsoft.com/office/drawing/2014/main" id="{9DF7D1F3-52D2-4029-B862-10440113C060}"/>
               </a:ext>
             </a:extLst>
           </p:cNvPr>
@@ -1532,7 +1702,7 @@
           <p:cNvPr id="2" name="Title 1">
             <a:extLst>
               <a:ext uri="{FF2B5EF4-FFF2-40B4-BE49-F238E27FC236}">
-                <a16:creationId xmlns:a16="http://schemas.microsoft.com/office/drawing/2014/main" xmlns="" id="{7BA45855-39EF-47A0-A504-C639015C3B74}"/>
+                <a16:creationId xmlns="" xmlns:a16="http://schemas.microsoft.com/office/drawing/2014/main" id="{7BA45855-39EF-47A0-A504-C639015C3B74}"/>
               </a:ext>
             </a:extLst>
           </p:cNvPr>
@@ -1569,7 +1739,7 @@
           <p:cNvPr id="3" name="Text Placeholder 2">
             <a:extLst>
               <a:ext uri="{FF2B5EF4-FFF2-40B4-BE49-F238E27FC236}">
-                <a16:creationId xmlns:a16="http://schemas.microsoft.com/office/drawing/2014/main" xmlns="" id="{F98B8D24-F025-4281-B9EF-271FEE07FBF7}"/>
+                <a16:creationId xmlns="" xmlns:a16="http://schemas.microsoft.com/office/drawing/2014/main" id="{F98B8D24-F025-4281-B9EF-271FEE07FBF7}"/>
               </a:ext>
             </a:extLst>
           </p:cNvPr>
@@ -1694,7 +1864,7 @@
           <p:cNvPr id="4" name="Date Placeholder 3">
             <a:extLst>
               <a:ext uri="{FF2B5EF4-FFF2-40B4-BE49-F238E27FC236}">
-                <a16:creationId xmlns:a16="http://schemas.microsoft.com/office/drawing/2014/main" xmlns="" id="{24167402-33D3-402F-9A4F-0CC943C3D7EA}"/>
+                <a16:creationId xmlns="" xmlns:a16="http://schemas.microsoft.com/office/drawing/2014/main" id="{24167402-33D3-402F-9A4F-0CC943C3D7EA}"/>
               </a:ext>
             </a:extLst>
           </p:cNvPr>
@@ -1712,7 +1882,7 @@
           <a:p>
             <a:fld id="{1DF0471C-15C6-430F-A1D2-F5E2439A92BD}" type="datetimeFigureOut">
               <a:rPr lang="en-US" smtClean="0"/>
-              <a:t>12/22/2022</a:t>
+              <a:t>12/24/2022</a:t>
             </a:fld>
             <a:endParaRPr lang="en-US"/>
           </a:p>
@@ -1723,7 +1893,7 @@
           <p:cNvPr id="5" name="Footer Placeholder 4">
             <a:extLst>
               <a:ext uri="{FF2B5EF4-FFF2-40B4-BE49-F238E27FC236}">
-                <a16:creationId xmlns:a16="http://schemas.microsoft.com/office/drawing/2014/main" xmlns="" id="{E8406ADB-3CD4-4A9F-8E63-00F73D91CFD4}"/>
+                <a16:creationId xmlns="" xmlns:a16="http://schemas.microsoft.com/office/drawing/2014/main" id="{E8406ADB-3CD4-4A9F-8E63-00F73D91CFD4}"/>
               </a:ext>
             </a:extLst>
           </p:cNvPr>
@@ -1748,7 +1918,7 @@
           <p:cNvPr id="6" name="Slide Number Placeholder 5">
             <a:extLst>
               <a:ext uri="{FF2B5EF4-FFF2-40B4-BE49-F238E27FC236}">
-                <a16:creationId xmlns:a16="http://schemas.microsoft.com/office/drawing/2014/main" xmlns="" id="{FDF6385E-3E04-47C6-9AF2-E7AB2D906BB6}"/>
+                <a16:creationId xmlns="" xmlns:a16="http://schemas.microsoft.com/office/drawing/2014/main" id="{FDF6385E-3E04-47C6-9AF2-E7AB2D906BB6}"/>
               </a:ext>
             </a:extLst>
           </p:cNvPr>
@@ -1807,7 +1977,7 @@
           <p:cNvPr id="2" name="Title 1">
             <a:extLst>
               <a:ext uri="{FF2B5EF4-FFF2-40B4-BE49-F238E27FC236}">
-                <a16:creationId xmlns:a16="http://schemas.microsoft.com/office/drawing/2014/main" xmlns="" id="{ED6CCC0B-9F72-4E67-83AA-7B36B1965281}"/>
+                <a16:creationId xmlns="" xmlns:a16="http://schemas.microsoft.com/office/drawing/2014/main" id="{ED6CCC0B-9F72-4E67-83AA-7B36B1965281}"/>
               </a:ext>
             </a:extLst>
           </p:cNvPr>
@@ -1835,7 +2005,7 @@
           <p:cNvPr id="3" name="Content Placeholder 2">
             <a:extLst>
               <a:ext uri="{FF2B5EF4-FFF2-40B4-BE49-F238E27FC236}">
-                <a16:creationId xmlns:a16="http://schemas.microsoft.com/office/drawing/2014/main" xmlns="" id="{E7B63006-8859-4E31-9A7B-732066FD28D3}"/>
+                <a16:creationId xmlns="" xmlns:a16="http://schemas.microsoft.com/office/drawing/2014/main" id="{E7B63006-8859-4E31-9A7B-732066FD28D3}"/>
               </a:ext>
             </a:extLst>
           </p:cNvPr>
@@ -1897,7 +2067,7 @@
           <p:cNvPr id="4" name="Content Placeholder 3">
             <a:extLst>
               <a:ext uri="{FF2B5EF4-FFF2-40B4-BE49-F238E27FC236}">
-                <a16:creationId xmlns:a16="http://schemas.microsoft.com/office/drawing/2014/main" xmlns="" id="{5D54DF68-216B-42C3-9256-63ADC1AA0FBC}"/>
+                <a16:creationId xmlns="" xmlns:a16="http://schemas.microsoft.com/office/drawing/2014/main" id="{5D54DF68-216B-42C3-9256-63ADC1AA0FBC}"/>
               </a:ext>
             </a:extLst>
           </p:cNvPr>
@@ -1959,7 +2129,7 @@
           <p:cNvPr id="5" name="Date Placeholder 4">
             <a:extLst>
               <a:ext uri="{FF2B5EF4-FFF2-40B4-BE49-F238E27FC236}">
-                <a16:creationId xmlns:a16="http://schemas.microsoft.com/office/drawing/2014/main" xmlns="" id="{0F8CB3C2-36F1-4E0E-87E4-722E0A2B8830}"/>
+                <a16:creationId xmlns="" xmlns:a16="http://schemas.microsoft.com/office/drawing/2014/main" id="{0F8CB3C2-36F1-4E0E-87E4-722E0A2B8830}"/>
               </a:ext>
             </a:extLst>
           </p:cNvPr>
@@ -1977,7 +2147,7 @@
           <a:p>
             <a:fld id="{1DF0471C-15C6-430F-A1D2-F5E2439A92BD}" type="datetimeFigureOut">
               <a:rPr lang="en-US" smtClean="0"/>
-              <a:t>12/22/2022</a:t>
+              <a:t>12/24/2022</a:t>
             </a:fld>
             <a:endParaRPr lang="en-US"/>
           </a:p>
@@ -1988,7 +2158,7 @@
           <p:cNvPr id="6" name="Footer Placeholder 5">
             <a:extLst>
               <a:ext uri="{FF2B5EF4-FFF2-40B4-BE49-F238E27FC236}">
-                <a16:creationId xmlns:a16="http://schemas.microsoft.com/office/drawing/2014/main" xmlns="" id="{47A426AA-98E5-4C32-BD26-67433988AA7C}"/>
+                <a16:creationId xmlns="" xmlns:a16="http://schemas.microsoft.com/office/drawing/2014/main" id="{47A426AA-98E5-4C32-BD26-67433988AA7C}"/>
               </a:ext>
             </a:extLst>
           </p:cNvPr>
@@ -2013,7 +2183,7 @@
           <p:cNvPr id="7" name="Slide Number Placeholder 6">
             <a:extLst>
               <a:ext uri="{FF2B5EF4-FFF2-40B4-BE49-F238E27FC236}">
-                <a16:creationId xmlns:a16="http://schemas.microsoft.com/office/drawing/2014/main" xmlns="" id="{AEF93DAC-53DB-48BB-8C16-553726965EF3}"/>
+                <a16:creationId xmlns="" xmlns:a16="http://schemas.microsoft.com/office/drawing/2014/main" id="{AEF93DAC-53DB-48BB-8C16-553726965EF3}"/>
               </a:ext>
             </a:extLst>
           </p:cNvPr>
@@ -2072,7 +2242,7 @@
           <p:cNvPr id="2" name="Title 1">
             <a:extLst>
               <a:ext uri="{FF2B5EF4-FFF2-40B4-BE49-F238E27FC236}">
-                <a16:creationId xmlns:a16="http://schemas.microsoft.com/office/drawing/2014/main" xmlns="" id="{545ED9B5-95EB-42C7-9485-646F75953A7C}"/>
+                <a16:creationId xmlns="" xmlns:a16="http://schemas.microsoft.com/office/drawing/2014/main" id="{545ED9B5-95EB-42C7-9485-646F75953A7C}"/>
               </a:ext>
             </a:extLst>
           </p:cNvPr>
@@ -2105,7 +2275,7 @@
           <p:cNvPr id="3" name="Text Placeholder 2">
             <a:extLst>
               <a:ext uri="{FF2B5EF4-FFF2-40B4-BE49-F238E27FC236}">
-                <a16:creationId xmlns:a16="http://schemas.microsoft.com/office/drawing/2014/main" xmlns="" id="{433D3E70-C817-4747-B196-2EE7F616E55D}"/>
+                <a16:creationId xmlns="" xmlns:a16="http://schemas.microsoft.com/office/drawing/2014/main" id="{433D3E70-C817-4747-B196-2EE7F616E55D}"/>
               </a:ext>
             </a:extLst>
           </p:cNvPr>
@@ -2176,7 +2346,7 @@
           <p:cNvPr id="4" name="Content Placeholder 3">
             <a:extLst>
               <a:ext uri="{FF2B5EF4-FFF2-40B4-BE49-F238E27FC236}">
-                <a16:creationId xmlns:a16="http://schemas.microsoft.com/office/drawing/2014/main" xmlns="" id="{89E43232-D7AE-4CEA-B0CD-A62351B134BB}"/>
+                <a16:creationId xmlns="" xmlns:a16="http://schemas.microsoft.com/office/drawing/2014/main" id="{89E43232-D7AE-4CEA-B0CD-A62351B134BB}"/>
               </a:ext>
             </a:extLst>
           </p:cNvPr>
@@ -2238,7 +2408,7 @@
           <p:cNvPr id="5" name="Text Placeholder 4">
             <a:extLst>
               <a:ext uri="{FF2B5EF4-FFF2-40B4-BE49-F238E27FC236}">
-                <a16:creationId xmlns:a16="http://schemas.microsoft.com/office/drawing/2014/main" xmlns="" id="{F1BF8678-D57B-4B16-AA25-CD85B19E1B3A}"/>
+                <a16:creationId xmlns="" xmlns:a16="http://schemas.microsoft.com/office/drawing/2014/main" id="{F1BF8678-D57B-4B16-AA25-CD85B19E1B3A}"/>
               </a:ext>
             </a:extLst>
           </p:cNvPr>
@@ -2309,7 +2479,7 @@
           <p:cNvPr id="6" name="Content Placeholder 5">
             <a:extLst>
               <a:ext uri="{FF2B5EF4-FFF2-40B4-BE49-F238E27FC236}">
-                <a16:creationId xmlns:a16="http://schemas.microsoft.com/office/drawing/2014/main" xmlns="" id="{7DCBE630-179A-4327-878B-3847467281D3}"/>
+                <a16:creationId xmlns="" xmlns:a16="http://schemas.microsoft.com/office/drawing/2014/main" id="{7DCBE630-179A-4327-878B-3847467281D3}"/>
               </a:ext>
             </a:extLst>
           </p:cNvPr>
@@ -2371,7 +2541,7 @@
           <p:cNvPr id="7" name="Date Placeholder 6">
             <a:extLst>
               <a:ext uri="{FF2B5EF4-FFF2-40B4-BE49-F238E27FC236}">
-                <a16:creationId xmlns:a16="http://schemas.microsoft.com/office/drawing/2014/main" xmlns="" id="{E532529C-12B5-4D3A-A59C-5829E7D42567}"/>
+                <a16:creationId xmlns="" xmlns:a16="http://schemas.microsoft.com/office/drawing/2014/main" id="{E532529C-12B5-4D3A-A59C-5829E7D42567}"/>
               </a:ext>
             </a:extLst>
           </p:cNvPr>
@@ -2389,7 +2559,7 @@
           <a:p>
             <a:fld id="{1DF0471C-15C6-430F-A1D2-F5E2439A92BD}" type="datetimeFigureOut">
               <a:rPr lang="en-US" smtClean="0"/>
-              <a:t>12/22/2022</a:t>
+              <a:t>12/24/2022</a:t>
             </a:fld>
             <a:endParaRPr lang="en-US"/>
           </a:p>
@@ -2400,7 +2570,7 @@
           <p:cNvPr id="8" name="Footer Placeholder 7">
             <a:extLst>
               <a:ext uri="{FF2B5EF4-FFF2-40B4-BE49-F238E27FC236}">
-                <a16:creationId xmlns:a16="http://schemas.microsoft.com/office/drawing/2014/main" xmlns="" id="{D40F80FF-DCE0-4C7C-8044-57BFC37C586E}"/>
+                <a16:creationId xmlns="" xmlns:a16="http://schemas.microsoft.com/office/drawing/2014/main" id="{D40F80FF-DCE0-4C7C-8044-57BFC37C586E}"/>
               </a:ext>
             </a:extLst>
           </p:cNvPr>
@@ -2425,7 +2595,7 @@
           <p:cNvPr id="9" name="Slide Number Placeholder 8">
             <a:extLst>
               <a:ext uri="{FF2B5EF4-FFF2-40B4-BE49-F238E27FC236}">
-                <a16:creationId xmlns:a16="http://schemas.microsoft.com/office/drawing/2014/main" xmlns="" id="{C8F2F391-E1E7-4833-9AFF-E9A7A6123EA8}"/>
+                <a16:creationId xmlns="" xmlns:a16="http://schemas.microsoft.com/office/drawing/2014/main" id="{C8F2F391-E1E7-4833-9AFF-E9A7A6123EA8}"/>
               </a:ext>
             </a:extLst>
           </p:cNvPr>
@@ -2484,7 +2654,7 @@
           <p:cNvPr id="2" name="Title 1">
             <a:extLst>
               <a:ext uri="{FF2B5EF4-FFF2-40B4-BE49-F238E27FC236}">
-                <a16:creationId xmlns:a16="http://schemas.microsoft.com/office/drawing/2014/main" xmlns="" id="{6120F39E-D600-4EF7-8592-B5B8CA1FB8DE}"/>
+                <a16:creationId xmlns="" xmlns:a16="http://schemas.microsoft.com/office/drawing/2014/main" id="{6120F39E-D600-4EF7-8592-B5B8CA1FB8DE}"/>
               </a:ext>
             </a:extLst>
           </p:cNvPr>
@@ -2512,7 +2682,7 @@
           <p:cNvPr id="3" name="Date Placeholder 2">
             <a:extLst>
               <a:ext uri="{FF2B5EF4-FFF2-40B4-BE49-F238E27FC236}">
-                <a16:creationId xmlns:a16="http://schemas.microsoft.com/office/drawing/2014/main" xmlns="" id="{A5CB6ADA-F787-43FE-AC74-6E61D078A86D}"/>
+                <a16:creationId xmlns="" xmlns:a16="http://schemas.microsoft.com/office/drawing/2014/main" id="{A5CB6ADA-F787-43FE-AC74-6E61D078A86D}"/>
               </a:ext>
             </a:extLst>
           </p:cNvPr>
@@ -2530,7 +2700,7 @@
           <a:p>
             <a:fld id="{1DF0471C-15C6-430F-A1D2-F5E2439A92BD}" type="datetimeFigureOut">
               <a:rPr lang="en-US" smtClean="0"/>
-              <a:t>12/22/2022</a:t>
+              <a:t>12/24/2022</a:t>
             </a:fld>
             <a:endParaRPr lang="en-US"/>
           </a:p>
@@ -2541,7 +2711,7 @@
           <p:cNvPr id="4" name="Footer Placeholder 3">
             <a:extLst>
               <a:ext uri="{FF2B5EF4-FFF2-40B4-BE49-F238E27FC236}">
-                <a16:creationId xmlns:a16="http://schemas.microsoft.com/office/drawing/2014/main" xmlns="" id="{2EDD119A-D885-4E6D-A0EF-6EA781CCF1FA}"/>
+                <a16:creationId xmlns="" xmlns:a16="http://schemas.microsoft.com/office/drawing/2014/main" id="{2EDD119A-D885-4E6D-A0EF-6EA781CCF1FA}"/>
               </a:ext>
             </a:extLst>
           </p:cNvPr>
@@ -2566,7 +2736,7 @@
           <p:cNvPr id="5" name="Slide Number Placeholder 4">
             <a:extLst>
               <a:ext uri="{FF2B5EF4-FFF2-40B4-BE49-F238E27FC236}">
-                <a16:creationId xmlns:a16="http://schemas.microsoft.com/office/drawing/2014/main" xmlns="" id="{AE921555-C8FE-4D6F-9562-9BF9FC738B48}"/>
+                <a16:creationId xmlns="" xmlns:a16="http://schemas.microsoft.com/office/drawing/2014/main" id="{AE921555-C8FE-4D6F-9562-9BF9FC738B48}"/>
               </a:ext>
             </a:extLst>
           </p:cNvPr>
@@ -2625,7 +2795,7 @@
           <p:cNvPr id="2" name="Date Placeholder 1">
             <a:extLst>
               <a:ext uri="{FF2B5EF4-FFF2-40B4-BE49-F238E27FC236}">
-                <a16:creationId xmlns:a16="http://schemas.microsoft.com/office/drawing/2014/main" xmlns="" id="{A53558C2-1A82-4EF4-8BAA-764708819FAA}"/>
+                <a16:creationId xmlns="" xmlns:a16="http://schemas.microsoft.com/office/drawing/2014/main" id="{A53558C2-1A82-4EF4-8BAA-764708819FAA}"/>
               </a:ext>
             </a:extLst>
           </p:cNvPr>
@@ -2643,7 +2813,7 @@
           <a:p>
             <a:fld id="{1DF0471C-15C6-430F-A1D2-F5E2439A92BD}" type="datetimeFigureOut">
               <a:rPr lang="en-US" smtClean="0"/>
-              <a:t>12/22/2022</a:t>
+              <a:t>12/24/2022</a:t>
             </a:fld>
             <a:endParaRPr lang="en-US"/>
           </a:p>
@@ -2654,7 +2824,7 @@
           <p:cNvPr id="3" name="Footer Placeholder 2">
             <a:extLst>
               <a:ext uri="{FF2B5EF4-FFF2-40B4-BE49-F238E27FC236}">
-                <a16:creationId xmlns:a16="http://schemas.microsoft.com/office/drawing/2014/main" xmlns="" id="{99F012A8-7436-429E-8F24-73C22C8E09FE}"/>
+                <a16:creationId xmlns="" xmlns:a16="http://schemas.microsoft.com/office/drawing/2014/main" id="{99F012A8-7436-429E-8F24-73C22C8E09FE}"/>
               </a:ext>
             </a:extLst>
           </p:cNvPr>
@@ -2679,7 +2849,7 @@
           <p:cNvPr id="4" name="Slide Number Placeholder 3">
             <a:extLst>
               <a:ext uri="{FF2B5EF4-FFF2-40B4-BE49-F238E27FC236}">
-                <a16:creationId xmlns:a16="http://schemas.microsoft.com/office/drawing/2014/main" xmlns="" id="{6C8E85BE-B27C-485C-B2B0-085F09F7386A}"/>
+                <a16:creationId xmlns="" xmlns:a16="http://schemas.microsoft.com/office/drawing/2014/main" id="{6C8E85BE-B27C-485C-B2B0-085F09F7386A}"/>
               </a:ext>
             </a:extLst>
           </p:cNvPr>
@@ -2738,7 +2908,7 @@
           <p:cNvPr id="2" name="Title 1">
             <a:extLst>
               <a:ext uri="{FF2B5EF4-FFF2-40B4-BE49-F238E27FC236}">
-                <a16:creationId xmlns:a16="http://schemas.microsoft.com/office/drawing/2014/main" xmlns="" id="{C8EB7628-37D5-483E-BF2D-227BF43C7DD8}"/>
+                <a16:creationId xmlns="" xmlns:a16="http://schemas.microsoft.com/office/drawing/2014/main" id="{C8EB7628-37D5-483E-BF2D-227BF43C7DD8}"/>
               </a:ext>
             </a:extLst>
           </p:cNvPr>
@@ -2775,7 +2945,7 @@
           <p:cNvPr id="3" name="Content Placeholder 2">
             <a:extLst>
               <a:ext uri="{FF2B5EF4-FFF2-40B4-BE49-F238E27FC236}">
-                <a16:creationId xmlns:a16="http://schemas.microsoft.com/office/drawing/2014/main" xmlns="" id="{B6A4EEEF-9654-4C68-98D6-223555EE59D6}"/>
+                <a16:creationId xmlns="" xmlns:a16="http://schemas.microsoft.com/office/drawing/2014/main" id="{B6A4EEEF-9654-4C68-98D6-223555EE59D6}"/>
               </a:ext>
             </a:extLst>
           </p:cNvPr>
@@ -2865,7 +3035,7 @@
           <p:cNvPr id="4" name="Text Placeholder 3">
             <a:extLst>
               <a:ext uri="{FF2B5EF4-FFF2-40B4-BE49-F238E27FC236}">
-                <a16:creationId xmlns:a16="http://schemas.microsoft.com/office/drawing/2014/main" xmlns="" id="{00DA8380-51B0-4F28-85FC-067FB8CF17F4}"/>
+                <a16:creationId xmlns="" xmlns:a16="http://schemas.microsoft.com/office/drawing/2014/main" id="{00DA8380-51B0-4F28-85FC-067FB8CF17F4}"/>
               </a:ext>
             </a:extLst>
           </p:cNvPr>
@@ -2936,7 +3106,7 @@
           <p:cNvPr id="5" name="Date Placeholder 4">
             <a:extLst>
               <a:ext uri="{FF2B5EF4-FFF2-40B4-BE49-F238E27FC236}">
-                <a16:creationId xmlns:a16="http://schemas.microsoft.com/office/drawing/2014/main" xmlns="" id="{B43A1E1A-A745-4419-94DF-F1664473D5F9}"/>
+                <a16:creationId xmlns="" xmlns:a16="http://schemas.microsoft.com/office/drawing/2014/main" id="{B43A1E1A-A745-4419-94DF-F1664473D5F9}"/>
               </a:ext>
             </a:extLst>
           </p:cNvPr>
@@ -2954,7 +3124,7 @@
           <a:p>
             <a:fld id="{1DF0471C-15C6-430F-A1D2-F5E2439A92BD}" type="datetimeFigureOut">
               <a:rPr lang="en-US" smtClean="0"/>
-              <a:t>12/22/2022</a:t>
+              <a:t>12/24/2022</a:t>
             </a:fld>
             <a:endParaRPr lang="en-US"/>
           </a:p>
@@ -2965,7 +3135,7 @@
           <p:cNvPr id="6" name="Footer Placeholder 5">
             <a:extLst>
               <a:ext uri="{FF2B5EF4-FFF2-40B4-BE49-F238E27FC236}">
-                <a16:creationId xmlns:a16="http://schemas.microsoft.com/office/drawing/2014/main" xmlns="" id="{BE7AF249-9AA1-4A7B-ABEC-1DA340BA4725}"/>
+                <a16:creationId xmlns="" xmlns:a16="http://schemas.microsoft.com/office/drawing/2014/main" id="{BE7AF249-9AA1-4A7B-ABEC-1DA340BA4725}"/>
               </a:ext>
             </a:extLst>
           </p:cNvPr>
@@ -2990,7 +3160,7 @@
           <p:cNvPr id="7" name="Slide Number Placeholder 6">
             <a:extLst>
               <a:ext uri="{FF2B5EF4-FFF2-40B4-BE49-F238E27FC236}">
-                <a16:creationId xmlns:a16="http://schemas.microsoft.com/office/drawing/2014/main" xmlns="" id="{21A5C071-8445-4D81-8E03-FE52BB467EF3}"/>
+                <a16:creationId xmlns="" xmlns:a16="http://schemas.microsoft.com/office/drawing/2014/main" id="{21A5C071-8445-4D81-8E03-FE52BB467EF3}"/>
               </a:ext>
             </a:extLst>
           </p:cNvPr>
@@ -3049,7 +3219,7 @@
           <p:cNvPr id="2" name="Title 1">
             <a:extLst>
               <a:ext uri="{FF2B5EF4-FFF2-40B4-BE49-F238E27FC236}">
-                <a16:creationId xmlns:a16="http://schemas.microsoft.com/office/drawing/2014/main" xmlns="" id="{0E3F1C17-470B-42F4-9A17-35826AA08A57}"/>
+                <a16:creationId xmlns="" xmlns:a16="http://schemas.microsoft.com/office/drawing/2014/main" id="{0E3F1C17-470B-42F4-9A17-35826AA08A57}"/>
               </a:ext>
             </a:extLst>
           </p:cNvPr>
@@ -3086,7 +3256,7 @@
           <p:cNvPr id="3" name="Picture Placeholder 2">
             <a:extLst>
               <a:ext uri="{FF2B5EF4-FFF2-40B4-BE49-F238E27FC236}">
-                <a16:creationId xmlns:a16="http://schemas.microsoft.com/office/drawing/2014/main" xmlns="" id="{845AFDA6-55BA-4CCC-A3D1-0D28903D9F65}"/>
+                <a16:creationId xmlns="" xmlns:a16="http://schemas.microsoft.com/office/drawing/2014/main" id="{845AFDA6-55BA-4CCC-A3D1-0D28903D9F65}"/>
               </a:ext>
             </a:extLst>
           </p:cNvPr>
@@ -3153,7 +3323,7 @@
           <p:cNvPr id="4" name="Text Placeholder 3">
             <a:extLst>
               <a:ext uri="{FF2B5EF4-FFF2-40B4-BE49-F238E27FC236}">
-                <a16:creationId xmlns:a16="http://schemas.microsoft.com/office/drawing/2014/main" xmlns="" id="{42A2F931-34E2-4203-BC74-DBEDFA5F7D5E}"/>
+                <a16:creationId xmlns="" xmlns:a16="http://schemas.microsoft.com/office/drawing/2014/main" id="{42A2F931-34E2-4203-BC74-DBEDFA5F7D5E}"/>
               </a:ext>
             </a:extLst>
           </p:cNvPr>
@@ -3224,7 +3394,7 @@
           <p:cNvPr id="5" name="Date Placeholder 4">
             <a:extLst>
               <a:ext uri="{FF2B5EF4-FFF2-40B4-BE49-F238E27FC236}">
-                <a16:creationId xmlns:a16="http://schemas.microsoft.com/office/drawing/2014/main" xmlns="" id="{0AAC29A3-3865-4E50-8B48-16A0F74C0291}"/>
+                <a16:creationId xmlns="" xmlns:a16="http://schemas.microsoft.com/office/drawing/2014/main" id="{0AAC29A3-3865-4E50-8B48-16A0F74C0291}"/>
               </a:ext>
             </a:extLst>
           </p:cNvPr>
@@ -3242,7 +3412,7 @@
           <a:p>
             <a:fld id="{1DF0471C-15C6-430F-A1D2-F5E2439A92BD}" type="datetimeFigureOut">
               <a:rPr lang="en-US" smtClean="0"/>
-              <a:t>12/22/2022</a:t>
+              <a:t>12/24/2022</a:t>
             </a:fld>
             <a:endParaRPr lang="en-US"/>
           </a:p>
@@ -3253,7 +3423,7 @@
           <p:cNvPr id="6" name="Footer Placeholder 5">
             <a:extLst>
               <a:ext uri="{FF2B5EF4-FFF2-40B4-BE49-F238E27FC236}">
-                <a16:creationId xmlns:a16="http://schemas.microsoft.com/office/drawing/2014/main" xmlns="" id="{BDC00C21-8A04-424A-8FA8-1ECDEB8CD4CD}"/>
+                <a16:creationId xmlns="" xmlns:a16="http://schemas.microsoft.com/office/drawing/2014/main" id="{BDC00C21-8A04-424A-8FA8-1ECDEB8CD4CD}"/>
               </a:ext>
             </a:extLst>
           </p:cNvPr>
@@ -3278,7 +3448,7 @@
           <p:cNvPr id="7" name="Slide Number Placeholder 6">
             <a:extLst>
               <a:ext uri="{FF2B5EF4-FFF2-40B4-BE49-F238E27FC236}">
-                <a16:creationId xmlns:a16="http://schemas.microsoft.com/office/drawing/2014/main" xmlns="" id="{F42CD0FE-C8F0-4EAA-94BC-6E82306B6C79}"/>
+                <a16:creationId xmlns="" xmlns:a16="http://schemas.microsoft.com/office/drawing/2014/main" id="{F42CD0FE-C8F0-4EAA-94BC-6E82306B6C79}"/>
               </a:ext>
             </a:extLst>
           </p:cNvPr>
@@ -3342,7 +3512,7 @@
           <p:cNvPr id="2" name="Title Placeholder 1">
             <a:extLst>
               <a:ext uri="{FF2B5EF4-FFF2-40B4-BE49-F238E27FC236}">
-                <a16:creationId xmlns:a16="http://schemas.microsoft.com/office/drawing/2014/main" xmlns="" id="{940A7DD8-7706-4514-90E2-C24E40A94D91}"/>
+                <a16:creationId xmlns="" xmlns:a16="http://schemas.microsoft.com/office/drawing/2014/main" id="{940A7DD8-7706-4514-90E2-C24E40A94D91}"/>
               </a:ext>
             </a:extLst>
           </p:cNvPr>
@@ -3380,7 +3550,7 @@
           <p:cNvPr id="3" name="Text Placeholder 2">
             <a:extLst>
               <a:ext uri="{FF2B5EF4-FFF2-40B4-BE49-F238E27FC236}">
-                <a16:creationId xmlns:a16="http://schemas.microsoft.com/office/drawing/2014/main" xmlns="" id="{3981306D-1561-42BE-A13B-EA5C01B087BD}"/>
+                <a16:creationId xmlns="" xmlns:a16="http://schemas.microsoft.com/office/drawing/2014/main" id="{3981306D-1561-42BE-A13B-EA5C01B087BD}"/>
               </a:ext>
             </a:extLst>
           </p:cNvPr>
@@ -3447,7 +3617,7 @@
           <p:cNvPr id="4" name="Date Placeholder 3">
             <a:extLst>
               <a:ext uri="{FF2B5EF4-FFF2-40B4-BE49-F238E27FC236}">
-                <a16:creationId xmlns:a16="http://schemas.microsoft.com/office/drawing/2014/main" xmlns="" id="{97FBF928-F762-45BA-8F1B-7BF281188E37}"/>
+                <a16:creationId xmlns="" xmlns:a16="http://schemas.microsoft.com/office/drawing/2014/main" id="{97FBF928-F762-45BA-8F1B-7BF281188E37}"/>
               </a:ext>
             </a:extLst>
           </p:cNvPr>
@@ -3483,7 +3653,7 @@
           <a:p>
             <a:fld id="{1DF0471C-15C6-430F-A1D2-F5E2439A92BD}" type="datetimeFigureOut">
               <a:rPr lang="en-US" smtClean="0"/>
-              <a:t>12/22/2022</a:t>
+              <a:t>12/24/2022</a:t>
             </a:fld>
             <a:endParaRPr lang="en-US"/>
           </a:p>
@@ -3494,7 +3664,7 @@
           <p:cNvPr id="5" name="Footer Placeholder 4">
             <a:extLst>
               <a:ext uri="{FF2B5EF4-FFF2-40B4-BE49-F238E27FC236}">
-                <a16:creationId xmlns:a16="http://schemas.microsoft.com/office/drawing/2014/main" xmlns="" id="{8BE2224F-E8B6-4AA6-A581-266221933E49}"/>
+                <a16:creationId xmlns="" xmlns:a16="http://schemas.microsoft.com/office/drawing/2014/main" id="{8BE2224F-E8B6-4AA6-A581-266221933E49}"/>
               </a:ext>
             </a:extLst>
           </p:cNvPr>
@@ -3537,7 +3707,7 @@
           <p:cNvPr id="6" name="Slide Number Placeholder 5">
             <a:extLst>
               <a:ext uri="{FF2B5EF4-FFF2-40B4-BE49-F238E27FC236}">
-                <a16:creationId xmlns:a16="http://schemas.microsoft.com/office/drawing/2014/main" xmlns="" id="{16D3250F-2726-4163-8DC1-97CCB3BC9E2C}"/>
+                <a16:creationId xmlns="" xmlns:a16="http://schemas.microsoft.com/office/drawing/2014/main" id="{16D3250F-2726-4163-8DC1-97CCB3BC9E2C}"/>
               </a:ext>
             </a:extLst>
           </p:cNvPr>
@@ -3584,7 +3754,7 @@
           <p:cNvPr id="7" name="MSIPCMContentMarking" descr="{&quot;HashCode&quot;:1596673254,&quot;Placement&quot;:&quot;Footer&quot;,&quot;Top&quot;:524.1047,&quot;Left&quot;:923.827,&quot;SlideWidth&quot;:960,&quot;SlideHeight&quot;:540}">
             <a:extLst>
               <a:ext uri="{FF2B5EF4-FFF2-40B4-BE49-F238E27FC236}">
-                <a16:creationId xmlns:a16="http://schemas.microsoft.com/office/drawing/2014/main" xmlns="" id="{301E2244-036C-431A-A644-1C4D02F8E5C7}"/>
+                <a16:creationId xmlns="" xmlns:a16="http://schemas.microsoft.com/office/drawing/2014/main" id="{301E2244-036C-431A-A644-1C4D02F8E5C7}"/>
               </a:ext>
             </a:extLst>
           </p:cNvPr>
@@ -3987,7 +4157,7 @@
           <p:cNvPr id="10" name="Rectangle: Rounded Corners 9">
             <a:extLst>
               <a:ext uri="{FF2B5EF4-FFF2-40B4-BE49-F238E27FC236}">
-                <a16:creationId xmlns:a16="http://schemas.microsoft.com/office/drawing/2014/main" xmlns="" id="{280D6242-586B-4726-BC93-86C917CE8E52}"/>
+                <a16:creationId xmlns="" xmlns:a16="http://schemas.microsoft.com/office/drawing/2014/main" id="{280D6242-586B-4726-BC93-86C917CE8E52}"/>
               </a:ext>
             </a:extLst>
           </p:cNvPr>
@@ -4043,7 +4213,7 @@
           <p:cNvPr id="11" name="Rectangle: Rounded Corners 10">
             <a:extLst>
               <a:ext uri="{FF2B5EF4-FFF2-40B4-BE49-F238E27FC236}">
-                <a16:creationId xmlns:a16="http://schemas.microsoft.com/office/drawing/2014/main" xmlns="" id="{1AFD95DB-EE82-4014-8431-753B408C671F}"/>
+                <a16:creationId xmlns="" xmlns:a16="http://schemas.microsoft.com/office/drawing/2014/main" id="{1AFD95DB-EE82-4014-8431-753B408C671F}"/>
               </a:ext>
             </a:extLst>
           </p:cNvPr>
@@ -4119,7 +4289,7 @@
           <p:cNvPr id="12" name="Rectangle: Rounded Corners 11">
             <a:extLst>
               <a:ext uri="{FF2B5EF4-FFF2-40B4-BE49-F238E27FC236}">
-                <a16:creationId xmlns:a16="http://schemas.microsoft.com/office/drawing/2014/main" xmlns="" id="{5A1BEE6C-84E1-4224-B447-1AC8A888AAC0}"/>
+                <a16:creationId xmlns="" xmlns:a16="http://schemas.microsoft.com/office/drawing/2014/main" id="{5A1BEE6C-84E1-4224-B447-1AC8A888AAC0}"/>
               </a:ext>
             </a:extLst>
           </p:cNvPr>
@@ -4179,7 +4349,7 @@
           <p:cNvPr id="13" name="Rectangle: Rounded Corners 12">
             <a:extLst>
               <a:ext uri="{FF2B5EF4-FFF2-40B4-BE49-F238E27FC236}">
-                <a16:creationId xmlns:a16="http://schemas.microsoft.com/office/drawing/2014/main" xmlns="" id="{C39141B1-20FA-423F-B75B-5471535624C8}"/>
+                <a16:creationId xmlns="" xmlns:a16="http://schemas.microsoft.com/office/drawing/2014/main" id="{C39141B1-20FA-423F-B75B-5471535624C8}"/>
               </a:ext>
             </a:extLst>
           </p:cNvPr>
@@ -4231,7 +4401,7 @@
           <p:cNvPr id="14" name="Rectangle: Rounded Corners 13">
             <a:extLst>
               <a:ext uri="{FF2B5EF4-FFF2-40B4-BE49-F238E27FC236}">
-                <a16:creationId xmlns:a16="http://schemas.microsoft.com/office/drawing/2014/main" xmlns="" id="{81CE814C-51C2-45D8-9AA1-5DF8C38665AD}"/>
+                <a16:creationId xmlns="" xmlns:a16="http://schemas.microsoft.com/office/drawing/2014/main" id="{81CE814C-51C2-45D8-9AA1-5DF8C38665AD}"/>
               </a:ext>
             </a:extLst>
           </p:cNvPr>
@@ -4291,7 +4461,7 @@
           <p:cNvPr id="15" name="Rectangle: Rounded Corners 14">
             <a:extLst>
               <a:ext uri="{FF2B5EF4-FFF2-40B4-BE49-F238E27FC236}">
-                <a16:creationId xmlns:a16="http://schemas.microsoft.com/office/drawing/2014/main" xmlns="" id="{E25DC19F-6B3A-4545-BDB8-13C5481B9137}"/>
+                <a16:creationId xmlns="" xmlns:a16="http://schemas.microsoft.com/office/drawing/2014/main" id="{E25DC19F-6B3A-4545-BDB8-13C5481B9137}"/>
               </a:ext>
             </a:extLst>
           </p:cNvPr>
@@ -4343,7 +4513,7 @@
           <p:cNvPr id="3" name="Straight Arrow Connector 2">
             <a:extLst>
               <a:ext uri="{FF2B5EF4-FFF2-40B4-BE49-F238E27FC236}">
-                <a16:creationId xmlns:a16="http://schemas.microsoft.com/office/drawing/2014/main" xmlns="" id="{DA11DF66-EB94-42A7-A712-9922433548FE}"/>
+                <a16:creationId xmlns="" xmlns:a16="http://schemas.microsoft.com/office/drawing/2014/main" id="{DA11DF66-EB94-42A7-A712-9922433548FE}"/>
               </a:ext>
             </a:extLst>
           </p:cNvPr>
@@ -4385,7 +4555,7 @@
           <p:cNvPr id="16" name="TextBox 15">
             <a:extLst>
               <a:ext uri="{FF2B5EF4-FFF2-40B4-BE49-F238E27FC236}">
-                <a16:creationId xmlns:a16="http://schemas.microsoft.com/office/drawing/2014/main" xmlns="" id="{9ADF6F6C-444B-4360-9821-C523FAFE1E57}"/>
+                <a16:creationId xmlns="" xmlns:a16="http://schemas.microsoft.com/office/drawing/2014/main" id="{9ADF6F6C-444B-4360-9821-C523FAFE1E57}"/>
               </a:ext>
             </a:extLst>
           </p:cNvPr>
@@ -4425,7 +4595,7 @@
           <p:cNvPr id="17" name="Straight Arrow Connector 16">
             <a:extLst>
               <a:ext uri="{FF2B5EF4-FFF2-40B4-BE49-F238E27FC236}">
-                <a16:creationId xmlns:a16="http://schemas.microsoft.com/office/drawing/2014/main" xmlns="" id="{EB1F8E18-9264-4C4C-A388-691903EE6285}"/>
+                <a16:creationId xmlns="" xmlns:a16="http://schemas.microsoft.com/office/drawing/2014/main" id="{EB1F8E18-9264-4C4C-A388-691903EE6285}"/>
               </a:ext>
             </a:extLst>
           </p:cNvPr>
@@ -4468,7 +4638,7 @@
           <p:cNvPr id="18" name="Straight Arrow Connector 17">
             <a:extLst>
               <a:ext uri="{FF2B5EF4-FFF2-40B4-BE49-F238E27FC236}">
-                <a16:creationId xmlns:a16="http://schemas.microsoft.com/office/drawing/2014/main" xmlns="" id="{6EBEDE39-1CAE-42E5-98DB-1687FB9FF878}"/>
+                <a16:creationId xmlns="" xmlns:a16="http://schemas.microsoft.com/office/drawing/2014/main" id="{6EBEDE39-1CAE-42E5-98DB-1687FB9FF878}"/>
               </a:ext>
             </a:extLst>
           </p:cNvPr>
@@ -4507,7 +4677,7 @@
           <p:cNvPr id="20" name="TextBox 19">
             <a:extLst>
               <a:ext uri="{FF2B5EF4-FFF2-40B4-BE49-F238E27FC236}">
-                <a16:creationId xmlns:a16="http://schemas.microsoft.com/office/drawing/2014/main" xmlns="" id="{C0DE93DA-4E5B-4155-9045-9C20A40BBD7D}"/>
+                <a16:creationId xmlns="" xmlns:a16="http://schemas.microsoft.com/office/drawing/2014/main" id="{C0DE93DA-4E5B-4155-9045-9C20A40BBD7D}"/>
               </a:ext>
             </a:extLst>
           </p:cNvPr>
@@ -4542,7 +4712,7 @@
           <p:cNvPr id="21" name="Straight Arrow Connector 20">
             <a:extLst>
               <a:ext uri="{FF2B5EF4-FFF2-40B4-BE49-F238E27FC236}">
-                <a16:creationId xmlns:a16="http://schemas.microsoft.com/office/drawing/2014/main" xmlns="" id="{D8CA6A16-C24E-403F-92DA-24201808389D}"/>
+                <a16:creationId xmlns="" xmlns:a16="http://schemas.microsoft.com/office/drawing/2014/main" id="{D8CA6A16-C24E-403F-92DA-24201808389D}"/>
               </a:ext>
             </a:extLst>
           </p:cNvPr>
@@ -4584,7 +4754,7 @@
           <p:cNvPr id="22" name="Straight Arrow Connector 21">
             <a:extLst>
               <a:ext uri="{FF2B5EF4-FFF2-40B4-BE49-F238E27FC236}">
-                <a16:creationId xmlns:a16="http://schemas.microsoft.com/office/drawing/2014/main" xmlns="" id="{1AF07EEB-8486-4019-9959-3F0CBF0C6A66}"/>
+                <a16:creationId xmlns="" xmlns:a16="http://schemas.microsoft.com/office/drawing/2014/main" id="{1AF07EEB-8486-4019-9959-3F0CBF0C6A66}"/>
               </a:ext>
             </a:extLst>
           </p:cNvPr>
@@ -4625,7 +4795,7 @@
           <p:cNvPr id="23" name="TextBox 22">
             <a:extLst>
               <a:ext uri="{FF2B5EF4-FFF2-40B4-BE49-F238E27FC236}">
-                <a16:creationId xmlns:a16="http://schemas.microsoft.com/office/drawing/2014/main" xmlns="" id="{452BE8F3-0295-4B15-80B4-B2026225BC92}"/>
+                <a16:creationId xmlns="" xmlns:a16="http://schemas.microsoft.com/office/drawing/2014/main" id="{452BE8F3-0295-4B15-80B4-B2026225BC92}"/>
               </a:ext>
             </a:extLst>
           </p:cNvPr>
@@ -4710,7 +4880,7 @@
           <p:cNvPr id="23" name="TextBox 22">
             <a:extLst>
               <a:ext uri="{FF2B5EF4-FFF2-40B4-BE49-F238E27FC236}">
-                <a16:creationId xmlns:a16="http://schemas.microsoft.com/office/drawing/2014/main" xmlns="" id="{452BE8F3-0295-4B15-80B4-B2026225BC92}"/>
+                <a16:creationId xmlns="" xmlns:a16="http://schemas.microsoft.com/office/drawing/2014/main" id="{452BE8F3-0295-4B15-80B4-B2026225BC92}"/>
               </a:ext>
             </a:extLst>
           </p:cNvPr>
@@ -4762,7 +4932,7 @@
           <p:cNvPr id="24" name="Rectangle: Rounded Corners 14">
             <a:extLst>
               <a:ext uri="{FF2B5EF4-FFF2-40B4-BE49-F238E27FC236}">
-                <a16:creationId xmlns:a16="http://schemas.microsoft.com/office/drawing/2014/main" xmlns="" id="{E25DC19F-6B3A-4545-BDB8-13C5481B9137}"/>
+                <a16:creationId xmlns="" xmlns:a16="http://schemas.microsoft.com/office/drawing/2014/main" id="{E25DC19F-6B3A-4545-BDB8-13C5481B9137}"/>
               </a:ext>
             </a:extLst>
           </p:cNvPr>
@@ -4815,7 +4985,7 @@
           <p:cNvPr id="27" name="Rectangle: Rounded Corners 14">
             <a:extLst>
               <a:ext uri="{FF2B5EF4-FFF2-40B4-BE49-F238E27FC236}">
-                <a16:creationId xmlns:a16="http://schemas.microsoft.com/office/drawing/2014/main" xmlns="" id="{E25DC19F-6B3A-4545-BDB8-13C5481B9137}"/>
+                <a16:creationId xmlns="" xmlns:a16="http://schemas.microsoft.com/office/drawing/2014/main" id="{E25DC19F-6B3A-4545-BDB8-13C5481B9137}"/>
               </a:ext>
             </a:extLst>
           </p:cNvPr>
@@ -4942,7 +5112,7 @@
           <p:cNvPr id="36" name="TextBox 35">
             <a:extLst>
               <a:ext uri="{FF2B5EF4-FFF2-40B4-BE49-F238E27FC236}">
-                <a16:creationId xmlns:a16="http://schemas.microsoft.com/office/drawing/2014/main" xmlns="" id="{452BE8F3-0295-4B15-80B4-B2026225BC92}"/>
+                <a16:creationId xmlns="" xmlns:a16="http://schemas.microsoft.com/office/drawing/2014/main" id="{452BE8F3-0295-4B15-80B4-B2026225BC92}"/>
               </a:ext>
             </a:extLst>
           </p:cNvPr>
@@ -4994,7 +5164,7 @@
           <p:cNvPr id="37" name="Rectangle: Rounded Corners 11">
             <a:extLst>
               <a:ext uri="{FF2B5EF4-FFF2-40B4-BE49-F238E27FC236}">
-                <a16:creationId xmlns:a16="http://schemas.microsoft.com/office/drawing/2014/main" xmlns="" id="{5A1BEE6C-84E1-4224-B447-1AC8A888AAC0}"/>
+                <a16:creationId xmlns="" xmlns:a16="http://schemas.microsoft.com/office/drawing/2014/main" id="{5A1BEE6C-84E1-4224-B447-1AC8A888AAC0}"/>
               </a:ext>
             </a:extLst>
           </p:cNvPr>
@@ -5128,7 +5298,7 @@
           <p:cNvPr id="38" name="Rectangle: Rounded Corners 14">
             <a:extLst>
               <a:ext uri="{FF2B5EF4-FFF2-40B4-BE49-F238E27FC236}">
-                <a16:creationId xmlns:a16="http://schemas.microsoft.com/office/drawing/2014/main" xmlns="" id="{E25DC19F-6B3A-4545-BDB8-13C5481B9137}"/>
+                <a16:creationId xmlns="" xmlns:a16="http://schemas.microsoft.com/office/drawing/2014/main" id="{E25DC19F-6B3A-4545-BDB8-13C5481B9137}"/>
               </a:ext>
             </a:extLst>
           </p:cNvPr>
@@ -5181,7 +5351,7 @@
           <p:cNvPr id="39" name="Rectangle: Rounded Corners 14">
             <a:extLst>
               <a:ext uri="{FF2B5EF4-FFF2-40B4-BE49-F238E27FC236}">
-                <a16:creationId xmlns:a16="http://schemas.microsoft.com/office/drawing/2014/main" xmlns="" id="{E25DC19F-6B3A-4545-BDB8-13C5481B9137}"/>
+                <a16:creationId xmlns="" xmlns:a16="http://schemas.microsoft.com/office/drawing/2014/main" id="{E25DC19F-6B3A-4545-BDB8-13C5481B9137}"/>
               </a:ext>
             </a:extLst>
           </p:cNvPr>
@@ -5275,7 +5445,7 @@
           <p:cNvPr id="41" name="Rectangle: Rounded Corners 11">
             <a:extLst>
               <a:ext uri="{FF2B5EF4-FFF2-40B4-BE49-F238E27FC236}">
-                <a16:creationId xmlns:a16="http://schemas.microsoft.com/office/drawing/2014/main" xmlns="" id="{5A1BEE6C-84E1-4224-B447-1AC8A888AAC0}"/>
+                <a16:creationId xmlns="" xmlns:a16="http://schemas.microsoft.com/office/drawing/2014/main" id="{5A1BEE6C-84E1-4224-B447-1AC8A888AAC0}"/>
               </a:ext>
             </a:extLst>
           </p:cNvPr>
@@ -5508,7 +5678,7 @@
           <p:cNvPr id="44" name="Rectangle: Rounded Corners 11">
             <a:extLst>
               <a:ext uri="{FF2B5EF4-FFF2-40B4-BE49-F238E27FC236}">
-                <a16:creationId xmlns:a16="http://schemas.microsoft.com/office/drawing/2014/main" xmlns="" id="{5A1BEE6C-84E1-4224-B447-1AC8A888AAC0}"/>
+                <a16:creationId xmlns="" xmlns:a16="http://schemas.microsoft.com/office/drawing/2014/main" id="{5A1BEE6C-84E1-4224-B447-1AC8A888AAC0}"/>
               </a:ext>
             </a:extLst>
           </p:cNvPr>
@@ -5779,7 +5949,7 @@
           <p:cNvPr id="23" name="TextBox 22">
             <a:extLst>
               <a:ext uri="{FF2B5EF4-FFF2-40B4-BE49-F238E27FC236}">
-                <a16:creationId xmlns:a16="http://schemas.microsoft.com/office/drawing/2014/main" xmlns="" id="{452BE8F3-0295-4B15-80B4-B2026225BC92}"/>
+                <a16:creationId xmlns="" xmlns:a16="http://schemas.microsoft.com/office/drawing/2014/main" id="{452BE8F3-0295-4B15-80B4-B2026225BC92}"/>
               </a:ext>
             </a:extLst>
           </p:cNvPr>
@@ -5917,7 +6087,7 @@
           <p:cNvPr id="36" name="TextBox 35">
             <a:extLst>
               <a:ext uri="{FF2B5EF4-FFF2-40B4-BE49-F238E27FC236}">
-                <a16:creationId xmlns:a16="http://schemas.microsoft.com/office/drawing/2014/main" xmlns="" id="{452BE8F3-0295-4B15-80B4-B2026225BC92}"/>
+                <a16:creationId xmlns="" xmlns:a16="http://schemas.microsoft.com/office/drawing/2014/main" id="{452BE8F3-0295-4B15-80B4-B2026225BC92}"/>
               </a:ext>
             </a:extLst>
           </p:cNvPr>
@@ -5969,7 +6139,7 @@
           <p:cNvPr id="37" name="Rectangle: Rounded Corners 11">
             <a:extLst>
               <a:ext uri="{FF2B5EF4-FFF2-40B4-BE49-F238E27FC236}">
-                <a16:creationId xmlns:a16="http://schemas.microsoft.com/office/drawing/2014/main" xmlns="" id="{5A1BEE6C-84E1-4224-B447-1AC8A888AAC0}"/>
+                <a16:creationId xmlns="" xmlns:a16="http://schemas.microsoft.com/office/drawing/2014/main" id="{5A1BEE6C-84E1-4224-B447-1AC8A888AAC0}"/>
               </a:ext>
             </a:extLst>
           </p:cNvPr>
@@ -6103,7 +6273,7 @@
           <p:cNvPr id="38" name="Rectangle: Rounded Corners 14">
             <a:extLst>
               <a:ext uri="{FF2B5EF4-FFF2-40B4-BE49-F238E27FC236}">
-                <a16:creationId xmlns:a16="http://schemas.microsoft.com/office/drawing/2014/main" xmlns="" id="{E25DC19F-6B3A-4545-BDB8-13C5481B9137}"/>
+                <a16:creationId xmlns="" xmlns:a16="http://schemas.microsoft.com/office/drawing/2014/main" id="{E25DC19F-6B3A-4545-BDB8-13C5481B9137}"/>
               </a:ext>
             </a:extLst>
           </p:cNvPr>
@@ -6156,7 +6326,7 @@
           <p:cNvPr id="39" name="Rectangle: Rounded Corners 14">
             <a:extLst>
               <a:ext uri="{FF2B5EF4-FFF2-40B4-BE49-F238E27FC236}">
-                <a16:creationId xmlns:a16="http://schemas.microsoft.com/office/drawing/2014/main" xmlns="" id="{E25DC19F-6B3A-4545-BDB8-13C5481B9137}"/>
+                <a16:creationId xmlns="" xmlns:a16="http://schemas.microsoft.com/office/drawing/2014/main" id="{E25DC19F-6B3A-4545-BDB8-13C5481B9137}"/>
               </a:ext>
             </a:extLst>
           </p:cNvPr>
@@ -6250,7 +6420,7 @@
           <p:cNvPr id="41" name="Rectangle: Rounded Corners 11">
             <a:extLst>
               <a:ext uri="{FF2B5EF4-FFF2-40B4-BE49-F238E27FC236}">
-                <a16:creationId xmlns:a16="http://schemas.microsoft.com/office/drawing/2014/main" xmlns="" id="{5A1BEE6C-84E1-4224-B447-1AC8A888AAC0}"/>
+                <a16:creationId xmlns="" xmlns:a16="http://schemas.microsoft.com/office/drawing/2014/main" id="{5A1BEE6C-84E1-4224-B447-1AC8A888AAC0}"/>
               </a:ext>
             </a:extLst>
           </p:cNvPr>
@@ -6322,37 +6492,24 @@
                   <a:schemeClr val="tx1"/>
                 </a:solidFill>
               </a:rPr>
-              <a:t>= </a:t>
-            </a:r>
-            <a:r>
-              <a:rPr lang="en-US" sz="900" dirty="0">
+              <a:t>= Propagation.</a:t>
+            </a:r>
+            <a:r>
+              <a:rPr lang="en-US" sz="900" b="1" i="1" dirty="0">
+                <a:solidFill>
+                  <a:srgbClr val="0000FF"/>
+                </a:solidFill>
+              </a:rPr>
+              <a:t>SUPPORTS</a:t>
+            </a:r>
+            <a:r>
+              <a:rPr lang="en-US" sz="900" i="1" dirty="0" smtClean="0">
                 <a:solidFill>
                   <a:schemeClr val="tx1"/>
                 </a:solidFill>
               </a:rPr>
-              <a:t>Propagation.</a:t>
-            </a:r>
-            <a:r>
-              <a:rPr lang="en-US" sz="900" b="1" i="1" dirty="0">
-                <a:solidFill>
-                  <a:srgbClr val="0000FF"/>
-                </a:solidFill>
-              </a:rPr>
-              <a:t>SUPPORTS</a:t>
-            </a:r>
-            <a:r>
-              <a:rPr lang="en-US" sz="900" i="1" dirty="0" smtClean="0">
-                <a:solidFill>
-                  <a:schemeClr val="tx1"/>
-                </a:solidFill>
-              </a:rPr>
               <a:t>)</a:t>
             </a:r>
-            <a:endParaRPr lang="en-US" sz="900" i="1" dirty="0" smtClean="0">
-              <a:solidFill>
-                <a:schemeClr val="tx1"/>
-              </a:solidFill>
-            </a:endParaRPr>
           </a:p>
           <a:p>
             <a:r>
@@ -6496,7 +6653,7 @@
           <p:cNvPr id="44" name="Rectangle: Rounded Corners 11">
             <a:extLst>
               <a:ext uri="{FF2B5EF4-FFF2-40B4-BE49-F238E27FC236}">
-                <a16:creationId xmlns:a16="http://schemas.microsoft.com/office/drawing/2014/main" xmlns="" id="{5A1BEE6C-84E1-4224-B447-1AC8A888AAC0}"/>
+                <a16:creationId xmlns="" xmlns:a16="http://schemas.microsoft.com/office/drawing/2014/main" id="{5A1BEE6C-84E1-4224-B447-1AC8A888AAC0}"/>
               </a:ext>
             </a:extLst>
           </p:cNvPr>
@@ -6594,11 +6751,6 @@
               </a:rPr>
               <a:t>)</a:t>
             </a:r>
-            <a:endParaRPr lang="en-US" sz="900" i="1" dirty="0" smtClean="0">
-              <a:solidFill>
-                <a:schemeClr val="tx1"/>
-              </a:solidFill>
-            </a:endParaRPr>
           </a:p>
           <a:p>
             <a:r>
@@ -6742,6 +6894,2451 @@
     <p:extLst>
       <p:ext uri="{BB962C8B-B14F-4D97-AF65-F5344CB8AC3E}">
         <p14:creationId xmlns:p14="http://schemas.microsoft.com/office/powerpoint/2010/main" val="542041219"/>
+      </p:ext>
+    </p:extLst>
+  </p:cSld>
+  <p:clrMapOvr>
+    <a:masterClrMapping/>
+  </p:clrMapOvr>
+  <p:timing>
+    <p:tnLst>
+      <p:par>
+        <p:cTn id="1" dur="indefinite" restart="never" nodeType="tmRoot"/>
+      </p:par>
+    </p:tnLst>
+  </p:timing>
+</p:sld>
+</file>
+
+<file path=ppt/slides/slide4.xml><?xml version="1.0" encoding="utf-8"?>
+<p:sld xmlns:a="http://schemas.openxmlformats.org/drawingml/2006/main" xmlns:r="http://schemas.openxmlformats.org/officeDocument/2006/relationships" xmlns:p="http://schemas.openxmlformats.org/presentationml/2006/main">
+  <p:cSld>
+    <p:spTree>
+      <p:nvGrpSpPr>
+        <p:cNvPr id="1" name=""/>
+        <p:cNvGrpSpPr/>
+        <p:nvPr/>
+      </p:nvGrpSpPr>
+      <p:grpSpPr>
+        <a:xfrm>
+          <a:off x="0" y="0"/>
+          <a:ext cx="0" cy="0"/>
+          <a:chOff x="0" y="0"/>
+          <a:chExt cx="0" cy="0"/>
+        </a:xfrm>
+      </p:grpSpPr>
+      <p:sp>
+        <p:nvSpPr>
+          <p:cNvPr id="23" name="TextBox 22">
+            <a:extLst>
+              <a:ext uri="{FF2B5EF4-FFF2-40B4-BE49-F238E27FC236}">
+                <a16:creationId xmlns="" xmlns:a16="http://schemas.microsoft.com/office/drawing/2014/main" id="{452BE8F3-0295-4B15-80B4-B2026225BC92}"/>
+              </a:ext>
+            </a:extLst>
+          </p:cNvPr>
+          <p:cNvSpPr txBox="1"/>
+          <p:nvPr/>
+        </p:nvSpPr>
+        <p:spPr>
+          <a:xfrm>
+            <a:off x="2194540" y="668789"/>
+            <a:ext cx="1914038" cy="707886"/>
+          </a:xfrm>
+          <a:prstGeom prst="rect">
+            <a:avLst/>
+          </a:prstGeom>
+          <a:noFill/>
+        </p:spPr>
+        <p:txBody>
+          <a:bodyPr wrap="square">
+            <a:spAutoFit/>
+          </a:bodyPr>
+          <a:lstStyle/>
+          <a:p>
+            <a:pPr algn="ctr"/>
+            <a:r>
+              <a:rPr lang="en-US" sz="2000" dirty="0" smtClean="0">
+                <a:solidFill>
+                  <a:srgbClr val="002060"/>
+                </a:solidFill>
+              </a:rPr>
+              <a:t>Executed in </a:t>
+            </a:r>
+          </a:p>
+          <a:p>
+            <a:pPr algn="ctr"/>
+            <a:r>
+              <a:rPr lang="en-US" sz="2000" dirty="0" smtClean="0">
+                <a:solidFill>
+                  <a:srgbClr val="002060"/>
+                </a:solidFill>
+              </a:rPr>
+              <a:t>Transaction </a:t>
+            </a:r>
+            <a:r>
+              <a:rPr lang="en-US" sz="2000" b="1" i="1" u="sng" dirty="0" smtClean="0">
+                <a:solidFill>
+                  <a:srgbClr val="FF0000"/>
+                </a:solidFill>
+              </a:rPr>
+              <a:t>NO</a:t>
+            </a:r>
+            <a:endParaRPr lang="en-US" sz="2000" b="1" i="1" u="sng" dirty="0">
+              <a:solidFill>
+                <a:srgbClr val="FF0000"/>
+              </a:solidFill>
+            </a:endParaRPr>
+          </a:p>
+        </p:txBody>
+      </p:sp>
+      <p:sp>
+        <p:nvSpPr>
+          <p:cNvPr id="8" name="Rounded Rectangle 7"/>
+          <p:cNvSpPr/>
+          <p:nvPr/>
+        </p:nvSpPr>
+        <p:spPr>
+          <a:xfrm>
+            <a:off x="1158240" y="661839"/>
+            <a:ext cx="3796938" cy="2163961"/>
+          </a:xfrm>
+          <a:prstGeom prst="roundRect">
+            <a:avLst/>
+          </a:prstGeom>
+          <a:noFill/>
+        </p:spPr>
+        <p:style>
+          <a:lnRef idx="2">
+            <a:schemeClr val="accent1">
+              <a:shade val="50000"/>
+            </a:schemeClr>
+          </a:lnRef>
+          <a:fillRef idx="1">
+            <a:schemeClr val="accent1"/>
+          </a:fillRef>
+          <a:effectRef idx="0">
+            <a:schemeClr val="accent1"/>
+          </a:effectRef>
+          <a:fontRef idx="minor">
+            <a:schemeClr val="lt1"/>
+          </a:fontRef>
+        </p:style>
+        <p:txBody>
+          <a:bodyPr rtlCol="0" anchor="ctr"/>
+          <a:lstStyle/>
+          <a:p>
+            <a:pPr algn="ctr"/>
+            <a:endParaRPr lang="en-US"/>
+          </a:p>
+        </p:txBody>
+      </p:sp>
+      <p:cxnSp>
+        <p:nvCxnSpPr>
+          <p:cNvPr id="13" name="Straight Arrow Connector 12"/>
+          <p:cNvCxnSpPr/>
+          <p:nvPr/>
+        </p:nvCxnSpPr>
+        <p:spPr>
+          <a:xfrm>
+            <a:off x="1236009" y="1980600"/>
+            <a:ext cx="399923" cy="2583"/>
+          </a:xfrm>
+          <a:prstGeom prst="straightConnector1">
+            <a:avLst/>
+          </a:prstGeom>
+          <a:ln w="38100">
+            <a:tailEnd type="triangle"/>
+          </a:ln>
+        </p:spPr>
+        <p:style>
+          <a:lnRef idx="1">
+            <a:schemeClr val="accent1"/>
+          </a:lnRef>
+          <a:fillRef idx="0">
+            <a:schemeClr val="accent1"/>
+          </a:fillRef>
+          <a:effectRef idx="0">
+            <a:schemeClr val="accent1"/>
+          </a:effectRef>
+          <a:fontRef idx="minor">
+            <a:schemeClr val="tx1"/>
+          </a:fontRef>
+        </p:style>
+      </p:cxnSp>
+      <p:sp>
+        <p:nvSpPr>
+          <p:cNvPr id="36" name="TextBox 35">
+            <a:extLst>
+              <a:ext uri="{FF2B5EF4-FFF2-40B4-BE49-F238E27FC236}">
+                <a16:creationId xmlns="" xmlns:a16="http://schemas.microsoft.com/office/drawing/2014/main" id="{452BE8F3-0295-4B15-80B4-B2026225BC92}"/>
+              </a:ext>
+            </a:extLst>
+          </p:cNvPr>
+          <p:cNvSpPr txBox="1"/>
+          <p:nvPr/>
+        </p:nvSpPr>
+        <p:spPr>
+          <a:xfrm>
+            <a:off x="2626557" y="3393899"/>
+            <a:ext cx="1914038" cy="707886"/>
+          </a:xfrm>
+          <a:prstGeom prst="rect">
+            <a:avLst/>
+          </a:prstGeom>
+          <a:noFill/>
+        </p:spPr>
+        <p:txBody>
+          <a:bodyPr wrap="square">
+            <a:spAutoFit/>
+          </a:bodyPr>
+          <a:lstStyle/>
+          <a:p>
+            <a:pPr algn="ctr"/>
+            <a:r>
+              <a:rPr lang="en-US" sz="2000" dirty="0" smtClean="0">
+                <a:solidFill>
+                  <a:srgbClr val="002060"/>
+                </a:solidFill>
+              </a:rPr>
+              <a:t>Executed in </a:t>
+            </a:r>
+          </a:p>
+          <a:p>
+            <a:pPr algn="ctr"/>
+            <a:r>
+              <a:rPr lang="en-US" sz="2000" dirty="0" smtClean="0">
+                <a:solidFill>
+                  <a:srgbClr val="002060"/>
+                </a:solidFill>
+              </a:rPr>
+              <a:t>Transaction </a:t>
+            </a:r>
+            <a:r>
+              <a:rPr lang="en-US" sz="2000" b="1" dirty="0" smtClean="0">
+                <a:solidFill>
+                  <a:srgbClr val="0000FF"/>
+                </a:solidFill>
+              </a:rPr>
+              <a:t>T1</a:t>
+            </a:r>
+            <a:endParaRPr lang="en-US" sz="2000" b="1" dirty="0">
+              <a:solidFill>
+                <a:srgbClr val="0000FF"/>
+              </a:solidFill>
+            </a:endParaRPr>
+          </a:p>
+        </p:txBody>
+      </p:sp>
+      <p:sp>
+        <p:nvSpPr>
+          <p:cNvPr id="37" name="Rectangle: Rounded Corners 11">
+            <a:extLst>
+              <a:ext uri="{FF2B5EF4-FFF2-40B4-BE49-F238E27FC236}">
+                <a16:creationId xmlns="" xmlns:a16="http://schemas.microsoft.com/office/drawing/2014/main" id="{5A1BEE6C-84E1-4224-B447-1AC8A888AAC0}"/>
+              </a:ext>
+            </a:extLst>
+          </p:cNvPr>
+          <p:cNvSpPr/>
+          <p:nvPr/>
+        </p:nvSpPr>
+        <p:spPr>
+          <a:xfrm>
+            <a:off x="2437729" y="4320263"/>
+            <a:ext cx="2909334" cy="796023"/>
+          </a:xfrm>
+          <a:prstGeom prst="roundRect">
+            <a:avLst/>
+          </a:prstGeom>
+          <a:noFill/>
+        </p:spPr>
+        <p:style>
+          <a:lnRef idx="2">
+            <a:schemeClr val="accent1">
+              <a:shade val="50000"/>
+            </a:schemeClr>
+          </a:lnRef>
+          <a:fillRef idx="1">
+            <a:schemeClr val="accent1"/>
+          </a:fillRef>
+          <a:effectRef idx="0">
+            <a:schemeClr val="accent1"/>
+          </a:effectRef>
+          <a:fontRef idx="minor">
+            <a:schemeClr val="lt1"/>
+          </a:fontRef>
+        </p:style>
+        <p:txBody>
+          <a:bodyPr rtlCol="0" anchor="ctr"/>
+          <a:lstStyle/>
+          <a:p>
+            <a:pPr algn="ctr"/>
+            <a:r>
+              <a:rPr lang="en-US" sz="1100" b="1" dirty="0" smtClean="0">
+                <a:solidFill>
+                  <a:srgbClr val="7030A0"/>
+                </a:solidFill>
+              </a:rPr>
+              <a:t>OrganizationServiceImpl</a:t>
+            </a:r>
+          </a:p>
+          <a:p>
+            <a:r>
+              <a:rPr lang="en-US" sz="900" b="1" dirty="0" smtClean="0">
+                <a:solidFill>
+                  <a:schemeClr val="bg2">
+                    <a:lumMod val="75000"/>
+                  </a:schemeClr>
+                </a:solidFill>
+              </a:rPr>
+              <a:t>@Transactional</a:t>
+            </a:r>
+            <a:r>
+              <a:rPr lang="en-US" sz="900" dirty="0" smtClean="0">
+                <a:solidFill>
+                  <a:schemeClr val="tx1"/>
+                </a:solidFill>
+              </a:rPr>
+              <a:t>(propagation = Propagation.</a:t>
+            </a:r>
+            <a:r>
+              <a:rPr lang="en-US" sz="900" b="1" i="1" dirty="0" smtClean="0">
+                <a:solidFill>
+                  <a:srgbClr val="0000FF"/>
+                </a:solidFill>
+              </a:rPr>
+              <a:t>REQUIRED</a:t>
+            </a:r>
+            <a:r>
+              <a:rPr lang="en-US" sz="900" i="1" dirty="0" smtClean="0">
+                <a:solidFill>
+                  <a:schemeClr val="tx1"/>
+                </a:solidFill>
+              </a:rPr>
+              <a:t>)</a:t>
+            </a:r>
+          </a:p>
+          <a:p>
+            <a:r>
+              <a:rPr lang="en-US" sz="900" b="1" dirty="0">
+                <a:solidFill>
+                  <a:srgbClr val="FF0000"/>
+                </a:solidFill>
+              </a:rPr>
+              <a:t>public</a:t>
+            </a:r>
+            <a:r>
+              <a:rPr lang="en-US" sz="900" dirty="0">
+                <a:solidFill>
+                  <a:schemeClr val="tx1"/>
+                </a:solidFill>
+              </a:rPr>
+              <a:t> void </a:t>
+            </a:r>
+            <a:r>
+              <a:rPr lang="en-US" sz="900" b="1" dirty="0">
+                <a:solidFill>
+                  <a:srgbClr val="C00000"/>
+                </a:solidFill>
+              </a:rPr>
+              <a:t>joinOrganization</a:t>
+            </a:r>
+            <a:r>
+              <a:rPr lang="en-US" sz="900" dirty="0">
+                <a:solidFill>
+                  <a:schemeClr val="tx1"/>
+                </a:solidFill>
+              </a:rPr>
+              <a:t>() {</a:t>
+            </a:r>
+          </a:p>
+          <a:p>
+            <a:r>
+              <a:rPr lang="en-US" sz="900" dirty="0">
+                <a:solidFill>
+                  <a:schemeClr val="tx1"/>
+                </a:solidFill>
+              </a:rPr>
+              <a:t>}</a:t>
+            </a:r>
+          </a:p>
+        </p:txBody>
+      </p:sp>
+      <p:sp>
+        <p:nvSpPr>
+          <p:cNvPr id="38" name="Rectangle: Rounded Corners 14">
+            <a:extLst>
+              <a:ext uri="{FF2B5EF4-FFF2-40B4-BE49-F238E27FC236}">
+                <a16:creationId xmlns="" xmlns:a16="http://schemas.microsoft.com/office/drawing/2014/main" id="{E25DC19F-6B3A-4545-BDB8-13C5481B9137}"/>
+              </a:ext>
+            </a:extLst>
+          </p:cNvPr>
+          <p:cNvSpPr/>
+          <p:nvPr/>
+        </p:nvSpPr>
+        <p:spPr>
+          <a:xfrm>
+            <a:off x="2203269" y="4113057"/>
+            <a:ext cx="1202410" cy="212228"/>
+          </a:xfrm>
+          <a:prstGeom prst="roundRect">
+            <a:avLst/>
+          </a:prstGeom>
+          <a:solidFill>
+            <a:srgbClr val="FFC000"/>
+          </a:solidFill>
+        </p:spPr>
+        <p:style>
+          <a:lnRef idx="2">
+            <a:schemeClr val="accent1">
+              <a:shade val="50000"/>
+            </a:schemeClr>
+          </a:lnRef>
+          <a:fillRef idx="1">
+            <a:schemeClr val="accent1"/>
+          </a:fillRef>
+          <a:effectRef idx="0">
+            <a:schemeClr val="accent1"/>
+          </a:effectRef>
+          <a:fontRef idx="minor">
+            <a:schemeClr val="lt1"/>
+          </a:fontRef>
+        </p:style>
+        <p:txBody>
+          <a:bodyPr rtlCol="0" anchor="ctr"/>
+          <a:lstStyle/>
+          <a:p>
+            <a:pPr algn="ctr"/>
+            <a:r>
+              <a:rPr lang="en-US" sz="900" dirty="0" smtClean="0"/>
+              <a:t>Begin Transaction T1</a:t>
+            </a:r>
+            <a:endParaRPr lang="en-US" sz="900" dirty="0"/>
+          </a:p>
+        </p:txBody>
+      </p:sp>
+      <p:sp>
+        <p:nvSpPr>
+          <p:cNvPr id="39" name="Rectangle: Rounded Corners 14">
+            <a:extLst>
+              <a:ext uri="{FF2B5EF4-FFF2-40B4-BE49-F238E27FC236}">
+                <a16:creationId xmlns="" xmlns:a16="http://schemas.microsoft.com/office/drawing/2014/main" id="{E25DC19F-6B3A-4545-BDB8-13C5481B9137}"/>
+              </a:ext>
+            </a:extLst>
+          </p:cNvPr>
+          <p:cNvSpPr/>
+          <p:nvPr/>
+        </p:nvSpPr>
+        <p:spPr>
+          <a:xfrm>
+            <a:off x="2203269" y="5128829"/>
+            <a:ext cx="1202410" cy="212228"/>
+          </a:xfrm>
+          <a:prstGeom prst="roundRect">
+            <a:avLst/>
+          </a:prstGeom>
+          <a:solidFill>
+            <a:srgbClr val="FFC000"/>
+          </a:solidFill>
+        </p:spPr>
+        <p:style>
+          <a:lnRef idx="2">
+            <a:schemeClr val="accent1">
+              <a:shade val="50000"/>
+            </a:schemeClr>
+          </a:lnRef>
+          <a:fillRef idx="1">
+            <a:schemeClr val="accent1"/>
+          </a:fillRef>
+          <a:effectRef idx="0">
+            <a:schemeClr val="accent1"/>
+          </a:effectRef>
+          <a:fontRef idx="minor">
+            <a:schemeClr val="lt1"/>
+          </a:fontRef>
+        </p:style>
+        <p:txBody>
+          <a:bodyPr rtlCol="0" anchor="ctr"/>
+          <a:lstStyle/>
+          <a:p>
+            <a:pPr algn="ctr"/>
+            <a:r>
+              <a:rPr lang="en-US" sz="900" dirty="0" smtClean="0"/>
+              <a:t>End Transaction T1</a:t>
+            </a:r>
+            <a:endParaRPr lang="en-US" sz="900" dirty="0"/>
+          </a:p>
+        </p:txBody>
+      </p:sp>
+      <p:sp>
+        <p:nvSpPr>
+          <p:cNvPr id="40" name="Rounded Rectangle 39"/>
+          <p:cNvSpPr/>
+          <p:nvPr/>
+        </p:nvSpPr>
+        <p:spPr>
+          <a:xfrm>
+            <a:off x="1898469" y="3405171"/>
+            <a:ext cx="3544388" cy="2163961"/>
+          </a:xfrm>
+          <a:prstGeom prst="roundRect">
+            <a:avLst/>
+          </a:prstGeom>
+          <a:noFill/>
+        </p:spPr>
+        <p:style>
+          <a:lnRef idx="2">
+            <a:schemeClr val="accent1">
+              <a:shade val="50000"/>
+            </a:schemeClr>
+          </a:lnRef>
+          <a:fillRef idx="1">
+            <a:schemeClr val="accent1"/>
+          </a:fillRef>
+          <a:effectRef idx="0">
+            <a:schemeClr val="accent1"/>
+          </a:effectRef>
+          <a:fontRef idx="minor">
+            <a:schemeClr val="lt1"/>
+          </a:fontRef>
+        </p:style>
+        <p:txBody>
+          <a:bodyPr rtlCol="0" anchor="ctr"/>
+          <a:lstStyle/>
+          <a:p>
+            <a:pPr algn="ctr"/>
+            <a:endParaRPr lang="en-US"/>
+          </a:p>
+        </p:txBody>
+      </p:sp>
+      <p:cxnSp>
+        <p:nvCxnSpPr>
+          <p:cNvPr id="42" name="Straight Arrow Connector 41"/>
+          <p:cNvCxnSpPr>
+            <a:endCxn id="37" idx="1"/>
+          </p:cNvCxnSpPr>
+          <p:nvPr/>
+        </p:nvCxnSpPr>
+        <p:spPr>
+          <a:xfrm>
+            <a:off x="2037806" y="4715692"/>
+            <a:ext cx="399923" cy="2583"/>
+          </a:xfrm>
+          <a:prstGeom prst="straightConnector1">
+            <a:avLst/>
+          </a:prstGeom>
+          <a:ln w="38100">
+            <a:tailEnd type="triangle"/>
+          </a:ln>
+        </p:spPr>
+        <p:style>
+          <a:lnRef idx="1">
+            <a:schemeClr val="accent1"/>
+          </a:lnRef>
+          <a:fillRef idx="0">
+            <a:schemeClr val="accent1"/>
+          </a:fillRef>
+          <a:effectRef idx="0">
+            <a:schemeClr val="accent1"/>
+          </a:effectRef>
+          <a:fontRef idx="minor">
+            <a:schemeClr val="tx1"/>
+          </a:fontRef>
+        </p:style>
+      </p:cxnSp>
+      <p:cxnSp>
+        <p:nvCxnSpPr>
+          <p:cNvPr id="43" name="Straight Arrow Connector 42"/>
+          <p:cNvCxnSpPr/>
+          <p:nvPr/>
+        </p:nvCxnSpPr>
+        <p:spPr>
+          <a:xfrm>
+            <a:off x="5442857" y="4730817"/>
+            <a:ext cx="530552" cy="1"/>
+          </a:xfrm>
+          <a:prstGeom prst="straightConnector1">
+            <a:avLst/>
+          </a:prstGeom>
+          <a:ln w="38100">
+            <a:tailEnd type="triangle"/>
+          </a:ln>
+        </p:spPr>
+        <p:style>
+          <a:lnRef idx="1">
+            <a:schemeClr val="accent1"/>
+          </a:lnRef>
+          <a:fillRef idx="0">
+            <a:schemeClr val="accent1"/>
+          </a:fillRef>
+          <a:effectRef idx="0">
+            <a:schemeClr val="accent1"/>
+          </a:effectRef>
+          <a:fontRef idx="minor">
+            <a:schemeClr val="tx1"/>
+          </a:fontRef>
+        </p:style>
+      </p:cxnSp>
+      <p:sp>
+        <p:nvSpPr>
+          <p:cNvPr id="44" name="Rectangle: Rounded Corners 11">
+            <a:extLst>
+              <a:ext uri="{FF2B5EF4-FFF2-40B4-BE49-F238E27FC236}">
+                <a16:creationId xmlns="" xmlns:a16="http://schemas.microsoft.com/office/drawing/2014/main" id="{5A1BEE6C-84E1-4224-B447-1AC8A888AAC0}"/>
+              </a:ext>
+            </a:extLst>
+          </p:cNvPr>
+          <p:cNvSpPr/>
+          <p:nvPr/>
+        </p:nvSpPr>
+        <p:spPr>
+          <a:xfrm>
+            <a:off x="1635932" y="1583881"/>
+            <a:ext cx="3232160" cy="796023"/>
+          </a:xfrm>
+          <a:prstGeom prst="roundRect">
+            <a:avLst/>
+          </a:prstGeom>
+          <a:noFill/>
+        </p:spPr>
+        <p:style>
+          <a:lnRef idx="2">
+            <a:schemeClr val="accent1">
+              <a:shade val="50000"/>
+            </a:schemeClr>
+          </a:lnRef>
+          <a:fillRef idx="1">
+            <a:schemeClr val="accent1"/>
+          </a:fillRef>
+          <a:effectRef idx="0">
+            <a:schemeClr val="accent1"/>
+          </a:effectRef>
+          <a:fontRef idx="minor">
+            <a:schemeClr val="lt1"/>
+          </a:fontRef>
+        </p:style>
+        <p:txBody>
+          <a:bodyPr rtlCol="0" anchor="ctr"/>
+          <a:lstStyle/>
+          <a:p>
+            <a:pPr algn="ctr"/>
+            <a:r>
+              <a:rPr lang="en-US" sz="1100" b="1" dirty="0" smtClean="0">
+                <a:solidFill>
+                  <a:srgbClr val="7030A0"/>
+                </a:solidFill>
+              </a:rPr>
+              <a:t>EmployeeServiceImpl</a:t>
+            </a:r>
+          </a:p>
+          <a:p>
+            <a:r>
+              <a:rPr lang="en-US" sz="900" b="1" dirty="0" smtClean="0">
+                <a:solidFill>
+                  <a:schemeClr val="bg2">
+                    <a:lumMod val="75000"/>
+                  </a:schemeClr>
+                </a:solidFill>
+              </a:rPr>
+              <a:t>@Transactional</a:t>
+            </a:r>
+            <a:r>
+              <a:rPr lang="en-US" sz="900" dirty="0" smtClean="0">
+                <a:solidFill>
+                  <a:schemeClr val="tx1"/>
+                </a:solidFill>
+              </a:rPr>
+              <a:t>(propagation </a:t>
+            </a:r>
+            <a:r>
+              <a:rPr lang="en-US" sz="900" dirty="0">
+                <a:solidFill>
+                  <a:schemeClr val="tx1"/>
+                </a:solidFill>
+              </a:rPr>
+              <a:t>= </a:t>
+            </a:r>
+            <a:r>
+              <a:rPr lang="en-US" sz="900" dirty="0" smtClean="0">
+                <a:solidFill>
+                  <a:schemeClr val="tx1"/>
+                </a:solidFill>
+              </a:rPr>
+              <a:t>Propagation.</a:t>
+            </a:r>
+            <a:r>
+              <a:rPr lang="en-US" sz="900" b="1" i="1" dirty="0" smtClean="0">
+                <a:solidFill>
+                  <a:srgbClr val="0000FF"/>
+                </a:solidFill>
+              </a:rPr>
+              <a:t>NOT_SUPPORTED</a:t>
+            </a:r>
+            <a:r>
+              <a:rPr lang="en-US" sz="900" i="1" dirty="0" smtClean="0">
+                <a:solidFill>
+                  <a:schemeClr val="tx1"/>
+                </a:solidFill>
+              </a:rPr>
+              <a:t>)</a:t>
+            </a:r>
+            <a:endParaRPr lang="en-US" sz="900" i="1" dirty="0" smtClean="0">
+              <a:solidFill>
+                <a:schemeClr val="tx1"/>
+              </a:solidFill>
+            </a:endParaRPr>
+          </a:p>
+          <a:p>
+            <a:r>
+              <a:rPr lang="en-US" sz="900" b="1" dirty="0" smtClean="0">
+                <a:solidFill>
+                  <a:srgbClr val="FF0000"/>
+                </a:solidFill>
+              </a:rPr>
+              <a:t>public</a:t>
+            </a:r>
+            <a:r>
+              <a:rPr lang="en-US" sz="900" dirty="0" smtClean="0">
+                <a:solidFill>
+                  <a:srgbClr val="FF0000"/>
+                </a:solidFill>
+              </a:rPr>
+              <a:t> </a:t>
+            </a:r>
+            <a:r>
+              <a:rPr lang="en-US" sz="900" dirty="0">
+                <a:solidFill>
+                  <a:schemeClr val="tx1"/>
+                </a:solidFill>
+              </a:rPr>
+              <a:t>Employee </a:t>
+            </a:r>
+            <a:r>
+              <a:rPr lang="en-US" sz="900" b="1" dirty="0" smtClean="0">
+                <a:solidFill>
+                  <a:srgbClr val="C00000"/>
+                </a:solidFill>
+              </a:rPr>
+              <a:t>addEmployee</a:t>
+            </a:r>
+            <a:r>
+              <a:rPr lang="en-US" sz="900" dirty="0" smtClean="0">
+                <a:solidFill>
+                  <a:schemeClr val="tx1"/>
+                </a:solidFill>
+              </a:rPr>
+              <a:t>() </a:t>
+            </a:r>
+            <a:r>
+              <a:rPr lang="en-US" sz="900" dirty="0">
+                <a:solidFill>
+                  <a:schemeClr val="tx1"/>
+                </a:solidFill>
+              </a:rPr>
+              <a:t>{</a:t>
+            </a:r>
+          </a:p>
+          <a:p>
+            <a:r>
+              <a:rPr lang="en-US" sz="900" dirty="0" smtClean="0">
+                <a:solidFill>
+                  <a:schemeClr val="tx1"/>
+                </a:solidFill>
+              </a:rPr>
+              <a:t>}</a:t>
+            </a:r>
+            <a:endParaRPr lang="en-US" sz="900" dirty="0">
+              <a:solidFill>
+                <a:schemeClr val="tx1"/>
+              </a:solidFill>
+            </a:endParaRPr>
+          </a:p>
+        </p:txBody>
+      </p:sp>
+      <p:sp>
+        <p:nvSpPr>
+          <p:cNvPr id="16" name="Rectangle 15"/>
+          <p:cNvSpPr/>
+          <p:nvPr/>
+        </p:nvSpPr>
+        <p:spPr>
+          <a:xfrm>
+            <a:off x="5402883" y="147784"/>
+            <a:ext cx="5992795" cy="615553"/>
+          </a:xfrm>
+          <a:prstGeom prst="rect">
+            <a:avLst/>
+          </a:prstGeom>
+          <a:noFill/>
+        </p:spPr>
+        <p:txBody>
+          <a:bodyPr wrap="none" lIns="91440" tIns="45720" rIns="91440" bIns="45720">
+            <a:spAutoFit/>
+          </a:bodyPr>
+          <a:lstStyle/>
+          <a:p>
+            <a:pPr algn="ctr"/>
+            <a:r>
+              <a:rPr lang="en-US" sz="3400" b="0" u="sng" cap="none" spc="0" dirty="0" smtClean="0">
+                <a:ln w="0"/>
+                <a:solidFill>
+                  <a:schemeClr val="tx1"/>
+                </a:solidFill>
+                <a:effectLst>
+                  <a:outerShdw blurRad="38100" dist="19050" dir="2700000" algn="tl" rotWithShape="0">
+                    <a:schemeClr val="dk1">
+                      <a:alpha val="40000"/>
+                    </a:schemeClr>
+                  </a:outerShdw>
+                </a:effectLst>
+              </a:rPr>
+              <a:t>PROPAGATION.</a:t>
+            </a:r>
+            <a:r>
+              <a:rPr lang="en-US" sz="3400" b="0" i="1" u="sng" cap="none" spc="0" dirty="0" smtClean="0">
+                <a:ln w="0"/>
+                <a:solidFill>
+                  <a:srgbClr val="0000FF"/>
+                </a:solidFill>
+                <a:effectLst>
+                  <a:outerShdw blurRad="38100" dist="19050" dir="2700000" algn="tl" rotWithShape="0">
+                    <a:schemeClr val="dk1">
+                      <a:alpha val="40000"/>
+                    </a:schemeClr>
+                  </a:outerShdw>
+                </a:effectLst>
+              </a:rPr>
+              <a:t>NOT_SUPPORTED</a:t>
+            </a:r>
+            <a:endParaRPr lang="en-US" sz="3400" b="0" i="1" u="sng" cap="none" spc="0" dirty="0">
+              <a:ln w="0"/>
+              <a:solidFill>
+                <a:srgbClr val="0000FF"/>
+              </a:solidFill>
+              <a:effectLst>
+                <a:outerShdw blurRad="38100" dist="19050" dir="2700000" algn="tl" rotWithShape="0">
+                  <a:schemeClr val="dk1">
+                    <a:alpha val="40000"/>
+                  </a:schemeClr>
+                </a:outerShdw>
+              </a:effectLst>
+            </a:endParaRPr>
+          </a:p>
+        </p:txBody>
+      </p:sp>
+      <p:sp>
+        <p:nvSpPr>
+          <p:cNvPr id="15" name="Rounded Rectangle 14"/>
+          <p:cNvSpPr/>
+          <p:nvPr/>
+        </p:nvSpPr>
+        <p:spPr>
+          <a:xfrm>
+            <a:off x="5755695" y="3405171"/>
+            <a:ext cx="3527642" cy="2163961"/>
+          </a:xfrm>
+          <a:prstGeom prst="roundRect">
+            <a:avLst/>
+          </a:prstGeom>
+          <a:noFill/>
+        </p:spPr>
+        <p:style>
+          <a:lnRef idx="2">
+            <a:schemeClr val="accent1">
+              <a:shade val="50000"/>
+            </a:schemeClr>
+          </a:lnRef>
+          <a:fillRef idx="1">
+            <a:schemeClr val="accent1"/>
+          </a:fillRef>
+          <a:effectRef idx="0">
+            <a:schemeClr val="accent1"/>
+          </a:effectRef>
+          <a:fontRef idx="minor">
+            <a:schemeClr val="lt1"/>
+          </a:fontRef>
+        </p:style>
+        <p:txBody>
+          <a:bodyPr rtlCol="0" anchor="ctr"/>
+          <a:lstStyle/>
+          <a:p>
+            <a:pPr algn="ctr"/>
+            <a:endParaRPr lang="en-US"/>
+          </a:p>
+        </p:txBody>
+      </p:sp>
+      <p:sp>
+        <p:nvSpPr>
+          <p:cNvPr id="17" name="Rectangle: Rounded Corners 11">
+            <a:extLst>
+              <a:ext uri="{FF2B5EF4-FFF2-40B4-BE49-F238E27FC236}">
+                <a16:creationId xmlns="" xmlns:a16="http://schemas.microsoft.com/office/drawing/2014/main" id="{5A1BEE6C-84E1-4224-B447-1AC8A888AAC0}"/>
+              </a:ext>
+            </a:extLst>
+          </p:cNvPr>
+          <p:cNvSpPr/>
+          <p:nvPr/>
+        </p:nvSpPr>
+        <p:spPr>
+          <a:xfrm>
+            <a:off x="5964701" y="4332806"/>
+            <a:ext cx="3232160" cy="796023"/>
+          </a:xfrm>
+          <a:prstGeom prst="roundRect">
+            <a:avLst/>
+          </a:prstGeom>
+          <a:noFill/>
+        </p:spPr>
+        <p:style>
+          <a:lnRef idx="2">
+            <a:schemeClr val="accent1">
+              <a:shade val="50000"/>
+            </a:schemeClr>
+          </a:lnRef>
+          <a:fillRef idx="1">
+            <a:schemeClr val="accent1"/>
+          </a:fillRef>
+          <a:effectRef idx="0">
+            <a:schemeClr val="accent1"/>
+          </a:effectRef>
+          <a:fontRef idx="minor">
+            <a:schemeClr val="lt1"/>
+          </a:fontRef>
+        </p:style>
+        <p:txBody>
+          <a:bodyPr rtlCol="0" anchor="ctr"/>
+          <a:lstStyle/>
+          <a:p>
+            <a:pPr algn="ctr"/>
+            <a:r>
+              <a:rPr lang="en-US" sz="1100" b="1" dirty="0" smtClean="0">
+                <a:solidFill>
+                  <a:srgbClr val="7030A0"/>
+                </a:solidFill>
+              </a:rPr>
+              <a:t>EmployeeServiceImpl</a:t>
+            </a:r>
+          </a:p>
+          <a:p>
+            <a:r>
+              <a:rPr lang="en-US" sz="900" b="1" dirty="0" smtClean="0">
+                <a:solidFill>
+                  <a:schemeClr val="bg2">
+                    <a:lumMod val="75000"/>
+                  </a:schemeClr>
+                </a:solidFill>
+              </a:rPr>
+              <a:t>@Transactional</a:t>
+            </a:r>
+            <a:r>
+              <a:rPr lang="en-US" sz="900" dirty="0" smtClean="0">
+                <a:solidFill>
+                  <a:schemeClr val="tx1"/>
+                </a:solidFill>
+              </a:rPr>
+              <a:t>(propagation </a:t>
+            </a:r>
+            <a:r>
+              <a:rPr lang="en-US" sz="900" dirty="0">
+                <a:solidFill>
+                  <a:schemeClr val="tx1"/>
+                </a:solidFill>
+              </a:rPr>
+              <a:t>= </a:t>
+            </a:r>
+            <a:r>
+              <a:rPr lang="en-US" sz="900" dirty="0" smtClean="0">
+                <a:solidFill>
+                  <a:schemeClr val="tx1"/>
+                </a:solidFill>
+              </a:rPr>
+              <a:t>Propagation.</a:t>
+            </a:r>
+            <a:r>
+              <a:rPr lang="en-US" sz="900" b="1" i="1" dirty="0" smtClean="0">
+                <a:solidFill>
+                  <a:srgbClr val="0000FF"/>
+                </a:solidFill>
+              </a:rPr>
+              <a:t>NOT_SUPPORTED</a:t>
+            </a:r>
+            <a:r>
+              <a:rPr lang="en-US" sz="900" i="1" dirty="0" smtClean="0">
+                <a:solidFill>
+                  <a:schemeClr val="tx1"/>
+                </a:solidFill>
+              </a:rPr>
+              <a:t>)</a:t>
+            </a:r>
+            <a:endParaRPr lang="en-US" sz="900" i="1" dirty="0" smtClean="0">
+              <a:solidFill>
+                <a:schemeClr val="tx1"/>
+              </a:solidFill>
+            </a:endParaRPr>
+          </a:p>
+          <a:p>
+            <a:r>
+              <a:rPr lang="en-US" sz="900" b="1" dirty="0" smtClean="0">
+                <a:solidFill>
+                  <a:srgbClr val="FF0000"/>
+                </a:solidFill>
+              </a:rPr>
+              <a:t>public</a:t>
+            </a:r>
+            <a:r>
+              <a:rPr lang="en-US" sz="900" dirty="0" smtClean="0">
+                <a:solidFill>
+                  <a:srgbClr val="FF0000"/>
+                </a:solidFill>
+              </a:rPr>
+              <a:t> </a:t>
+            </a:r>
+            <a:r>
+              <a:rPr lang="en-US" sz="900" dirty="0">
+                <a:solidFill>
+                  <a:schemeClr val="tx1"/>
+                </a:solidFill>
+              </a:rPr>
+              <a:t>Employee </a:t>
+            </a:r>
+            <a:r>
+              <a:rPr lang="en-US" sz="900" b="1" dirty="0" smtClean="0">
+                <a:solidFill>
+                  <a:srgbClr val="C00000"/>
+                </a:solidFill>
+              </a:rPr>
+              <a:t>addEmployee</a:t>
+            </a:r>
+            <a:r>
+              <a:rPr lang="en-US" sz="900" dirty="0" smtClean="0">
+                <a:solidFill>
+                  <a:schemeClr val="tx1"/>
+                </a:solidFill>
+              </a:rPr>
+              <a:t>() </a:t>
+            </a:r>
+            <a:r>
+              <a:rPr lang="en-US" sz="900" dirty="0">
+                <a:solidFill>
+                  <a:schemeClr val="tx1"/>
+                </a:solidFill>
+              </a:rPr>
+              <a:t>{</a:t>
+            </a:r>
+          </a:p>
+          <a:p>
+            <a:r>
+              <a:rPr lang="en-US" sz="900" dirty="0" smtClean="0">
+                <a:solidFill>
+                  <a:schemeClr val="tx1"/>
+                </a:solidFill>
+              </a:rPr>
+              <a:t>}</a:t>
+            </a:r>
+            <a:endParaRPr lang="en-US" sz="900" dirty="0">
+              <a:solidFill>
+                <a:schemeClr val="tx1"/>
+              </a:solidFill>
+            </a:endParaRPr>
+          </a:p>
+        </p:txBody>
+      </p:sp>
+      <p:sp>
+        <p:nvSpPr>
+          <p:cNvPr id="18" name="TextBox 17">
+            <a:extLst>
+              <a:ext uri="{FF2B5EF4-FFF2-40B4-BE49-F238E27FC236}">
+                <a16:creationId xmlns="" xmlns:a16="http://schemas.microsoft.com/office/drawing/2014/main" id="{452BE8F3-0295-4B15-80B4-B2026225BC92}"/>
+              </a:ext>
+            </a:extLst>
+          </p:cNvPr>
+          <p:cNvSpPr txBox="1"/>
+          <p:nvPr/>
+        </p:nvSpPr>
+        <p:spPr>
+          <a:xfrm>
+            <a:off x="6562497" y="3473433"/>
+            <a:ext cx="1914038" cy="707886"/>
+          </a:xfrm>
+          <a:prstGeom prst="rect">
+            <a:avLst/>
+          </a:prstGeom>
+          <a:noFill/>
+        </p:spPr>
+        <p:txBody>
+          <a:bodyPr wrap="square">
+            <a:spAutoFit/>
+          </a:bodyPr>
+          <a:lstStyle/>
+          <a:p>
+            <a:pPr algn="ctr"/>
+            <a:r>
+              <a:rPr lang="en-US" sz="2000" dirty="0" smtClean="0">
+                <a:solidFill>
+                  <a:srgbClr val="002060"/>
+                </a:solidFill>
+              </a:rPr>
+              <a:t>Executed in </a:t>
+            </a:r>
+          </a:p>
+          <a:p>
+            <a:pPr algn="ctr"/>
+            <a:r>
+              <a:rPr lang="en-US" sz="2000" dirty="0" smtClean="0">
+                <a:solidFill>
+                  <a:srgbClr val="002060"/>
+                </a:solidFill>
+              </a:rPr>
+              <a:t>Transaction </a:t>
+            </a:r>
+            <a:r>
+              <a:rPr lang="en-US" sz="2000" b="1" i="1" u="sng" dirty="0" smtClean="0">
+                <a:solidFill>
+                  <a:srgbClr val="FF0000"/>
+                </a:solidFill>
+              </a:rPr>
+              <a:t>NO</a:t>
+            </a:r>
+            <a:endParaRPr lang="en-US" sz="2000" b="1" i="1" u="sng" dirty="0">
+              <a:solidFill>
+                <a:srgbClr val="FF0000"/>
+              </a:solidFill>
+            </a:endParaRPr>
+          </a:p>
+        </p:txBody>
+      </p:sp>
+    </p:spTree>
+    <p:extLst>
+      <p:ext uri="{BB962C8B-B14F-4D97-AF65-F5344CB8AC3E}">
+        <p14:creationId xmlns:p14="http://schemas.microsoft.com/office/powerpoint/2010/main" val="3949767965"/>
+      </p:ext>
+    </p:extLst>
+  </p:cSld>
+  <p:clrMapOvr>
+    <a:masterClrMapping/>
+  </p:clrMapOvr>
+  <p:timing>
+    <p:tnLst>
+      <p:par>
+        <p:cTn id="1" dur="indefinite" restart="never" nodeType="tmRoot"/>
+      </p:par>
+    </p:tnLst>
+  </p:timing>
+</p:sld>
+</file>
+
+<file path=ppt/slides/slide5.xml><?xml version="1.0" encoding="utf-8"?>
+<p:sld xmlns:a="http://schemas.openxmlformats.org/drawingml/2006/main" xmlns:r="http://schemas.openxmlformats.org/officeDocument/2006/relationships" xmlns:p="http://schemas.openxmlformats.org/presentationml/2006/main">
+  <p:cSld>
+    <p:spTree>
+      <p:nvGrpSpPr>
+        <p:cNvPr id="1" name=""/>
+        <p:cNvGrpSpPr/>
+        <p:nvPr/>
+      </p:nvGrpSpPr>
+      <p:grpSpPr>
+        <a:xfrm>
+          <a:off x="0" y="0"/>
+          <a:ext cx="0" cy="0"/>
+          <a:chOff x="0" y="0"/>
+          <a:chExt cx="0" cy="0"/>
+        </a:xfrm>
+      </p:grpSpPr>
+      <p:sp>
+        <p:nvSpPr>
+          <p:cNvPr id="23" name="TextBox 22">
+            <a:extLst>
+              <a:ext uri="{FF2B5EF4-FFF2-40B4-BE49-F238E27FC236}">
+                <a16:creationId xmlns="" xmlns:a16="http://schemas.microsoft.com/office/drawing/2014/main" id="{452BE8F3-0295-4B15-80B4-B2026225BC92}"/>
+              </a:ext>
+            </a:extLst>
+          </p:cNvPr>
+          <p:cNvSpPr txBox="1"/>
+          <p:nvPr/>
+        </p:nvSpPr>
+        <p:spPr>
+          <a:xfrm>
+            <a:off x="2194540" y="668789"/>
+            <a:ext cx="1914038" cy="707886"/>
+          </a:xfrm>
+          <a:prstGeom prst="rect">
+            <a:avLst/>
+          </a:prstGeom>
+          <a:noFill/>
+        </p:spPr>
+        <p:txBody>
+          <a:bodyPr wrap="square">
+            <a:spAutoFit/>
+          </a:bodyPr>
+          <a:lstStyle/>
+          <a:p>
+            <a:pPr algn="ctr"/>
+            <a:r>
+              <a:rPr lang="en-US" sz="2000" dirty="0" smtClean="0">
+                <a:solidFill>
+                  <a:srgbClr val="002060"/>
+                </a:solidFill>
+              </a:rPr>
+              <a:t>Executed in </a:t>
+            </a:r>
+          </a:p>
+          <a:p>
+            <a:pPr algn="ctr"/>
+            <a:r>
+              <a:rPr lang="en-US" sz="2000" dirty="0" smtClean="0">
+                <a:solidFill>
+                  <a:srgbClr val="002060"/>
+                </a:solidFill>
+              </a:rPr>
+              <a:t>Transaction </a:t>
+            </a:r>
+            <a:r>
+              <a:rPr lang="en-US" sz="2000" b="1" dirty="0" smtClean="0">
+                <a:solidFill>
+                  <a:srgbClr val="0000FF"/>
+                </a:solidFill>
+              </a:rPr>
+              <a:t>T1</a:t>
+            </a:r>
+            <a:endParaRPr lang="en-US" sz="2000" b="1" dirty="0">
+              <a:solidFill>
+                <a:srgbClr val="0000FF"/>
+              </a:solidFill>
+            </a:endParaRPr>
+          </a:p>
+        </p:txBody>
+      </p:sp>
+      <p:sp>
+        <p:nvSpPr>
+          <p:cNvPr id="8" name="Rounded Rectangle 7"/>
+          <p:cNvSpPr/>
+          <p:nvPr/>
+        </p:nvSpPr>
+        <p:spPr>
+          <a:xfrm>
+            <a:off x="1158240" y="661839"/>
+            <a:ext cx="3796938" cy="2163961"/>
+          </a:xfrm>
+          <a:prstGeom prst="roundRect">
+            <a:avLst/>
+          </a:prstGeom>
+          <a:noFill/>
+        </p:spPr>
+        <p:style>
+          <a:lnRef idx="2">
+            <a:schemeClr val="accent1">
+              <a:shade val="50000"/>
+            </a:schemeClr>
+          </a:lnRef>
+          <a:fillRef idx="1">
+            <a:schemeClr val="accent1"/>
+          </a:fillRef>
+          <a:effectRef idx="0">
+            <a:schemeClr val="accent1"/>
+          </a:effectRef>
+          <a:fontRef idx="minor">
+            <a:schemeClr val="lt1"/>
+          </a:fontRef>
+        </p:style>
+        <p:txBody>
+          <a:bodyPr rtlCol="0" anchor="ctr"/>
+          <a:lstStyle/>
+          <a:p>
+            <a:pPr algn="ctr"/>
+            <a:endParaRPr lang="en-US"/>
+          </a:p>
+        </p:txBody>
+      </p:sp>
+      <p:cxnSp>
+        <p:nvCxnSpPr>
+          <p:cNvPr id="13" name="Straight Arrow Connector 12"/>
+          <p:cNvCxnSpPr/>
+          <p:nvPr/>
+        </p:nvCxnSpPr>
+        <p:spPr>
+          <a:xfrm>
+            <a:off x="1236009" y="1980600"/>
+            <a:ext cx="399923" cy="2583"/>
+          </a:xfrm>
+          <a:prstGeom prst="straightConnector1">
+            <a:avLst/>
+          </a:prstGeom>
+          <a:ln w="38100">
+            <a:tailEnd type="triangle"/>
+          </a:ln>
+        </p:spPr>
+        <p:style>
+          <a:lnRef idx="1">
+            <a:schemeClr val="accent1"/>
+          </a:lnRef>
+          <a:fillRef idx="0">
+            <a:schemeClr val="accent1"/>
+          </a:fillRef>
+          <a:effectRef idx="0">
+            <a:schemeClr val="accent1"/>
+          </a:effectRef>
+          <a:fontRef idx="minor">
+            <a:schemeClr val="tx1"/>
+          </a:fontRef>
+        </p:style>
+      </p:cxnSp>
+      <p:sp>
+        <p:nvSpPr>
+          <p:cNvPr id="36" name="TextBox 35">
+            <a:extLst>
+              <a:ext uri="{FF2B5EF4-FFF2-40B4-BE49-F238E27FC236}">
+                <a16:creationId xmlns="" xmlns:a16="http://schemas.microsoft.com/office/drawing/2014/main" id="{452BE8F3-0295-4B15-80B4-B2026225BC92}"/>
+              </a:ext>
+            </a:extLst>
+          </p:cNvPr>
+          <p:cNvSpPr txBox="1"/>
+          <p:nvPr/>
+        </p:nvSpPr>
+        <p:spPr>
+          <a:xfrm>
+            <a:off x="2626557" y="3393899"/>
+            <a:ext cx="1914038" cy="707886"/>
+          </a:xfrm>
+          <a:prstGeom prst="rect">
+            <a:avLst/>
+          </a:prstGeom>
+          <a:noFill/>
+        </p:spPr>
+        <p:txBody>
+          <a:bodyPr wrap="square">
+            <a:spAutoFit/>
+          </a:bodyPr>
+          <a:lstStyle/>
+          <a:p>
+            <a:pPr algn="ctr"/>
+            <a:r>
+              <a:rPr lang="en-US" sz="2000" dirty="0" smtClean="0">
+                <a:solidFill>
+                  <a:srgbClr val="002060"/>
+                </a:solidFill>
+              </a:rPr>
+              <a:t>Executed in </a:t>
+            </a:r>
+          </a:p>
+          <a:p>
+            <a:pPr algn="ctr"/>
+            <a:r>
+              <a:rPr lang="en-US" sz="2000" dirty="0" smtClean="0">
+                <a:solidFill>
+                  <a:srgbClr val="002060"/>
+                </a:solidFill>
+              </a:rPr>
+              <a:t>Transaction </a:t>
+            </a:r>
+            <a:r>
+              <a:rPr lang="en-US" sz="2000" b="1" dirty="0" smtClean="0">
+                <a:solidFill>
+                  <a:srgbClr val="0000FF"/>
+                </a:solidFill>
+              </a:rPr>
+              <a:t>T1</a:t>
+            </a:r>
+            <a:endParaRPr lang="en-US" sz="2000" b="1" dirty="0">
+              <a:solidFill>
+                <a:srgbClr val="0000FF"/>
+              </a:solidFill>
+            </a:endParaRPr>
+          </a:p>
+        </p:txBody>
+      </p:sp>
+      <p:sp>
+        <p:nvSpPr>
+          <p:cNvPr id="37" name="Rectangle: Rounded Corners 11">
+            <a:extLst>
+              <a:ext uri="{FF2B5EF4-FFF2-40B4-BE49-F238E27FC236}">
+                <a16:creationId xmlns="" xmlns:a16="http://schemas.microsoft.com/office/drawing/2014/main" id="{5A1BEE6C-84E1-4224-B447-1AC8A888AAC0}"/>
+              </a:ext>
+            </a:extLst>
+          </p:cNvPr>
+          <p:cNvSpPr/>
+          <p:nvPr/>
+        </p:nvSpPr>
+        <p:spPr>
+          <a:xfrm>
+            <a:off x="2437729" y="4320263"/>
+            <a:ext cx="2909334" cy="796023"/>
+          </a:xfrm>
+          <a:prstGeom prst="roundRect">
+            <a:avLst/>
+          </a:prstGeom>
+          <a:noFill/>
+        </p:spPr>
+        <p:style>
+          <a:lnRef idx="2">
+            <a:schemeClr val="accent1">
+              <a:shade val="50000"/>
+            </a:schemeClr>
+          </a:lnRef>
+          <a:fillRef idx="1">
+            <a:schemeClr val="accent1"/>
+          </a:fillRef>
+          <a:effectRef idx="0">
+            <a:schemeClr val="accent1"/>
+          </a:effectRef>
+          <a:fontRef idx="minor">
+            <a:schemeClr val="lt1"/>
+          </a:fontRef>
+        </p:style>
+        <p:txBody>
+          <a:bodyPr rtlCol="0" anchor="ctr"/>
+          <a:lstStyle/>
+          <a:p>
+            <a:pPr algn="ctr"/>
+            <a:r>
+              <a:rPr lang="en-US" sz="1100" b="1" dirty="0" smtClean="0">
+                <a:solidFill>
+                  <a:srgbClr val="7030A0"/>
+                </a:solidFill>
+              </a:rPr>
+              <a:t>OrganizationServiceImpl</a:t>
+            </a:r>
+          </a:p>
+          <a:p>
+            <a:r>
+              <a:rPr lang="en-US" sz="900" b="1" dirty="0" smtClean="0">
+                <a:solidFill>
+                  <a:schemeClr val="bg2">
+                    <a:lumMod val="75000"/>
+                  </a:schemeClr>
+                </a:solidFill>
+              </a:rPr>
+              <a:t>@Transactional</a:t>
+            </a:r>
+            <a:r>
+              <a:rPr lang="en-US" sz="900" dirty="0" smtClean="0">
+                <a:solidFill>
+                  <a:schemeClr val="tx1"/>
+                </a:solidFill>
+              </a:rPr>
+              <a:t>(propagation = Propagation.</a:t>
+            </a:r>
+            <a:r>
+              <a:rPr lang="en-US" sz="900" b="1" i="1" dirty="0" smtClean="0">
+                <a:solidFill>
+                  <a:srgbClr val="0000FF"/>
+                </a:solidFill>
+              </a:rPr>
+              <a:t>REQUIRED</a:t>
+            </a:r>
+            <a:r>
+              <a:rPr lang="en-US" sz="900" i="1" dirty="0" smtClean="0">
+                <a:solidFill>
+                  <a:schemeClr val="tx1"/>
+                </a:solidFill>
+              </a:rPr>
+              <a:t>)</a:t>
+            </a:r>
+          </a:p>
+          <a:p>
+            <a:r>
+              <a:rPr lang="en-US" sz="900" b="1" dirty="0">
+                <a:solidFill>
+                  <a:srgbClr val="FF0000"/>
+                </a:solidFill>
+              </a:rPr>
+              <a:t>public</a:t>
+            </a:r>
+            <a:r>
+              <a:rPr lang="en-US" sz="900" dirty="0">
+                <a:solidFill>
+                  <a:schemeClr val="tx1"/>
+                </a:solidFill>
+              </a:rPr>
+              <a:t> void </a:t>
+            </a:r>
+            <a:r>
+              <a:rPr lang="en-US" sz="900" b="1" dirty="0">
+                <a:solidFill>
+                  <a:srgbClr val="C00000"/>
+                </a:solidFill>
+              </a:rPr>
+              <a:t>joinOrganization</a:t>
+            </a:r>
+            <a:r>
+              <a:rPr lang="en-US" sz="900" dirty="0">
+                <a:solidFill>
+                  <a:schemeClr val="tx1"/>
+                </a:solidFill>
+              </a:rPr>
+              <a:t>() {</a:t>
+            </a:r>
+          </a:p>
+          <a:p>
+            <a:r>
+              <a:rPr lang="en-US" sz="900" dirty="0">
+                <a:solidFill>
+                  <a:schemeClr val="tx1"/>
+                </a:solidFill>
+              </a:rPr>
+              <a:t>}</a:t>
+            </a:r>
+          </a:p>
+        </p:txBody>
+      </p:sp>
+      <p:sp>
+        <p:nvSpPr>
+          <p:cNvPr id="38" name="Rectangle: Rounded Corners 14">
+            <a:extLst>
+              <a:ext uri="{FF2B5EF4-FFF2-40B4-BE49-F238E27FC236}">
+                <a16:creationId xmlns="" xmlns:a16="http://schemas.microsoft.com/office/drawing/2014/main" id="{E25DC19F-6B3A-4545-BDB8-13C5481B9137}"/>
+              </a:ext>
+            </a:extLst>
+          </p:cNvPr>
+          <p:cNvSpPr/>
+          <p:nvPr/>
+        </p:nvSpPr>
+        <p:spPr>
+          <a:xfrm>
+            <a:off x="2203269" y="4113057"/>
+            <a:ext cx="1202410" cy="212228"/>
+          </a:xfrm>
+          <a:prstGeom prst="roundRect">
+            <a:avLst/>
+          </a:prstGeom>
+          <a:solidFill>
+            <a:srgbClr val="FFC000"/>
+          </a:solidFill>
+        </p:spPr>
+        <p:style>
+          <a:lnRef idx="2">
+            <a:schemeClr val="accent1">
+              <a:shade val="50000"/>
+            </a:schemeClr>
+          </a:lnRef>
+          <a:fillRef idx="1">
+            <a:schemeClr val="accent1"/>
+          </a:fillRef>
+          <a:effectRef idx="0">
+            <a:schemeClr val="accent1"/>
+          </a:effectRef>
+          <a:fontRef idx="minor">
+            <a:schemeClr val="lt1"/>
+          </a:fontRef>
+        </p:style>
+        <p:txBody>
+          <a:bodyPr rtlCol="0" anchor="ctr"/>
+          <a:lstStyle/>
+          <a:p>
+            <a:pPr algn="ctr"/>
+            <a:r>
+              <a:rPr lang="en-US" sz="900" dirty="0" smtClean="0"/>
+              <a:t>Begin Transaction T1</a:t>
+            </a:r>
+            <a:endParaRPr lang="en-US" sz="900" dirty="0"/>
+          </a:p>
+        </p:txBody>
+      </p:sp>
+      <p:sp>
+        <p:nvSpPr>
+          <p:cNvPr id="39" name="Rectangle: Rounded Corners 14">
+            <a:extLst>
+              <a:ext uri="{FF2B5EF4-FFF2-40B4-BE49-F238E27FC236}">
+                <a16:creationId xmlns="" xmlns:a16="http://schemas.microsoft.com/office/drawing/2014/main" id="{E25DC19F-6B3A-4545-BDB8-13C5481B9137}"/>
+              </a:ext>
+            </a:extLst>
+          </p:cNvPr>
+          <p:cNvSpPr/>
+          <p:nvPr/>
+        </p:nvSpPr>
+        <p:spPr>
+          <a:xfrm>
+            <a:off x="2203269" y="5128829"/>
+            <a:ext cx="1202410" cy="212228"/>
+          </a:xfrm>
+          <a:prstGeom prst="roundRect">
+            <a:avLst/>
+          </a:prstGeom>
+          <a:solidFill>
+            <a:srgbClr val="FFC000"/>
+          </a:solidFill>
+        </p:spPr>
+        <p:style>
+          <a:lnRef idx="2">
+            <a:schemeClr val="accent1">
+              <a:shade val="50000"/>
+            </a:schemeClr>
+          </a:lnRef>
+          <a:fillRef idx="1">
+            <a:schemeClr val="accent1"/>
+          </a:fillRef>
+          <a:effectRef idx="0">
+            <a:schemeClr val="accent1"/>
+          </a:effectRef>
+          <a:fontRef idx="minor">
+            <a:schemeClr val="lt1"/>
+          </a:fontRef>
+        </p:style>
+        <p:txBody>
+          <a:bodyPr rtlCol="0" anchor="ctr"/>
+          <a:lstStyle/>
+          <a:p>
+            <a:pPr algn="ctr"/>
+            <a:r>
+              <a:rPr lang="en-US" sz="900" dirty="0" smtClean="0"/>
+              <a:t>End Transaction T1</a:t>
+            </a:r>
+            <a:endParaRPr lang="en-US" sz="900" dirty="0"/>
+          </a:p>
+        </p:txBody>
+      </p:sp>
+      <p:sp>
+        <p:nvSpPr>
+          <p:cNvPr id="40" name="Rounded Rectangle 39"/>
+          <p:cNvSpPr/>
+          <p:nvPr/>
+        </p:nvSpPr>
+        <p:spPr>
+          <a:xfrm>
+            <a:off x="1898469" y="3405171"/>
+            <a:ext cx="3544388" cy="2163961"/>
+          </a:xfrm>
+          <a:prstGeom prst="roundRect">
+            <a:avLst/>
+          </a:prstGeom>
+          <a:noFill/>
+        </p:spPr>
+        <p:style>
+          <a:lnRef idx="2">
+            <a:schemeClr val="accent1">
+              <a:shade val="50000"/>
+            </a:schemeClr>
+          </a:lnRef>
+          <a:fillRef idx="1">
+            <a:schemeClr val="accent1"/>
+          </a:fillRef>
+          <a:effectRef idx="0">
+            <a:schemeClr val="accent1"/>
+          </a:effectRef>
+          <a:fontRef idx="minor">
+            <a:schemeClr val="lt1"/>
+          </a:fontRef>
+        </p:style>
+        <p:txBody>
+          <a:bodyPr rtlCol="0" anchor="ctr"/>
+          <a:lstStyle/>
+          <a:p>
+            <a:pPr algn="ctr"/>
+            <a:endParaRPr lang="en-US"/>
+          </a:p>
+        </p:txBody>
+      </p:sp>
+      <p:cxnSp>
+        <p:nvCxnSpPr>
+          <p:cNvPr id="42" name="Straight Arrow Connector 41"/>
+          <p:cNvCxnSpPr>
+            <a:endCxn id="37" idx="1"/>
+          </p:cNvCxnSpPr>
+          <p:nvPr/>
+        </p:nvCxnSpPr>
+        <p:spPr>
+          <a:xfrm>
+            <a:off x="2037806" y="4715692"/>
+            <a:ext cx="399923" cy="2583"/>
+          </a:xfrm>
+          <a:prstGeom prst="straightConnector1">
+            <a:avLst/>
+          </a:prstGeom>
+          <a:ln w="38100">
+            <a:tailEnd type="triangle"/>
+          </a:ln>
+        </p:spPr>
+        <p:style>
+          <a:lnRef idx="1">
+            <a:schemeClr val="accent1"/>
+          </a:lnRef>
+          <a:fillRef idx="0">
+            <a:schemeClr val="accent1"/>
+          </a:fillRef>
+          <a:effectRef idx="0">
+            <a:schemeClr val="accent1"/>
+          </a:effectRef>
+          <a:fontRef idx="minor">
+            <a:schemeClr val="tx1"/>
+          </a:fontRef>
+        </p:style>
+      </p:cxnSp>
+      <p:cxnSp>
+        <p:nvCxnSpPr>
+          <p:cNvPr id="43" name="Straight Arrow Connector 42"/>
+          <p:cNvCxnSpPr/>
+          <p:nvPr/>
+        </p:nvCxnSpPr>
+        <p:spPr>
+          <a:xfrm>
+            <a:off x="5442857" y="4730817"/>
+            <a:ext cx="530552" cy="1"/>
+          </a:xfrm>
+          <a:prstGeom prst="straightConnector1">
+            <a:avLst/>
+          </a:prstGeom>
+          <a:ln w="38100">
+            <a:tailEnd type="triangle"/>
+          </a:ln>
+        </p:spPr>
+        <p:style>
+          <a:lnRef idx="1">
+            <a:schemeClr val="accent1"/>
+          </a:lnRef>
+          <a:fillRef idx="0">
+            <a:schemeClr val="accent1"/>
+          </a:fillRef>
+          <a:effectRef idx="0">
+            <a:schemeClr val="accent1"/>
+          </a:effectRef>
+          <a:fontRef idx="minor">
+            <a:schemeClr val="tx1"/>
+          </a:fontRef>
+        </p:style>
+      </p:cxnSp>
+      <p:sp>
+        <p:nvSpPr>
+          <p:cNvPr id="44" name="Rectangle: Rounded Corners 11">
+            <a:extLst>
+              <a:ext uri="{FF2B5EF4-FFF2-40B4-BE49-F238E27FC236}">
+                <a16:creationId xmlns="" xmlns:a16="http://schemas.microsoft.com/office/drawing/2014/main" id="{5A1BEE6C-84E1-4224-B447-1AC8A888AAC0}"/>
+              </a:ext>
+            </a:extLst>
+          </p:cNvPr>
+          <p:cNvSpPr/>
+          <p:nvPr/>
+        </p:nvSpPr>
+        <p:spPr>
+          <a:xfrm>
+            <a:off x="1635932" y="1583881"/>
+            <a:ext cx="3171199" cy="796023"/>
+          </a:xfrm>
+          <a:prstGeom prst="roundRect">
+            <a:avLst/>
+          </a:prstGeom>
+          <a:noFill/>
+        </p:spPr>
+        <p:style>
+          <a:lnRef idx="2">
+            <a:schemeClr val="accent1">
+              <a:shade val="50000"/>
+            </a:schemeClr>
+          </a:lnRef>
+          <a:fillRef idx="1">
+            <a:schemeClr val="accent1"/>
+          </a:fillRef>
+          <a:effectRef idx="0">
+            <a:schemeClr val="accent1"/>
+          </a:effectRef>
+          <a:fontRef idx="minor">
+            <a:schemeClr val="lt1"/>
+          </a:fontRef>
+        </p:style>
+        <p:txBody>
+          <a:bodyPr rtlCol="0" anchor="ctr"/>
+          <a:lstStyle/>
+          <a:p>
+            <a:pPr algn="ctr"/>
+            <a:r>
+              <a:rPr lang="en-US" sz="1100" b="1" dirty="0" smtClean="0">
+                <a:solidFill>
+                  <a:srgbClr val="7030A0"/>
+                </a:solidFill>
+              </a:rPr>
+              <a:t>EmployeeServiceImpl</a:t>
+            </a:r>
+          </a:p>
+          <a:p>
+            <a:r>
+              <a:rPr lang="en-US" sz="900" b="1" dirty="0" smtClean="0">
+                <a:solidFill>
+                  <a:schemeClr val="bg2">
+                    <a:lumMod val="75000"/>
+                  </a:schemeClr>
+                </a:solidFill>
+              </a:rPr>
+              <a:t>@Transactional</a:t>
+            </a:r>
+            <a:r>
+              <a:rPr lang="en-US" sz="900" dirty="0" smtClean="0">
+                <a:solidFill>
+                  <a:schemeClr val="tx1"/>
+                </a:solidFill>
+              </a:rPr>
+              <a:t>(propagation </a:t>
+            </a:r>
+            <a:r>
+              <a:rPr lang="en-US" sz="900" dirty="0">
+                <a:solidFill>
+                  <a:schemeClr val="tx1"/>
+                </a:solidFill>
+              </a:rPr>
+              <a:t>= </a:t>
+            </a:r>
+            <a:r>
+              <a:rPr lang="en-US" sz="900" dirty="0">
+                <a:solidFill>
+                  <a:schemeClr val="tx1"/>
+                </a:solidFill>
+              </a:rPr>
+              <a:t>Propagation.</a:t>
+            </a:r>
+            <a:r>
+              <a:rPr lang="en-US" sz="900" b="1" i="1" dirty="0">
+                <a:solidFill>
+                  <a:srgbClr val="0000FF"/>
+                </a:solidFill>
+              </a:rPr>
+              <a:t>REQUIRES_NEW</a:t>
+            </a:r>
+            <a:r>
+              <a:rPr lang="en-US" sz="900" i="1" dirty="0" smtClean="0">
+                <a:solidFill>
+                  <a:schemeClr val="tx1"/>
+                </a:solidFill>
+              </a:rPr>
+              <a:t>)</a:t>
+            </a:r>
+            <a:endParaRPr lang="en-US" sz="900" i="1" dirty="0" smtClean="0">
+              <a:solidFill>
+                <a:schemeClr val="tx1"/>
+              </a:solidFill>
+            </a:endParaRPr>
+          </a:p>
+          <a:p>
+            <a:r>
+              <a:rPr lang="en-US" sz="900" b="1" dirty="0" smtClean="0">
+                <a:solidFill>
+                  <a:srgbClr val="FF0000"/>
+                </a:solidFill>
+              </a:rPr>
+              <a:t>public</a:t>
+            </a:r>
+            <a:r>
+              <a:rPr lang="en-US" sz="900" dirty="0" smtClean="0">
+                <a:solidFill>
+                  <a:srgbClr val="FF0000"/>
+                </a:solidFill>
+              </a:rPr>
+              <a:t> </a:t>
+            </a:r>
+            <a:r>
+              <a:rPr lang="en-US" sz="900" dirty="0">
+                <a:solidFill>
+                  <a:schemeClr val="tx1"/>
+                </a:solidFill>
+              </a:rPr>
+              <a:t>Employee </a:t>
+            </a:r>
+            <a:r>
+              <a:rPr lang="en-US" sz="900" b="1" dirty="0" smtClean="0">
+                <a:solidFill>
+                  <a:srgbClr val="C00000"/>
+                </a:solidFill>
+              </a:rPr>
+              <a:t>addEmployee</a:t>
+            </a:r>
+            <a:r>
+              <a:rPr lang="en-US" sz="900" dirty="0" smtClean="0">
+                <a:solidFill>
+                  <a:schemeClr val="tx1"/>
+                </a:solidFill>
+              </a:rPr>
+              <a:t>() </a:t>
+            </a:r>
+            <a:r>
+              <a:rPr lang="en-US" sz="900" dirty="0">
+                <a:solidFill>
+                  <a:schemeClr val="tx1"/>
+                </a:solidFill>
+              </a:rPr>
+              <a:t>{</a:t>
+            </a:r>
+          </a:p>
+          <a:p>
+            <a:r>
+              <a:rPr lang="en-US" sz="900" dirty="0" smtClean="0">
+                <a:solidFill>
+                  <a:schemeClr val="tx1"/>
+                </a:solidFill>
+              </a:rPr>
+              <a:t>}</a:t>
+            </a:r>
+            <a:endParaRPr lang="en-US" sz="900" dirty="0">
+              <a:solidFill>
+                <a:schemeClr val="tx1"/>
+              </a:solidFill>
+            </a:endParaRPr>
+          </a:p>
+        </p:txBody>
+      </p:sp>
+      <p:sp>
+        <p:nvSpPr>
+          <p:cNvPr id="16" name="Rectangle 15"/>
+          <p:cNvSpPr/>
+          <p:nvPr/>
+        </p:nvSpPr>
+        <p:spPr>
+          <a:xfrm>
+            <a:off x="5529713" y="147784"/>
+            <a:ext cx="5739136" cy="615553"/>
+          </a:xfrm>
+          <a:prstGeom prst="rect">
+            <a:avLst/>
+          </a:prstGeom>
+          <a:noFill/>
+        </p:spPr>
+        <p:txBody>
+          <a:bodyPr wrap="none" lIns="91440" tIns="45720" rIns="91440" bIns="45720">
+            <a:spAutoFit/>
+          </a:bodyPr>
+          <a:lstStyle/>
+          <a:p>
+            <a:pPr algn="ctr"/>
+            <a:r>
+              <a:rPr lang="en-US" sz="3400" u="sng" dirty="0" smtClean="0">
+                <a:ln w="0"/>
+                <a:effectLst>
+                  <a:outerShdw blurRad="38100" dist="19050" dir="2700000" algn="tl" rotWithShape="0">
+                    <a:schemeClr val="dk1">
+                      <a:alpha val="40000"/>
+                    </a:schemeClr>
+                  </a:outerShdw>
+                </a:effectLst>
+              </a:rPr>
+              <a:t>PROPAGATION.</a:t>
+            </a:r>
+            <a:r>
+              <a:rPr lang="en-US" sz="3400" i="1" u="sng" dirty="0" smtClean="0">
+                <a:ln w="0"/>
+                <a:solidFill>
+                  <a:srgbClr val="0000FF"/>
+                </a:solidFill>
+                <a:effectLst>
+                  <a:outerShdw blurRad="38100" dist="19050" dir="2700000" algn="tl" rotWithShape="0">
+                    <a:schemeClr val="dk1">
+                      <a:alpha val="40000"/>
+                    </a:schemeClr>
+                  </a:outerShdw>
+                </a:effectLst>
+              </a:rPr>
+              <a:t>REQUIRES_NEW</a:t>
+            </a:r>
+            <a:endParaRPr lang="en-US" sz="3400" b="0" i="1" u="sng" cap="none" spc="0" dirty="0">
+              <a:ln w="0"/>
+              <a:solidFill>
+                <a:srgbClr val="0000FF"/>
+              </a:solidFill>
+              <a:effectLst>
+                <a:outerShdw blurRad="38100" dist="19050" dir="2700000" algn="tl" rotWithShape="0">
+                  <a:schemeClr val="dk1">
+                    <a:alpha val="40000"/>
+                  </a:schemeClr>
+                </a:outerShdw>
+              </a:effectLst>
+            </a:endParaRPr>
+          </a:p>
+        </p:txBody>
+      </p:sp>
+      <p:sp>
+        <p:nvSpPr>
+          <p:cNvPr id="15" name="Rounded Rectangle 14"/>
+          <p:cNvSpPr/>
+          <p:nvPr/>
+        </p:nvSpPr>
+        <p:spPr>
+          <a:xfrm>
+            <a:off x="5755695" y="3405171"/>
+            <a:ext cx="3527642" cy="2163961"/>
+          </a:xfrm>
+          <a:prstGeom prst="roundRect">
+            <a:avLst/>
+          </a:prstGeom>
+          <a:noFill/>
+        </p:spPr>
+        <p:style>
+          <a:lnRef idx="2">
+            <a:schemeClr val="accent1">
+              <a:shade val="50000"/>
+            </a:schemeClr>
+          </a:lnRef>
+          <a:fillRef idx="1">
+            <a:schemeClr val="accent1"/>
+          </a:fillRef>
+          <a:effectRef idx="0">
+            <a:schemeClr val="accent1"/>
+          </a:effectRef>
+          <a:fontRef idx="minor">
+            <a:schemeClr val="lt1"/>
+          </a:fontRef>
+        </p:style>
+        <p:txBody>
+          <a:bodyPr rtlCol="0" anchor="ctr"/>
+          <a:lstStyle/>
+          <a:p>
+            <a:pPr algn="ctr"/>
+            <a:endParaRPr lang="en-US"/>
+          </a:p>
+        </p:txBody>
+      </p:sp>
+      <p:sp>
+        <p:nvSpPr>
+          <p:cNvPr id="17" name="Rectangle: Rounded Corners 11">
+            <a:extLst>
+              <a:ext uri="{FF2B5EF4-FFF2-40B4-BE49-F238E27FC236}">
+                <a16:creationId xmlns="" xmlns:a16="http://schemas.microsoft.com/office/drawing/2014/main" id="{5A1BEE6C-84E1-4224-B447-1AC8A888AAC0}"/>
+              </a:ext>
+            </a:extLst>
+          </p:cNvPr>
+          <p:cNvSpPr/>
+          <p:nvPr/>
+        </p:nvSpPr>
+        <p:spPr>
+          <a:xfrm>
+            <a:off x="5964701" y="4332806"/>
+            <a:ext cx="3232160" cy="796023"/>
+          </a:xfrm>
+          <a:prstGeom prst="roundRect">
+            <a:avLst/>
+          </a:prstGeom>
+          <a:noFill/>
+        </p:spPr>
+        <p:style>
+          <a:lnRef idx="2">
+            <a:schemeClr val="accent1">
+              <a:shade val="50000"/>
+            </a:schemeClr>
+          </a:lnRef>
+          <a:fillRef idx="1">
+            <a:schemeClr val="accent1"/>
+          </a:fillRef>
+          <a:effectRef idx="0">
+            <a:schemeClr val="accent1"/>
+          </a:effectRef>
+          <a:fontRef idx="minor">
+            <a:schemeClr val="lt1"/>
+          </a:fontRef>
+        </p:style>
+        <p:txBody>
+          <a:bodyPr rtlCol="0" anchor="ctr"/>
+          <a:lstStyle/>
+          <a:p>
+            <a:pPr algn="ctr"/>
+            <a:r>
+              <a:rPr lang="en-US" sz="1100" b="1" dirty="0" smtClean="0">
+                <a:solidFill>
+                  <a:srgbClr val="7030A0"/>
+                </a:solidFill>
+              </a:rPr>
+              <a:t>EmployeeServiceImpl</a:t>
+            </a:r>
+          </a:p>
+          <a:p>
+            <a:r>
+              <a:rPr lang="en-US" sz="900" b="1" dirty="0" smtClean="0">
+                <a:solidFill>
+                  <a:schemeClr val="bg2">
+                    <a:lumMod val="75000"/>
+                  </a:schemeClr>
+                </a:solidFill>
+              </a:rPr>
+              <a:t>@Transactional</a:t>
+            </a:r>
+            <a:r>
+              <a:rPr lang="en-US" sz="900" dirty="0" smtClean="0">
+                <a:solidFill>
+                  <a:schemeClr val="tx1"/>
+                </a:solidFill>
+              </a:rPr>
+              <a:t>(propagation </a:t>
+            </a:r>
+            <a:r>
+              <a:rPr lang="en-US" sz="900" dirty="0">
+                <a:solidFill>
+                  <a:schemeClr val="tx1"/>
+                </a:solidFill>
+              </a:rPr>
+              <a:t>= </a:t>
+            </a:r>
+            <a:r>
+              <a:rPr lang="en-US" sz="900" dirty="0" smtClean="0">
+                <a:solidFill>
+                  <a:schemeClr val="tx1"/>
+                </a:solidFill>
+              </a:rPr>
+              <a:t>Propagation.</a:t>
+            </a:r>
+            <a:r>
+              <a:rPr lang="en-US" sz="900" b="1" i="1" dirty="0" smtClean="0">
+                <a:solidFill>
+                  <a:srgbClr val="0000FF"/>
+                </a:solidFill>
+              </a:rPr>
+              <a:t>REQUIRES_NEW</a:t>
+            </a:r>
+            <a:r>
+              <a:rPr lang="en-US" sz="900" i="1" dirty="0" smtClean="0">
+                <a:solidFill>
+                  <a:schemeClr val="tx1"/>
+                </a:solidFill>
+              </a:rPr>
+              <a:t>)</a:t>
+            </a:r>
+            <a:endParaRPr lang="en-US" sz="900" i="1" dirty="0" smtClean="0">
+              <a:solidFill>
+                <a:schemeClr val="tx1"/>
+              </a:solidFill>
+            </a:endParaRPr>
+          </a:p>
+          <a:p>
+            <a:r>
+              <a:rPr lang="en-US" sz="900" b="1" dirty="0" smtClean="0">
+                <a:solidFill>
+                  <a:srgbClr val="FF0000"/>
+                </a:solidFill>
+              </a:rPr>
+              <a:t>public</a:t>
+            </a:r>
+            <a:r>
+              <a:rPr lang="en-US" sz="900" dirty="0" smtClean="0">
+                <a:solidFill>
+                  <a:srgbClr val="FF0000"/>
+                </a:solidFill>
+              </a:rPr>
+              <a:t> </a:t>
+            </a:r>
+            <a:r>
+              <a:rPr lang="en-US" sz="900" dirty="0">
+                <a:solidFill>
+                  <a:schemeClr val="tx1"/>
+                </a:solidFill>
+              </a:rPr>
+              <a:t>Employee </a:t>
+            </a:r>
+            <a:r>
+              <a:rPr lang="en-US" sz="900" b="1" dirty="0" smtClean="0">
+                <a:solidFill>
+                  <a:srgbClr val="C00000"/>
+                </a:solidFill>
+              </a:rPr>
+              <a:t>addEmployee</a:t>
+            </a:r>
+            <a:r>
+              <a:rPr lang="en-US" sz="900" dirty="0" smtClean="0">
+                <a:solidFill>
+                  <a:schemeClr val="tx1"/>
+                </a:solidFill>
+              </a:rPr>
+              <a:t>() </a:t>
+            </a:r>
+            <a:r>
+              <a:rPr lang="en-US" sz="900" dirty="0">
+                <a:solidFill>
+                  <a:schemeClr val="tx1"/>
+                </a:solidFill>
+              </a:rPr>
+              <a:t>{</a:t>
+            </a:r>
+          </a:p>
+          <a:p>
+            <a:r>
+              <a:rPr lang="en-US" sz="900" dirty="0" smtClean="0">
+                <a:solidFill>
+                  <a:schemeClr val="tx1"/>
+                </a:solidFill>
+              </a:rPr>
+              <a:t>}</a:t>
+            </a:r>
+            <a:endParaRPr lang="en-US" sz="900" dirty="0">
+              <a:solidFill>
+                <a:schemeClr val="tx1"/>
+              </a:solidFill>
+            </a:endParaRPr>
+          </a:p>
+        </p:txBody>
+      </p:sp>
+      <p:sp>
+        <p:nvSpPr>
+          <p:cNvPr id="18" name="TextBox 17">
+            <a:extLst>
+              <a:ext uri="{FF2B5EF4-FFF2-40B4-BE49-F238E27FC236}">
+                <a16:creationId xmlns="" xmlns:a16="http://schemas.microsoft.com/office/drawing/2014/main" id="{452BE8F3-0295-4B15-80B4-B2026225BC92}"/>
+              </a:ext>
+            </a:extLst>
+          </p:cNvPr>
+          <p:cNvSpPr txBox="1"/>
+          <p:nvPr/>
+        </p:nvSpPr>
+        <p:spPr>
+          <a:xfrm>
+            <a:off x="6562497" y="3473433"/>
+            <a:ext cx="1914038" cy="707886"/>
+          </a:xfrm>
+          <a:prstGeom prst="rect">
+            <a:avLst/>
+          </a:prstGeom>
+          <a:noFill/>
+        </p:spPr>
+        <p:txBody>
+          <a:bodyPr wrap="square">
+            <a:spAutoFit/>
+          </a:bodyPr>
+          <a:lstStyle/>
+          <a:p>
+            <a:pPr algn="ctr"/>
+            <a:r>
+              <a:rPr lang="en-US" sz="2000" dirty="0" smtClean="0">
+                <a:solidFill>
+                  <a:srgbClr val="002060"/>
+                </a:solidFill>
+              </a:rPr>
+              <a:t>Executed in </a:t>
+            </a:r>
+          </a:p>
+          <a:p>
+            <a:pPr algn="ctr"/>
+            <a:r>
+              <a:rPr lang="en-US" sz="2000" dirty="0" smtClean="0">
+                <a:solidFill>
+                  <a:srgbClr val="002060"/>
+                </a:solidFill>
+              </a:rPr>
+              <a:t>Transaction </a:t>
+            </a:r>
+            <a:r>
+              <a:rPr lang="en-US" sz="2000" b="1" dirty="0" smtClean="0">
+                <a:solidFill>
+                  <a:srgbClr val="00B050"/>
+                </a:solidFill>
+              </a:rPr>
+              <a:t>T2</a:t>
+            </a:r>
+            <a:endParaRPr lang="en-US" sz="2000" b="1" dirty="0">
+              <a:solidFill>
+                <a:srgbClr val="00B050"/>
+              </a:solidFill>
+            </a:endParaRPr>
+          </a:p>
+        </p:txBody>
+      </p:sp>
+      <p:sp>
+        <p:nvSpPr>
+          <p:cNvPr id="19" name="Rectangle: Rounded Corners 14">
+            <a:extLst>
+              <a:ext uri="{FF2B5EF4-FFF2-40B4-BE49-F238E27FC236}">
+                <a16:creationId xmlns="" xmlns:a16="http://schemas.microsoft.com/office/drawing/2014/main" id="{E25DC19F-6B3A-4545-BDB8-13C5481B9137}"/>
+              </a:ext>
+            </a:extLst>
+          </p:cNvPr>
+          <p:cNvSpPr/>
+          <p:nvPr/>
+        </p:nvSpPr>
+        <p:spPr>
+          <a:xfrm>
+            <a:off x="1424147" y="1374164"/>
+            <a:ext cx="1202410" cy="212228"/>
+          </a:xfrm>
+          <a:prstGeom prst="roundRect">
+            <a:avLst/>
+          </a:prstGeom>
+          <a:solidFill>
+            <a:srgbClr val="FFC000"/>
+          </a:solidFill>
+        </p:spPr>
+        <p:style>
+          <a:lnRef idx="2">
+            <a:schemeClr val="accent1">
+              <a:shade val="50000"/>
+            </a:schemeClr>
+          </a:lnRef>
+          <a:fillRef idx="1">
+            <a:schemeClr val="accent1"/>
+          </a:fillRef>
+          <a:effectRef idx="0">
+            <a:schemeClr val="accent1"/>
+          </a:effectRef>
+          <a:fontRef idx="minor">
+            <a:schemeClr val="lt1"/>
+          </a:fontRef>
+        </p:style>
+        <p:txBody>
+          <a:bodyPr rtlCol="0" anchor="ctr"/>
+          <a:lstStyle/>
+          <a:p>
+            <a:pPr algn="ctr"/>
+            <a:r>
+              <a:rPr lang="en-US" sz="900" dirty="0" smtClean="0"/>
+              <a:t>Begin Transaction T1</a:t>
+            </a:r>
+            <a:endParaRPr lang="en-US" sz="900" dirty="0"/>
+          </a:p>
+        </p:txBody>
+      </p:sp>
+      <p:sp>
+        <p:nvSpPr>
+          <p:cNvPr id="20" name="Rectangle: Rounded Corners 14">
+            <a:extLst>
+              <a:ext uri="{FF2B5EF4-FFF2-40B4-BE49-F238E27FC236}">
+                <a16:creationId xmlns="" xmlns:a16="http://schemas.microsoft.com/office/drawing/2014/main" id="{E25DC19F-6B3A-4545-BDB8-13C5481B9137}"/>
+              </a:ext>
+            </a:extLst>
+          </p:cNvPr>
+          <p:cNvSpPr/>
+          <p:nvPr/>
+        </p:nvSpPr>
+        <p:spPr>
+          <a:xfrm>
+            <a:off x="1424147" y="2383029"/>
+            <a:ext cx="1202410" cy="212228"/>
+          </a:xfrm>
+          <a:prstGeom prst="roundRect">
+            <a:avLst/>
+          </a:prstGeom>
+          <a:solidFill>
+            <a:srgbClr val="FFC000"/>
+          </a:solidFill>
+        </p:spPr>
+        <p:style>
+          <a:lnRef idx="2">
+            <a:schemeClr val="accent1">
+              <a:shade val="50000"/>
+            </a:schemeClr>
+          </a:lnRef>
+          <a:fillRef idx="1">
+            <a:schemeClr val="accent1"/>
+          </a:fillRef>
+          <a:effectRef idx="0">
+            <a:schemeClr val="accent1"/>
+          </a:effectRef>
+          <a:fontRef idx="minor">
+            <a:schemeClr val="lt1"/>
+          </a:fontRef>
+        </p:style>
+        <p:txBody>
+          <a:bodyPr rtlCol="0" anchor="ctr"/>
+          <a:lstStyle/>
+          <a:p>
+            <a:pPr algn="ctr"/>
+            <a:r>
+              <a:rPr lang="en-US" sz="900" dirty="0" smtClean="0"/>
+              <a:t>End Transaction T1</a:t>
+            </a:r>
+            <a:endParaRPr lang="en-US" sz="900" dirty="0"/>
+          </a:p>
+        </p:txBody>
+      </p:sp>
+      <p:sp>
+        <p:nvSpPr>
+          <p:cNvPr id="21" name="Rectangle: Rounded Corners 14">
+            <a:extLst>
+              <a:ext uri="{FF2B5EF4-FFF2-40B4-BE49-F238E27FC236}">
+                <a16:creationId xmlns="" xmlns:a16="http://schemas.microsoft.com/office/drawing/2014/main" id="{E25DC19F-6B3A-4545-BDB8-13C5481B9137}"/>
+              </a:ext>
+            </a:extLst>
+          </p:cNvPr>
+          <p:cNvSpPr/>
+          <p:nvPr/>
+        </p:nvSpPr>
+        <p:spPr>
+          <a:xfrm>
+            <a:off x="5804873" y="4128556"/>
+            <a:ext cx="1202410" cy="212228"/>
+          </a:xfrm>
+          <a:prstGeom prst="roundRect">
+            <a:avLst/>
+          </a:prstGeom>
+          <a:solidFill>
+            <a:srgbClr val="00B050"/>
+          </a:solidFill>
+        </p:spPr>
+        <p:style>
+          <a:lnRef idx="2">
+            <a:schemeClr val="accent1">
+              <a:shade val="50000"/>
+            </a:schemeClr>
+          </a:lnRef>
+          <a:fillRef idx="1">
+            <a:schemeClr val="accent1"/>
+          </a:fillRef>
+          <a:effectRef idx="0">
+            <a:schemeClr val="accent1"/>
+          </a:effectRef>
+          <a:fontRef idx="minor">
+            <a:schemeClr val="lt1"/>
+          </a:fontRef>
+        </p:style>
+        <p:txBody>
+          <a:bodyPr rtlCol="0" anchor="ctr"/>
+          <a:lstStyle/>
+          <a:p>
+            <a:pPr algn="ctr"/>
+            <a:r>
+              <a:rPr lang="en-US" sz="900" dirty="0" smtClean="0"/>
+              <a:t>Begin Transaction </a:t>
+            </a:r>
+            <a:r>
+              <a:rPr lang="en-US" sz="900" dirty="0" smtClean="0"/>
+              <a:t>T2</a:t>
+            </a:r>
+            <a:endParaRPr lang="en-US" sz="900" dirty="0"/>
+          </a:p>
+        </p:txBody>
+      </p:sp>
+      <p:sp>
+        <p:nvSpPr>
+          <p:cNvPr id="22" name="Rectangle: Rounded Corners 14">
+            <a:extLst>
+              <a:ext uri="{FF2B5EF4-FFF2-40B4-BE49-F238E27FC236}">
+                <a16:creationId xmlns="" xmlns:a16="http://schemas.microsoft.com/office/drawing/2014/main" id="{E25DC19F-6B3A-4545-BDB8-13C5481B9137}"/>
+              </a:ext>
+            </a:extLst>
+          </p:cNvPr>
+          <p:cNvSpPr/>
+          <p:nvPr/>
+        </p:nvSpPr>
+        <p:spPr>
+          <a:xfrm>
+            <a:off x="5804873" y="5116286"/>
+            <a:ext cx="1202410" cy="212228"/>
+          </a:xfrm>
+          <a:prstGeom prst="roundRect">
+            <a:avLst/>
+          </a:prstGeom>
+          <a:solidFill>
+            <a:srgbClr val="00B050"/>
+          </a:solidFill>
+        </p:spPr>
+        <p:style>
+          <a:lnRef idx="2">
+            <a:schemeClr val="accent1">
+              <a:shade val="50000"/>
+            </a:schemeClr>
+          </a:lnRef>
+          <a:fillRef idx="1">
+            <a:schemeClr val="accent1"/>
+          </a:fillRef>
+          <a:effectRef idx="0">
+            <a:schemeClr val="accent1"/>
+          </a:effectRef>
+          <a:fontRef idx="minor">
+            <a:schemeClr val="lt1"/>
+          </a:fontRef>
+        </p:style>
+        <p:txBody>
+          <a:bodyPr rtlCol="0" anchor="ctr"/>
+          <a:lstStyle/>
+          <a:p>
+            <a:pPr algn="ctr"/>
+            <a:r>
+              <a:rPr lang="en-US" sz="900" dirty="0" smtClean="0"/>
+              <a:t>End Transaction T2</a:t>
+            </a:r>
+            <a:endParaRPr lang="en-US" sz="900" dirty="0"/>
+          </a:p>
+        </p:txBody>
+      </p:sp>
+    </p:spTree>
+    <p:extLst>
+      <p:ext uri="{BB962C8B-B14F-4D97-AF65-F5344CB8AC3E}">
+        <p14:creationId xmlns:p14="http://schemas.microsoft.com/office/powerpoint/2010/main" val="3110351340"/>
       </p:ext>
     </p:extLst>
   </p:cSld>
